--- a/ppi/ppi-project.pptx
+++ b/ppi/ppi-project.pptx
@@ -5,10 +5,11 @@
     <p:sldMasterId id="2147483648" r:id="rId1"/>
   </p:sldMasterIdLst>
   <p:notesMasterIdLst>
-    <p:notesMasterId r:id="rId3"/>
+    <p:notesMasterId r:id="rId4"/>
   </p:notesMasterIdLst>
   <p:sldIdLst>
-    <p:sldId id="256" r:id="rId2"/>
+    <p:sldId id="257" r:id="rId2"/>
+    <p:sldId id="256" r:id="rId3"/>
   </p:sldIdLst>
   <p:sldSz cx="12192000" cy="6858000"/>
   <p:notesSz cx="6858000" cy="9144000"/>
@@ -197,7 +198,7 @@
           <a:p>
             <a:fld id="{93867FB6-3614-4446-A537-B153597F3F7D}" type="datetimeFigureOut">
               <a:rPr lang="nl-NL" smtClean="0"/>
-              <a:t>20-9-2023</a:t>
+              <a:t>4-10-2023</a:t>
             </a:fld>
             <a:endParaRPr lang="nl-NL"/>
           </a:p>
@@ -611,7 +612,7 @@
           <a:p>
             <a:fld id="{68957F31-EF9F-422B-9EBC-20B94937EE59}" type="datetimeFigureOut">
               <a:rPr lang="nl-NL" smtClean="0"/>
-              <a:t>20-9-2023</a:t>
+              <a:t>4-10-2023</a:t>
             </a:fld>
             <a:endParaRPr lang="nl-NL"/>
           </a:p>
@@ -809,7 +810,7 @@
           <a:p>
             <a:fld id="{68957F31-EF9F-422B-9EBC-20B94937EE59}" type="datetimeFigureOut">
               <a:rPr lang="nl-NL" smtClean="0"/>
-              <a:t>20-9-2023</a:t>
+              <a:t>4-10-2023</a:t>
             </a:fld>
             <a:endParaRPr lang="nl-NL"/>
           </a:p>
@@ -1017,7 +1018,7 @@
           <a:p>
             <a:fld id="{68957F31-EF9F-422B-9EBC-20B94937EE59}" type="datetimeFigureOut">
               <a:rPr lang="nl-NL" smtClean="0"/>
-              <a:t>20-9-2023</a:t>
+              <a:t>4-10-2023</a:t>
             </a:fld>
             <a:endParaRPr lang="nl-NL"/>
           </a:p>
@@ -1215,7 +1216,7 @@
           <a:p>
             <a:fld id="{68957F31-EF9F-422B-9EBC-20B94937EE59}" type="datetimeFigureOut">
               <a:rPr lang="nl-NL" smtClean="0"/>
-              <a:t>20-9-2023</a:t>
+              <a:t>4-10-2023</a:t>
             </a:fld>
             <a:endParaRPr lang="nl-NL"/>
           </a:p>
@@ -1490,7 +1491,7 @@
           <a:p>
             <a:fld id="{68957F31-EF9F-422B-9EBC-20B94937EE59}" type="datetimeFigureOut">
               <a:rPr lang="nl-NL" smtClean="0"/>
-              <a:t>20-9-2023</a:t>
+              <a:t>4-10-2023</a:t>
             </a:fld>
             <a:endParaRPr lang="nl-NL"/>
           </a:p>
@@ -1755,7 +1756,7 @@
           <a:p>
             <a:fld id="{68957F31-EF9F-422B-9EBC-20B94937EE59}" type="datetimeFigureOut">
               <a:rPr lang="nl-NL" smtClean="0"/>
-              <a:t>20-9-2023</a:t>
+              <a:t>4-10-2023</a:t>
             </a:fld>
             <a:endParaRPr lang="nl-NL"/>
           </a:p>
@@ -2167,7 +2168,7 @@
           <a:p>
             <a:fld id="{68957F31-EF9F-422B-9EBC-20B94937EE59}" type="datetimeFigureOut">
               <a:rPr lang="nl-NL" smtClean="0"/>
-              <a:t>20-9-2023</a:t>
+              <a:t>4-10-2023</a:t>
             </a:fld>
             <a:endParaRPr lang="nl-NL"/>
           </a:p>
@@ -2308,7 +2309,7 @@
           <a:p>
             <a:fld id="{68957F31-EF9F-422B-9EBC-20B94937EE59}" type="datetimeFigureOut">
               <a:rPr lang="nl-NL" smtClean="0"/>
-              <a:t>20-9-2023</a:t>
+              <a:t>4-10-2023</a:t>
             </a:fld>
             <a:endParaRPr lang="nl-NL"/>
           </a:p>
@@ -2421,7 +2422,7 @@
           <a:p>
             <a:fld id="{68957F31-EF9F-422B-9EBC-20B94937EE59}" type="datetimeFigureOut">
               <a:rPr lang="nl-NL" smtClean="0"/>
-              <a:t>20-9-2023</a:t>
+              <a:t>4-10-2023</a:t>
             </a:fld>
             <a:endParaRPr lang="nl-NL"/>
           </a:p>
@@ -2732,7 +2733,7 @@
           <a:p>
             <a:fld id="{68957F31-EF9F-422B-9EBC-20B94937EE59}" type="datetimeFigureOut">
               <a:rPr lang="nl-NL" smtClean="0"/>
-              <a:t>20-9-2023</a:t>
+              <a:t>4-10-2023</a:t>
             </a:fld>
             <a:endParaRPr lang="nl-NL"/>
           </a:p>
@@ -3020,7 +3021,7 @@
           <a:p>
             <a:fld id="{68957F31-EF9F-422B-9EBC-20B94937EE59}" type="datetimeFigureOut">
               <a:rPr lang="nl-NL" smtClean="0"/>
-              <a:t>20-9-2023</a:t>
+              <a:t>4-10-2023</a:t>
             </a:fld>
             <a:endParaRPr lang="nl-NL"/>
           </a:p>
@@ -3261,7 +3262,7 @@
           <a:p>
             <a:fld id="{68957F31-EF9F-422B-9EBC-20B94937EE59}" type="datetimeFigureOut">
               <a:rPr lang="nl-NL" smtClean="0"/>
-              <a:t>20-9-2023</a:t>
+              <a:t>4-10-2023</a:t>
             </a:fld>
             <a:endParaRPr lang="nl-NL"/>
           </a:p>
@@ -3662,6 +3663,1088 @@
 </file>
 
 <file path=ppt/slides/slide1.xml><?xml version="1.0" encoding="utf-8"?>
+<p:sld xmlns:a="http://schemas.openxmlformats.org/drawingml/2006/main" xmlns:r="http://schemas.openxmlformats.org/officeDocument/2006/relationships" xmlns:p="http://schemas.openxmlformats.org/presentationml/2006/main">
+  <p:cSld>
+    <p:spTree>
+      <p:nvGrpSpPr>
+        <p:cNvPr id="1" name=""/>
+        <p:cNvGrpSpPr/>
+        <p:nvPr/>
+      </p:nvGrpSpPr>
+      <p:grpSpPr>
+        <a:xfrm>
+          <a:off x="0" y="0"/>
+          <a:ext cx="0" cy="0"/>
+          <a:chOff x="0" y="0"/>
+          <a:chExt cx="0" cy="0"/>
+        </a:xfrm>
+      </p:grpSpPr>
+      <p:sp>
+        <p:nvSpPr>
+          <p:cNvPr id="27" name="Pijl: punthaak 26">
+            <a:extLst>
+              <a:ext uri="{FF2B5EF4-FFF2-40B4-BE49-F238E27FC236}">
+                <a16:creationId xmlns:a16="http://schemas.microsoft.com/office/drawing/2014/main" id="{0378F427-0670-26D3-6A03-A7AA41A832D0}"/>
+              </a:ext>
+            </a:extLst>
+          </p:cNvPr>
+          <p:cNvSpPr/>
+          <p:nvPr/>
+        </p:nvSpPr>
+        <p:spPr>
+          <a:xfrm>
+            <a:off x="3217365" y="2561232"/>
+            <a:ext cx="1681319" cy="400110"/>
+          </a:xfrm>
+          <a:prstGeom prst="chevron">
+            <a:avLst/>
+          </a:prstGeom>
+          <a:solidFill>
+            <a:schemeClr val="bg2"/>
+          </a:solidFill>
+          <a:ln w="19050"/>
+        </p:spPr>
+        <p:style>
+          <a:lnRef idx="2">
+            <a:schemeClr val="accent1">
+              <a:shade val="15000"/>
+            </a:schemeClr>
+          </a:lnRef>
+          <a:fillRef idx="1">
+            <a:schemeClr val="accent1"/>
+          </a:fillRef>
+          <a:effectRef idx="0">
+            <a:schemeClr val="accent1"/>
+          </a:effectRef>
+          <a:fontRef idx="minor">
+            <a:schemeClr val="lt1"/>
+          </a:fontRef>
+        </p:style>
+        <p:txBody>
+          <a:bodyPr rtlCol="0" anchor="ctr"/>
+          <a:lstStyle/>
+          <a:p>
+            <a:pPr algn="ctr"/>
+            <a:endParaRPr lang="nl-NL">
+              <a:solidFill>
+                <a:schemeClr val="tx1"/>
+              </a:solidFill>
+            </a:endParaRPr>
+          </a:p>
+        </p:txBody>
+      </p:sp>
+      <p:sp>
+        <p:nvSpPr>
+          <p:cNvPr id="2" name="Tekstvak 1">
+            <a:extLst>
+              <a:ext uri="{FF2B5EF4-FFF2-40B4-BE49-F238E27FC236}">
+                <a16:creationId xmlns:a16="http://schemas.microsoft.com/office/drawing/2014/main" id="{4CD32B17-6FCB-D59D-DA92-835CB358FCF5}"/>
+              </a:ext>
+            </a:extLst>
+          </p:cNvPr>
+          <p:cNvSpPr txBox="1"/>
+          <p:nvPr/>
+        </p:nvSpPr>
+        <p:spPr>
+          <a:xfrm>
+            <a:off x="2437764" y="156479"/>
+            <a:ext cx="7136890" cy="400110"/>
+          </a:xfrm>
+          <a:prstGeom prst="rect">
+            <a:avLst/>
+          </a:prstGeom>
+          <a:noFill/>
+        </p:spPr>
+        <p:txBody>
+          <a:bodyPr wrap="none" rtlCol="0">
+            <a:spAutoFit/>
+          </a:bodyPr>
+          <a:lstStyle/>
+          <a:p>
+            <a:r>
+              <a:rPr lang="en-US" sz="2000" dirty="0">
+                <a:latin typeface="Arial" panose="020B0604020202020204" pitchFamily="34" charset="0"/>
+                <a:cs typeface="Arial" panose="020B0604020202020204" pitchFamily="34" charset="0"/>
+              </a:rPr>
+              <a:t>Finding computational relevant VCAM1 interactors (</a:t>
+            </a:r>
+            <a:r>
+              <a:rPr lang="en-US" sz="2000" i="1" dirty="0">
+                <a:latin typeface="Arial" panose="020B0604020202020204" pitchFamily="34" charset="0"/>
+                <a:cs typeface="Arial" panose="020B0604020202020204" pitchFamily="34" charset="0"/>
+              </a:rPr>
+              <a:t>heatmap</a:t>
+            </a:r>
+            <a:r>
+              <a:rPr lang="en-US" sz="2000" dirty="0">
+                <a:latin typeface="Arial" panose="020B0604020202020204" pitchFamily="34" charset="0"/>
+                <a:cs typeface="Arial" panose="020B0604020202020204" pitchFamily="34" charset="0"/>
+              </a:rPr>
+              <a:t>)</a:t>
+            </a:r>
+            <a:endParaRPr lang="nl-NL" sz="2000" dirty="0">
+              <a:latin typeface="Arial" panose="020B0604020202020204" pitchFamily="34" charset="0"/>
+              <a:cs typeface="Arial" panose="020B0604020202020204" pitchFamily="34" charset="0"/>
+            </a:endParaRPr>
+          </a:p>
+        </p:txBody>
+      </p:sp>
+      <p:sp>
+        <p:nvSpPr>
+          <p:cNvPr id="3" name="Tekstvak 2">
+            <a:extLst>
+              <a:ext uri="{FF2B5EF4-FFF2-40B4-BE49-F238E27FC236}">
+                <a16:creationId xmlns:a16="http://schemas.microsoft.com/office/drawing/2014/main" id="{30CD170B-D45E-CEE4-7603-33A6EDFC8E60}"/>
+              </a:ext>
+            </a:extLst>
+          </p:cNvPr>
+          <p:cNvSpPr txBox="1"/>
+          <p:nvPr/>
+        </p:nvSpPr>
+        <p:spPr>
+          <a:xfrm>
+            <a:off x="3410880" y="3017765"/>
+            <a:ext cx="1173352" cy="954107"/>
+          </a:xfrm>
+          <a:prstGeom prst="rect">
+            <a:avLst/>
+          </a:prstGeom>
+          <a:noFill/>
+        </p:spPr>
+        <p:txBody>
+          <a:bodyPr wrap="square" rtlCol="0">
+            <a:spAutoFit/>
+          </a:bodyPr>
+          <a:lstStyle/>
+          <a:p>
+            <a:pPr algn="ctr"/>
+            <a:r>
+              <a:rPr lang="en-US" sz="1400" dirty="0">
+                <a:latin typeface="Arial" panose="020B0604020202020204" pitchFamily="34" charset="0"/>
+                <a:cs typeface="Arial" panose="020B0604020202020204" pitchFamily="34" charset="0"/>
+              </a:rPr>
+              <a:t>OMNIPATH</a:t>
+            </a:r>
+          </a:p>
+          <a:p>
+            <a:pPr algn="ctr"/>
+            <a:r>
+              <a:rPr lang="en-US" sz="1400" dirty="0">
+                <a:latin typeface="Arial" panose="020B0604020202020204" pitchFamily="34" charset="0"/>
+                <a:cs typeface="Arial" panose="020B0604020202020204" pitchFamily="34" charset="0"/>
+              </a:rPr>
+              <a:t>PSICQUIC</a:t>
+            </a:r>
+          </a:p>
+          <a:p>
+            <a:pPr algn="ctr"/>
+            <a:r>
+              <a:rPr lang="en-US" sz="1400" dirty="0">
+                <a:latin typeface="Arial" panose="020B0604020202020204" pitchFamily="34" charset="0"/>
+                <a:cs typeface="Arial" panose="020B0604020202020204" pitchFamily="34" charset="0"/>
+              </a:rPr>
+              <a:t>STRING</a:t>
+            </a:r>
+          </a:p>
+          <a:p>
+            <a:pPr algn="ctr"/>
+            <a:r>
+              <a:rPr lang="en-US" sz="1400" dirty="0">
+                <a:latin typeface="Arial" panose="020B0604020202020204" pitchFamily="34" charset="0"/>
+                <a:cs typeface="Arial" panose="020B0604020202020204" pitchFamily="34" charset="0"/>
+              </a:rPr>
+              <a:t>APID</a:t>
+            </a:r>
+          </a:p>
+        </p:txBody>
+      </p:sp>
+      <p:sp>
+        <p:nvSpPr>
+          <p:cNvPr id="5" name="Rechthoek 4">
+            <a:extLst>
+              <a:ext uri="{FF2B5EF4-FFF2-40B4-BE49-F238E27FC236}">
+                <a16:creationId xmlns:a16="http://schemas.microsoft.com/office/drawing/2014/main" id="{8D7B3E29-407F-3667-C77E-6834E6139659}"/>
+              </a:ext>
+            </a:extLst>
+          </p:cNvPr>
+          <p:cNvSpPr/>
+          <p:nvPr/>
+        </p:nvSpPr>
+        <p:spPr>
+          <a:xfrm>
+            <a:off x="3226466" y="3023696"/>
+            <a:ext cx="1542180" cy="965221"/>
+          </a:xfrm>
+          <a:prstGeom prst="rect">
+            <a:avLst/>
+          </a:prstGeom>
+          <a:noFill/>
+          <a:ln w="19050">
+            <a:solidFill>
+              <a:schemeClr val="tx1"/>
+            </a:solidFill>
+          </a:ln>
+        </p:spPr>
+        <p:style>
+          <a:lnRef idx="2">
+            <a:schemeClr val="accent1">
+              <a:shade val="15000"/>
+            </a:schemeClr>
+          </a:lnRef>
+          <a:fillRef idx="1">
+            <a:schemeClr val="accent1"/>
+          </a:fillRef>
+          <a:effectRef idx="0">
+            <a:schemeClr val="accent1"/>
+          </a:effectRef>
+          <a:fontRef idx="minor">
+            <a:schemeClr val="lt1"/>
+          </a:fontRef>
+        </p:style>
+        <p:txBody>
+          <a:bodyPr rtlCol="0" anchor="ctr"/>
+          <a:lstStyle/>
+          <a:p>
+            <a:pPr algn="ctr"/>
+            <a:endParaRPr lang="nl-NL"/>
+          </a:p>
+        </p:txBody>
+      </p:sp>
+      <p:sp>
+        <p:nvSpPr>
+          <p:cNvPr id="6" name="Pijl: vijfhoek 5">
+            <a:extLst>
+              <a:ext uri="{FF2B5EF4-FFF2-40B4-BE49-F238E27FC236}">
+                <a16:creationId xmlns:a16="http://schemas.microsoft.com/office/drawing/2014/main" id="{A4C4E48D-9580-1F63-D40C-2B52449EE5CA}"/>
+              </a:ext>
+            </a:extLst>
+          </p:cNvPr>
+          <p:cNvSpPr/>
+          <p:nvPr/>
+        </p:nvSpPr>
+        <p:spPr>
+          <a:xfrm>
+            <a:off x="1545146" y="2548929"/>
+            <a:ext cx="1681320" cy="400110"/>
+          </a:xfrm>
+          <a:prstGeom prst="homePlate">
+            <a:avLst/>
+          </a:prstGeom>
+          <a:solidFill>
+            <a:schemeClr val="bg2"/>
+          </a:solidFill>
+          <a:ln w="19050"/>
+        </p:spPr>
+        <p:style>
+          <a:lnRef idx="2">
+            <a:schemeClr val="accent1">
+              <a:shade val="15000"/>
+            </a:schemeClr>
+          </a:lnRef>
+          <a:fillRef idx="1">
+            <a:schemeClr val="accent1"/>
+          </a:fillRef>
+          <a:effectRef idx="0">
+            <a:schemeClr val="accent1"/>
+          </a:effectRef>
+          <a:fontRef idx="minor">
+            <a:schemeClr val="lt1"/>
+          </a:fontRef>
+        </p:style>
+        <p:txBody>
+          <a:bodyPr rtlCol="0" anchor="ctr"/>
+          <a:lstStyle/>
+          <a:p>
+            <a:pPr algn="ctr"/>
+            <a:endParaRPr lang="nl-NL"/>
+          </a:p>
+        </p:txBody>
+      </p:sp>
+      <p:sp>
+        <p:nvSpPr>
+          <p:cNvPr id="8" name="Tekstvak 7">
+            <a:extLst>
+              <a:ext uri="{FF2B5EF4-FFF2-40B4-BE49-F238E27FC236}">
+                <a16:creationId xmlns:a16="http://schemas.microsoft.com/office/drawing/2014/main" id="{2932B1C5-9E63-A2B6-2C9F-26FEDF64B7ED}"/>
+              </a:ext>
+            </a:extLst>
+          </p:cNvPr>
+          <p:cNvSpPr txBox="1"/>
+          <p:nvPr/>
+        </p:nvSpPr>
+        <p:spPr>
+          <a:xfrm>
+            <a:off x="1621234" y="2589555"/>
+            <a:ext cx="1247457" cy="307777"/>
+          </a:xfrm>
+          <a:prstGeom prst="rect">
+            <a:avLst/>
+          </a:prstGeom>
+          <a:noFill/>
+        </p:spPr>
+        <p:txBody>
+          <a:bodyPr wrap="none" rtlCol="0">
+            <a:spAutoFit/>
+          </a:bodyPr>
+          <a:lstStyle/>
+          <a:p>
+            <a:pPr algn="ctr"/>
+            <a:r>
+              <a:rPr lang="en-US" sz="1400" b="1" dirty="0">
+                <a:latin typeface="Arial" panose="020B0604020202020204" pitchFamily="34" charset="0"/>
+                <a:cs typeface="Arial" panose="020B0604020202020204" pitchFamily="34" charset="0"/>
+              </a:rPr>
+              <a:t>Db selection</a:t>
+            </a:r>
+          </a:p>
+        </p:txBody>
+      </p:sp>
+      <p:sp>
+        <p:nvSpPr>
+          <p:cNvPr id="9" name="Rechthoek 8">
+            <a:extLst>
+              <a:ext uri="{FF2B5EF4-FFF2-40B4-BE49-F238E27FC236}">
+                <a16:creationId xmlns:a16="http://schemas.microsoft.com/office/drawing/2014/main" id="{5B66F4E4-2501-F123-1C73-A861C9E61350}"/>
+              </a:ext>
+            </a:extLst>
+          </p:cNvPr>
+          <p:cNvSpPr/>
+          <p:nvPr/>
+        </p:nvSpPr>
+        <p:spPr>
+          <a:xfrm>
+            <a:off x="4851843" y="3023696"/>
+            <a:ext cx="1465466" cy="965221"/>
+          </a:xfrm>
+          <a:prstGeom prst="rect">
+            <a:avLst/>
+          </a:prstGeom>
+          <a:noFill/>
+          <a:ln w="19050">
+            <a:solidFill>
+              <a:schemeClr val="tx1"/>
+            </a:solidFill>
+          </a:ln>
+        </p:spPr>
+        <p:style>
+          <a:lnRef idx="2">
+            <a:schemeClr val="accent1">
+              <a:shade val="15000"/>
+            </a:schemeClr>
+          </a:lnRef>
+          <a:fillRef idx="1">
+            <a:schemeClr val="accent1"/>
+          </a:fillRef>
+          <a:effectRef idx="0">
+            <a:schemeClr val="accent1"/>
+          </a:effectRef>
+          <a:fontRef idx="minor">
+            <a:schemeClr val="lt1"/>
+          </a:fontRef>
+        </p:style>
+        <p:txBody>
+          <a:bodyPr rtlCol="0" anchor="ctr"/>
+          <a:lstStyle/>
+          <a:p>
+            <a:pPr algn="ctr"/>
+            <a:endParaRPr lang="nl-NL"/>
+          </a:p>
+        </p:txBody>
+      </p:sp>
+      <p:sp>
+        <p:nvSpPr>
+          <p:cNvPr id="10" name="Pijl: punthaak 9">
+            <a:extLst>
+              <a:ext uri="{FF2B5EF4-FFF2-40B4-BE49-F238E27FC236}">
+                <a16:creationId xmlns:a16="http://schemas.microsoft.com/office/drawing/2014/main" id="{5F372E47-11EE-87FA-58FD-CB1BBE588E45}"/>
+              </a:ext>
+            </a:extLst>
+          </p:cNvPr>
+          <p:cNvSpPr/>
+          <p:nvPr/>
+        </p:nvSpPr>
+        <p:spPr>
+          <a:xfrm>
+            <a:off x="4824228" y="2548929"/>
+            <a:ext cx="1681319" cy="400110"/>
+          </a:xfrm>
+          <a:prstGeom prst="chevron">
+            <a:avLst/>
+          </a:prstGeom>
+          <a:solidFill>
+            <a:schemeClr val="bg2"/>
+          </a:solidFill>
+          <a:ln w="19050"/>
+        </p:spPr>
+        <p:style>
+          <a:lnRef idx="2">
+            <a:schemeClr val="accent1">
+              <a:shade val="15000"/>
+            </a:schemeClr>
+          </a:lnRef>
+          <a:fillRef idx="1">
+            <a:schemeClr val="accent1"/>
+          </a:fillRef>
+          <a:effectRef idx="0">
+            <a:schemeClr val="accent1"/>
+          </a:effectRef>
+          <a:fontRef idx="minor">
+            <a:schemeClr val="lt1"/>
+          </a:fontRef>
+        </p:style>
+        <p:txBody>
+          <a:bodyPr rtlCol="0" anchor="ctr"/>
+          <a:lstStyle/>
+          <a:p>
+            <a:pPr algn="ctr"/>
+            <a:endParaRPr lang="nl-NL">
+              <a:solidFill>
+                <a:schemeClr val="tx1"/>
+              </a:solidFill>
+            </a:endParaRPr>
+          </a:p>
+        </p:txBody>
+      </p:sp>
+      <p:sp>
+        <p:nvSpPr>
+          <p:cNvPr id="12" name="Tekstvak 11">
+            <a:extLst>
+              <a:ext uri="{FF2B5EF4-FFF2-40B4-BE49-F238E27FC236}">
+                <a16:creationId xmlns:a16="http://schemas.microsoft.com/office/drawing/2014/main" id="{7B2B858A-3ADB-3873-5144-E932863766EF}"/>
+              </a:ext>
+            </a:extLst>
+          </p:cNvPr>
+          <p:cNvSpPr txBox="1"/>
+          <p:nvPr/>
+        </p:nvSpPr>
+        <p:spPr>
+          <a:xfrm>
+            <a:off x="5090180" y="2589556"/>
+            <a:ext cx="1149418" cy="307777"/>
+          </a:xfrm>
+          <a:prstGeom prst="rect">
+            <a:avLst/>
+          </a:prstGeom>
+          <a:noFill/>
+        </p:spPr>
+        <p:txBody>
+          <a:bodyPr wrap="none" rtlCol="0">
+            <a:spAutoFit/>
+          </a:bodyPr>
+          <a:lstStyle/>
+          <a:p>
+            <a:pPr algn="ctr"/>
+            <a:r>
+              <a:rPr lang="en-US" sz="1400" b="1" dirty="0">
+                <a:latin typeface="Arial" panose="020B0604020202020204" pitchFamily="34" charset="0"/>
+                <a:cs typeface="Arial" panose="020B0604020202020204" pitchFamily="34" charset="0"/>
+              </a:rPr>
+              <a:t>Verification</a:t>
+            </a:r>
+          </a:p>
+        </p:txBody>
+      </p:sp>
+      <p:sp>
+        <p:nvSpPr>
+          <p:cNvPr id="13" name="Tekstvak 12">
+            <a:extLst>
+              <a:ext uri="{FF2B5EF4-FFF2-40B4-BE49-F238E27FC236}">
+                <a16:creationId xmlns:a16="http://schemas.microsoft.com/office/drawing/2014/main" id="{549007BB-B2F8-25FE-3EA8-BF585A318EA4}"/>
+              </a:ext>
+            </a:extLst>
+          </p:cNvPr>
+          <p:cNvSpPr txBox="1"/>
+          <p:nvPr/>
+        </p:nvSpPr>
+        <p:spPr>
+          <a:xfrm>
+            <a:off x="4902214" y="3233208"/>
+            <a:ext cx="1279516" cy="523220"/>
+          </a:xfrm>
+          <a:prstGeom prst="rect">
+            <a:avLst/>
+          </a:prstGeom>
+          <a:noFill/>
+        </p:spPr>
+        <p:txBody>
+          <a:bodyPr wrap="none" rtlCol="0">
+            <a:spAutoFit/>
+          </a:bodyPr>
+          <a:lstStyle/>
+          <a:p>
+            <a:pPr algn="ctr"/>
+            <a:r>
+              <a:rPr lang="en-US" sz="1400" dirty="0">
+                <a:latin typeface="Arial" panose="020B0604020202020204" pitchFamily="34" charset="0"/>
+                <a:cs typeface="Arial" panose="020B0604020202020204" pitchFamily="34" charset="0"/>
+              </a:rPr>
+              <a:t>Experimental </a:t>
+            </a:r>
+          </a:p>
+          <a:p>
+            <a:pPr algn="ctr"/>
+            <a:r>
+              <a:rPr lang="en-US" sz="1400" dirty="0">
+                <a:latin typeface="Arial" panose="020B0604020202020204" pitchFamily="34" charset="0"/>
+                <a:cs typeface="Arial" panose="020B0604020202020204" pitchFamily="34" charset="0"/>
+              </a:rPr>
+              <a:t>evidence</a:t>
+            </a:r>
+          </a:p>
+        </p:txBody>
+      </p:sp>
+      <p:sp>
+        <p:nvSpPr>
+          <p:cNvPr id="14" name="Rechthoek 13">
+            <a:extLst>
+              <a:ext uri="{FF2B5EF4-FFF2-40B4-BE49-F238E27FC236}">
+                <a16:creationId xmlns:a16="http://schemas.microsoft.com/office/drawing/2014/main" id="{F79542E7-04CD-86A8-3E8E-F7B24AF8CB0C}"/>
+              </a:ext>
+            </a:extLst>
+          </p:cNvPr>
+          <p:cNvSpPr/>
+          <p:nvPr/>
+        </p:nvSpPr>
+        <p:spPr>
+          <a:xfrm>
+            <a:off x="6450359" y="3023696"/>
+            <a:ext cx="1465466" cy="965221"/>
+          </a:xfrm>
+          <a:prstGeom prst="rect">
+            <a:avLst/>
+          </a:prstGeom>
+          <a:noFill/>
+          <a:ln w="19050">
+            <a:solidFill>
+              <a:schemeClr val="tx1"/>
+            </a:solidFill>
+          </a:ln>
+        </p:spPr>
+        <p:style>
+          <a:lnRef idx="2">
+            <a:schemeClr val="accent1">
+              <a:shade val="15000"/>
+            </a:schemeClr>
+          </a:lnRef>
+          <a:fillRef idx="1">
+            <a:schemeClr val="accent1"/>
+          </a:fillRef>
+          <a:effectRef idx="0">
+            <a:schemeClr val="accent1"/>
+          </a:effectRef>
+          <a:fontRef idx="minor">
+            <a:schemeClr val="lt1"/>
+          </a:fontRef>
+        </p:style>
+        <p:txBody>
+          <a:bodyPr rtlCol="0" anchor="ctr"/>
+          <a:lstStyle/>
+          <a:p>
+            <a:pPr algn="ctr"/>
+            <a:endParaRPr lang="nl-NL"/>
+          </a:p>
+        </p:txBody>
+      </p:sp>
+      <p:sp>
+        <p:nvSpPr>
+          <p:cNvPr id="15" name="Pijl: punthaak 14">
+            <a:extLst>
+              <a:ext uri="{FF2B5EF4-FFF2-40B4-BE49-F238E27FC236}">
+                <a16:creationId xmlns:a16="http://schemas.microsoft.com/office/drawing/2014/main" id="{FD86459A-483A-8F8B-2F5E-2FF15B835D3C}"/>
+              </a:ext>
+            </a:extLst>
+          </p:cNvPr>
+          <p:cNvSpPr/>
+          <p:nvPr/>
+        </p:nvSpPr>
+        <p:spPr>
+          <a:xfrm>
+            <a:off x="6421988" y="2554467"/>
+            <a:ext cx="1681319" cy="400110"/>
+          </a:xfrm>
+          <a:prstGeom prst="chevron">
+            <a:avLst/>
+          </a:prstGeom>
+          <a:solidFill>
+            <a:schemeClr val="bg2"/>
+          </a:solidFill>
+          <a:ln w="19050"/>
+        </p:spPr>
+        <p:style>
+          <a:lnRef idx="2">
+            <a:schemeClr val="accent1">
+              <a:shade val="15000"/>
+            </a:schemeClr>
+          </a:lnRef>
+          <a:fillRef idx="1">
+            <a:schemeClr val="accent1"/>
+          </a:fillRef>
+          <a:effectRef idx="0">
+            <a:schemeClr val="accent1"/>
+          </a:effectRef>
+          <a:fontRef idx="minor">
+            <a:schemeClr val="lt1"/>
+          </a:fontRef>
+        </p:style>
+        <p:txBody>
+          <a:bodyPr rtlCol="0" anchor="ctr"/>
+          <a:lstStyle/>
+          <a:p>
+            <a:pPr algn="ctr"/>
+            <a:endParaRPr lang="nl-NL">
+              <a:solidFill>
+                <a:schemeClr val="tx1"/>
+              </a:solidFill>
+            </a:endParaRPr>
+          </a:p>
+        </p:txBody>
+      </p:sp>
+      <p:sp>
+        <p:nvSpPr>
+          <p:cNvPr id="16" name="Tekstvak 15">
+            <a:extLst>
+              <a:ext uri="{FF2B5EF4-FFF2-40B4-BE49-F238E27FC236}">
+                <a16:creationId xmlns:a16="http://schemas.microsoft.com/office/drawing/2014/main" id="{75893A5E-F90D-4FC6-DF64-F5B58C9340FE}"/>
+              </a:ext>
+            </a:extLst>
+          </p:cNvPr>
+          <p:cNvSpPr txBox="1"/>
+          <p:nvPr/>
+        </p:nvSpPr>
+        <p:spPr>
+          <a:xfrm>
+            <a:off x="6622682" y="3233208"/>
+            <a:ext cx="1120820" cy="523220"/>
+          </a:xfrm>
+          <a:prstGeom prst="rect">
+            <a:avLst/>
+          </a:prstGeom>
+          <a:noFill/>
+        </p:spPr>
+        <p:txBody>
+          <a:bodyPr wrap="none" rtlCol="0">
+            <a:spAutoFit/>
+          </a:bodyPr>
+          <a:lstStyle/>
+          <a:p>
+            <a:pPr algn="ctr"/>
+            <a:r>
+              <a:rPr lang="en-US" sz="1400" dirty="0">
+                <a:latin typeface="Arial" panose="020B0604020202020204" pitchFamily="34" charset="0"/>
+                <a:cs typeface="Arial" panose="020B0604020202020204" pitchFamily="34" charset="0"/>
+              </a:rPr>
+              <a:t>Subcellular </a:t>
+            </a:r>
+          </a:p>
+          <a:p>
+            <a:pPr algn="ctr"/>
+            <a:r>
+              <a:rPr lang="en-US" sz="1400" dirty="0">
+                <a:latin typeface="Arial" panose="020B0604020202020204" pitchFamily="34" charset="0"/>
+                <a:cs typeface="Arial" panose="020B0604020202020204" pitchFamily="34" charset="0"/>
+              </a:rPr>
+              <a:t>location</a:t>
+            </a:r>
+          </a:p>
+        </p:txBody>
+      </p:sp>
+      <p:sp>
+        <p:nvSpPr>
+          <p:cNvPr id="17" name="Tekstvak 16">
+            <a:extLst>
+              <a:ext uri="{FF2B5EF4-FFF2-40B4-BE49-F238E27FC236}">
+                <a16:creationId xmlns:a16="http://schemas.microsoft.com/office/drawing/2014/main" id="{A25A9AE1-9D1D-087F-63C5-B3E2683900EA}"/>
+              </a:ext>
+            </a:extLst>
+          </p:cNvPr>
+          <p:cNvSpPr txBox="1"/>
+          <p:nvPr/>
+        </p:nvSpPr>
+        <p:spPr>
+          <a:xfrm>
+            <a:off x="6809629" y="2589556"/>
+            <a:ext cx="832279" cy="307777"/>
+          </a:xfrm>
+          <a:prstGeom prst="rect">
+            <a:avLst/>
+          </a:prstGeom>
+          <a:noFill/>
+        </p:spPr>
+        <p:txBody>
+          <a:bodyPr wrap="none" rtlCol="0">
+            <a:spAutoFit/>
+          </a:bodyPr>
+          <a:lstStyle/>
+          <a:p>
+            <a:pPr algn="ctr"/>
+            <a:r>
+              <a:rPr lang="en-US" sz="1400" b="1" dirty="0">
+                <a:latin typeface="Arial" panose="020B0604020202020204" pitchFamily="34" charset="0"/>
+                <a:cs typeface="Arial" panose="020B0604020202020204" pitchFamily="34" charset="0"/>
+              </a:rPr>
+              <a:t>UniProt</a:t>
+            </a:r>
+          </a:p>
+        </p:txBody>
+      </p:sp>
+      <p:sp>
+        <p:nvSpPr>
+          <p:cNvPr id="21" name="Pijl: punthaak 20">
+            <a:extLst>
+              <a:ext uri="{FF2B5EF4-FFF2-40B4-BE49-F238E27FC236}">
+                <a16:creationId xmlns:a16="http://schemas.microsoft.com/office/drawing/2014/main" id="{55EEE148-E849-17B1-38A2-8D062F460BD0}"/>
+              </a:ext>
+            </a:extLst>
+          </p:cNvPr>
+          <p:cNvSpPr/>
+          <p:nvPr/>
+        </p:nvSpPr>
+        <p:spPr>
+          <a:xfrm>
+            <a:off x="8019748" y="2555126"/>
+            <a:ext cx="1681319" cy="400110"/>
+          </a:xfrm>
+          <a:prstGeom prst="chevron">
+            <a:avLst/>
+          </a:prstGeom>
+          <a:solidFill>
+            <a:schemeClr val="bg2"/>
+          </a:solidFill>
+          <a:ln w="19050"/>
+        </p:spPr>
+        <p:style>
+          <a:lnRef idx="2">
+            <a:schemeClr val="accent1">
+              <a:shade val="15000"/>
+            </a:schemeClr>
+          </a:lnRef>
+          <a:fillRef idx="1">
+            <a:schemeClr val="accent1"/>
+          </a:fillRef>
+          <a:effectRef idx="0">
+            <a:schemeClr val="accent1"/>
+          </a:effectRef>
+          <a:fontRef idx="minor">
+            <a:schemeClr val="lt1"/>
+          </a:fontRef>
+        </p:style>
+        <p:txBody>
+          <a:bodyPr rtlCol="0" anchor="ctr"/>
+          <a:lstStyle/>
+          <a:p>
+            <a:pPr algn="ctr"/>
+            <a:endParaRPr lang="nl-NL">
+              <a:solidFill>
+                <a:schemeClr val="tx1"/>
+              </a:solidFill>
+            </a:endParaRPr>
+          </a:p>
+        </p:txBody>
+      </p:sp>
+      <p:sp>
+        <p:nvSpPr>
+          <p:cNvPr id="22" name="Tekstvak 21">
+            <a:extLst>
+              <a:ext uri="{FF2B5EF4-FFF2-40B4-BE49-F238E27FC236}">
+                <a16:creationId xmlns:a16="http://schemas.microsoft.com/office/drawing/2014/main" id="{626E292F-F1F1-02D1-6607-80EA7C037E80}"/>
+              </a:ext>
+            </a:extLst>
+          </p:cNvPr>
+          <p:cNvSpPr txBox="1"/>
+          <p:nvPr/>
+        </p:nvSpPr>
+        <p:spPr>
+          <a:xfrm>
+            <a:off x="8442657" y="2589555"/>
+            <a:ext cx="761748" cy="307777"/>
+          </a:xfrm>
+          <a:prstGeom prst="rect">
+            <a:avLst/>
+          </a:prstGeom>
+          <a:noFill/>
+        </p:spPr>
+        <p:txBody>
+          <a:bodyPr wrap="none" rtlCol="0">
+            <a:spAutoFit/>
+          </a:bodyPr>
+          <a:lstStyle/>
+          <a:p>
+            <a:pPr algn="ctr"/>
+            <a:r>
+              <a:rPr lang="en-US" sz="1400" b="1" dirty="0">
+                <a:latin typeface="Arial" panose="020B0604020202020204" pitchFamily="34" charset="0"/>
+                <a:cs typeface="Arial" panose="020B0604020202020204" pitchFamily="34" charset="0"/>
+              </a:rPr>
+              <a:t>X et al.</a:t>
+            </a:r>
+          </a:p>
+        </p:txBody>
+      </p:sp>
+      <p:sp>
+        <p:nvSpPr>
+          <p:cNvPr id="23" name="Rechthoek 22">
+            <a:extLst>
+              <a:ext uri="{FF2B5EF4-FFF2-40B4-BE49-F238E27FC236}">
+                <a16:creationId xmlns:a16="http://schemas.microsoft.com/office/drawing/2014/main" id="{BD01A2E5-6082-69A6-E260-6D161B6ADDB5}"/>
+              </a:ext>
+            </a:extLst>
+          </p:cNvPr>
+          <p:cNvSpPr/>
+          <p:nvPr/>
+        </p:nvSpPr>
+        <p:spPr>
+          <a:xfrm>
+            <a:off x="8019748" y="3023696"/>
+            <a:ext cx="1465466" cy="965221"/>
+          </a:xfrm>
+          <a:prstGeom prst="rect">
+            <a:avLst/>
+          </a:prstGeom>
+          <a:noFill/>
+          <a:ln w="19050">
+            <a:solidFill>
+              <a:schemeClr val="tx1"/>
+            </a:solidFill>
+          </a:ln>
+        </p:spPr>
+        <p:style>
+          <a:lnRef idx="2">
+            <a:schemeClr val="accent1">
+              <a:shade val="15000"/>
+            </a:schemeClr>
+          </a:lnRef>
+          <a:fillRef idx="1">
+            <a:schemeClr val="accent1"/>
+          </a:fillRef>
+          <a:effectRef idx="0">
+            <a:schemeClr val="accent1"/>
+          </a:effectRef>
+          <a:fontRef idx="minor">
+            <a:schemeClr val="lt1"/>
+          </a:fontRef>
+        </p:style>
+        <p:txBody>
+          <a:bodyPr rtlCol="0" anchor="ctr"/>
+          <a:lstStyle/>
+          <a:p>
+            <a:pPr algn="ctr"/>
+            <a:endParaRPr lang="nl-NL"/>
+          </a:p>
+        </p:txBody>
+      </p:sp>
+      <p:sp>
+        <p:nvSpPr>
+          <p:cNvPr id="24" name="Tekstvak 23">
+            <a:extLst>
+              <a:ext uri="{FF2B5EF4-FFF2-40B4-BE49-F238E27FC236}">
+                <a16:creationId xmlns:a16="http://schemas.microsoft.com/office/drawing/2014/main" id="{7098B673-0FC2-F7D7-D51D-1D6FB8CCA246}"/>
+              </a:ext>
+            </a:extLst>
+          </p:cNvPr>
+          <p:cNvSpPr txBox="1"/>
+          <p:nvPr/>
+        </p:nvSpPr>
+        <p:spPr>
+          <a:xfrm>
+            <a:off x="8137569" y="3233208"/>
+            <a:ext cx="1229824" cy="523220"/>
+          </a:xfrm>
+          <a:prstGeom prst="rect">
+            <a:avLst/>
+          </a:prstGeom>
+          <a:noFill/>
+        </p:spPr>
+        <p:txBody>
+          <a:bodyPr wrap="none" rtlCol="0">
+            <a:spAutoFit/>
+          </a:bodyPr>
+          <a:lstStyle/>
+          <a:p>
+            <a:pPr algn="ctr"/>
+            <a:r>
+              <a:rPr lang="en-US" sz="1400" dirty="0">
+                <a:latin typeface="Arial" panose="020B0604020202020204" pitchFamily="34" charset="0"/>
+                <a:cs typeface="Arial" panose="020B0604020202020204" pitchFamily="34" charset="0"/>
+              </a:rPr>
+              <a:t>Hippocampal</a:t>
+            </a:r>
+          </a:p>
+          <a:p>
+            <a:pPr algn="ctr"/>
+            <a:r>
+              <a:rPr lang="en-US" sz="1400" dirty="0">
+                <a:latin typeface="Arial" panose="020B0604020202020204" pitchFamily="34" charset="0"/>
+                <a:cs typeface="Arial" panose="020B0604020202020204" pitchFamily="34" charset="0"/>
+              </a:rPr>
+              <a:t>expression</a:t>
+            </a:r>
+          </a:p>
+        </p:txBody>
+      </p:sp>
+      <p:sp>
+        <p:nvSpPr>
+          <p:cNvPr id="25" name="Rechthoek 24">
+            <a:extLst>
+              <a:ext uri="{FF2B5EF4-FFF2-40B4-BE49-F238E27FC236}">
+                <a16:creationId xmlns:a16="http://schemas.microsoft.com/office/drawing/2014/main" id="{1987AE45-5309-39BB-4701-B98F81F4507A}"/>
+              </a:ext>
+            </a:extLst>
+          </p:cNvPr>
+          <p:cNvSpPr/>
+          <p:nvPr/>
+        </p:nvSpPr>
+        <p:spPr>
+          <a:xfrm>
+            <a:off x="1540546" y="3029774"/>
+            <a:ext cx="1542180" cy="965221"/>
+          </a:xfrm>
+          <a:prstGeom prst="rect">
+            <a:avLst/>
+          </a:prstGeom>
+          <a:noFill/>
+          <a:ln w="19050">
+            <a:solidFill>
+              <a:schemeClr val="tx1"/>
+            </a:solidFill>
+          </a:ln>
+        </p:spPr>
+        <p:style>
+          <a:lnRef idx="2">
+            <a:schemeClr val="accent1">
+              <a:shade val="15000"/>
+            </a:schemeClr>
+          </a:lnRef>
+          <a:fillRef idx="1">
+            <a:schemeClr val="accent1"/>
+          </a:fillRef>
+          <a:effectRef idx="0">
+            <a:schemeClr val="accent1"/>
+          </a:effectRef>
+          <a:fontRef idx="minor">
+            <a:schemeClr val="lt1"/>
+          </a:fontRef>
+        </p:style>
+        <p:txBody>
+          <a:bodyPr rtlCol="0" anchor="ctr"/>
+          <a:lstStyle/>
+          <a:p>
+            <a:pPr algn="ctr"/>
+            <a:endParaRPr lang="nl-NL"/>
+          </a:p>
+        </p:txBody>
+      </p:sp>
+      <p:sp>
+        <p:nvSpPr>
+          <p:cNvPr id="26" name="Tekstvak 25">
+            <a:extLst>
+              <a:ext uri="{FF2B5EF4-FFF2-40B4-BE49-F238E27FC236}">
+                <a16:creationId xmlns:a16="http://schemas.microsoft.com/office/drawing/2014/main" id="{6FB07696-84BF-0BC8-F590-95563850A388}"/>
+              </a:ext>
+            </a:extLst>
+          </p:cNvPr>
+          <p:cNvSpPr txBox="1"/>
+          <p:nvPr/>
+        </p:nvSpPr>
+        <p:spPr>
+          <a:xfrm>
+            <a:off x="3382093" y="2589554"/>
+            <a:ext cx="1406155" cy="307777"/>
+          </a:xfrm>
+          <a:prstGeom prst="rect">
+            <a:avLst/>
+          </a:prstGeom>
+          <a:noFill/>
+        </p:spPr>
+        <p:txBody>
+          <a:bodyPr wrap="none" rtlCol="0">
+            <a:spAutoFit/>
+          </a:bodyPr>
+          <a:lstStyle/>
+          <a:p>
+            <a:pPr algn="ctr"/>
+            <a:r>
+              <a:rPr lang="en-US" sz="1400" b="1" dirty="0">
+                <a:latin typeface="Arial" panose="020B0604020202020204" pitchFamily="34" charset="0"/>
+                <a:cs typeface="Arial" panose="020B0604020202020204" pitchFamily="34" charset="0"/>
+              </a:rPr>
+              <a:t>Back-end data</a:t>
+            </a:r>
+          </a:p>
+        </p:txBody>
+      </p:sp>
+      <p:sp>
+        <p:nvSpPr>
+          <p:cNvPr id="28" name="Tekstvak 27">
+            <a:extLst>
+              <a:ext uri="{FF2B5EF4-FFF2-40B4-BE49-F238E27FC236}">
+                <a16:creationId xmlns:a16="http://schemas.microsoft.com/office/drawing/2014/main" id="{5A9B650A-E056-F3F3-E34D-C87B114A7A62}"/>
+              </a:ext>
+            </a:extLst>
+          </p:cNvPr>
+          <p:cNvSpPr txBox="1"/>
+          <p:nvPr/>
+        </p:nvSpPr>
+        <p:spPr>
+          <a:xfrm>
+            <a:off x="1470976" y="3170470"/>
+            <a:ext cx="1681320" cy="738664"/>
+          </a:xfrm>
+          <a:prstGeom prst="rect">
+            <a:avLst/>
+          </a:prstGeom>
+          <a:noFill/>
+        </p:spPr>
+        <p:txBody>
+          <a:bodyPr wrap="square" rtlCol="0">
+            <a:spAutoFit/>
+          </a:bodyPr>
+          <a:lstStyle/>
+          <a:p>
+            <a:pPr algn="ctr"/>
+            <a:r>
+              <a:rPr lang="en-US" sz="1400" dirty="0">
+                <a:latin typeface="Arial" panose="020B0604020202020204" pitchFamily="34" charset="0"/>
+                <a:cs typeface="Arial" panose="020B0604020202020204" pitchFamily="34" charset="0"/>
+              </a:rPr>
+              <a:t>Bajpai et al. 2020</a:t>
+            </a:r>
+          </a:p>
+          <a:p>
+            <a:pPr algn="ctr"/>
+            <a:r>
+              <a:rPr lang="en-US" sz="1400" dirty="0">
+                <a:latin typeface="Arial" panose="020B0604020202020204" pitchFamily="34" charset="0"/>
+                <a:cs typeface="Arial" panose="020B0604020202020204" pitchFamily="34" charset="0"/>
+              </a:rPr>
+              <a:t>&amp; </a:t>
+            </a:r>
+          </a:p>
+          <a:p>
+            <a:pPr algn="ctr"/>
+            <a:r>
+              <a:rPr lang="en-US" sz="1400" dirty="0">
+                <a:latin typeface="Arial" panose="020B0604020202020204" pitchFamily="34" charset="0"/>
+                <a:cs typeface="Arial" panose="020B0604020202020204" pitchFamily="34" charset="0"/>
+              </a:rPr>
+              <a:t>own experience</a:t>
+            </a:r>
+          </a:p>
+        </p:txBody>
+      </p:sp>
+    </p:spTree>
+    <p:extLst>
+      <p:ext uri="{BB962C8B-B14F-4D97-AF65-F5344CB8AC3E}">
+        <p14:creationId xmlns:p14="http://schemas.microsoft.com/office/powerpoint/2010/main" val="1798010541"/>
+      </p:ext>
+    </p:extLst>
+  </p:cSld>
+  <p:clrMapOvr>
+    <a:masterClrMapping/>
+  </p:clrMapOvr>
+</p:sld>
+</file>
+
+<file path=ppt/slides/slide2.xml><?xml version="1.0" encoding="utf-8"?>
 <p:sld xmlns:a="http://schemas.openxmlformats.org/drawingml/2006/main" xmlns:r="http://schemas.openxmlformats.org/officeDocument/2006/relationships" xmlns:p="http://schemas.openxmlformats.org/presentationml/2006/main">
   <p:cSld>
     <p:spTree>

--- a/ppi/ppi-project.pptx
+++ b/ppi/ppi-project.pptx
@@ -5,11 +5,15 @@
     <p:sldMasterId id="2147483648" r:id="rId1"/>
   </p:sldMasterIdLst>
   <p:notesMasterIdLst>
-    <p:notesMasterId r:id="rId4"/>
+    <p:notesMasterId r:id="rId8"/>
   </p:notesMasterIdLst>
   <p:sldIdLst>
     <p:sldId id="257" r:id="rId2"/>
     <p:sldId id="256" r:id="rId3"/>
+    <p:sldId id="314" r:id="rId4"/>
+    <p:sldId id="313" r:id="rId5"/>
+    <p:sldId id="318" r:id="rId6"/>
+    <p:sldId id="317" r:id="rId7"/>
   </p:sldIdLst>
   <p:sldSz cx="12192000" cy="6858000"/>
   <p:notesSz cx="6858000" cy="9144000"/>
@@ -198,7 +202,7 @@
           <a:p>
             <a:fld id="{93867FB6-3614-4446-A537-B153597F3F7D}" type="datetimeFigureOut">
               <a:rPr lang="nl-NL" smtClean="0"/>
-              <a:t>4-10-2023</a:t>
+              <a:t>10-10-2023</a:t>
             </a:fld>
             <a:endParaRPr lang="nl-NL"/>
           </a:p>
@@ -612,7 +616,7 @@
           <a:p>
             <a:fld id="{68957F31-EF9F-422B-9EBC-20B94937EE59}" type="datetimeFigureOut">
               <a:rPr lang="nl-NL" smtClean="0"/>
-              <a:t>4-10-2023</a:t>
+              <a:t>10-10-2023</a:t>
             </a:fld>
             <a:endParaRPr lang="nl-NL"/>
           </a:p>
@@ -810,7 +814,7 @@
           <a:p>
             <a:fld id="{68957F31-EF9F-422B-9EBC-20B94937EE59}" type="datetimeFigureOut">
               <a:rPr lang="nl-NL" smtClean="0"/>
-              <a:t>4-10-2023</a:t>
+              <a:t>10-10-2023</a:t>
             </a:fld>
             <a:endParaRPr lang="nl-NL"/>
           </a:p>
@@ -1018,7 +1022,7 @@
           <a:p>
             <a:fld id="{68957F31-EF9F-422B-9EBC-20B94937EE59}" type="datetimeFigureOut">
               <a:rPr lang="nl-NL" smtClean="0"/>
-              <a:t>4-10-2023</a:t>
+              <a:t>10-10-2023</a:t>
             </a:fld>
             <a:endParaRPr lang="nl-NL"/>
           </a:p>
@@ -1216,7 +1220,7 @@
           <a:p>
             <a:fld id="{68957F31-EF9F-422B-9EBC-20B94937EE59}" type="datetimeFigureOut">
               <a:rPr lang="nl-NL" smtClean="0"/>
-              <a:t>4-10-2023</a:t>
+              <a:t>10-10-2023</a:t>
             </a:fld>
             <a:endParaRPr lang="nl-NL"/>
           </a:p>
@@ -1491,7 +1495,7 @@
           <a:p>
             <a:fld id="{68957F31-EF9F-422B-9EBC-20B94937EE59}" type="datetimeFigureOut">
               <a:rPr lang="nl-NL" smtClean="0"/>
-              <a:t>4-10-2023</a:t>
+              <a:t>10-10-2023</a:t>
             </a:fld>
             <a:endParaRPr lang="nl-NL"/>
           </a:p>
@@ -1756,7 +1760,7 @@
           <a:p>
             <a:fld id="{68957F31-EF9F-422B-9EBC-20B94937EE59}" type="datetimeFigureOut">
               <a:rPr lang="nl-NL" smtClean="0"/>
-              <a:t>4-10-2023</a:t>
+              <a:t>10-10-2023</a:t>
             </a:fld>
             <a:endParaRPr lang="nl-NL"/>
           </a:p>
@@ -2168,7 +2172,7 @@
           <a:p>
             <a:fld id="{68957F31-EF9F-422B-9EBC-20B94937EE59}" type="datetimeFigureOut">
               <a:rPr lang="nl-NL" smtClean="0"/>
-              <a:t>4-10-2023</a:t>
+              <a:t>10-10-2023</a:t>
             </a:fld>
             <a:endParaRPr lang="nl-NL"/>
           </a:p>
@@ -2309,7 +2313,7 @@
           <a:p>
             <a:fld id="{68957F31-EF9F-422B-9EBC-20B94937EE59}" type="datetimeFigureOut">
               <a:rPr lang="nl-NL" smtClean="0"/>
-              <a:t>4-10-2023</a:t>
+              <a:t>10-10-2023</a:t>
             </a:fld>
             <a:endParaRPr lang="nl-NL"/>
           </a:p>
@@ -2422,7 +2426,7 @@
           <a:p>
             <a:fld id="{68957F31-EF9F-422B-9EBC-20B94937EE59}" type="datetimeFigureOut">
               <a:rPr lang="nl-NL" smtClean="0"/>
-              <a:t>4-10-2023</a:t>
+              <a:t>10-10-2023</a:t>
             </a:fld>
             <a:endParaRPr lang="nl-NL"/>
           </a:p>
@@ -2733,7 +2737,7 @@
           <a:p>
             <a:fld id="{68957F31-EF9F-422B-9EBC-20B94937EE59}" type="datetimeFigureOut">
               <a:rPr lang="nl-NL" smtClean="0"/>
-              <a:t>4-10-2023</a:t>
+              <a:t>10-10-2023</a:t>
             </a:fld>
             <a:endParaRPr lang="nl-NL"/>
           </a:p>
@@ -3021,7 +3025,7 @@
           <a:p>
             <a:fld id="{68957F31-EF9F-422B-9EBC-20B94937EE59}" type="datetimeFigureOut">
               <a:rPr lang="nl-NL" smtClean="0"/>
-              <a:t>4-10-2023</a:t>
+              <a:t>10-10-2023</a:t>
             </a:fld>
             <a:endParaRPr lang="nl-NL"/>
           </a:p>
@@ -3262,7 +3266,7 @@
           <a:p>
             <a:fld id="{68957F31-EF9F-422B-9EBC-20B94937EE59}" type="datetimeFigureOut">
               <a:rPr lang="nl-NL" smtClean="0"/>
-              <a:t>4-10-2023</a:t>
+              <a:t>10-10-2023</a:t>
             </a:fld>
             <a:endParaRPr lang="nl-NL"/>
           </a:p>
@@ -5761,6 +5765,1929 @@
     <p:extLst>
       <p:ext uri="{BB962C8B-B14F-4D97-AF65-F5344CB8AC3E}">
         <p14:creationId xmlns:p14="http://schemas.microsoft.com/office/powerpoint/2010/main" val="3693617880"/>
+      </p:ext>
+    </p:extLst>
+  </p:cSld>
+  <p:clrMapOvr>
+    <a:masterClrMapping/>
+  </p:clrMapOvr>
+</p:sld>
+</file>
+
+<file path=ppt/slides/slide3.xml><?xml version="1.0" encoding="utf-8"?>
+<p:sld xmlns:a="http://schemas.openxmlformats.org/drawingml/2006/main" xmlns:r="http://schemas.openxmlformats.org/officeDocument/2006/relationships" xmlns:p="http://schemas.openxmlformats.org/presentationml/2006/main">
+  <p:cSld>
+    <p:spTree>
+      <p:nvGrpSpPr>
+        <p:cNvPr id="1" name=""/>
+        <p:cNvGrpSpPr/>
+        <p:nvPr/>
+      </p:nvGrpSpPr>
+      <p:grpSpPr>
+        <a:xfrm>
+          <a:off x="0" y="0"/>
+          <a:ext cx="0" cy="0"/>
+          <a:chOff x="0" y="0"/>
+          <a:chExt cx="0" cy="0"/>
+        </a:xfrm>
+      </p:grpSpPr>
+      <p:pic>
+        <p:nvPicPr>
+          <p:cNvPr id="2" name="Picture 1">
+            <a:extLst>
+              <a:ext uri="{FF2B5EF4-FFF2-40B4-BE49-F238E27FC236}">
+                <a16:creationId xmlns:a16="http://schemas.microsoft.com/office/drawing/2014/main" id="{2E94BF7E-6F83-499A-BB60-9778BD501DE5}"/>
+              </a:ext>
+            </a:extLst>
+          </p:cNvPr>
+          <p:cNvPicPr>
+            <a:picLocks noChangeAspect="1"/>
+          </p:cNvPicPr>
+          <p:nvPr/>
+        </p:nvPicPr>
+        <p:blipFill>
+          <a:blip r:embed="rId2"/>
+          <a:stretch>
+            <a:fillRect/>
+          </a:stretch>
+        </p:blipFill>
+        <p:spPr>
+          <a:xfrm>
+            <a:off x="1745047" y="1716761"/>
+            <a:ext cx="7350240" cy="4172625"/>
+          </a:xfrm>
+          <a:prstGeom prst="rect">
+            <a:avLst/>
+          </a:prstGeom>
+        </p:spPr>
+      </p:pic>
+      <p:cxnSp>
+        <p:nvCxnSpPr>
+          <p:cNvPr id="4" name="Straight Arrow Connector 3">
+            <a:extLst>
+              <a:ext uri="{FF2B5EF4-FFF2-40B4-BE49-F238E27FC236}">
+                <a16:creationId xmlns:a16="http://schemas.microsoft.com/office/drawing/2014/main" id="{6D671647-3BCD-4A83-82E1-E9501D0A26B4}"/>
+              </a:ext>
+            </a:extLst>
+          </p:cNvPr>
+          <p:cNvCxnSpPr/>
+          <p:nvPr/>
+        </p:nvCxnSpPr>
+        <p:spPr>
+          <a:xfrm>
+            <a:off x="9173688" y="4827321"/>
+            <a:ext cx="575954" cy="0"/>
+          </a:xfrm>
+          <a:prstGeom prst="straightConnector1">
+            <a:avLst/>
+          </a:prstGeom>
+          <a:ln>
+            <a:tailEnd type="triangle"/>
+          </a:ln>
+        </p:spPr>
+        <p:style>
+          <a:lnRef idx="1">
+            <a:schemeClr val="accent1"/>
+          </a:lnRef>
+          <a:fillRef idx="0">
+            <a:schemeClr val="accent1"/>
+          </a:fillRef>
+          <a:effectRef idx="0">
+            <a:schemeClr val="accent1"/>
+          </a:effectRef>
+          <a:fontRef idx="minor">
+            <a:schemeClr val="tx1"/>
+          </a:fontRef>
+        </p:style>
+      </p:cxnSp>
+      <p:sp>
+        <p:nvSpPr>
+          <p:cNvPr id="5" name="TextBox 4">
+            <a:extLst>
+              <a:ext uri="{FF2B5EF4-FFF2-40B4-BE49-F238E27FC236}">
+                <a16:creationId xmlns:a16="http://schemas.microsoft.com/office/drawing/2014/main" id="{A69BA926-E305-43BE-BA5B-782F12316BA1}"/>
+              </a:ext>
+            </a:extLst>
+          </p:cNvPr>
+          <p:cNvSpPr txBox="1"/>
+          <p:nvPr/>
+        </p:nvSpPr>
+        <p:spPr>
+          <a:xfrm>
+            <a:off x="9828043" y="4642655"/>
+            <a:ext cx="1665841" cy="923330"/>
+          </a:xfrm>
+          <a:prstGeom prst="rect">
+            <a:avLst/>
+          </a:prstGeom>
+          <a:noFill/>
+        </p:spPr>
+        <p:txBody>
+          <a:bodyPr wrap="none" rtlCol="0">
+            <a:spAutoFit/>
+          </a:bodyPr>
+          <a:lstStyle/>
+          <a:p>
+            <a:r>
+              <a:rPr lang="en-US" dirty="0"/>
+              <a:t>STRING &amp; </a:t>
+            </a:r>
+            <a:r>
+              <a:rPr lang="en-US" dirty="0" err="1"/>
+              <a:t>UniHI</a:t>
+            </a:r>
+            <a:endParaRPr lang="en-US" dirty="0"/>
+          </a:p>
+          <a:p>
+            <a:endParaRPr lang="en-US" dirty="0"/>
+          </a:p>
+          <a:p>
+            <a:r>
+              <a:rPr lang="en-US" dirty="0" err="1"/>
+              <a:t>UniHi</a:t>
+            </a:r>
+            <a:r>
+              <a:rPr lang="en-US" dirty="0"/>
+              <a:t> is down</a:t>
+            </a:r>
+            <a:endParaRPr lang="nl-BE" dirty="0"/>
+          </a:p>
+        </p:txBody>
+      </p:sp>
+      <p:pic>
+        <p:nvPicPr>
+          <p:cNvPr id="6" name="Picture 5">
+            <a:extLst>
+              <a:ext uri="{FF2B5EF4-FFF2-40B4-BE49-F238E27FC236}">
+                <a16:creationId xmlns:a16="http://schemas.microsoft.com/office/drawing/2014/main" id="{9CC2B16D-9E85-449C-B8FB-A39BCCA6AD82}"/>
+              </a:ext>
+            </a:extLst>
+          </p:cNvPr>
+          <p:cNvPicPr>
+            <a:picLocks noChangeAspect="1"/>
+          </p:cNvPicPr>
+          <p:nvPr/>
+        </p:nvPicPr>
+        <p:blipFill>
+          <a:blip r:embed="rId3"/>
+          <a:stretch>
+            <a:fillRect/>
+          </a:stretch>
+        </p:blipFill>
+        <p:spPr>
+          <a:xfrm>
+            <a:off x="1745047" y="222652"/>
+            <a:ext cx="7635902" cy="1425063"/>
+          </a:xfrm>
+          <a:prstGeom prst="rect">
+            <a:avLst/>
+          </a:prstGeom>
+        </p:spPr>
+      </p:pic>
+    </p:spTree>
+    <p:extLst>
+      <p:ext uri="{BB962C8B-B14F-4D97-AF65-F5344CB8AC3E}">
+        <p14:creationId xmlns:p14="http://schemas.microsoft.com/office/powerpoint/2010/main" val="1588898040"/>
+      </p:ext>
+    </p:extLst>
+  </p:cSld>
+  <p:clrMapOvr>
+    <a:masterClrMapping/>
+  </p:clrMapOvr>
+</p:sld>
+</file>
+
+<file path=ppt/slides/slide4.xml><?xml version="1.0" encoding="utf-8"?>
+<p:sld xmlns:a="http://schemas.openxmlformats.org/drawingml/2006/main" xmlns:r="http://schemas.openxmlformats.org/officeDocument/2006/relationships" xmlns:p="http://schemas.openxmlformats.org/presentationml/2006/main">
+  <p:cSld>
+    <p:spTree>
+      <p:nvGrpSpPr>
+        <p:cNvPr id="1" name=""/>
+        <p:cNvGrpSpPr/>
+        <p:nvPr/>
+      </p:nvGrpSpPr>
+      <p:grpSpPr>
+        <a:xfrm>
+          <a:off x="0" y="0"/>
+          <a:ext cx="0" cy="0"/>
+          <a:chOff x="0" y="0"/>
+          <a:chExt cx="0" cy="0"/>
+        </a:xfrm>
+      </p:grpSpPr>
+      <p:sp>
+        <p:nvSpPr>
+          <p:cNvPr id="2" name="Tekstvak 1">
+            <a:extLst>
+              <a:ext uri="{FF2B5EF4-FFF2-40B4-BE49-F238E27FC236}">
+                <a16:creationId xmlns:a16="http://schemas.microsoft.com/office/drawing/2014/main" id="{09F43449-AD8F-4BC8-BA43-FD0A499484D7}"/>
+              </a:ext>
+            </a:extLst>
+          </p:cNvPr>
+          <p:cNvSpPr txBox="1"/>
+          <p:nvPr/>
+        </p:nvSpPr>
+        <p:spPr>
+          <a:xfrm>
+            <a:off x="2437764" y="156479"/>
+            <a:ext cx="2366353" cy="400110"/>
+          </a:xfrm>
+          <a:prstGeom prst="rect">
+            <a:avLst/>
+          </a:prstGeom>
+          <a:noFill/>
+        </p:spPr>
+        <p:txBody>
+          <a:bodyPr wrap="none" rtlCol="0">
+            <a:spAutoFit/>
+          </a:bodyPr>
+          <a:lstStyle/>
+          <a:p>
+            <a:r>
+              <a:rPr lang="en-US" sz="2000" dirty="0">
+                <a:latin typeface="Arial" panose="020B0604020202020204" pitchFamily="34" charset="0"/>
+                <a:cs typeface="Arial" panose="020B0604020202020204" pitchFamily="34" charset="0"/>
+              </a:rPr>
+              <a:t>Database selection</a:t>
+            </a:r>
+            <a:endParaRPr lang="nl-NL" sz="2000" dirty="0">
+              <a:latin typeface="Arial" panose="020B0604020202020204" pitchFamily="34" charset="0"/>
+              <a:cs typeface="Arial" panose="020B0604020202020204" pitchFamily="34" charset="0"/>
+            </a:endParaRPr>
+          </a:p>
+        </p:txBody>
+      </p:sp>
+      <p:pic>
+        <p:nvPicPr>
+          <p:cNvPr id="3" name="Picture 2">
+            <a:extLst>
+              <a:ext uri="{FF2B5EF4-FFF2-40B4-BE49-F238E27FC236}">
+                <a16:creationId xmlns:a16="http://schemas.microsoft.com/office/drawing/2014/main" id="{628AD89C-D07F-4B7A-903B-7983D3DE9353}"/>
+              </a:ext>
+            </a:extLst>
+          </p:cNvPr>
+          <p:cNvPicPr>
+            <a:picLocks noChangeAspect="1"/>
+          </p:cNvPicPr>
+          <p:nvPr/>
+        </p:nvPicPr>
+        <p:blipFill>
+          <a:blip r:embed="rId2"/>
+          <a:stretch>
+            <a:fillRect/>
+          </a:stretch>
+        </p:blipFill>
+        <p:spPr>
+          <a:xfrm>
+            <a:off x="1786611" y="947045"/>
+            <a:ext cx="7635902" cy="1425063"/>
+          </a:xfrm>
+          <a:prstGeom prst="rect">
+            <a:avLst/>
+          </a:prstGeom>
+        </p:spPr>
+      </p:pic>
+      <p:pic>
+        <p:nvPicPr>
+          <p:cNvPr id="9" name="Picture 8">
+            <a:extLst>
+              <a:ext uri="{FF2B5EF4-FFF2-40B4-BE49-F238E27FC236}">
+                <a16:creationId xmlns:a16="http://schemas.microsoft.com/office/drawing/2014/main" id="{ED38D8B8-6D73-4159-90F5-7CC67DAE7DAB}"/>
+              </a:ext>
+            </a:extLst>
+          </p:cNvPr>
+          <p:cNvPicPr>
+            <a:picLocks noChangeAspect="1"/>
+          </p:cNvPicPr>
+          <p:nvPr/>
+        </p:nvPicPr>
+        <p:blipFill>
+          <a:blip r:embed="rId3"/>
+          <a:stretch>
+            <a:fillRect/>
+          </a:stretch>
+        </p:blipFill>
+        <p:spPr>
+          <a:xfrm>
+            <a:off x="824124" y="2501987"/>
+            <a:ext cx="5430982" cy="3967812"/>
+          </a:xfrm>
+          <a:prstGeom prst="rect">
+            <a:avLst/>
+          </a:prstGeom>
+        </p:spPr>
+      </p:pic>
+      <p:pic>
+        <p:nvPicPr>
+          <p:cNvPr id="12" name="Picture 11">
+            <a:extLst>
+              <a:ext uri="{FF2B5EF4-FFF2-40B4-BE49-F238E27FC236}">
+                <a16:creationId xmlns:a16="http://schemas.microsoft.com/office/drawing/2014/main" id="{2002654C-0A29-4D37-95B5-EE0B3738B8B3}"/>
+              </a:ext>
+            </a:extLst>
+          </p:cNvPr>
+          <p:cNvPicPr>
+            <a:picLocks noChangeAspect="1"/>
+          </p:cNvPicPr>
+          <p:nvPr/>
+        </p:nvPicPr>
+        <p:blipFill>
+          <a:blip r:embed="rId4"/>
+          <a:stretch>
+            <a:fillRect/>
+          </a:stretch>
+        </p:blipFill>
+        <p:spPr>
+          <a:xfrm>
+            <a:off x="6584867" y="5701920"/>
+            <a:ext cx="5523702" cy="921510"/>
+          </a:xfrm>
+          <a:prstGeom prst="rect">
+            <a:avLst/>
+          </a:prstGeom>
+        </p:spPr>
+      </p:pic>
+    </p:spTree>
+    <p:extLst>
+      <p:ext uri="{BB962C8B-B14F-4D97-AF65-F5344CB8AC3E}">
+        <p14:creationId xmlns:p14="http://schemas.microsoft.com/office/powerpoint/2010/main" val="3517122714"/>
+      </p:ext>
+    </p:extLst>
+  </p:cSld>
+  <p:clrMapOvr>
+    <a:masterClrMapping/>
+  </p:clrMapOvr>
+</p:sld>
+</file>
+
+<file path=ppt/slides/slide5.xml><?xml version="1.0" encoding="utf-8"?>
+<p:sld xmlns:a="http://schemas.openxmlformats.org/drawingml/2006/main" xmlns:r="http://schemas.openxmlformats.org/officeDocument/2006/relationships" xmlns:p="http://schemas.openxmlformats.org/presentationml/2006/main">
+  <p:cSld>
+    <p:spTree>
+      <p:nvGrpSpPr>
+        <p:cNvPr id="1" name=""/>
+        <p:cNvGrpSpPr/>
+        <p:nvPr/>
+      </p:nvGrpSpPr>
+      <p:grpSpPr>
+        <a:xfrm>
+          <a:off x="0" y="0"/>
+          <a:ext cx="0" cy="0"/>
+          <a:chOff x="0" y="0"/>
+          <a:chExt cx="0" cy="0"/>
+        </a:xfrm>
+      </p:grpSpPr>
+      <p:pic>
+        <p:nvPicPr>
+          <p:cNvPr id="2" name="Picture 1">
+            <a:extLst>
+              <a:ext uri="{FF2B5EF4-FFF2-40B4-BE49-F238E27FC236}">
+                <a16:creationId xmlns:a16="http://schemas.microsoft.com/office/drawing/2014/main" id="{19C50232-B35D-473D-B4B8-DAC80CB28961}"/>
+              </a:ext>
+            </a:extLst>
+          </p:cNvPr>
+          <p:cNvPicPr>
+            <a:picLocks noChangeAspect="1"/>
+          </p:cNvPicPr>
+          <p:nvPr/>
+        </p:nvPicPr>
+        <p:blipFill>
+          <a:blip r:embed="rId2"/>
+          <a:stretch>
+            <a:fillRect/>
+          </a:stretch>
+        </p:blipFill>
+        <p:spPr>
+          <a:xfrm>
+            <a:off x="338448" y="967836"/>
+            <a:ext cx="5317938" cy="4108863"/>
+          </a:xfrm>
+          <a:prstGeom prst="rect">
+            <a:avLst/>
+          </a:prstGeom>
+        </p:spPr>
+      </p:pic>
+      <p:cxnSp>
+        <p:nvCxnSpPr>
+          <p:cNvPr id="4" name="Straight Connector 3">
+            <a:extLst>
+              <a:ext uri="{FF2B5EF4-FFF2-40B4-BE49-F238E27FC236}">
+                <a16:creationId xmlns:a16="http://schemas.microsoft.com/office/drawing/2014/main" id="{F9F43923-4294-4ABF-98CA-882E69471F7A}"/>
+              </a:ext>
+            </a:extLst>
+          </p:cNvPr>
+          <p:cNvCxnSpPr>
+            <a:cxnSpLocks/>
+          </p:cNvCxnSpPr>
+          <p:nvPr/>
+        </p:nvCxnSpPr>
+        <p:spPr>
+          <a:xfrm flipV="1">
+            <a:off x="2676158" y="2092035"/>
+            <a:ext cx="414891" cy="2"/>
+          </a:xfrm>
+          <a:prstGeom prst="line">
+            <a:avLst/>
+          </a:prstGeom>
+          <a:ln w="38100">
+            <a:solidFill>
+              <a:srgbClr val="FF0000"/>
+            </a:solidFill>
+          </a:ln>
+        </p:spPr>
+        <p:style>
+          <a:lnRef idx="1">
+            <a:schemeClr val="accent1"/>
+          </a:lnRef>
+          <a:fillRef idx="0">
+            <a:schemeClr val="accent1"/>
+          </a:fillRef>
+          <a:effectRef idx="0">
+            <a:schemeClr val="accent1"/>
+          </a:effectRef>
+          <a:fontRef idx="minor">
+            <a:schemeClr val="tx1"/>
+          </a:fontRef>
+        </p:style>
+      </p:cxnSp>
+      <p:cxnSp>
+        <p:nvCxnSpPr>
+          <p:cNvPr id="5" name="Straight Connector 4">
+            <a:extLst>
+              <a:ext uri="{FF2B5EF4-FFF2-40B4-BE49-F238E27FC236}">
+                <a16:creationId xmlns:a16="http://schemas.microsoft.com/office/drawing/2014/main" id="{5E370DC0-146A-484C-A107-C34F7EB333E1}"/>
+              </a:ext>
+            </a:extLst>
+          </p:cNvPr>
+          <p:cNvCxnSpPr>
+            <a:cxnSpLocks/>
+          </p:cNvCxnSpPr>
+          <p:nvPr/>
+        </p:nvCxnSpPr>
+        <p:spPr>
+          <a:xfrm flipV="1">
+            <a:off x="2676158" y="2313708"/>
+            <a:ext cx="516229" cy="2"/>
+          </a:xfrm>
+          <a:prstGeom prst="line">
+            <a:avLst/>
+          </a:prstGeom>
+          <a:ln w="38100">
+            <a:solidFill>
+              <a:srgbClr val="FF0000"/>
+            </a:solidFill>
+          </a:ln>
+        </p:spPr>
+        <p:style>
+          <a:lnRef idx="1">
+            <a:schemeClr val="accent1"/>
+          </a:lnRef>
+          <a:fillRef idx="0">
+            <a:schemeClr val="accent1"/>
+          </a:fillRef>
+          <a:effectRef idx="0">
+            <a:schemeClr val="accent1"/>
+          </a:effectRef>
+          <a:fontRef idx="minor">
+            <a:schemeClr val="tx1"/>
+          </a:fontRef>
+        </p:style>
+      </p:cxnSp>
+      <p:cxnSp>
+        <p:nvCxnSpPr>
+          <p:cNvPr id="7" name="Straight Connector 6">
+            <a:extLst>
+              <a:ext uri="{FF2B5EF4-FFF2-40B4-BE49-F238E27FC236}">
+                <a16:creationId xmlns:a16="http://schemas.microsoft.com/office/drawing/2014/main" id="{40664960-FE14-4CDE-9B45-3129368DB20C}"/>
+              </a:ext>
+            </a:extLst>
+          </p:cNvPr>
+          <p:cNvCxnSpPr>
+            <a:cxnSpLocks/>
+          </p:cNvCxnSpPr>
+          <p:nvPr/>
+        </p:nvCxnSpPr>
+        <p:spPr>
+          <a:xfrm flipV="1">
+            <a:off x="2676158" y="2952996"/>
+            <a:ext cx="516229" cy="2"/>
+          </a:xfrm>
+          <a:prstGeom prst="line">
+            <a:avLst/>
+          </a:prstGeom>
+          <a:ln w="38100">
+            <a:solidFill>
+              <a:srgbClr val="FF0000"/>
+            </a:solidFill>
+          </a:ln>
+        </p:spPr>
+        <p:style>
+          <a:lnRef idx="1">
+            <a:schemeClr val="accent1"/>
+          </a:lnRef>
+          <a:fillRef idx="0">
+            <a:schemeClr val="accent1"/>
+          </a:fillRef>
+          <a:effectRef idx="0">
+            <a:schemeClr val="accent1"/>
+          </a:effectRef>
+          <a:fontRef idx="minor">
+            <a:schemeClr val="tx1"/>
+          </a:fontRef>
+        </p:style>
+      </p:cxnSp>
+      <p:sp>
+        <p:nvSpPr>
+          <p:cNvPr id="11" name="Rectangle 10">
+            <a:extLst>
+              <a:ext uri="{FF2B5EF4-FFF2-40B4-BE49-F238E27FC236}">
+                <a16:creationId xmlns:a16="http://schemas.microsoft.com/office/drawing/2014/main" id="{BFFA5932-90BD-4BA6-9535-ABCB746150DD}"/>
+              </a:ext>
+            </a:extLst>
+          </p:cNvPr>
+          <p:cNvSpPr/>
+          <p:nvPr/>
+        </p:nvSpPr>
+        <p:spPr>
+          <a:xfrm>
+            <a:off x="534008" y="72171"/>
+            <a:ext cx="5114081" cy="523220"/>
+          </a:xfrm>
+          <a:prstGeom prst="rect">
+            <a:avLst/>
+          </a:prstGeom>
+        </p:spPr>
+        <p:txBody>
+          <a:bodyPr wrap="square">
+            <a:spAutoFit/>
+          </a:bodyPr>
+          <a:lstStyle/>
+          <a:p>
+            <a:r>
+              <a:rPr lang="nl-BE" sz="1400" dirty="0" err="1"/>
+              <a:t>Mean</a:t>
+            </a:r>
+            <a:r>
+              <a:rPr lang="nl-BE" sz="1400" dirty="0"/>
+              <a:t> </a:t>
+            </a:r>
+            <a:r>
+              <a:rPr lang="nl-BE" sz="1400" dirty="0" err="1"/>
+              <a:t>yield</a:t>
+            </a:r>
+            <a:r>
+              <a:rPr lang="nl-BE" sz="1400" dirty="0"/>
+              <a:t> </a:t>
+            </a:r>
+            <a:r>
+              <a:rPr lang="nl-BE" sz="1400" dirty="0" err="1"/>
+              <a:t>coverage</a:t>
+            </a:r>
+            <a:r>
+              <a:rPr lang="nl-BE" sz="1400" dirty="0"/>
+              <a:t> of </a:t>
+            </a:r>
+            <a:r>
+              <a:rPr lang="nl-BE" sz="1400" dirty="0" err="1"/>
+              <a:t>protein</a:t>
+            </a:r>
+            <a:r>
+              <a:rPr lang="nl-BE" sz="1400" dirty="0"/>
+              <a:t> </a:t>
+            </a:r>
+            <a:r>
+              <a:rPr lang="nl-BE" sz="1400" dirty="0" err="1"/>
+              <a:t>interactions</a:t>
+            </a:r>
+            <a:r>
+              <a:rPr lang="nl-BE" sz="1400" dirty="0"/>
+              <a:t> </a:t>
+            </a:r>
+            <a:r>
+              <a:rPr lang="nl-BE" sz="1400" dirty="0" err="1"/>
+              <a:t>across</a:t>
+            </a:r>
+            <a:r>
+              <a:rPr lang="nl-BE" sz="1400" dirty="0"/>
+              <a:t> databases </a:t>
+            </a:r>
+            <a:r>
+              <a:rPr lang="nl-BE" sz="1400" dirty="0" err="1"/>
+              <a:t>for</a:t>
+            </a:r>
+            <a:r>
+              <a:rPr lang="nl-BE" sz="1400" dirty="0"/>
+              <a:t> </a:t>
+            </a:r>
+            <a:r>
+              <a:rPr lang="nl-BE" sz="1400" dirty="0" err="1"/>
+              <a:t>ubiquitous</a:t>
+            </a:r>
+            <a:r>
+              <a:rPr lang="nl-BE" sz="1400" dirty="0"/>
+              <a:t>, tissue-</a:t>
+            </a:r>
+            <a:r>
+              <a:rPr lang="nl-BE" sz="1400" dirty="0" err="1"/>
+              <a:t>specific</a:t>
+            </a:r>
+            <a:r>
+              <a:rPr lang="nl-BE" sz="1400" dirty="0"/>
+              <a:t>, </a:t>
+            </a:r>
+            <a:r>
+              <a:rPr lang="nl-BE" sz="1400" dirty="0" err="1"/>
+              <a:t>and</a:t>
+            </a:r>
+            <a:r>
+              <a:rPr lang="nl-BE" sz="1400" dirty="0"/>
+              <a:t> </a:t>
+            </a:r>
+            <a:r>
+              <a:rPr lang="nl-BE" sz="1400" dirty="0" err="1"/>
+              <a:t>disease-associated</a:t>
+            </a:r>
+            <a:r>
+              <a:rPr lang="nl-BE" sz="1400" dirty="0"/>
+              <a:t> gene-sets.</a:t>
+            </a:r>
+          </a:p>
+        </p:txBody>
+      </p:sp>
+      <p:pic>
+        <p:nvPicPr>
+          <p:cNvPr id="15" name="Picture 14">
+            <a:extLst>
+              <a:ext uri="{FF2B5EF4-FFF2-40B4-BE49-F238E27FC236}">
+                <a16:creationId xmlns:a16="http://schemas.microsoft.com/office/drawing/2014/main" id="{6A523DB4-4433-49EF-9322-C106F354FBB8}"/>
+              </a:ext>
+            </a:extLst>
+          </p:cNvPr>
+          <p:cNvPicPr>
+            <a:picLocks noChangeAspect="1"/>
+          </p:cNvPicPr>
+          <p:nvPr/>
+        </p:nvPicPr>
+        <p:blipFill>
+          <a:blip r:embed="rId3"/>
+          <a:stretch>
+            <a:fillRect/>
+          </a:stretch>
+        </p:blipFill>
+        <p:spPr>
+          <a:xfrm>
+            <a:off x="5950604" y="599490"/>
+            <a:ext cx="5487695" cy="3010240"/>
+          </a:xfrm>
+          <a:prstGeom prst="rect">
+            <a:avLst/>
+          </a:prstGeom>
+        </p:spPr>
+      </p:pic>
+      <p:sp>
+        <p:nvSpPr>
+          <p:cNvPr id="16" name="Rectangle 15">
+            <a:extLst>
+              <a:ext uri="{FF2B5EF4-FFF2-40B4-BE49-F238E27FC236}">
+                <a16:creationId xmlns:a16="http://schemas.microsoft.com/office/drawing/2014/main" id="{89F237DC-E413-41E3-BE41-A4D9282D3BC0}"/>
+              </a:ext>
+            </a:extLst>
+          </p:cNvPr>
+          <p:cNvSpPr/>
+          <p:nvPr/>
+        </p:nvSpPr>
+        <p:spPr>
+          <a:xfrm>
+            <a:off x="6575555" y="205012"/>
+            <a:ext cx="4862744" cy="523220"/>
+          </a:xfrm>
+          <a:prstGeom prst="rect">
+            <a:avLst/>
+          </a:prstGeom>
+        </p:spPr>
+        <p:txBody>
+          <a:bodyPr wrap="square">
+            <a:spAutoFit/>
+          </a:bodyPr>
+          <a:lstStyle/>
+          <a:p>
+            <a:r>
+              <a:rPr lang="en-US" sz="1400" b="0" i="0" dirty="0">
+                <a:solidFill>
+                  <a:srgbClr val="000000"/>
+                </a:solidFill>
+              </a:rPr>
+              <a:t>Coverage of protein interactions across the databases based on complete downloaded data.</a:t>
+            </a:r>
+            <a:endParaRPr lang="nl-BE" sz="1400" dirty="0"/>
+          </a:p>
+        </p:txBody>
+      </p:sp>
+      <p:cxnSp>
+        <p:nvCxnSpPr>
+          <p:cNvPr id="17" name="Straight Connector 16">
+            <a:extLst>
+              <a:ext uri="{FF2B5EF4-FFF2-40B4-BE49-F238E27FC236}">
+                <a16:creationId xmlns:a16="http://schemas.microsoft.com/office/drawing/2014/main" id="{CE77BC9E-114D-406C-9314-722E8FBAB53F}"/>
+              </a:ext>
+            </a:extLst>
+          </p:cNvPr>
+          <p:cNvCxnSpPr>
+            <a:cxnSpLocks/>
+          </p:cNvCxnSpPr>
+          <p:nvPr/>
+        </p:nvCxnSpPr>
+        <p:spPr>
+          <a:xfrm flipV="1">
+            <a:off x="7519312" y="3064823"/>
+            <a:ext cx="433686" cy="469078"/>
+          </a:xfrm>
+          <a:prstGeom prst="line">
+            <a:avLst/>
+          </a:prstGeom>
+          <a:ln w="38100">
+            <a:solidFill>
+              <a:srgbClr val="FF0000"/>
+            </a:solidFill>
+          </a:ln>
+        </p:spPr>
+        <p:style>
+          <a:lnRef idx="1">
+            <a:schemeClr val="accent1"/>
+          </a:lnRef>
+          <a:fillRef idx="0">
+            <a:schemeClr val="accent1"/>
+          </a:fillRef>
+          <a:effectRef idx="0">
+            <a:schemeClr val="accent1"/>
+          </a:effectRef>
+          <a:fontRef idx="minor">
+            <a:schemeClr val="tx1"/>
+          </a:fontRef>
+        </p:style>
+      </p:cxnSp>
+      <p:cxnSp>
+        <p:nvCxnSpPr>
+          <p:cNvPr id="21" name="Straight Connector 20">
+            <a:extLst>
+              <a:ext uri="{FF2B5EF4-FFF2-40B4-BE49-F238E27FC236}">
+                <a16:creationId xmlns:a16="http://schemas.microsoft.com/office/drawing/2014/main" id="{CD8D4623-A05E-4127-84F7-D4E3CE9566A1}"/>
+              </a:ext>
+            </a:extLst>
+          </p:cNvPr>
+          <p:cNvCxnSpPr>
+            <a:cxnSpLocks/>
+          </p:cNvCxnSpPr>
+          <p:nvPr/>
+        </p:nvCxnSpPr>
+        <p:spPr>
+          <a:xfrm flipV="1">
+            <a:off x="7861717" y="3064823"/>
+            <a:ext cx="433686" cy="469078"/>
+          </a:xfrm>
+          <a:prstGeom prst="line">
+            <a:avLst/>
+          </a:prstGeom>
+          <a:ln w="38100">
+            <a:solidFill>
+              <a:srgbClr val="FF0000"/>
+            </a:solidFill>
+          </a:ln>
+        </p:spPr>
+        <p:style>
+          <a:lnRef idx="1">
+            <a:schemeClr val="accent1"/>
+          </a:lnRef>
+          <a:fillRef idx="0">
+            <a:schemeClr val="accent1"/>
+          </a:fillRef>
+          <a:effectRef idx="0">
+            <a:schemeClr val="accent1"/>
+          </a:effectRef>
+          <a:fontRef idx="minor">
+            <a:schemeClr val="tx1"/>
+          </a:fontRef>
+        </p:style>
+      </p:cxnSp>
+      <p:cxnSp>
+        <p:nvCxnSpPr>
+          <p:cNvPr id="22" name="Straight Connector 21">
+            <a:extLst>
+              <a:ext uri="{FF2B5EF4-FFF2-40B4-BE49-F238E27FC236}">
+                <a16:creationId xmlns:a16="http://schemas.microsoft.com/office/drawing/2014/main" id="{3468E38C-3ECE-498C-8A42-719C34A817E4}"/>
+              </a:ext>
+            </a:extLst>
+          </p:cNvPr>
+          <p:cNvCxnSpPr>
+            <a:cxnSpLocks/>
+          </p:cNvCxnSpPr>
+          <p:nvPr/>
+        </p:nvCxnSpPr>
+        <p:spPr>
+          <a:xfrm flipV="1">
+            <a:off x="8803826" y="3064823"/>
+            <a:ext cx="433686" cy="469078"/>
+          </a:xfrm>
+          <a:prstGeom prst="line">
+            <a:avLst/>
+          </a:prstGeom>
+          <a:ln w="38100">
+            <a:solidFill>
+              <a:srgbClr val="FF0000"/>
+            </a:solidFill>
+          </a:ln>
+        </p:spPr>
+        <p:style>
+          <a:lnRef idx="1">
+            <a:schemeClr val="accent1"/>
+          </a:lnRef>
+          <a:fillRef idx="0">
+            <a:schemeClr val="accent1"/>
+          </a:fillRef>
+          <a:effectRef idx="0">
+            <a:schemeClr val="accent1"/>
+          </a:effectRef>
+          <a:fontRef idx="minor">
+            <a:schemeClr val="tx1"/>
+          </a:fontRef>
+        </p:style>
+      </p:cxnSp>
+      <p:cxnSp>
+        <p:nvCxnSpPr>
+          <p:cNvPr id="23" name="Straight Arrow Connector 22">
+            <a:extLst>
+              <a:ext uri="{FF2B5EF4-FFF2-40B4-BE49-F238E27FC236}">
+                <a16:creationId xmlns:a16="http://schemas.microsoft.com/office/drawing/2014/main" id="{31A3A2F8-3225-461E-9CB7-AEE3F4A1A241}"/>
+              </a:ext>
+            </a:extLst>
+          </p:cNvPr>
+          <p:cNvCxnSpPr/>
+          <p:nvPr/>
+        </p:nvCxnSpPr>
+        <p:spPr>
+          <a:xfrm>
+            <a:off x="836106" y="5888179"/>
+            <a:ext cx="575954" cy="0"/>
+          </a:xfrm>
+          <a:prstGeom prst="straightConnector1">
+            <a:avLst/>
+          </a:prstGeom>
+          <a:ln>
+            <a:solidFill>
+              <a:schemeClr val="tx1"/>
+            </a:solidFill>
+            <a:tailEnd type="triangle"/>
+          </a:ln>
+        </p:spPr>
+        <p:style>
+          <a:lnRef idx="1">
+            <a:schemeClr val="accent1"/>
+          </a:lnRef>
+          <a:fillRef idx="0">
+            <a:schemeClr val="accent1"/>
+          </a:fillRef>
+          <a:effectRef idx="0">
+            <a:schemeClr val="accent1"/>
+          </a:effectRef>
+          <a:fontRef idx="minor">
+            <a:schemeClr val="tx1"/>
+          </a:fontRef>
+        </p:style>
+      </p:cxnSp>
+      <p:sp>
+        <p:nvSpPr>
+          <p:cNvPr id="24" name="TextBox 23">
+            <a:extLst>
+              <a:ext uri="{FF2B5EF4-FFF2-40B4-BE49-F238E27FC236}">
+                <a16:creationId xmlns:a16="http://schemas.microsoft.com/office/drawing/2014/main" id="{BA1C8646-B888-4A91-8827-FB4B78BCF3D6}"/>
+              </a:ext>
+            </a:extLst>
+          </p:cNvPr>
+          <p:cNvSpPr txBox="1"/>
+          <p:nvPr/>
+        </p:nvSpPr>
+        <p:spPr>
+          <a:xfrm>
+            <a:off x="1548627" y="5222242"/>
+            <a:ext cx="3910814" cy="1200329"/>
+          </a:xfrm>
+          <a:prstGeom prst="rect">
+            <a:avLst/>
+          </a:prstGeom>
+          <a:noFill/>
+        </p:spPr>
+        <p:txBody>
+          <a:bodyPr wrap="none" rtlCol="0">
+            <a:spAutoFit/>
+          </a:bodyPr>
+          <a:lstStyle/>
+          <a:p>
+            <a:r>
+              <a:rPr lang="en-US" dirty="0"/>
+              <a:t>STRING</a:t>
+            </a:r>
+          </a:p>
+          <a:p>
+            <a:r>
+              <a:rPr lang="en-US" dirty="0"/>
+              <a:t>APID (</a:t>
+            </a:r>
+            <a:r>
+              <a:rPr lang="en-US" dirty="0" err="1"/>
+              <a:t>BioGRID</a:t>
+            </a:r>
+            <a:r>
+              <a:rPr lang="en-US" dirty="0"/>
+              <a:t>, </a:t>
+            </a:r>
+            <a:r>
+              <a:rPr lang="en-US" dirty="0" err="1"/>
+              <a:t>InAct</a:t>
+            </a:r>
+            <a:r>
+              <a:rPr lang="en-US" dirty="0"/>
+              <a:t>, MINT, HPRD, …)</a:t>
+            </a:r>
+          </a:p>
+          <a:p>
+            <a:r>
+              <a:rPr lang="en-US" dirty="0"/>
+              <a:t>HIPPIE (</a:t>
+            </a:r>
+            <a:r>
+              <a:rPr lang="en-US" dirty="0" err="1"/>
+              <a:t>BioGRID</a:t>
+            </a:r>
+            <a:r>
+              <a:rPr lang="en-US" dirty="0"/>
+              <a:t>, </a:t>
+            </a:r>
+            <a:r>
+              <a:rPr lang="en-US" dirty="0" err="1"/>
+              <a:t>InAct</a:t>
+            </a:r>
+            <a:r>
+              <a:rPr lang="en-US" dirty="0"/>
+              <a:t>, MINT, HPRD, … )</a:t>
+            </a:r>
+          </a:p>
+          <a:p>
+            <a:r>
+              <a:rPr lang="en-US" dirty="0"/>
+              <a:t>IID (</a:t>
+            </a:r>
+            <a:r>
+              <a:rPr lang="en-US" dirty="0" err="1"/>
+              <a:t>BioGRID</a:t>
+            </a:r>
+            <a:r>
+              <a:rPr lang="en-US" dirty="0"/>
+              <a:t>, </a:t>
+            </a:r>
+            <a:r>
+              <a:rPr lang="en-US" dirty="0" err="1"/>
+              <a:t>InAct</a:t>
+            </a:r>
+            <a:r>
+              <a:rPr lang="en-US" dirty="0"/>
+              <a:t>, MINT, HPRD, … )</a:t>
+            </a:r>
+          </a:p>
+        </p:txBody>
+      </p:sp>
+      <p:pic>
+        <p:nvPicPr>
+          <p:cNvPr id="25" name="Picture 24">
+            <a:extLst>
+              <a:ext uri="{FF2B5EF4-FFF2-40B4-BE49-F238E27FC236}">
+                <a16:creationId xmlns:a16="http://schemas.microsoft.com/office/drawing/2014/main" id="{AE67DDCB-41CB-4CE9-80D2-2EEA765DDB33}"/>
+              </a:ext>
+            </a:extLst>
+          </p:cNvPr>
+          <p:cNvPicPr>
+            <a:picLocks noChangeAspect="1"/>
+          </p:cNvPicPr>
+          <p:nvPr/>
+        </p:nvPicPr>
+        <p:blipFill>
+          <a:blip r:embed="rId4"/>
+          <a:stretch>
+            <a:fillRect/>
+          </a:stretch>
+        </p:blipFill>
+        <p:spPr>
+          <a:xfrm>
+            <a:off x="7669802" y="4203872"/>
+            <a:ext cx="2701733" cy="2562320"/>
+          </a:xfrm>
+          <a:prstGeom prst="rect">
+            <a:avLst/>
+          </a:prstGeom>
+        </p:spPr>
+      </p:pic>
+      <p:sp>
+        <p:nvSpPr>
+          <p:cNvPr id="27" name="Rectangle 26">
+            <a:extLst>
+              <a:ext uri="{FF2B5EF4-FFF2-40B4-BE49-F238E27FC236}">
+                <a16:creationId xmlns:a16="http://schemas.microsoft.com/office/drawing/2014/main" id="{D234F007-1571-48F8-AB99-08EF78473498}"/>
+              </a:ext>
+            </a:extLst>
+          </p:cNvPr>
+          <p:cNvSpPr/>
+          <p:nvPr/>
+        </p:nvSpPr>
+        <p:spPr>
+          <a:xfrm>
+            <a:off x="6575555" y="3796537"/>
+            <a:ext cx="5474770" cy="523220"/>
+          </a:xfrm>
+          <a:prstGeom prst="rect">
+            <a:avLst/>
+          </a:prstGeom>
+        </p:spPr>
+        <p:txBody>
+          <a:bodyPr wrap="square">
+            <a:spAutoFit/>
+          </a:bodyPr>
+          <a:lstStyle/>
+          <a:p>
+            <a:r>
+              <a:rPr lang="en-US" sz="1400" dirty="0"/>
+              <a:t> </a:t>
+            </a:r>
+            <a:r>
+              <a:rPr lang="en-US" sz="1400" b="0" i="0" dirty="0">
+                <a:solidFill>
+                  <a:srgbClr val="000000"/>
+                </a:solidFill>
+              </a:rPr>
+              <a:t>Coverage of exclusive protein interactions among the primary databases, based on the analysis of complete downloaded data. </a:t>
+            </a:r>
+            <a:endParaRPr lang="nl-BE" sz="1400" dirty="0"/>
+          </a:p>
+        </p:txBody>
+      </p:sp>
+    </p:spTree>
+    <p:extLst>
+      <p:ext uri="{BB962C8B-B14F-4D97-AF65-F5344CB8AC3E}">
+        <p14:creationId xmlns:p14="http://schemas.microsoft.com/office/powerpoint/2010/main" val="1728162899"/>
+      </p:ext>
+    </p:extLst>
+  </p:cSld>
+  <p:clrMapOvr>
+    <a:masterClrMapping/>
+  </p:clrMapOvr>
+</p:sld>
+</file>
+
+<file path=ppt/slides/slide6.xml><?xml version="1.0" encoding="utf-8"?>
+<p:sld xmlns:a="http://schemas.openxmlformats.org/drawingml/2006/main" xmlns:r="http://schemas.openxmlformats.org/officeDocument/2006/relationships" xmlns:p="http://schemas.openxmlformats.org/presentationml/2006/main">
+  <p:cSld>
+    <p:spTree>
+      <p:nvGrpSpPr>
+        <p:cNvPr id="1" name=""/>
+        <p:cNvGrpSpPr/>
+        <p:nvPr/>
+      </p:nvGrpSpPr>
+      <p:grpSpPr>
+        <a:xfrm>
+          <a:off x="0" y="0"/>
+          <a:ext cx="0" cy="0"/>
+          <a:chOff x="0" y="0"/>
+          <a:chExt cx="0" cy="0"/>
+        </a:xfrm>
+      </p:grpSpPr>
+      <p:pic>
+        <p:nvPicPr>
+          <p:cNvPr id="2" name="Picture 1">
+            <a:extLst>
+              <a:ext uri="{FF2B5EF4-FFF2-40B4-BE49-F238E27FC236}">
+                <a16:creationId xmlns:a16="http://schemas.microsoft.com/office/drawing/2014/main" id="{4532BC1B-9906-4BBA-AFCC-EA6CC319222C}"/>
+              </a:ext>
+            </a:extLst>
+          </p:cNvPr>
+          <p:cNvPicPr>
+            <a:picLocks noChangeAspect="1"/>
+          </p:cNvPicPr>
+          <p:nvPr/>
+        </p:nvPicPr>
+        <p:blipFill rotWithShape="1">
+          <a:blip r:embed="rId2"/>
+          <a:srcRect r="32748"/>
+          <a:stretch/>
+        </p:blipFill>
+        <p:spPr>
+          <a:xfrm>
+            <a:off x="657642" y="291559"/>
+            <a:ext cx="1646171" cy="486344"/>
+          </a:xfrm>
+          <a:prstGeom prst="rect">
+            <a:avLst/>
+          </a:prstGeom>
+        </p:spPr>
+      </p:pic>
+      <p:pic>
+        <p:nvPicPr>
+          <p:cNvPr id="3" name="Picture 2">
+            <a:extLst>
+              <a:ext uri="{FF2B5EF4-FFF2-40B4-BE49-F238E27FC236}">
+                <a16:creationId xmlns:a16="http://schemas.microsoft.com/office/drawing/2014/main" id="{6B686941-ADD7-4FFF-B13C-9ABE46A27543}"/>
+              </a:ext>
+            </a:extLst>
+          </p:cNvPr>
+          <p:cNvPicPr>
+            <a:picLocks noChangeAspect="1"/>
+          </p:cNvPicPr>
+          <p:nvPr/>
+        </p:nvPicPr>
+        <p:blipFill>
+          <a:blip r:embed="rId3"/>
+          <a:stretch>
+            <a:fillRect/>
+          </a:stretch>
+        </p:blipFill>
+        <p:spPr>
+          <a:xfrm>
+            <a:off x="570015" y="1076864"/>
+            <a:ext cx="9019309" cy="2219198"/>
+          </a:xfrm>
+          <a:prstGeom prst="rect">
+            <a:avLst/>
+          </a:prstGeom>
+        </p:spPr>
+      </p:pic>
+      <p:sp>
+        <p:nvSpPr>
+          <p:cNvPr id="5" name="Rectangle 4">
+            <a:extLst>
+              <a:ext uri="{FF2B5EF4-FFF2-40B4-BE49-F238E27FC236}">
+                <a16:creationId xmlns:a16="http://schemas.microsoft.com/office/drawing/2014/main" id="{003FF063-6BB1-4356-9B7B-CE9A83AB58D4}"/>
+              </a:ext>
+            </a:extLst>
+          </p:cNvPr>
+          <p:cNvSpPr/>
+          <p:nvPr/>
+        </p:nvSpPr>
+        <p:spPr>
+          <a:xfrm>
+            <a:off x="2359772" y="1648691"/>
+            <a:ext cx="1260222" cy="201880"/>
+          </a:xfrm>
+          <a:prstGeom prst="rect">
+            <a:avLst/>
+          </a:prstGeom>
+          <a:noFill/>
+          <a:ln>
+            <a:solidFill>
+              <a:schemeClr val="tx1"/>
+            </a:solidFill>
+          </a:ln>
+        </p:spPr>
+        <p:style>
+          <a:lnRef idx="2">
+            <a:schemeClr val="accent1">
+              <a:shade val="50000"/>
+            </a:schemeClr>
+          </a:lnRef>
+          <a:fillRef idx="1">
+            <a:schemeClr val="accent1"/>
+          </a:fillRef>
+          <a:effectRef idx="0">
+            <a:schemeClr val="accent1"/>
+          </a:effectRef>
+          <a:fontRef idx="minor">
+            <a:schemeClr val="lt1"/>
+          </a:fontRef>
+        </p:style>
+        <p:txBody>
+          <a:bodyPr rtlCol="0" anchor="ctr"/>
+          <a:lstStyle/>
+          <a:p>
+            <a:pPr algn="ctr"/>
+            <a:endParaRPr lang="nl-BE"/>
+          </a:p>
+        </p:txBody>
+      </p:sp>
+      <p:sp>
+        <p:nvSpPr>
+          <p:cNvPr id="6" name="Rectangle 5">
+            <a:extLst>
+              <a:ext uri="{FF2B5EF4-FFF2-40B4-BE49-F238E27FC236}">
+                <a16:creationId xmlns:a16="http://schemas.microsoft.com/office/drawing/2014/main" id="{1B82314C-64A4-4001-9F75-F6F4D28C911B}"/>
+              </a:ext>
+            </a:extLst>
+          </p:cNvPr>
+          <p:cNvSpPr/>
+          <p:nvPr/>
+        </p:nvSpPr>
+        <p:spPr>
+          <a:xfrm>
+            <a:off x="657642" y="2645229"/>
+            <a:ext cx="1260222" cy="201880"/>
+          </a:xfrm>
+          <a:prstGeom prst="rect">
+            <a:avLst/>
+          </a:prstGeom>
+          <a:noFill/>
+          <a:ln>
+            <a:solidFill>
+              <a:schemeClr val="tx1"/>
+            </a:solidFill>
+          </a:ln>
+        </p:spPr>
+        <p:style>
+          <a:lnRef idx="2">
+            <a:schemeClr val="accent1">
+              <a:shade val="50000"/>
+            </a:schemeClr>
+          </a:lnRef>
+          <a:fillRef idx="1">
+            <a:schemeClr val="accent1"/>
+          </a:fillRef>
+          <a:effectRef idx="0">
+            <a:schemeClr val="accent1"/>
+          </a:effectRef>
+          <a:fontRef idx="minor">
+            <a:schemeClr val="lt1"/>
+          </a:fontRef>
+        </p:style>
+        <p:txBody>
+          <a:bodyPr rtlCol="0" anchor="ctr"/>
+          <a:lstStyle/>
+          <a:p>
+            <a:pPr algn="ctr"/>
+            <a:endParaRPr lang="nl-BE"/>
+          </a:p>
+        </p:txBody>
+      </p:sp>
+      <p:sp>
+        <p:nvSpPr>
+          <p:cNvPr id="7" name="Rectangle 6">
+            <a:extLst>
+              <a:ext uri="{FF2B5EF4-FFF2-40B4-BE49-F238E27FC236}">
+                <a16:creationId xmlns:a16="http://schemas.microsoft.com/office/drawing/2014/main" id="{29D2BF67-6399-492F-B2B1-F48EEE6EAC6E}"/>
+              </a:ext>
+            </a:extLst>
+          </p:cNvPr>
+          <p:cNvSpPr/>
+          <p:nvPr/>
+        </p:nvSpPr>
+        <p:spPr>
+          <a:xfrm>
+            <a:off x="3998567" y="2245427"/>
+            <a:ext cx="1260222" cy="201880"/>
+          </a:xfrm>
+          <a:prstGeom prst="rect">
+            <a:avLst/>
+          </a:prstGeom>
+          <a:noFill/>
+          <a:ln>
+            <a:solidFill>
+              <a:schemeClr val="tx1"/>
+            </a:solidFill>
+          </a:ln>
+        </p:spPr>
+        <p:style>
+          <a:lnRef idx="2">
+            <a:schemeClr val="accent1">
+              <a:shade val="50000"/>
+            </a:schemeClr>
+          </a:lnRef>
+          <a:fillRef idx="1">
+            <a:schemeClr val="accent1"/>
+          </a:fillRef>
+          <a:effectRef idx="0">
+            <a:schemeClr val="accent1"/>
+          </a:effectRef>
+          <a:fontRef idx="minor">
+            <a:schemeClr val="lt1"/>
+          </a:fontRef>
+        </p:style>
+        <p:txBody>
+          <a:bodyPr rtlCol="0" anchor="ctr"/>
+          <a:lstStyle/>
+          <a:p>
+            <a:pPr algn="ctr"/>
+            <a:endParaRPr lang="nl-BE"/>
+          </a:p>
+        </p:txBody>
+      </p:sp>
+      <p:pic>
+        <p:nvPicPr>
+          <p:cNvPr id="14" name="Picture 13">
+            <a:extLst>
+              <a:ext uri="{FF2B5EF4-FFF2-40B4-BE49-F238E27FC236}">
+                <a16:creationId xmlns:a16="http://schemas.microsoft.com/office/drawing/2014/main" id="{D72E7841-059B-4DBA-B3B2-1B4236C37BDC}"/>
+              </a:ext>
+            </a:extLst>
+          </p:cNvPr>
+          <p:cNvPicPr>
+            <a:picLocks noChangeAspect="1"/>
+          </p:cNvPicPr>
+          <p:nvPr/>
+        </p:nvPicPr>
+        <p:blipFill>
+          <a:blip r:embed="rId4"/>
+          <a:stretch>
+            <a:fillRect/>
+          </a:stretch>
+        </p:blipFill>
+        <p:spPr>
+          <a:xfrm>
+            <a:off x="3499323" y="7032"/>
+            <a:ext cx="2447755" cy="971101"/>
+          </a:xfrm>
+          <a:prstGeom prst="rect">
+            <a:avLst/>
+          </a:prstGeom>
+        </p:spPr>
+      </p:pic>
+      <p:sp>
+        <p:nvSpPr>
+          <p:cNvPr id="16" name="TextBox 15">
+            <a:extLst>
+              <a:ext uri="{FF2B5EF4-FFF2-40B4-BE49-F238E27FC236}">
+                <a16:creationId xmlns:a16="http://schemas.microsoft.com/office/drawing/2014/main" id="{2D331B50-1D07-4A96-912E-D4D3280FFFC7}"/>
+              </a:ext>
+            </a:extLst>
+          </p:cNvPr>
+          <p:cNvSpPr txBox="1"/>
+          <p:nvPr/>
+        </p:nvSpPr>
+        <p:spPr>
+          <a:xfrm>
+            <a:off x="729739" y="3561939"/>
+            <a:ext cx="3910814" cy="1200329"/>
+          </a:xfrm>
+          <a:prstGeom prst="rect">
+            <a:avLst/>
+          </a:prstGeom>
+          <a:noFill/>
+        </p:spPr>
+        <p:txBody>
+          <a:bodyPr wrap="none" rtlCol="0">
+            <a:spAutoFit/>
+          </a:bodyPr>
+          <a:lstStyle/>
+          <a:p>
+            <a:r>
+              <a:rPr lang="en-US" dirty="0"/>
+              <a:t>STRING</a:t>
+            </a:r>
+          </a:p>
+          <a:p>
+            <a:r>
+              <a:rPr lang="en-US" dirty="0"/>
+              <a:t>APID (</a:t>
+            </a:r>
+            <a:r>
+              <a:rPr lang="en-US" dirty="0" err="1"/>
+              <a:t>BioGRID</a:t>
+            </a:r>
+            <a:r>
+              <a:rPr lang="en-US" dirty="0"/>
+              <a:t>, </a:t>
+            </a:r>
+            <a:r>
+              <a:rPr lang="en-US" dirty="0" err="1"/>
+              <a:t>InAct</a:t>
+            </a:r>
+            <a:r>
+              <a:rPr lang="en-US" dirty="0"/>
+              <a:t>, MINT, HPRD, …)</a:t>
+            </a:r>
+          </a:p>
+          <a:p>
+            <a:r>
+              <a:rPr lang="en-US" dirty="0"/>
+              <a:t>HIPPIE (</a:t>
+            </a:r>
+            <a:r>
+              <a:rPr lang="en-US" dirty="0" err="1"/>
+              <a:t>BioGRID</a:t>
+            </a:r>
+            <a:r>
+              <a:rPr lang="en-US" dirty="0"/>
+              <a:t>, </a:t>
+            </a:r>
+            <a:r>
+              <a:rPr lang="en-US" dirty="0" err="1"/>
+              <a:t>InAct</a:t>
+            </a:r>
+            <a:r>
+              <a:rPr lang="en-US" dirty="0"/>
+              <a:t>, MINT, HPRD, … )</a:t>
+            </a:r>
+          </a:p>
+          <a:p>
+            <a:r>
+              <a:rPr lang="en-US" dirty="0"/>
+              <a:t>IID (</a:t>
+            </a:r>
+            <a:r>
+              <a:rPr lang="en-US" dirty="0" err="1"/>
+              <a:t>BioGRID</a:t>
+            </a:r>
+            <a:r>
+              <a:rPr lang="en-US" dirty="0"/>
+              <a:t>, </a:t>
+            </a:r>
+            <a:r>
+              <a:rPr lang="en-US" dirty="0" err="1"/>
+              <a:t>InAct</a:t>
+            </a:r>
+            <a:r>
+              <a:rPr lang="en-US" dirty="0"/>
+              <a:t>, MINT, HPRD, … )</a:t>
+            </a:r>
+          </a:p>
+        </p:txBody>
+      </p:sp>
+      <p:cxnSp>
+        <p:nvCxnSpPr>
+          <p:cNvPr id="17" name="Straight Arrow Connector 16">
+            <a:extLst>
+              <a:ext uri="{FF2B5EF4-FFF2-40B4-BE49-F238E27FC236}">
+                <a16:creationId xmlns:a16="http://schemas.microsoft.com/office/drawing/2014/main" id="{56B96F71-4972-4D0F-B6C7-ED7E72500EA1}"/>
+              </a:ext>
+            </a:extLst>
+          </p:cNvPr>
+          <p:cNvCxnSpPr>
+            <a:cxnSpLocks/>
+          </p:cNvCxnSpPr>
+          <p:nvPr/>
+        </p:nvCxnSpPr>
+        <p:spPr>
+          <a:xfrm>
+            <a:off x="5057783" y="4192250"/>
+            <a:ext cx="1105510" cy="0"/>
+          </a:xfrm>
+          <a:prstGeom prst="straightConnector1">
+            <a:avLst/>
+          </a:prstGeom>
+          <a:ln>
+            <a:solidFill>
+              <a:schemeClr val="tx1"/>
+            </a:solidFill>
+            <a:tailEnd type="triangle"/>
+          </a:ln>
+        </p:spPr>
+        <p:style>
+          <a:lnRef idx="1">
+            <a:schemeClr val="accent1"/>
+          </a:lnRef>
+          <a:fillRef idx="0">
+            <a:schemeClr val="accent1"/>
+          </a:fillRef>
+          <a:effectRef idx="0">
+            <a:schemeClr val="accent1"/>
+          </a:effectRef>
+          <a:fontRef idx="minor">
+            <a:schemeClr val="tx1"/>
+          </a:fontRef>
+        </p:style>
+      </p:cxnSp>
+      <p:sp>
+        <p:nvSpPr>
+          <p:cNvPr id="19" name="TextBox 18">
+            <a:extLst>
+              <a:ext uri="{FF2B5EF4-FFF2-40B4-BE49-F238E27FC236}">
+                <a16:creationId xmlns:a16="http://schemas.microsoft.com/office/drawing/2014/main" id="{FDF0FF24-E917-4F80-BBBD-02CA95B799E7}"/>
+              </a:ext>
+            </a:extLst>
+          </p:cNvPr>
+          <p:cNvSpPr txBox="1"/>
+          <p:nvPr/>
+        </p:nvSpPr>
+        <p:spPr>
+          <a:xfrm>
+            <a:off x="6580523" y="3592085"/>
+            <a:ext cx="4685770" cy="1200329"/>
+          </a:xfrm>
+          <a:prstGeom prst="rect">
+            <a:avLst/>
+          </a:prstGeom>
+          <a:noFill/>
+        </p:spPr>
+        <p:txBody>
+          <a:bodyPr wrap="none" rtlCol="0">
+            <a:spAutoFit/>
+          </a:bodyPr>
+          <a:lstStyle/>
+          <a:p>
+            <a:r>
+              <a:rPr lang="en-US" dirty="0"/>
+              <a:t>STRING (scoring system)</a:t>
+            </a:r>
+          </a:p>
+          <a:p>
+            <a:r>
+              <a:rPr lang="en-US" b="1" dirty="0"/>
+              <a:t>PSICQUIC</a:t>
+            </a:r>
+            <a:r>
+              <a:rPr lang="en-US" dirty="0"/>
+              <a:t> (no scoring system, nr of publications)</a:t>
+            </a:r>
+          </a:p>
+          <a:p>
+            <a:r>
+              <a:rPr lang="en-US" dirty="0"/>
+              <a:t>HIPPIE (scoring system)</a:t>
+            </a:r>
+          </a:p>
+          <a:p>
+            <a:r>
+              <a:rPr lang="en-US" dirty="0"/>
+              <a:t>+ APID (as backup to HIPPIE, scoring system)</a:t>
+            </a:r>
+          </a:p>
+        </p:txBody>
+      </p:sp>
+      <p:sp>
+        <p:nvSpPr>
+          <p:cNvPr id="29" name="TextBox 28">
+            <a:extLst>
+              <a:ext uri="{FF2B5EF4-FFF2-40B4-BE49-F238E27FC236}">
+                <a16:creationId xmlns:a16="http://schemas.microsoft.com/office/drawing/2014/main" id="{C4FFD574-EC80-4C08-8D79-750FBA6DD1A3}"/>
+              </a:ext>
+            </a:extLst>
+          </p:cNvPr>
+          <p:cNvSpPr txBox="1"/>
+          <p:nvPr/>
+        </p:nvSpPr>
+        <p:spPr>
+          <a:xfrm>
+            <a:off x="7493171" y="4810066"/>
+            <a:ext cx="878767" cy="369332"/>
+          </a:xfrm>
+          <a:prstGeom prst="rect">
+            <a:avLst/>
+          </a:prstGeom>
+          <a:noFill/>
+        </p:spPr>
+        <p:txBody>
+          <a:bodyPr wrap="none" rtlCol="0">
+            <a:spAutoFit/>
+          </a:bodyPr>
+          <a:lstStyle/>
+          <a:p>
+            <a:r>
+              <a:rPr lang="en-US" dirty="0">
+                <a:solidFill>
+                  <a:srgbClr val="9DB5E0"/>
+                </a:solidFill>
+              </a:rPr>
+              <a:t>STRING</a:t>
+            </a:r>
+            <a:endParaRPr lang="nl-BE" dirty="0">
+              <a:solidFill>
+                <a:srgbClr val="9DB5E0"/>
+              </a:solidFill>
+            </a:endParaRPr>
+          </a:p>
+        </p:txBody>
+      </p:sp>
+      <p:sp>
+        <p:nvSpPr>
+          <p:cNvPr id="30" name="TextBox 29">
+            <a:extLst>
+              <a:ext uri="{FF2B5EF4-FFF2-40B4-BE49-F238E27FC236}">
+                <a16:creationId xmlns:a16="http://schemas.microsoft.com/office/drawing/2014/main" id="{840E4A64-8115-46AF-9941-542E2640C54D}"/>
+              </a:ext>
+            </a:extLst>
+          </p:cNvPr>
+          <p:cNvSpPr txBox="1"/>
+          <p:nvPr/>
+        </p:nvSpPr>
+        <p:spPr>
+          <a:xfrm>
+            <a:off x="8483704" y="4754936"/>
+            <a:ext cx="1072281" cy="369332"/>
+          </a:xfrm>
+          <a:prstGeom prst="rect">
+            <a:avLst/>
+          </a:prstGeom>
+          <a:noFill/>
+        </p:spPr>
+        <p:txBody>
+          <a:bodyPr wrap="none" rtlCol="0">
+            <a:spAutoFit/>
+          </a:bodyPr>
+          <a:lstStyle/>
+          <a:p>
+            <a:r>
+              <a:rPr lang="en-US" dirty="0">
+                <a:solidFill>
+                  <a:srgbClr val="C6E6A4"/>
+                </a:solidFill>
+              </a:rPr>
+              <a:t>PSICQUIC</a:t>
+            </a:r>
+            <a:endParaRPr lang="nl-BE" dirty="0">
+              <a:solidFill>
+                <a:srgbClr val="C6E6A4"/>
+              </a:solidFill>
+            </a:endParaRPr>
+          </a:p>
+        </p:txBody>
+      </p:sp>
+      <p:sp>
+        <p:nvSpPr>
+          <p:cNvPr id="31" name="TextBox 30">
+            <a:extLst>
+              <a:ext uri="{FF2B5EF4-FFF2-40B4-BE49-F238E27FC236}">
+                <a16:creationId xmlns:a16="http://schemas.microsoft.com/office/drawing/2014/main" id="{81F28789-C79E-4689-B119-261300610E2E}"/>
+              </a:ext>
+            </a:extLst>
+          </p:cNvPr>
+          <p:cNvSpPr txBox="1"/>
+          <p:nvPr/>
+        </p:nvSpPr>
+        <p:spPr>
+          <a:xfrm>
+            <a:off x="9475397" y="5069101"/>
+            <a:ext cx="793807" cy="369332"/>
+          </a:xfrm>
+          <a:prstGeom prst="rect">
+            <a:avLst/>
+          </a:prstGeom>
+          <a:noFill/>
+        </p:spPr>
+        <p:txBody>
+          <a:bodyPr wrap="none" rtlCol="0">
+            <a:spAutoFit/>
+          </a:bodyPr>
+          <a:lstStyle/>
+          <a:p>
+            <a:r>
+              <a:rPr lang="en-US" dirty="0">
+                <a:solidFill>
+                  <a:srgbClr val="B493CD"/>
+                </a:solidFill>
+              </a:rPr>
+              <a:t>HIPPIE</a:t>
+            </a:r>
+            <a:endParaRPr lang="nl-BE" dirty="0">
+              <a:solidFill>
+                <a:srgbClr val="B493CD"/>
+              </a:solidFill>
+            </a:endParaRPr>
+          </a:p>
+        </p:txBody>
+      </p:sp>
+      <p:sp>
+        <p:nvSpPr>
+          <p:cNvPr id="32" name="TextBox 31">
+            <a:extLst>
+              <a:ext uri="{FF2B5EF4-FFF2-40B4-BE49-F238E27FC236}">
+                <a16:creationId xmlns:a16="http://schemas.microsoft.com/office/drawing/2014/main" id="{255EAF37-91FD-4B2E-9C52-890D61449E80}"/>
+              </a:ext>
+            </a:extLst>
+          </p:cNvPr>
+          <p:cNvSpPr txBox="1"/>
+          <p:nvPr/>
+        </p:nvSpPr>
+        <p:spPr>
+          <a:xfrm>
+            <a:off x="6813327" y="5252217"/>
+            <a:ext cx="636713" cy="369332"/>
+          </a:xfrm>
+          <a:prstGeom prst="rect">
+            <a:avLst/>
+          </a:prstGeom>
+          <a:noFill/>
+        </p:spPr>
+        <p:txBody>
+          <a:bodyPr wrap="none" rtlCol="0">
+            <a:spAutoFit/>
+          </a:bodyPr>
+          <a:lstStyle/>
+          <a:p>
+            <a:r>
+              <a:rPr lang="en-US" dirty="0">
+                <a:solidFill>
+                  <a:srgbClr val="FF7A7A"/>
+                </a:solidFill>
+              </a:rPr>
+              <a:t>APID</a:t>
+            </a:r>
+            <a:endParaRPr lang="nl-BE" dirty="0">
+              <a:solidFill>
+                <a:srgbClr val="FF7A7A"/>
+              </a:solidFill>
+            </a:endParaRPr>
+          </a:p>
+        </p:txBody>
+      </p:sp>
+      <p:sp>
+        <p:nvSpPr>
+          <p:cNvPr id="33" name="Oval 32">
+            <a:extLst>
+              <a:ext uri="{FF2B5EF4-FFF2-40B4-BE49-F238E27FC236}">
+                <a16:creationId xmlns:a16="http://schemas.microsoft.com/office/drawing/2014/main" id="{C6D990F6-DA9D-42EF-A1F6-549D0F3653C6}"/>
+              </a:ext>
+            </a:extLst>
+          </p:cNvPr>
+          <p:cNvSpPr/>
+          <p:nvPr/>
+        </p:nvSpPr>
+        <p:spPr>
+          <a:xfrm rot="2374457">
+            <a:off x="7206543" y="5717086"/>
+            <a:ext cx="1769423" cy="861790"/>
+          </a:xfrm>
+          <a:prstGeom prst="ellipse">
+            <a:avLst/>
+          </a:prstGeom>
+          <a:solidFill>
+            <a:srgbClr val="FF9595">
+              <a:alpha val="30196"/>
+            </a:srgbClr>
+          </a:solidFill>
+        </p:spPr>
+        <p:style>
+          <a:lnRef idx="2">
+            <a:schemeClr val="accent1">
+              <a:shade val="50000"/>
+            </a:schemeClr>
+          </a:lnRef>
+          <a:fillRef idx="1">
+            <a:schemeClr val="accent1"/>
+          </a:fillRef>
+          <a:effectRef idx="0">
+            <a:schemeClr val="accent1"/>
+          </a:effectRef>
+          <a:fontRef idx="minor">
+            <a:schemeClr val="lt1"/>
+          </a:fontRef>
+        </p:style>
+        <p:txBody>
+          <a:bodyPr rtlCol="0" anchor="ctr"/>
+          <a:lstStyle/>
+          <a:p>
+            <a:pPr algn="ctr"/>
+            <a:endParaRPr lang="nl-BE"/>
+          </a:p>
+        </p:txBody>
+      </p:sp>
+      <p:sp>
+        <p:nvSpPr>
+          <p:cNvPr id="34" name="Oval 33">
+            <a:extLst>
+              <a:ext uri="{FF2B5EF4-FFF2-40B4-BE49-F238E27FC236}">
+                <a16:creationId xmlns:a16="http://schemas.microsoft.com/office/drawing/2014/main" id="{BE492075-ED75-4B77-8E1B-F50EFE511F1F}"/>
+              </a:ext>
+            </a:extLst>
+          </p:cNvPr>
+          <p:cNvSpPr/>
+          <p:nvPr/>
+        </p:nvSpPr>
+        <p:spPr>
+          <a:xfrm rot="2374457">
+            <a:off x="7572890" y="5411165"/>
+            <a:ext cx="1769423" cy="861790"/>
+          </a:xfrm>
+          <a:prstGeom prst="ellipse">
+            <a:avLst/>
+          </a:prstGeom>
+          <a:solidFill>
+            <a:srgbClr val="4472C4">
+              <a:alpha val="25098"/>
+            </a:srgbClr>
+          </a:solidFill>
+        </p:spPr>
+        <p:style>
+          <a:lnRef idx="2">
+            <a:schemeClr val="accent1">
+              <a:shade val="50000"/>
+            </a:schemeClr>
+          </a:lnRef>
+          <a:fillRef idx="1">
+            <a:schemeClr val="accent1"/>
+          </a:fillRef>
+          <a:effectRef idx="0">
+            <a:schemeClr val="accent1"/>
+          </a:effectRef>
+          <a:fontRef idx="minor">
+            <a:schemeClr val="lt1"/>
+          </a:fontRef>
+        </p:style>
+        <p:txBody>
+          <a:bodyPr rtlCol="0" anchor="ctr"/>
+          <a:lstStyle/>
+          <a:p>
+            <a:pPr algn="ctr"/>
+            <a:endParaRPr lang="nl-BE"/>
+          </a:p>
+        </p:txBody>
+      </p:sp>
+      <p:sp>
+        <p:nvSpPr>
+          <p:cNvPr id="35" name="Oval 34">
+            <a:extLst>
+              <a:ext uri="{FF2B5EF4-FFF2-40B4-BE49-F238E27FC236}">
+                <a16:creationId xmlns:a16="http://schemas.microsoft.com/office/drawing/2014/main" id="{96F898FA-B684-483D-8ABD-8D234039236D}"/>
+              </a:ext>
+            </a:extLst>
+          </p:cNvPr>
+          <p:cNvSpPr/>
+          <p:nvPr/>
+        </p:nvSpPr>
+        <p:spPr>
+          <a:xfrm rot="7763483">
+            <a:off x="7605143" y="5441640"/>
+            <a:ext cx="1769423" cy="861790"/>
+          </a:xfrm>
+          <a:prstGeom prst="ellipse">
+            <a:avLst/>
+          </a:prstGeom>
+          <a:solidFill>
+            <a:srgbClr val="C6E6A4">
+              <a:alpha val="30196"/>
+            </a:srgbClr>
+          </a:solidFill>
+        </p:spPr>
+        <p:style>
+          <a:lnRef idx="2">
+            <a:schemeClr val="accent1">
+              <a:shade val="50000"/>
+            </a:schemeClr>
+          </a:lnRef>
+          <a:fillRef idx="1">
+            <a:schemeClr val="accent1"/>
+          </a:fillRef>
+          <a:effectRef idx="0">
+            <a:schemeClr val="accent1"/>
+          </a:effectRef>
+          <a:fontRef idx="minor">
+            <a:schemeClr val="lt1"/>
+          </a:fontRef>
+        </p:style>
+        <p:txBody>
+          <a:bodyPr rtlCol="0" anchor="ctr"/>
+          <a:lstStyle/>
+          <a:p>
+            <a:pPr algn="ctr"/>
+            <a:endParaRPr lang="nl-BE"/>
+          </a:p>
+        </p:txBody>
+      </p:sp>
+      <p:sp>
+        <p:nvSpPr>
+          <p:cNvPr id="36" name="Oval 35">
+            <a:extLst>
+              <a:ext uri="{FF2B5EF4-FFF2-40B4-BE49-F238E27FC236}">
+                <a16:creationId xmlns:a16="http://schemas.microsoft.com/office/drawing/2014/main" id="{6D17DC98-B95D-4D74-ADCB-81CB929ADA75}"/>
+              </a:ext>
+            </a:extLst>
+          </p:cNvPr>
+          <p:cNvSpPr/>
+          <p:nvPr/>
+        </p:nvSpPr>
+        <p:spPr>
+          <a:xfrm rot="7763483">
+            <a:off x="8016592" y="5632867"/>
+            <a:ext cx="1769423" cy="861790"/>
+          </a:xfrm>
+          <a:prstGeom prst="ellipse">
+            <a:avLst/>
+          </a:prstGeom>
+          <a:solidFill>
+            <a:srgbClr val="B493CD">
+              <a:alpha val="30196"/>
+            </a:srgbClr>
+          </a:solidFill>
+        </p:spPr>
+        <p:style>
+          <a:lnRef idx="2">
+            <a:schemeClr val="accent1">
+              <a:shade val="50000"/>
+            </a:schemeClr>
+          </a:lnRef>
+          <a:fillRef idx="1">
+            <a:schemeClr val="accent1"/>
+          </a:fillRef>
+          <a:effectRef idx="0">
+            <a:schemeClr val="accent1"/>
+          </a:effectRef>
+          <a:fontRef idx="minor">
+            <a:schemeClr val="lt1"/>
+          </a:fontRef>
+        </p:style>
+        <p:txBody>
+          <a:bodyPr rtlCol="0" anchor="ctr"/>
+          <a:lstStyle/>
+          <a:p>
+            <a:pPr algn="ctr"/>
+            <a:endParaRPr lang="nl-BE"/>
+          </a:p>
+        </p:txBody>
+      </p:sp>
+    </p:spTree>
+    <p:extLst>
+      <p:ext uri="{BB962C8B-B14F-4D97-AF65-F5344CB8AC3E}">
+        <p14:creationId xmlns:p14="http://schemas.microsoft.com/office/powerpoint/2010/main" val="760633493"/>
       </p:ext>
     </p:extLst>
   </p:cSld>

--- a/ppi/ppi-project.pptx
+++ b/ppi/ppi-project.pptx
@@ -202,7 +202,7 @@
           <a:p>
             <a:fld id="{93867FB6-3614-4446-A537-B153597F3F7D}" type="datetimeFigureOut">
               <a:rPr lang="nl-NL" smtClean="0"/>
-              <a:t>10-10-2023</a:t>
+              <a:t>14-10-2023</a:t>
             </a:fld>
             <a:endParaRPr lang="nl-NL"/>
           </a:p>
@@ -616,7 +616,7 @@
           <a:p>
             <a:fld id="{68957F31-EF9F-422B-9EBC-20B94937EE59}" type="datetimeFigureOut">
               <a:rPr lang="nl-NL" smtClean="0"/>
-              <a:t>10-10-2023</a:t>
+              <a:t>14-10-2023</a:t>
             </a:fld>
             <a:endParaRPr lang="nl-NL"/>
           </a:p>
@@ -814,7 +814,7 @@
           <a:p>
             <a:fld id="{68957F31-EF9F-422B-9EBC-20B94937EE59}" type="datetimeFigureOut">
               <a:rPr lang="nl-NL" smtClean="0"/>
-              <a:t>10-10-2023</a:t>
+              <a:t>14-10-2023</a:t>
             </a:fld>
             <a:endParaRPr lang="nl-NL"/>
           </a:p>
@@ -1022,7 +1022,7 @@
           <a:p>
             <a:fld id="{68957F31-EF9F-422B-9EBC-20B94937EE59}" type="datetimeFigureOut">
               <a:rPr lang="nl-NL" smtClean="0"/>
-              <a:t>10-10-2023</a:t>
+              <a:t>14-10-2023</a:t>
             </a:fld>
             <a:endParaRPr lang="nl-NL"/>
           </a:p>
@@ -1220,7 +1220,7 @@
           <a:p>
             <a:fld id="{68957F31-EF9F-422B-9EBC-20B94937EE59}" type="datetimeFigureOut">
               <a:rPr lang="nl-NL" smtClean="0"/>
-              <a:t>10-10-2023</a:t>
+              <a:t>14-10-2023</a:t>
             </a:fld>
             <a:endParaRPr lang="nl-NL"/>
           </a:p>
@@ -1495,7 +1495,7 @@
           <a:p>
             <a:fld id="{68957F31-EF9F-422B-9EBC-20B94937EE59}" type="datetimeFigureOut">
               <a:rPr lang="nl-NL" smtClean="0"/>
-              <a:t>10-10-2023</a:t>
+              <a:t>14-10-2023</a:t>
             </a:fld>
             <a:endParaRPr lang="nl-NL"/>
           </a:p>
@@ -1760,7 +1760,7 @@
           <a:p>
             <a:fld id="{68957F31-EF9F-422B-9EBC-20B94937EE59}" type="datetimeFigureOut">
               <a:rPr lang="nl-NL" smtClean="0"/>
-              <a:t>10-10-2023</a:t>
+              <a:t>14-10-2023</a:t>
             </a:fld>
             <a:endParaRPr lang="nl-NL"/>
           </a:p>
@@ -2172,7 +2172,7 @@
           <a:p>
             <a:fld id="{68957F31-EF9F-422B-9EBC-20B94937EE59}" type="datetimeFigureOut">
               <a:rPr lang="nl-NL" smtClean="0"/>
-              <a:t>10-10-2023</a:t>
+              <a:t>14-10-2023</a:t>
             </a:fld>
             <a:endParaRPr lang="nl-NL"/>
           </a:p>
@@ -2313,7 +2313,7 @@
           <a:p>
             <a:fld id="{68957F31-EF9F-422B-9EBC-20B94937EE59}" type="datetimeFigureOut">
               <a:rPr lang="nl-NL" smtClean="0"/>
-              <a:t>10-10-2023</a:t>
+              <a:t>14-10-2023</a:t>
             </a:fld>
             <a:endParaRPr lang="nl-NL"/>
           </a:p>
@@ -2426,7 +2426,7 @@
           <a:p>
             <a:fld id="{68957F31-EF9F-422B-9EBC-20B94937EE59}" type="datetimeFigureOut">
               <a:rPr lang="nl-NL" smtClean="0"/>
-              <a:t>10-10-2023</a:t>
+              <a:t>14-10-2023</a:t>
             </a:fld>
             <a:endParaRPr lang="nl-NL"/>
           </a:p>
@@ -2737,7 +2737,7 @@
           <a:p>
             <a:fld id="{68957F31-EF9F-422B-9EBC-20B94937EE59}" type="datetimeFigureOut">
               <a:rPr lang="nl-NL" smtClean="0"/>
-              <a:t>10-10-2023</a:t>
+              <a:t>14-10-2023</a:t>
             </a:fld>
             <a:endParaRPr lang="nl-NL"/>
           </a:p>
@@ -3025,7 +3025,7 @@
           <a:p>
             <a:fld id="{68957F31-EF9F-422B-9EBC-20B94937EE59}" type="datetimeFigureOut">
               <a:rPr lang="nl-NL" smtClean="0"/>
-              <a:t>10-10-2023</a:t>
+              <a:t>14-10-2023</a:t>
             </a:fld>
             <a:endParaRPr lang="nl-NL"/>
           </a:p>
@@ -3266,7 +3266,7 @@
           <a:p>
             <a:fld id="{68957F31-EF9F-422B-9EBC-20B94937EE59}" type="datetimeFigureOut">
               <a:rPr lang="nl-NL" smtClean="0"/>
-              <a:t>10-10-2023</a:t>
+              <a:t>14-10-2023</a:t>
             </a:fld>
             <a:endParaRPr lang="nl-NL"/>
           </a:p>
@@ -3827,7 +3827,7 @@
                 <a:latin typeface="Arial" panose="020B0604020202020204" pitchFamily="34" charset="0"/>
                 <a:cs typeface="Arial" panose="020B0604020202020204" pitchFamily="34" charset="0"/>
               </a:rPr>
-              <a:t>OMNIPATH</a:t>
+              <a:t>STRING</a:t>
             </a:r>
           </a:p>
           <a:p>
@@ -3837,7 +3837,7 @@
                 <a:latin typeface="Arial" panose="020B0604020202020204" pitchFamily="34" charset="0"/>
                 <a:cs typeface="Arial" panose="020B0604020202020204" pitchFamily="34" charset="0"/>
               </a:rPr>
-              <a:t>PSICQUIC</a:t>
+              <a:t>IntAct</a:t>
             </a:r>
           </a:p>
           <a:p>
@@ -3847,7 +3847,7 @@
                 <a:latin typeface="Arial" panose="020B0604020202020204" pitchFamily="34" charset="0"/>
                 <a:cs typeface="Arial" panose="020B0604020202020204" pitchFamily="34" charset="0"/>
               </a:rPr>
-              <a:t>STRING</a:t>
+              <a:t>BioGrid</a:t>
             </a:r>
           </a:p>
           <a:p>
@@ -3978,8 +3978,8 @@
         </p:nvSpPr>
         <p:spPr>
           <a:xfrm>
-            <a:off x="1621234" y="2589555"/>
-            <a:ext cx="1247457" cy="307777"/>
+            <a:off x="1545545" y="2604942"/>
+            <a:ext cx="1576072" cy="276999"/>
           </a:xfrm>
           <a:prstGeom prst="rect">
             <a:avLst/>
@@ -3994,11 +3994,11 @@
           <a:p>
             <a:pPr algn="ctr"/>
             <a:r>
-              <a:rPr lang="en-US" sz="1400" b="1" dirty="0">
+              <a:rPr lang="en-US" sz="1200" b="1" dirty="0">
                 <a:latin typeface="Arial" panose="020B0604020202020204" pitchFamily="34" charset="0"/>
                 <a:cs typeface="Arial" panose="020B0604020202020204" pitchFamily="34" charset="0"/>
               </a:rPr>
-              <a:t>Db selection</a:t>
+              <a:t>Database selection</a:t>
             </a:r>
           </a:p>
         </p:txBody>
@@ -4123,8 +4123,8 @@
         </p:nvSpPr>
         <p:spPr>
           <a:xfrm>
-            <a:off x="5090180" y="2589556"/>
-            <a:ext cx="1149418" cy="307777"/>
+            <a:off x="5149484" y="2599301"/>
+            <a:ext cx="1005403" cy="276999"/>
           </a:xfrm>
           <a:prstGeom prst="rect">
             <a:avLst/>
@@ -4139,11 +4139,11 @@
           <a:p>
             <a:pPr algn="ctr"/>
             <a:r>
-              <a:rPr lang="en-US" sz="1400" b="1" dirty="0">
+              <a:rPr lang="en-US" sz="1200" b="1" dirty="0">
                 <a:latin typeface="Arial" panose="020B0604020202020204" pitchFamily="34" charset="0"/>
                 <a:cs typeface="Arial" panose="020B0604020202020204" pitchFamily="34" charset="0"/>
               </a:rPr>
-              <a:t>Verification</a:t>
+              <a:t>verification</a:t>
             </a:r>
           </a:p>
         </p:txBody>
@@ -4366,8 +4366,8 @@
         </p:nvSpPr>
         <p:spPr>
           <a:xfrm>
-            <a:off x="6809629" y="2589556"/>
-            <a:ext cx="832279" cy="307777"/>
+            <a:off x="6855315" y="2589556"/>
+            <a:ext cx="740907" cy="276999"/>
           </a:xfrm>
           <a:prstGeom prst="rect">
             <a:avLst/>
@@ -4382,12 +4382,16 @@
           <a:p>
             <a:pPr algn="ctr"/>
             <a:r>
-              <a:rPr lang="en-US" sz="1400" b="1" dirty="0">
+              <a:rPr lang="en-US" sz="1200" b="1" dirty="0">
                 <a:latin typeface="Arial" panose="020B0604020202020204" pitchFamily="34" charset="0"/>
                 <a:cs typeface="Arial" panose="020B0604020202020204" pitchFamily="34" charset="0"/>
               </a:rPr>
               <a:t>UniProt</a:t>
             </a:r>
+            <a:endParaRPr lang="en-US" sz="1400" b="1" dirty="0">
+              <a:latin typeface="Arial" panose="020B0604020202020204" pitchFamily="34" charset="0"/>
+              <a:cs typeface="Arial" panose="020B0604020202020204" pitchFamily="34" charset="0"/>
+            </a:endParaRPr>
           </a:p>
         </p:txBody>
       </p:sp>
@@ -4459,8 +4463,8 @@
         </p:nvSpPr>
         <p:spPr>
           <a:xfrm>
-            <a:off x="8442657" y="2589555"/>
-            <a:ext cx="761748" cy="307777"/>
+            <a:off x="8482732" y="2589555"/>
+            <a:ext cx="681597" cy="276999"/>
           </a:xfrm>
           <a:prstGeom prst="rect">
             <a:avLst/>
@@ -4475,7 +4479,7 @@
           <a:p>
             <a:pPr algn="ctr"/>
             <a:r>
-              <a:rPr lang="en-US" sz="1400" b="1" dirty="0">
+              <a:rPr lang="en-US" sz="1200" b="1" dirty="0">
                 <a:latin typeface="Arial" panose="020B0604020202020204" pitchFamily="34" charset="0"/>
                 <a:cs typeface="Arial" panose="020B0604020202020204" pitchFamily="34" charset="0"/>
               </a:rPr>
@@ -4651,8 +4655,8 @@
         </p:nvSpPr>
         <p:spPr>
           <a:xfrm>
-            <a:off x="3382093" y="2589554"/>
-            <a:ext cx="1406155" cy="307777"/>
+            <a:off x="3447517" y="2599301"/>
+            <a:ext cx="1234632" cy="276999"/>
           </a:xfrm>
           <a:prstGeom prst="rect">
             <a:avLst/>
@@ -4667,7 +4671,7 @@
           <a:p>
             <a:pPr algn="ctr"/>
             <a:r>
-              <a:rPr lang="en-US" sz="1400" b="1" dirty="0">
+              <a:rPr lang="en-US" sz="1200" b="1" dirty="0">
                 <a:latin typeface="Arial" panose="020B0604020202020204" pitchFamily="34" charset="0"/>
                 <a:cs typeface="Arial" panose="020B0604020202020204" pitchFamily="34" charset="0"/>
               </a:rPr>
@@ -4691,7 +4695,7 @@
         <p:spPr>
           <a:xfrm>
             <a:off x="1470976" y="3170470"/>
-            <a:ext cx="1681320" cy="738664"/>
+            <a:ext cx="1681320" cy="523220"/>
           </a:xfrm>
           <a:prstGeom prst="rect">
             <a:avLst/>
@@ -4703,6 +4707,16 @@
             <a:spAutoFit/>
           </a:bodyPr>
           <a:lstStyle/>
+          <a:p>
+            <a:pPr algn="ctr"/>
+            <a:r>
+              <a:rPr lang="en-US" sz="1400" dirty="0">
+                <a:latin typeface="Arial" panose="020B0604020202020204" pitchFamily="34" charset="0"/>
+                <a:cs typeface="Arial" panose="020B0604020202020204" pitchFamily="34" charset="0"/>
+              </a:rPr>
+              <a:t>Benchmark:</a:t>
+            </a:r>
+          </a:p>
           <a:p>
             <a:pPr algn="ctr"/>
             <a:r>
@@ -4711,26 +4725,6 @@
                 <a:cs typeface="Arial" panose="020B0604020202020204" pitchFamily="34" charset="0"/>
               </a:rPr>
               <a:t>Bajpai et al. 2020</a:t>
-            </a:r>
-          </a:p>
-          <a:p>
-            <a:pPr algn="ctr"/>
-            <a:r>
-              <a:rPr lang="en-US" sz="1400" dirty="0">
-                <a:latin typeface="Arial" panose="020B0604020202020204" pitchFamily="34" charset="0"/>
-                <a:cs typeface="Arial" panose="020B0604020202020204" pitchFamily="34" charset="0"/>
-              </a:rPr>
-              <a:t>&amp; </a:t>
-            </a:r>
-          </a:p>
-          <a:p>
-            <a:pPr algn="ctr"/>
-            <a:r>
-              <a:rPr lang="en-US" sz="1400" dirty="0">
-                <a:latin typeface="Arial" panose="020B0604020202020204" pitchFamily="34" charset="0"/>
-                <a:cs typeface="Arial" panose="020B0604020202020204" pitchFamily="34" charset="0"/>
-              </a:rPr>
-              <a:t>own experience</a:t>
             </a:r>
           </a:p>
         </p:txBody>

--- a/ppi/ppi-project.pptx
+++ b/ppi/ppi-project.pptx
@@ -5,15 +5,17 @@
     <p:sldMasterId id="2147483648" r:id="rId1"/>
   </p:sldMasterIdLst>
   <p:notesMasterIdLst>
-    <p:notesMasterId r:id="rId8"/>
+    <p:notesMasterId r:id="rId10"/>
   </p:notesMasterIdLst>
   <p:sldIdLst>
     <p:sldId id="257" r:id="rId2"/>
-    <p:sldId id="256" r:id="rId3"/>
-    <p:sldId id="314" r:id="rId4"/>
-    <p:sldId id="313" r:id="rId5"/>
-    <p:sldId id="318" r:id="rId6"/>
-    <p:sldId id="317" r:id="rId7"/>
+    <p:sldId id="319" r:id="rId3"/>
+    <p:sldId id="320" r:id="rId4"/>
+    <p:sldId id="256" r:id="rId5"/>
+    <p:sldId id="314" r:id="rId6"/>
+    <p:sldId id="313" r:id="rId7"/>
+    <p:sldId id="318" r:id="rId8"/>
+    <p:sldId id="317" r:id="rId9"/>
   </p:sldIdLst>
   <p:sldSz cx="12192000" cy="6858000"/>
   <p:notesSz cx="6858000" cy="9144000"/>
@@ -202,7 +204,7 @@
           <a:p>
             <a:fld id="{93867FB6-3614-4446-A537-B153597F3F7D}" type="datetimeFigureOut">
               <a:rPr lang="nl-NL" smtClean="0"/>
-              <a:t>14-10-2023</a:t>
+              <a:t>17-10-2023</a:t>
             </a:fld>
             <a:endParaRPr lang="nl-NL"/>
           </a:p>
@@ -616,7 +618,7 @@
           <a:p>
             <a:fld id="{68957F31-EF9F-422B-9EBC-20B94937EE59}" type="datetimeFigureOut">
               <a:rPr lang="nl-NL" smtClean="0"/>
-              <a:t>14-10-2023</a:t>
+              <a:t>17-10-2023</a:t>
             </a:fld>
             <a:endParaRPr lang="nl-NL"/>
           </a:p>
@@ -814,7 +816,7 @@
           <a:p>
             <a:fld id="{68957F31-EF9F-422B-9EBC-20B94937EE59}" type="datetimeFigureOut">
               <a:rPr lang="nl-NL" smtClean="0"/>
-              <a:t>14-10-2023</a:t>
+              <a:t>17-10-2023</a:t>
             </a:fld>
             <a:endParaRPr lang="nl-NL"/>
           </a:p>
@@ -1022,7 +1024,7 @@
           <a:p>
             <a:fld id="{68957F31-EF9F-422B-9EBC-20B94937EE59}" type="datetimeFigureOut">
               <a:rPr lang="nl-NL" smtClean="0"/>
-              <a:t>14-10-2023</a:t>
+              <a:t>17-10-2023</a:t>
             </a:fld>
             <a:endParaRPr lang="nl-NL"/>
           </a:p>
@@ -1220,7 +1222,7 @@
           <a:p>
             <a:fld id="{68957F31-EF9F-422B-9EBC-20B94937EE59}" type="datetimeFigureOut">
               <a:rPr lang="nl-NL" smtClean="0"/>
-              <a:t>14-10-2023</a:t>
+              <a:t>17-10-2023</a:t>
             </a:fld>
             <a:endParaRPr lang="nl-NL"/>
           </a:p>
@@ -1495,7 +1497,7 @@
           <a:p>
             <a:fld id="{68957F31-EF9F-422B-9EBC-20B94937EE59}" type="datetimeFigureOut">
               <a:rPr lang="nl-NL" smtClean="0"/>
-              <a:t>14-10-2023</a:t>
+              <a:t>17-10-2023</a:t>
             </a:fld>
             <a:endParaRPr lang="nl-NL"/>
           </a:p>
@@ -1760,7 +1762,7 @@
           <a:p>
             <a:fld id="{68957F31-EF9F-422B-9EBC-20B94937EE59}" type="datetimeFigureOut">
               <a:rPr lang="nl-NL" smtClean="0"/>
-              <a:t>14-10-2023</a:t>
+              <a:t>17-10-2023</a:t>
             </a:fld>
             <a:endParaRPr lang="nl-NL"/>
           </a:p>
@@ -2172,7 +2174,7 @@
           <a:p>
             <a:fld id="{68957F31-EF9F-422B-9EBC-20B94937EE59}" type="datetimeFigureOut">
               <a:rPr lang="nl-NL" smtClean="0"/>
-              <a:t>14-10-2023</a:t>
+              <a:t>17-10-2023</a:t>
             </a:fld>
             <a:endParaRPr lang="nl-NL"/>
           </a:p>
@@ -2313,7 +2315,7 @@
           <a:p>
             <a:fld id="{68957F31-EF9F-422B-9EBC-20B94937EE59}" type="datetimeFigureOut">
               <a:rPr lang="nl-NL" smtClean="0"/>
-              <a:t>14-10-2023</a:t>
+              <a:t>17-10-2023</a:t>
             </a:fld>
             <a:endParaRPr lang="nl-NL"/>
           </a:p>
@@ -2426,7 +2428,7 @@
           <a:p>
             <a:fld id="{68957F31-EF9F-422B-9EBC-20B94937EE59}" type="datetimeFigureOut">
               <a:rPr lang="nl-NL" smtClean="0"/>
-              <a:t>14-10-2023</a:t>
+              <a:t>17-10-2023</a:t>
             </a:fld>
             <a:endParaRPr lang="nl-NL"/>
           </a:p>
@@ -2737,7 +2739,7 @@
           <a:p>
             <a:fld id="{68957F31-EF9F-422B-9EBC-20B94937EE59}" type="datetimeFigureOut">
               <a:rPr lang="nl-NL" smtClean="0"/>
-              <a:t>14-10-2023</a:t>
+              <a:t>17-10-2023</a:t>
             </a:fld>
             <a:endParaRPr lang="nl-NL"/>
           </a:p>
@@ -3025,7 +3027,7 @@
           <a:p>
             <a:fld id="{68957F31-EF9F-422B-9EBC-20B94937EE59}" type="datetimeFigureOut">
               <a:rPr lang="nl-NL" smtClean="0"/>
-              <a:t>14-10-2023</a:t>
+              <a:t>17-10-2023</a:t>
             </a:fld>
             <a:endParaRPr lang="nl-NL"/>
           </a:p>
@@ -3266,7 +3268,7 @@
           <a:p>
             <a:fld id="{68957F31-EF9F-422B-9EBC-20B94937EE59}" type="datetimeFigureOut">
               <a:rPr lang="nl-NL" smtClean="0"/>
-              <a:t>14-10-2023</a:t>
+              <a:t>17-10-2023</a:t>
             </a:fld>
             <a:endParaRPr lang="nl-NL"/>
           </a:p>
@@ -3843,12 +3845,16 @@
           <a:p>
             <a:pPr algn="ctr"/>
             <a:r>
-              <a:rPr lang="en-US" sz="1400" dirty="0">
+              <a:rPr lang="en-US" sz="1400" dirty="0" err="1">
                 <a:latin typeface="Arial" panose="020B0604020202020204" pitchFamily="34" charset="0"/>
                 <a:cs typeface="Arial" panose="020B0604020202020204" pitchFamily="34" charset="0"/>
               </a:rPr>
               <a:t>BioGrid</a:t>
             </a:r>
+            <a:endParaRPr lang="en-US" sz="1400" dirty="0">
+              <a:latin typeface="Arial" panose="020B0604020202020204" pitchFamily="34" charset="0"/>
+              <a:cs typeface="Arial" panose="020B0604020202020204" pitchFamily="34" charset="0"/>
+            </a:endParaRPr>
           </a:p>
           <a:p>
             <a:pPr algn="ctr"/>
@@ -4759,720 +4765,202 @@
           <a:chExt cx="0" cy="0"/>
         </a:xfrm>
       </p:grpSpPr>
-      <p:sp>
-        <p:nvSpPr>
-          <p:cNvPr id="4" name="Tekstvak 3">
-            <a:extLst>
-              <a:ext uri="{FF2B5EF4-FFF2-40B4-BE49-F238E27FC236}">
-                <a16:creationId xmlns:a16="http://schemas.microsoft.com/office/drawing/2014/main" id="{11B53E2A-8006-F2CB-6A5C-9C9532A08ED8}"/>
-              </a:ext>
-            </a:extLst>
-          </p:cNvPr>
-          <p:cNvSpPr txBox="1"/>
-          <p:nvPr/>
-        </p:nvSpPr>
-        <p:spPr>
-          <a:xfrm>
-            <a:off x="4943403" y="1316850"/>
-            <a:ext cx="3217547" cy="307777"/>
-          </a:xfrm>
-          <a:prstGeom prst="rect">
-            <a:avLst/>
-          </a:prstGeom>
-          <a:noFill/>
-        </p:spPr>
-        <p:txBody>
-          <a:bodyPr wrap="none" rtlCol="0">
-            <a:spAutoFit/>
-          </a:bodyPr>
-          <a:lstStyle/>
-          <a:p>
-            <a:r>
-              <a:rPr lang="en-US" sz="1400" dirty="0">
-                <a:latin typeface="Arial" panose="020B0604020202020204" pitchFamily="34" charset="0"/>
-                <a:cs typeface="Arial" panose="020B0604020202020204" pitchFamily="34" charset="0"/>
-              </a:rPr>
-              <a:t>data bases (experimental interactions)</a:t>
-            </a:r>
-            <a:endParaRPr lang="nl-NL" sz="1400" dirty="0">
-              <a:latin typeface="Arial" panose="020B0604020202020204" pitchFamily="34" charset="0"/>
-              <a:cs typeface="Arial" panose="020B0604020202020204" pitchFamily="34" charset="0"/>
-            </a:endParaRPr>
-          </a:p>
-        </p:txBody>
-      </p:sp>
-      <p:sp>
-        <p:nvSpPr>
-          <p:cNvPr id="5" name="Tekstvak 4">
-            <a:extLst>
-              <a:ext uri="{FF2B5EF4-FFF2-40B4-BE49-F238E27FC236}">
-                <a16:creationId xmlns:a16="http://schemas.microsoft.com/office/drawing/2014/main" id="{98C716B5-641E-BEB1-0E10-97B04D6FBEB8}"/>
-              </a:ext>
-            </a:extLst>
-          </p:cNvPr>
-          <p:cNvSpPr txBox="1"/>
-          <p:nvPr/>
-        </p:nvSpPr>
-        <p:spPr>
-          <a:xfrm>
-            <a:off x="4943403" y="1704418"/>
-            <a:ext cx="2521844" cy="307777"/>
-          </a:xfrm>
-          <a:prstGeom prst="rect">
-            <a:avLst/>
-          </a:prstGeom>
-          <a:noFill/>
-        </p:spPr>
-        <p:txBody>
-          <a:bodyPr wrap="none" rtlCol="0">
-            <a:spAutoFit/>
-          </a:bodyPr>
-          <a:lstStyle/>
-          <a:p>
-            <a:r>
-              <a:rPr lang="en-US" sz="1400" dirty="0">
-                <a:latin typeface="Arial" panose="020B0604020202020204" pitchFamily="34" charset="0"/>
-                <a:cs typeface="Arial" panose="020B0604020202020204" pitchFamily="34" charset="0"/>
-              </a:rPr>
-              <a:t>docking (</a:t>
-            </a:r>
-            <a:r>
-              <a:rPr lang="en-US" sz="1400" dirty="0" err="1">
-                <a:latin typeface="Arial" panose="020B0604020202020204" pitchFamily="34" charset="0"/>
-                <a:cs typeface="Arial" panose="020B0604020202020204" pitchFamily="34" charset="0"/>
-              </a:rPr>
-              <a:t>AlphaFold</a:t>
-            </a:r>
-            <a:r>
-              <a:rPr lang="en-US" sz="1400" dirty="0">
-                <a:latin typeface="Arial" panose="020B0604020202020204" pitchFamily="34" charset="0"/>
-                <a:cs typeface="Arial" panose="020B0604020202020204" pitchFamily="34" charset="0"/>
-              </a:rPr>
-              <a:t>-Multimer)</a:t>
-            </a:r>
-            <a:endParaRPr lang="nl-NL" sz="1400" dirty="0">
-              <a:latin typeface="Arial" panose="020B0604020202020204" pitchFamily="34" charset="0"/>
-              <a:cs typeface="Arial" panose="020B0604020202020204" pitchFamily="34" charset="0"/>
-            </a:endParaRPr>
-          </a:p>
-        </p:txBody>
-      </p:sp>
-      <p:sp>
-        <p:nvSpPr>
-          <p:cNvPr id="6" name="Tekstvak 5">
-            <a:extLst>
-              <a:ext uri="{FF2B5EF4-FFF2-40B4-BE49-F238E27FC236}">
-                <a16:creationId xmlns:a16="http://schemas.microsoft.com/office/drawing/2014/main" id="{32BBCCC5-B6CE-C132-4C2F-6E41F45EE488}"/>
-              </a:ext>
-            </a:extLst>
-          </p:cNvPr>
-          <p:cNvSpPr txBox="1"/>
-          <p:nvPr/>
-        </p:nvSpPr>
-        <p:spPr>
-          <a:xfrm>
-            <a:off x="3775455" y="1507322"/>
-            <a:ext cx="556563" cy="369332"/>
-          </a:xfrm>
-          <a:prstGeom prst="rect">
-            <a:avLst/>
-          </a:prstGeom>
-          <a:noFill/>
-        </p:spPr>
-        <p:txBody>
-          <a:bodyPr wrap="none" rtlCol="0">
-            <a:spAutoFit/>
-          </a:bodyPr>
-          <a:lstStyle/>
-          <a:p>
-            <a:r>
-              <a:rPr lang="en-US" b="1" dirty="0">
-                <a:latin typeface="Arial" panose="020B0604020202020204" pitchFamily="34" charset="0"/>
-                <a:cs typeface="Arial" panose="020B0604020202020204" pitchFamily="34" charset="0"/>
-              </a:rPr>
-              <a:t>PPI</a:t>
-            </a:r>
-            <a:endParaRPr lang="nl-NL" b="1" dirty="0">
-              <a:latin typeface="Arial" panose="020B0604020202020204" pitchFamily="34" charset="0"/>
-              <a:cs typeface="Arial" panose="020B0604020202020204" pitchFamily="34" charset="0"/>
-            </a:endParaRPr>
-          </a:p>
-        </p:txBody>
-      </p:sp>
-      <p:sp>
-        <p:nvSpPr>
-          <p:cNvPr id="7" name="Tekstvak 6">
-            <a:extLst>
-              <a:ext uri="{FF2B5EF4-FFF2-40B4-BE49-F238E27FC236}">
-                <a16:creationId xmlns:a16="http://schemas.microsoft.com/office/drawing/2014/main" id="{25BD6156-AFED-0ABF-9FE5-42083C3CE109}"/>
-              </a:ext>
-            </a:extLst>
-          </p:cNvPr>
-          <p:cNvSpPr txBox="1"/>
-          <p:nvPr/>
-        </p:nvSpPr>
-        <p:spPr>
-          <a:xfrm>
-            <a:off x="3587096" y="3750422"/>
-            <a:ext cx="1236236" cy="369332"/>
-          </a:xfrm>
-          <a:prstGeom prst="rect">
-            <a:avLst/>
-          </a:prstGeom>
-          <a:noFill/>
-        </p:spPr>
-        <p:txBody>
-          <a:bodyPr wrap="none" rtlCol="0">
-            <a:spAutoFit/>
-          </a:bodyPr>
-          <a:lstStyle/>
-          <a:p>
-            <a:r>
-              <a:rPr lang="en-US" b="1" dirty="0">
-                <a:latin typeface="Arial" panose="020B0604020202020204" pitchFamily="34" charset="0"/>
-                <a:cs typeface="Arial" panose="020B0604020202020204" pitchFamily="34" charset="0"/>
-              </a:rPr>
-              <a:t>GO terms</a:t>
-            </a:r>
-            <a:endParaRPr lang="nl-NL" b="1" dirty="0">
-              <a:latin typeface="Arial" panose="020B0604020202020204" pitchFamily="34" charset="0"/>
-              <a:cs typeface="Arial" panose="020B0604020202020204" pitchFamily="34" charset="0"/>
-            </a:endParaRPr>
-          </a:p>
-        </p:txBody>
-      </p:sp>
-      <p:sp>
-        <p:nvSpPr>
-          <p:cNvPr id="8" name="Tekstvak 7">
-            <a:extLst>
-              <a:ext uri="{FF2B5EF4-FFF2-40B4-BE49-F238E27FC236}">
-                <a16:creationId xmlns:a16="http://schemas.microsoft.com/office/drawing/2014/main" id="{7A352AFF-8399-FEB2-062A-1CF4728706E2}"/>
-              </a:ext>
-            </a:extLst>
-          </p:cNvPr>
-          <p:cNvSpPr txBox="1"/>
-          <p:nvPr/>
-        </p:nvSpPr>
-        <p:spPr>
-          <a:xfrm>
-            <a:off x="4943403" y="3781200"/>
-            <a:ext cx="5955476" cy="307777"/>
-          </a:xfrm>
-          <a:prstGeom prst="rect">
-            <a:avLst/>
-          </a:prstGeom>
-          <a:noFill/>
-        </p:spPr>
-        <p:txBody>
-          <a:bodyPr wrap="none" rtlCol="0">
-            <a:spAutoFit/>
-          </a:bodyPr>
-          <a:lstStyle/>
-          <a:p>
-            <a:r>
-              <a:rPr lang="en-US" sz="1400" dirty="0">
-                <a:latin typeface="Arial" panose="020B0604020202020204" pitchFamily="34" charset="0"/>
-                <a:cs typeface="Arial" panose="020B0604020202020204" pitchFamily="34" charset="0"/>
-              </a:rPr>
-              <a:t>Check GO terms (phagocytosis, synapse phagocytosis, … ) of interactors</a:t>
-            </a:r>
-            <a:endParaRPr lang="nl-NL" sz="1400" dirty="0">
-              <a:latin typeface="Arial" panose="020B0604020202020204" pitchFamily="34" charset="0"/>
-              <a:cs typeface="Arial" panose="020B0604020202020204" pitchFamily="34" charset="0"/>
-            </a:endParaRPr>
-          </a:p>
-        </p:txBody>
-      </p:sp>
-      <p:sp>
-        <p:nvSpPr>
-          <p:cNvPr id="9" name="Tekstvak 8">
-            <a:extLst>
-              <a:ext uri="{FF2B5EF4-FFF2-40B4-BE49-F238E27FC236}">
-                <a16:creationId xmlns:a16="http://schemas.microsoft.com/office/drawing/2014/main" id="{7AD4FFAC-B3BC-F011-65EB-921E9E8D7454}"/>
-              </a:ext>
-            </a:extLst>
-          </p:cNvPr>
-          <p:cNvSpPr txBox="1"/>
-          <p:nvPr/>
-        </p:nvSpPr>
-        <p:spPr>
-          <a:xfrm>
-            <a:off x="2457428" y="331581"/>
-            <a:ext cx="7136890" cy="400110"/>
-          </a:xfrm>
-          <a:prstGeom prst="rect">
-            <a:avLst/>
-          </a:prstGeom>
-          <a:noFill/>
-        </p:spPr>
-        <p:txBody>
-          <a:bodyPr wrap="none" rtlCol="0">
-            <a:spAutoFit/>
-          </a:bodyPr>
-          <a:lstStyle/>
-          <a:p>
-            <a:r>
-              <a:rPr lang="en-US" sz="2000" dirty="0">
-                <a:latin typeface="Arial" panose="020B0604020202020204" pitchFamily="34" charset="0"/>
-                <a:cs typeface="Arial" panose="020B0604020202020204" pitchFamily="34" charset="0"/>
-              </a:rPr>
-              <a:t>Finding computational relevant VCAM1 interactors (</a:t>
-            </a:r>
-            <a:r>
-              <a:rPr lang="en-US" sz="2000" i="1" dirty="0">
-                <a:latin typeface="Arial" panose="020B0604020202020204" pitchFamily="34" charset="0"/>
-                <a:cs typeface="Arial" panose="020B0604020202020204" pitchFamily="34" charset="0"/>
-              </a:rPr>
-              <a:t>heatmap</a:t>
-            </a:r>
-            <a:r>
-              <a:rPr lang="en-US" sz="2000" dirty="0">
-                <a:latin typeface="Arial" panose="020B0604020202020204" pitchFamily="34" charset="0"/>
-                <a:cs typeface="Arial" panose="020B0604020202020204" pitchFamily="34" charset="0"/>
-              </a:rPr>
-              <a:t>)</a:t>
-            </a:r>
-            <a:endParaRPr lang="nl-NL" sz="2000" dirty="0">
-              <a:latin typeface="Arial" panose="020B0604020202020204" pitchFamily="34" charset="0"/>
-              <a:cs typeface="Arial" panose="020B0604020202020204" pitchFamily="34" charset="0"/>
-            </a:endParaRPr>
-          </a:p>
-        </p:txBody>
-      </p:sp>
-      <p:sp>
-        <p:nvSpPr>
-          <p:cNvPr id="2" name="Tekstvak 1">
-            <a:extLst>
-              <a:ext uri="{FF2B5EF4-FFF2-40B4-BE49-F238E27FC236}">
-                <a16:creationId xmlns:a16="http://schemas.microsoft.com/office/drawing/2014/main" id="{FDDE8009-B8D8-2698-C458-F224561ECC6E}"/>
-              </a:ext>
-            </a:extLst>
-          </p:cNvPr>
-          <p:cNvSpPr txBox="1"/>
-          <p:nvPr/>
-        </p:nvSpPr>
-        <p:spPr>
-          <a:xfrm>
-            <a:off x="2540181" y="2423366"/>
-            <a:ext cx="2441694" cy="369332"/>
-          </a:xfrm>
-          <a:prstGeom prst="rect">
-            <a:avLst/>
-          </a:prstGeom>
-          <a:noFill/>
-        </p:spPr>
-        <p:txBody>
-          <a:bodyPr wrap="none" rtlCol="0">
-            <a:spAutoFit/>
-          </a:bodyPr>
-          <a:lstStyle/>
-          <a:p>
-            <a:r>
-              <a:rPr lang="en-US" b="1" dirty="0">
-                <a:latin typeface="Arial" panose="020B0604020202020204" pitchFamily="34" charset="0"/>
-                <a:cs typeface="Arial" panose="020B0604020202020204" pitchFamily="34" charset="0"/>
-              </a:rPr>
-              <a:t>Cell-type expression</a:t>
-            </a:r>
-            <a:endParaRPr lang="nl-NL" b="1" dirty="0">
-              <a:latin typeface="Arial" panose="020B0604020202020204" pitchFamily="34" charset="0"/>
-              <a:cs typeface="Arial" panose="020B0604020202020204" pitchFamily="34" charset="0"/>
-            </a:endParaRPr>
-          </a:p>
-        </p:txBody>
-      </p:sp>
-      <p:sp>
-        <p:nvSpPr>
-          <p:cNvPr id="3" name="Tekstvak 2">
-            <a:extLst>
-              <a:ext uri="{FF2B5EF4-FFF2-40B4-BE49-F238E27FC236}">
-                <a16:creationId xmlns:a16="http://schemas.microsoft.com/office/drawing/2014/main" id="{0DE6FB12-86A8-89F4-3CFE-5F541C3C773A}"/>
-              </a:ext>
-            </a:extLst>
-          </p:cNvPr>
-          <p:cNvSpPr txBox="1"/>
-          <p:nvPr/>
-        </p:nvSpPr>
-        <p:spPr>
-          <a:xfrm>
-            <a:off x="4943403" y="2490537"/>
-            <a:ext cx="7003840" cy="307777"/>
-          </a:xfrm>
-          <a:prstGeom prst="rect">
-            <a:avLst/>
-          </a:prstGeom>
-          <a:noFill/>
-        </p:spPr>
-        <p:txBody>
-          <a:bodyPr wrap="none" rtlCol="0">
-            <a:spAutoFit/>
-          </a:bodyPr>
-          <a:lstStyle/>
-          <a:p>
-            <a:r>
-              <a:rPr lang="en-US" sz="1400" dirty="0">
-                <a:latin typeface="Arial" panose="020B0604020202020204" pitchFamily="34" charset="0"/>
-                <a:cs typeface="Arial" panose="020B0604020202020204" pitchFamily="34" charset="0"/>
-              </a:rPr>
-              <a:t>Checking cell-type expression (microglia &amp; OPCs)  from Blanca and </a:t>
-            </a:r>
-            <a:r>
-              <a:rPr lang="en-US" sz="1400" dirty="0" err="1">
-                <a:latin typeface="Arial" panose="020B0604020202020204" pitchFamily="34" charset="0"/>
-                <a:cs typeface="Arial" panose="020B0604020202020204" pitchFamily="34" charset="0"/>
-              </a:rPr>
-              <a:t>Danies</a:t>
-            </a:r>
-            <a:r>
-              <a:rPr lang="en-US" sz="1400" dirty="0">
-                <a:latin typeface="Arial" panose="020B0604020202020204" pitchFamily="34" charset="0"/>
-                <a:cs typeface="Arial" panose="020B0604020202020204" pitchFamily="34" charset="0"/>
-              </a:rPr>
-              <a:t> single-cell</a:t>
-            </a:r>
-            <a:endParaRPr lang="nl-NL" sz="1400" dirty="0">
-              <a:latin typeface="Arial" panose="020B0604020202020204" pitchFamily="34" charset="0"/>
-              <a:cs typeface="Arial" panose="020B0604020202020204" pitchFamily="34" charset="0"/>
-            </a:endParaRPr>
-          </a:p>
-        </p:txBody>
-      </p:sp>
-      <p:sp>
-        <p:nvSpPr>
-          <p:cNvPr id="10" name="Tekstvak 9">
-            <a:extLst>
-              <a:ext uri="{FF2B5EF4-FFF2-40B4-BE49-F238E27FC236}">
-                <a16:creationId xmlns:a16="http://schemas.microsoft.com/office/drawing/2014/main" id="{C0521906-2307-8328-7157-3F35D6CA29BD}"/>
-              </a:ext>
-            </a:extLst>
-          </p:cNvPr>
-          <p:cNvSpPr txBox="1"/>
-          <p:nvPr/>
-        </p:nvSpPr>
-        <p:spPr>
-          <a:xfrm>
-            <a:off x="1929207" y="2878865"/>
-            <a:ext cx="3108543" cy="369332"/>
-          </a:xfrm>
-          <a:prstGeom prst="rect">
-            <a:avLst/>
-          </a:prstGeom>
-          <a:noFill/>
-        </p:spPr>
-        <p:txBody>
-          <a:bodyPr wrap="none" rtlCol="0">
-            <a:spAutoFit/>
-          </a:bodyPr>
-          <a:lstStyle/>
-          <a:p>
-            <a:r>
-              <a:rPr lang="en-US" b="1" dirty="0">
-                <a:latin typeface="Arial" panose="020B0604020202020204" pitchFamily="34" charset="0"/>
-                <a:cs typeface="Arial" panose="020B0604020202020204" pitchFamily="34" charset="0"/>
-              </a:rPr>
-              <a:t>Developmental expression</a:t>
-            </a:r>
-            <a:endParaRPr lang="nl-NL" b="1" dirty="0">
-              <a:latin typeface="Arial" panose="020B0604020202020204" pitchFamily="34" charset="0"/>
-              <a:cs typeface="Arial" panose="020B0604020202020204" pitchFamily="34" charset="0"/>
-            </a:endParaRPr>
-          </a:p>
-        </p:txBody>
-      </p:sp>
-      <p:sp>
-        <p:nvSpPr>
-          <p:cNvPr id="11" name="Tekstvak 10">
-            <a:extLst>
-              <a:ext uri="{FF2B5EF4-FFF2-40B4-BE49-F238E27FC236}">
-                <a16:creationId xmlns:a16="http://schemas.microsoft.com/office/drawing/2014/main" id="{A7E944EB-17EA-1B7A-EA23-9A0A14D05944}"/>
-              </a:ext>
-            </a:extLst>
-          </p:cNvPr>
-          <p:cNvSpPr txBox="1"/>
-          <p:nvPr/>
-        </p:nvSpPr>
-        <p:spPr>
-          <a:xfrm>
-            <a:off x="4943403" y="2940420"/>
-            <a:ext cx="5827236" cy="307777"/>
-          </a:xfrm>
-          <a:prstGeom prst="rect">
-            <a:avLst/>
-          </a:prstGeom>
-          <a:noFill/>
-        </p:spPr>
-        <p:txBody>
-          <a:bodyPr wrap="none" rtlCol="0">
-            <a:spAutoFit/>
-          </a:bodyPr>
-          <a:lstStyle/>
-          <a:p>
-            <a:r>
-              <a:rPr lang="en-US" sz="1400" dirty="0">
-                <a:latin typeface="Arial" panose="020B0604020202020204" pitchFamily="34" charset="0"/>
-                <a:cs typeface="Arial" panose="020B0604020202020204" pitchFamily="34" charset="0"/>
-              </a:rPr>
-              <a:t>Checking developmental expression from Blanca and </a:t>
-            </a:r>
-            <a:r>
-              <a:rPr lang="en-US" sz="1400" dirty="0" err="1">
-                <a:latin typeface="Arial" panose="020B0604020202020204" pitchFamily="34" charset="0"/>
-                <a:cs typeface="Arial" panose="020B0604020202020204" pitchFamily="34" charset="0"/>
-              </a:rPr>
-              <a:t>Danies</a:t>
-            </a:r>
-            <a:r>
-              <a:rPr lang="en-US" sz="1400" dirty="0">
-                <a:latin typeface="Arial" panose="020B0604020202020204" pitchFamily="34" charset="0"/>
-                <a:cs typeface="Arial" panose="020B0604020202020204" pitchFamily="34" charset="0"/>
-              </a:rPr>
-              <a:t> single-cell</a:t>
-            </a:r>
-            <a:endParaRPr lang="nl-NL" sz="1400" dirty="0">
-              <a:latin typeface="Arial" panose="020B0604020202020204" pitchFamily="34" charset="0"/>
-              <a:cs typeface="Arial" panose="020B0604020202020204" pitchFamily="34" charset="0"/>
-            </a:endParaRPr>
-          </a:p>
-        </p:txBody>
-      </p:sp>
-      <p:sp>
-        <p:nvSpPr>
-          <p:cNvPr id="14" name="Tekstvak 13">
-            <a:extLst>
-              <a:ext uri="{FF2B5EF4-FFF2-40B4-BE49-F238E27FC236}">
-                <a16:creationId xmlns:a16="http://schemas.microsoft.com/office/drawing/2014/main" id="{8154976C-2BB0-85F8-0D1D-6B5070B8C5EF}"/>
-              </a:ext>
-            </a:extLst>
-          </p:cNvPr>
-          <p:cNvSpPr txBox="1"/>
-          <p:nvPr/>
-        </p:nvSpPr>
-        <p:spPr>
-          <a:xfrm>
-            <a:off x="3407560" y="4326922"/>
-            <a:ext cx="1415772" cy="369332"/>
-          </a:xfrm>
-          <a:prstGeom prst="rect">
-            <a:avLst/>
-          </a:prstGeom>
-          <a:noFill/>
-        </p:spPr>
-        <p:txBody>
-          <a:bodyPr wrap="none" rtlCol="0">
-            <a:spAutoFit/>
-          </a:bodyPr>
-          <a:lstStyle/>
-          <a:p>
-            <a:r>
-              <a:rPr lang="en-US" b="1" dirty="0">
-                <a:latin typeface="Arial" panose="020B0604020202020204" pitchFamily="34" charset="0"/>
-                <a:cs typeface="Arial" panose="020B0604020202020204" pitchFamily="34" charset="0"/>
-              </a:rPr>
-              <a:t>Public data</a:t>
-            </a:r>
-            <a:endParaRPr lang="nl-NL" b="1" dirty="0">
-              <a:latin typeface="Arial" panose="020B0604020202020204" pitchFamily="34" charset="0"/>
-              <a:cs typeface="Arial" panose="020B0604020202020204" pitchFamily="34" charset="0"/>
-            </a:endParaRPr>
-          </a:p>
-        </p:txBody>
-      </p:sp>
-      <p:sp>
-        <p:nvSpPr>
-          <p:cNvPr id="15" name="Tekstvak 14">
-            <a:extLst>
-              <a:ext uri="{FF2B5EF4-FFF2-40B4-BE49-F238E27FC236}">
-                <a16:creationId xmlns:a16="http://schemas.microsoft.com/office/drawing/2014/main" id="{87081870-9BA9-3346-D4EC-0F24CF73EF39}"/>
-              </a:ext>
-            </a:extLst>
-          </p:cNvPr>
-          <p:cNvSpPr txBox="1"/>
-          <p:nvPr/>
-        </p:nvSpPr>
-        <p:spPr>
-          <a:xfrm>
-            <a:off x="4942379" y="4326922"/>
-            <a:ext cx="6822901" cy="2031325"/>
-          </a:xfrm>
-          <a:prstGeom prst="rect">
-            <a:avLst/>
-          </a:prstGeom>
-          <a:noFill/>
-        </p:spPr>
-        <p:txBody>
-          <a:bodyPr wrap="square" rtlCol="0">
-            <a:spAutoFit/>
-          </a:bodyPr>
-          <a:lstStyle/>
-          <a:p>
-            <a:r>
-              <a:rPr lang="en-US" sz="1400" dirty="0">
-                <a:latin typeface="Arial" panose="020B0604020202020204" pitchFamily="34" charset="0"/>
-                <a:cs typeface="Arial" panose="020B0604020202020204" pitchFamily="34" charset="0"/>
-              </a:rPr>
-              <a:t>Reanalyzing public </a:t>
-            </a:r>
-            <a:r>
-              <a:rPr lang="en-US" sz="1400" dirty="0" err="1">
-                <a:latin typeface="Arial" panose="020B0604020202020204" pitchFamily="34" charset="0"/>
-                <a:cs typeface="Arial" panose="020B0604020202020204" pitchFamily="34" charset="0"/>
-              </a:rPr>
-              <a:t>RNAseq</a:t>
-            </a:r>
-            <a:r>
-              <a:rPr lang="en-US" sz="1400" dirty="0">
-                <a:latin typeface="Arial" panose="020B0604020202020204" pitchFamily="34" charset="0"/>
-                <a:cs typeface="Arial" panose="020B0604020202020204" pitchFamily="34" charset="0"/>
-              </a:rPr>
-              <a:t> data related to synapse phagocytosis</a:t>
-            </a:r>
-          </a:p>
-          <a:p>
-            <a:r>
-              <a:rPr lang="en-US" sz="1400" dirty="0">
-                <a:latin typeface="Arial" panose="020B0604020202020204" pitchFamily="34" charset="0"/>
-                <a:cs typeface="Arial" panose="020B0604020202020204" pitchFamily="34" charset="0"/>
-              </a:rPr>
-              <a:t>- </a:t>
-            </a:r>
-            <a:r>
-              <a:rPr lang="da-DK" sz="1400" b="0" i="0" dirty="0">
-                <a:effectLst/>
-                <a:latin typeface="Roboto" panose="02000000000000000000" pitchFamily="2" charset="0"/>
-              </a:rPr>
-              <a:t>danyang et al. 2022 Mg tau-GFP+ and tau GFP-</a:t>
-            </a:r>
-            <a:endParaRPr lang="en-US" sz="1400" dirty="0">
-              <a:latin typeface="Arial" panose="020B0604020202020204" pitchFamily="34" charset="0"/>
-              <a:cs typeface="Arial" panose="020B0604020202020204" pitchFamily="34" charset="0"/>
-            </a:endParaRPr>
-          </a:p>
-          <a:p>
-            <a:r>
-              <a:rPr lang="en-US" sz="1400" dirty="0">
-                <a:latin typeface="Arial" panose="020B0604020202020204" pitchFamily="34" charset="0"/>
-                <a:cs typeface="Arial" panose="020B0604020202020204" pitchFamily="34" charset="0"/>
-              </a:rPr>
-              <a:t>- </a:t>
-            </a:r>
-            <a:r>
-              <a:rPr lang="en-US" sz="1400" b="0" i="0" dirty="0" err="1">
-                <a:effectLst/>
-                <a:latin typeface="Roboto" panose="02000000000000000000" pitchFamily="2" charset="0"/>
-              </a:rPr>
-              <a:t>danyang</a:t>
-            </a:r>
-            <a:r>
-              <a:rPr lang="en-US" sz="1400" b="0" i="0" dirty="0">
-                <a:effectLst/>
-                <a:latin typeface="Roboto" panose="02000000000000000000" pitchFamily="2" charset="0"/>
-              </a:rPr>
-              <a:t> et al. 2022 Mg high and low TRPM</a:t>
-            </a:r>
-            <a:endParaRPr lang="en-US" sz="1400" dirty="0">
-              <a:latin typeface="Arial" panose="020B0604020202020204" pitchFamily="34" charset="0"/>
-              <a:cs typeface="Arial" panose="020B0604020202020204" pitchFamily="34" charset="0"/>
-            </a:endParaRPr>
-          </a:p>
-          <a:p>
-            <a:r>
-              <a:rPr lang="en-US" sz="1400" dirty="0">
-                <a:latin typeface="Arial" panose="020B0604020202020204" pitchFamily="34" charset="0"/>
-                <a:cs typeface="Arial" panose="020B0604020202020204" pitchFamily="34" charset="0"/>
-              </a:rPr>
-              <a:t>- </a:t>
-            </a:r>
-            <a:r>
-              <a:rPr lang="de-DE" sz="1400" b="0" i="0" dirty="0" err="1">
-                <a:effectLst/>
-                <a:latin typeface="Roboto" panose="02000000000000000000" pitchFamily="2" charset="0"/>
-              </a:rPr>
-              <a:t>grubman</a:t>
-            </a:r>
-            <a:r>
-              <a:rPr lang="de-DE" sz="1400" b="0" i="0" dirty="0">
-                <a:effectLst/>
-                <a:latin typeface="Roboto" panose="02000000000000000000" pitchFamily="2" charset="0"/>
-              </a:rPr>
-              <a:t> et al. 2021 Mg Ab </a:t>
-            </a:r>
-            <a:r>
-              <a:rPr lang="de-DE" sz="1400" b="0" i="0" dirty="0" err="1">
-                <a:effectLst/>
-                <a:latin typeface="Roboto" panose="02000000000000000000" pitchFamily="2" charset="0"/>
-              </a:rPr>
-              <a:t>phago</a:t>
-            </a:r>
-            <a:endParaRPr lang="de-DE" sz="1400" b="0" i="0" dirty="0">
-              <a:effectLst/>
-              <a:latin typeface="Roboto" panose="02000000000000000000" pitchFamily="2" charset="0"/>
-            </a:endParaRPr>
-          </a:p>
-          <a:p>
-            <a:r>
-              <a:rPr lang="en-US" sz="1400" b="0" i="0" dirty="0">
-                <a:effectLst/>
-                <a:latin typeface="Roboto" panose="02000000000000000000" pitchFamily="2" charset="0"/>
-              </a:rPr>
-              <a:t>- Masuda et al. 2019 Mg subclasses throughout development</a:t>
-            </a:r>
-          </a:p>
-          <a:p>
-            <a:r>
-              <a:rPr lang="nl-NL" sz="1400" b="0" i="0" dirty="0">
-                <a:effectLst/>
-                <a:latin typeface="Roboto" panose="02000000000000000000" pitchFamily="2" charset="0"/>
-              </a:rPr>
-              <a:t>- Hammond et al. 2019 Mg over development</a:t>
-            </a:r>
-            <a:endParaRPr lang="en-US" sz="1400" dirty="0">
-              <a:latin typeface="Roboto" panose="02000000000000000000" pitchFamily="2" charset="0"/>
-            </a:endParaRPr>
-          </a:p>
-          <a:p>
-            <a:r>
-              <a:rPr lang="en-US" sz="1400" b="0" i="0" dirty="0">
-                <a:effectLst/>
-                <a:latin typeface="Roboto" panose="02000000000000000000" pitchFamily="2" charset="0"/>
-              </a:rPr>
-              <a:t>- Keren-</a:t>
-            </a:r>
-            <a:r>
-              <a:rPr lang="en-US" sz="1400" b="0" i="0" dirty="0" err="1">
-                <a:effectLst/>
-                <a:latin typeface="Roboto" panose="02000000000000000000" pitchFamily="2" charset="0"/>
-              </a:rPr>
-              <a:t>shaul</a:t>
-            </a:r>
-            <a:r>
-              <a:rPr lang="en-US" sz="1400" b="0" i="0" dirty="0">
-                <a:effectLst/>
-                <a:latin typeface="Roboto" panose="02000000000000000000" pitchFamily="2" charset="0"/>
-              </a:rPr>
-              <a:t> et al. 2017. DAM microglia (because the phagocytic pathway is induced in these type of microglia in AD context)</a:t>
-            </a:r>
-          </a:p>
-          <a:p>
-            <a:r>
-              <a:rPr lang="it-IT" sz="1400" b="0" i="0" dirty="0">
-                <a:effectLst/>
-                <a:latin typeface="Roboto" panose="02000000000000000000" pitchFamily="2" charset="0"/>
-              </a:rPr>
-              <a:t>- Li et al. 2019. Microglia developement</a:t>
-            </a:r>
-            <a:endParaRPr lang="nl-NL" sz="1400" dirty="0">
-              <a:latin typeface="Arial" panose="020B0604020202020204" pitchFamily="34" charset="0"/>
-              <a:cs typeface="Arial" panose="020B0604020202020204" pitchFamily="34" charset="0"/>
-            </a:endParaRPr>
-          </a:p>
-        </p:txBody>
-      </p:sp>
-      <p:sp>
-        <p:nvSpPr>
-          <p:cNvPr id="17" name="Rechthoek: afgeronde hoeken 16">
-            <a:extLst>
-              <a:ext uri="{FF2B5EF4-FFF2-40B4-BE49-F238E27FC236}">
-                <a16:creationId xmlns:a16="http://schemas.microsoft.com/office/drawing/2014/main" id="{DDF4FC3B-F9FC-D6EB-FEEA-091918D07346}"/>
+      <p:pic>
+        <p:nvPicPr>
+          <p:cNvPr id="3" name="Graphic 2">
+            <a:extLst>
+              <a:ext uri="{FF2B5EF4-FFF2-40B4-BE49-F238E27FC236}">
+                <a16:creationId xmlns:a16="http://schemas.microsoft.com/office/drawing/2014/main" id="{75F3ED51-1534-8D03-BECA-1E27FFEF0FD5}"/>
+              </a:ext>
+            </a:extLst>
+          </p:cNvPr>
+          <p:cNvPicPr>
+            <a:picLocks noChangeAspect="1"/>
+          </p:cNvPicPr>
+          <p:nvPr/>
+        </p:nvPicPr>
+        <p:blipFill rotWithShape="1">
+          <a:blip r:embed="rId2">
+            <a:extLst>
+              <a:ext uri="{28A0092B-C50C-407E-A947-70E740481C1C}">
+                <a14:useLocalDpi xmlns:a14="http://schemas.microsoft.com/office/drawing/2010/main" val="0"/>
+              </a:ext>
+              <a:ext uri="{96DAC541-7B7A-43D3-8B79-37D633B846F1}">
+                <asvg:svgBlip xmlns:asvg="http://schemas.microsoft.com/office/drawing/2016/SVG/main" r:embed="rId3"/>
+              </a:ext>
+            </a:extLst>
+          </a:blip>
+          <a:srcRect l="45193" r="51286"/>
+          <a:stretch/>
+        </p:blipFill>
+        <p:spPr>
+          <a:xfrm rot="5400000">
+            <a:off x="5143242" y="-1353236"/>
+            <a:ext cx="430483" cy="10721344"/>
+          </a:xfrm>
+          <a:prstGeom prst="rect">
+            <a:avLst/>
+          </a:prstGeom>
+        </p:spPr>
+      </p:pic>
+      <p:pic>
+        <p:nvPicPr>
+          <p:cNvPr id="4" name="Graphic 3">
+            <a:extLst>
+              <a:ext uri="{FF2B5EF4-FFF2-40B4-BE49-F238E27FC236}">
+                <a16:creationId xmlns:a16="http://schemas.microsoft.com/office/drawing/2014/main" id="{82CAEBCE-9177-81A9-9863-FCA489CC8218}"/>
+              </a:ext>
+            </a:extLst>
+          </p:cNvPr>
+          <p:cNvPicPr>
+            <a:picLocks noChangeAspect="1"/>
+          </p:cNvPicPr>
+          <p:nvPr/>
+        </p:nvPicPr>
+        <p:blipFill rotWithShape="1">
+          <a:blip r:embed="rId2">
+            <a:extLst>
+              <a:ext uri="{28A0092B-C50C-407E-A947-70E740481C1C}">
+                <a14:useLocalDpi xmlns:a14="http://schemas.microsoft.com/office/drawing/2010/main" val="0"/>
+              </a:ext>
+              <a:ext uri="{96DAC541-7B7A-43D3-8B79-37D633B846F1}">
+                <asvg:svgBlip xmlns:asvg="http://schemas.microsoft.com/office/drawing/2016/SVG/main" r:embed="rId3"/>
+              </a:ext>
+            </a:extLst>
+          </a:blip>
+          <a:srcRect l="48499" t="6691" r="41557" b="81450"/>
+          <a:stretch/>
+        </p:blipFill>
+        <p:spPr>
+          <a:xfrm>
+            <a:off x="633879" y="4920617"/>
+            <a:ext cx="1215631" cy="1271451"/>
+          </a:xfrm>
+          <a:prstGeom prst="rect">
+            <a:avLst/>
+          </a:prstGeom>
+        </p:spPr>
+      </p:pic>
+      <p:pic>
+        <p:nvPicPr>
+          <p:cNvPr id="7" name="Graphic 6">
+            <a:extLst>
+              <a:ext uri="{FF2B5EF4-FFF2-40B4-BE49-F238E27FC236}">
+                <a16:creationId xmlns:a16="http://schemas.microsoft.com/office/drawing/2014/main" id="{C91D1BAE-6A05-6D87-8662-FCB18B6E3279}"/>
+              </a:ext>
+            </a:extLst>
+          </p:cNvPr>
+          <p:cNvPicPr>
+            <a:picLocks noChangeAspect="1"/>
+          </p:cNvPicPr>
+          <p:nvPr/>
+        </p:nvPicPr>
+        <p:blipFill rotWithShape="1">
+          <a:blip r:embed="rId2">
+            <a:extLst>
+              <a:ext uri="{28A0092B-C50C-407E-A947-70E740481C1C}">
+                <a14:useLocalDpi xmlns:a14="http://schemas.microsoft.com/office/drawing/2010/main" val="0"/>
+              </a:ext>
+              <a:ext uri="{96DAC541-7B7A-43D3-8B79-37D633B846F1}">
+                <asvg:svgBlip xmlns:asvg="http://schemas.microsoft.com/office/drawing/2016/SVG/main" r:embed="rId3"/>
+              </a:ext>
+            </a:extLst>
+          </a:blip>
+          <a:srcRect l="28666" r="60598"/>
+          <a:stretch/>
+        </p:blipFill>
+        <p:spPr>
+          <a:xfrm rot="5400000">
+            <a:off x="4702157" y="-3587306"/>
+            <a:ext cx="1312651" cy="10721344"/>
+          </a:xfrm>
+          <a:prstGeom prst="rect">
+            <a:avLst/>
+          </a:prstGeom>
+        </p:spPr>
+      </p:pic>
+      <p:pic>
+        <p:nvPicPr>
+          <p:cNvPr id="8" name="Graphic 7">
+            <a:extLst>
+              <a:ext uri="{FF2B5EF4-FFF2-40B4-BE49-F238E27FC236}">
+                <a16:creationId xmlns:a16="http://schemas.microsoft.com/office/drawing/2014/main" id="{E05AE6B6-141C-F1A9-F6E6-9B09228F8EBC}"/>
+              </a:ext>
+            </a:extLst>
+          </p:cNvPr>
+          <p:cNvPicPr>
+            <a:picLocks noChangeAspect="1"/>
+          </p:cNvPicPr>
+          <p:nvPr/>
+        </p:nvPicPr>
+        <p:blipFill rotWithShape="1">
+          <a:blip r:embed="rId2">
+            <a:extLst>
+              <a:ext uri="{28A0092B-C50C-407E-A947-70E740481C1C}">
+                <a14:useLocalDpi xmlns:a14="http://schemas.microsoft.com/office/drawing/2010/main" val="0"/>
+              </a:ext>
+              <a:ext uri="{96DAC541-7B7A-43D3-8B79-37D633B846F1}">
+                <asvg:svgBlip xmlns:asvg="http://schemas.microsoft.com/office/drawing/2016/SVG/main" r:embed="rId3"/>
+              </a:ext>
+            </a:extLst>
+          </a:blip>
+          <a:srcRect l="39318" r="56857"/>
+          <a:stretch/>
+        </p:blipFill>
+        <p:spPr>
+          <a:xfrm rot="5400000">
+            <a:off x="5124650" y="-2538390"/>
+            <a:ext cx="467666" cy="10721344"/>
+          </a:xfrm>
+          <a:prstGeom prst="rect">
+            <a:avLst/>
+          </a:prstGeom>
+        </p:spPr>
+      </p:pic>
+      <p:pic>
+        <p:nvPicPr>
+          <p:cNvPr id="9" name="Graphic 8">
+            <a:extLst>
+              <a:ext uri="{FF2B5EF4-FFF2-40B4-BE49-F238E27FC236}">
+                <a16:creationId xmlns:a16="http://schemas.microsoft.com/office/drawing/2014/main" id="{44733391-55B5-5941-86CC-79DBE64BE7CA}"/>
+              </a:ext>
+            </a:extLst>
+          </p:cNvPr>
+          <p:cNvPicPr>
+            <a:picLocks noChangeAspect="1"/>
+          </p:cNvPicPr>
+          <p:nvPr/>
+        </p:nvPicPr>
+        <p:blipFill rotWithShape="1">
+          <a:blip r:embed="rId2">
+            <a:extLst>
+              <a:ext uri="{28A0092B-C50C-407E-A947-70E740481C1C}">
+                <a14:useLocalDpi xmlns:a14="http://schemas.microsoft.com/office/drawing/2010/main" val="0"/>
+              </a:ext>
+              <a:ext uri="{96DAC541-7B7A-43D3-8B79-37D633B846F1}">
+                <asvg:svgBlip xmlns:asvg="http://schemas.microsoft.com/office/drawing/2016/SVG/main" r:embed="rId3"/>
+              </a:ext>
+            </a:extLst>
+          </a:blip>
+          <a:srcRect l="43014" r="54136"/>
+          <a:stretch/>
+        </p:blipFill>
+        <p:spPr>
+          <a:xfrm rot="5400000">
+            <a:off x="5184312" y="-1866061"/>
+            <a:ext cx="348343" cy="10721344"/>
+          </a:xfrm>
+          <a:prstGeom prst="rect">
+            <a:avLst/>
+          </a:prstGeom>
+        </p:spPr>
+      </p:pic>
+      <p:sp>
+        <p:nvSpPr>
+          <p:cNvPr id="10" name="Rechthoek 9">
+            <a:extLst>
+              <a:ext uri="{FF2B5EF4-FFF2-40B4-BE49-F238E27FC236}">
+                <a16:creationId xmlns:a16="http://schemas.microsoft.com/office/drawing/2014/main" id="{C296F3AD-538F-0739-7F47-C926C34DCC3B}"/>
               </a:ext>
             </a:extLst>
           </p:cNvPr>
@@ -5481,17 +4969,17 @@
         </p:nvSpPr>
         <p:spPr>
           <a:xfrm>
-            <a:off x="3587096" y="1170039"/>
-            <a:ext cx="4672001" cy="1009216"/>
-          </a:xfrm>
-          <a:prstGeom prst="roundRect">
-            <a:avLst/>
-          </a:prstGeom>
-          <a:noFill/>
-          <a:ln w="28575">
-            <a:solidFill>
-              <a:schemeClr val="accent1"/>
-            </a:solidFill>
+            <a:off x="1935467" y="3668783"/>
+            <a:ext cx="8783688" cy="168426"/>
+          </a:xfrm>
+          <a:prstGeom prst="rect">
+            <a:avLst/>
+          </a:prstGeom>
+          <a:solidFill>
+            <a:schemeClr val="bg1"/>
+          </a:solidFill>
+          <a:ln>
+            <a:noFill/>
           </a:ln>
         </p:spPr>
         <p:style>
@@ -5521,10 +5009,10 @@
       </p:sp>
       <p:sp>
         <p:nvSpPr>
-          <p:cNvPr id="18" name="Rechthoek: afgeronde hoeken 17">
-            <a:extLst>
-              <a:ext uri="{FF2B5EF4-FFF2-40B4-BE49-F238E27FC236}">
-                <a16:creationId xmlns:a16="http://schemas.microsoft.com/office/drawing/2014/main" id="{28A88665-BF3E-E3F3-AB00-50BE9B4D8B4B}"/>
+          <p:cNvPr id="6" name="Rechthoek 5">
+            <a:extLst>
+              <a:ext uri="{FF2B5EF4-FFF2-40B4-BE49-F238E27FC236}">
+                <a16:creationId xmlns:a16="http://schemas.microsoft.com/office/drawing/2014/main" id="{09EB5E0E-9ABC-5684-3A10-0E633ACDC083}"/>
               </a:ext>
             </a:extLst>
           </p:cNvPr>
@@ -5533,17 +5021,17 @@
         </p:nvSpPr>
         <p:spPr>
           <a:xfrm>
-            <a:off x="1929207" y="2374257"/>
-            <a:ext cx="9938328" cy="1009216"/>
-          </a:xfrm>
-          <a:prstGeom prst="roundRect">
-            <a:avLst/>
-          </a:prstGeom>
-          <a:noFill/>
-          <a:ln w="28575">
-            <a:solidFill>
-              <a:schemeClr val="accent6"/>
-            </a:solidFill>
+            <a:off x="-13099" y="1884880"/>
+            <a:ext cx="1939855" cy="2543429"/>
+          </a:xfrm>
+          <a:prstGeom prst="rect">
+            <a:avLst/>
+          </a:prstGeom>
+          <a:solidFill>
+            <a:schemeClr val="bg1"/>
+          </a:solidFill>
+          <a:ln>
+            <a:noFill/>
           </a:ln>
         </p:spPr>
         <p:style>
@@ -5571,12 +5059,745 @@
           </a:p>
         </p:txBody>
       </p:sp>
-      <p:sp>
-        <p:nvSpPr>
-          <p:cNvPr id="19" name="Rechthoek: afgeronde hoeken 18">
-            <a:extLst>
-              <a:ext uri="{FF2B5EF4-FFF2-40B4-BE49-F238E27FC236}">
-                <a16:creationId xmlns:a16="http://schemas.microsoft.com/office/drawing/2014/main" id="{7995BDD8-DC06-089B-52B7-D5879A535AFE}"/>
+      <p:pic>
+        <p:nvPicPr>
+          <p:cNvPr id="11" name="Graphic 10">
+            <a:extLst>
+              <a:ext uri="{FF2B5EF4-FFF2-40B4-BE49-F238E27FC236}">
+                <a16:creationId xmlns:a16="http://schemas.microsoft.com/office/drawing/2014/main" id="{FA2E2AA6-568F-6F31-ABDC-C392286751A0}"/>
+              </a:ext>
+            </a:extLst>
+          </p:cNvPr>
+          <p:cNvPicPr>
+            <a:picLocks noChangeAspect="1"/>
+          </p:cNvPicPr>
+          <p:nvPr/>
+        </p:nvPicPr>
+        <p:blipFill rotWithShape="1">
+          <a:blip r:embed="rId2">
+            <a:extLst>
+              <a:ext uri="{28A0092B-C50C-407E-A947-70E740481C1C}">
+                <a14:useLocalDpi xmlns:a14="http://schemas.microsoft.com/office/drawing/2010/main" val="0"/>
+              </a:ext>
+              <a:ext uri="{96DAC541-7B7A-43D3-8B79-37D633B846F1}">
+                <asvg:svgBlip xmlns:asvg="http://schemas.microsoft.com/office/drawing/2016/SVG/main" r:embed="rId3"/>
+              </a:ext>
+            </a:extLst>
+          </a:blip>
+          <a:srcRect l="48373" t="19414" r="42082" b="69255"/>
+          <a:stretch/>
+        </p:blipFill>
+        <p:spPr>
+          <a:xfrm>
+            <a:off x="1849510" y="4977221"/>
+            <a:ext cx="1166949" cy="1214847"/>
+          </a:xfrm>
+          <a:prstGeom prst="rect">
+            <a:avLst/>
+          </a:prstGeom>
+        </p:spPr>
+      </p:pic>
+      <p:sp>
+        <p:nvSpPr>
+          <p:cNvPr id="12" name="Tekstvak 11">
+            <a:extLst>
+              <a:ext uri="{FF2B5EF4-FFF2-40B4-BE49-F238E27FC236}">
+                <a16:creationId xmlns:a16="http://schemas.microsoft.com/office/drawing/2014/main" id="{BF1BD778-02C9-FA84-C30B-CECCDA06D699}"/>
+              </a:ext>
+            </a:extLst>
+          </p:cNvPr>
+          <p:cNvSpPr txBox="1"/>
+          <p:nvPr/>
+        </p:nvSpPr>
+        <p:spPr>
+          <a:xfrm>
+            <a:off x="78378" y="2377188"/>
+            <a:ext cx="1685077" cy="369332"/>
+          </a:xfrm>
+          <a:prstGeom prst="rect">
+            <a:avLst/>
+          </a:prstGeom>
+          <a:noFill/>
+        </p:spPr>
+        <p:txBody>
+          <a:bodyPr wrap="none" rtlCol="0">
+            <a:spAutoFit/>
+          </a:bodyPr>
+          <a:lstStyle/>
+          <a:p>
+            <a:r>
+              <a:rPr lang="en-US" dirty="0">
+                <a:latin typeface="Arial" panose="020B0604020202020204" pitchFamily="34" charset="0"/>
+                <a:cs typeface="Arial" panose="020B0604020202020204" pitchFamily="34" charset="0"/>
+              </a:rPr>
+              <a:t>PPI databases</a:t>
+            </a:r>
+            <a:endParaRPr lang="nl-NL" dirty="0">
+              <a:latin typeface="Arial" panose="020B0604020202020204" pitchFamily="34" charset="0"/>
+              <a:cs typeface="Arial" panose="020B0604020202020204" pitchFamily="34" charset="0"/>
+            </a:endParaRPr>
+          </a:p>
+        </p:txBody>
+      </p:sp>
+      <p:cxnSp>
+        <p:nvCxnSpPr>
+          <p:cNvPr id="14" name="Rechte verbindingslijn 13">
+            <a:extLst>
+              <a:ext uri="{FF2B5EF4-FFF2-40B4-BE49-F238E27FC236}">
+                <a16:creationId xmlns:a16="http://schemas.microsoft.com/office/drawing/2014/main" id="{7790E420-02CC-D059-F0B8-5F17AACD97A8}"/>
+              </a:ext>
+            </a:extLst>
+          </p:cNvPr>
+          <p:cNvCxnSpPr/>
+          <p:nvPr/>
+        </p:nvCxnSpPr>
+        <p:spPr>
+          <a:xfrm>
+            <a:off x="1763455" y="2124891"/>
+            <a:ext cx="0" cy="931225"/>
+          </a:xfrm>
+          <a:prstGeom prst="line">
+            <a:avLst/>
+          </a:prstGeom>
+          <a:ln w="19050">
+            <a:solidFill>
+              <a:schemeClr val="tx1"/>
+            </a:solidFill>
+          </a:ln>
+        </p:spPr>
+        <p:style>
+          <a:lnRef idx="1">
+            <a:schemeClr val="dk1"/>
+          </a:lnRef>
+          <a:fillRef idx="0">
+            <a:schemeClr val="dk1"/>
+          </a:fillRef>
+          <a:effectRef idx="0">
+            <a:schemeClr val="dk1"/>
+          </a:effectRef>
+          <a:fontRef idx="minor">
+            <a:schemeClr val="tx1"/>
+          </a:fontRef>
+        </p:style>
+      </p:cxnSp>
+      <p:cxnSp>
+        <p:nvCxnSpPr>
+          <p:cNvPr id="15" name="Rechte verbindingslijn 14">
+            <a:extLst>
+              <a:ext uri="{FF2B5EF4-FFF2-40B4-BE49-F238E27FC236}">
+                <a16:creationId xmlns:a16="http://schemas.microsoft.com/office/drawing/2014/main" id="{BAAEBD2E-E7AA-BBC7-9FB5-1002141135AB}"/>
+              </a:ext>
+            </a:extLst>
+          </p:cNvPr>
+          <p:cNvCxnSpPr>
+            <a:cxnSpLocks/>
+          </p:cNvCxnSpPr>
+          <p:nvPr/>
+        </p:nvCxnSpPr>
+        <p:spPr>
+          <a:xfrm>
+            <a:off x="1763455" y="3291453"/>
+            <a:ext cx="0" cy="377330"/>
+          </a:xfrm>
+          <a:prstGeom prst="line">
+            <a:avLst/>
+          </a:prstGeom>
+          <a:ln w="19050">
+            <a:solidFill>
+              <a:schemeClr val="tx1"/>
+            </a:solidFill>
+          </a:ln>
+        </p:spPr>
+        <p:style>
+          <a:lnRef idx="1">
+            <a:schemeClr val="dk1"/>
+          </a:lnRef>
+          <a:fillRef idx="0">
+            <a:schemeClr val="dk1"/>
+          </a:fillRef>
+          <a:effectRef idx="0">
+            <a:schemeClr val="dk1"/>
+          </a:effectRef>
+          <a:fontRef idx="minor">
+            <a:schemeClr val="tx1"/>
+          </a:fontRef>
+        </p:style>
+      </p:cxnSp>
+      <p:cxnSp>
+        <p:nvCxnSpPr>
+          <p:cNvPr id="17" name="Rechte verbindingslijn 16">
+            <a:extLst>
+              <a:ext uri="{FF2B5EF4-FFF2-40B4-BE49-F238E27FC236}">
+                <a16:creationId xmlns:a16="http://schemas.microsoft.com/office/drawing/2014/main" id="{EFC66ED4-5131-0ADC-643C-9C0151C6B389}"/>
+              </a:ext>
+            </a:extLst>
+          </p:cNvPr>
+          <p:cNvCxnSpPr>
+            <a:cxnSpLocks/>
+          </p:cNvCxnSpPr>
+          <p:nvPr/>
+        </p:nvCxnSpPr>
+        <p:spPr>
+          <a:xfrm>
+            <a:off x="1763455" y="3818771"/>
+            <a:ext cx="0" cy="377330"/>
+          </a:xfrm>
+          <a:prstGeom prst="line">
+            <a:avLst/>
+          </a:prstGeom>
+          <a:ln w="19050">
+            <a:solidFill>
+              <a:schemeClr val="tx1"/>
+            </a:solidFill>
+          </a:ln>
+        </p:spPr>
+        <p:style>
+          <a:lnRef idx="1">
+            <a:schemeClr val="dk1"/>
+          </a:lnRef>
+          <a:fillRef idx="0">
+            <a:schemeClr val="dk1"/>
+          </a:fillRef>
+          <a:effectRef idx="0">
+            <a:schemeClr val="dk1"/>
+          </a:effectRef>
+          <a:fontRef idx="minor">
+            <a:schemeClr val="tx1"/>
+          </a:fontRef>
+        </p:style>
+      </p:cxnSp>
+      <p:sp>
+        <p:nvSpPr>
+          <p:cNvPr id="18" name="Tekstvak 17">
+            <a:extLst>
+              <a:ext uri="{FF2B5EF4-FFF2-40B4-BE49-F238E27FC236}">
+                <a16:creationId xmlns:a16="http://schemas.microsoft.com/office/drawing/2014/main" id="{49093CD2-C91A-54E1-2229-839B6CBC1024}"/>
+              </a:ext>
+            </a:extLst>
+          </p:cNvPr>
+          <p:cNvSpPr txBox="1"/>
+          <p:nvPr/>
+        </p:nvSpPr>
+        <p:spPr>
+          <a:xfrm>
+            <a:off x="537148" y="3270676"/>
+            <a:ext cx="1184940" cy="369332"/>
+          </a:xfrm>
+          <a:prstGeom prst="rect">
+            <a:avLst/>
+          </a:prstGeom>
+          <a:noFill/>
+        </p:spPr>
+        <p:txBody>
+          <a:bodyPr wrap="none" rtlCol="0">
+            <a:spAutoFit/>
+          </a:bodyPr>
+          <a:lstStyle/>
+          <a:p>
+            <a:r>
+              <a:rPr lang="en-US" dirty="0">
+                <a:latin typeface="Arial" panose="020B0604020202020204" pitchFamily="34" charset="0"/>
+                <a:cs typeface="Arial" panose="020B0604020202020204" pitchFamily="34" charset="0"/>
+              </a:rPr>
+              <a:t>GO terms</a:t>
+            </a:r>
+            <a:endParaRPr lang="nl-NL" dirty="0">
+              <a:latin typeface="Arial" panose="020B0604020202020204" pitchFamily="34" charset="0"/>
+              <a:cs typeface="Arial" panose="020B0604020202020204" pitchFamily="34" charset="0"/>
+            </a:endParaRPr>
+          </a:p>
+        </p:txBody>
+      </p:sp>
+      <p:sp>
+        <p:nvSpPr>
+          <p:cNvPr id="19" name="Tekstvak 18">
+            <a:extLst>
+              <a:ext uri="{FF2B5EF4-FFF2-40B4-BE49-F238E27FC236}">
+                <a16:creationId xmlns:a16="http://schemas.microsoft.com/office/drawing/2014/main" id="{E957F71D-CA5B-C904-7396-37456111BAB5}"/>
+              </a:ext>
+            </a:extLst>
+          </p:cNvPr>
+          <p:cNvSpPr txBox="1"/>
+          <p:nvPr/>
+        </p:nvSpPr>
+        <p:spPr>
+          <a:xfrm>
+            <a:off x="82734" y="3805786"/>
+            <a:ext cx="1685077" cy="369332"/>
+          </a:xfrm>
+          <a:prstGeom prst="rect">
+            <a:avLst/>
+          </a:prstGeom>
+          <a:noFill/>
+        </p:spPr>
+        <p:txBody>
+          <a:bodyPr wrap="none" rtlCol="0">
+            <a:spAutoFit/>
+          </a:bodyPr>
+          <a:lstStyle/>
+          <a:p>
+            <a:r>
+              <a:rPr lang="en-US" dirty="0">
+                <a:latin typeface="Arial" panose="020B0604020202020204" pitchFamily="34" charset="0"/>
+                <a:cs typeface="Arial" panose="020B0604020202020204" pitchFamily="34" charset="0"/>
+              </a:rPr>
+              <a:t>Danyang 2022</a:t>
+            </a:r>
+            <a:endParaRPr lang="nl-NL" dirty="0">
+              <a:latin typeface="Arial" panose="020B0604020202020204" pitchFamily="34" charset="0"/>
+              <a:cs typeface="Arial" panose="020B0604020202020204" pitchFamily="34" charset="0"/>
+            </a:endParaRPr>
+          </a:p>
+        </p:txBody>
+      </p:sp>
+      <p:sp>
+        <p:nvSpPr>
+          <p:cNvPr id="20" name="Tekstvak 19">
+            <a:extLst>
+              <a:ext uri="{FF2B5EF4-FFF2-40B4-BE49-F238E27FC236}">
+                <a16:creationId xmlns:a16="http://schemas.microsoft.com/office/drawing/2014/main" id="{5A47E4B1-D717-2F42-F75C-69110A6185C5}"/>
+              </a:ext>
+            </a:extLst>
+          </p:cNvPr>
+          <p:cNvSpPr txBox="1"/>
+          <p:nvPr/>
+        </p:nvSpPr>
+        <p:spPr>
+          <a:xfrm>
+            <a:off x="10577768" y="2056493"/>
+            <a:ext cx="1603324" cy="276999"/>
+          </a:xfrm>
+          <a:prstGeom prst="rect">
+            <a:avLst/>
+          </a:prstGeom>
+          <a:noFill/>
+        </p:spPr>
+        <p:txBody>
+          <a:bodyPr wrap="none" rtlCol="0">
+            <a:spAutoFit/>
+          </a:bodyPr>
+          <a:lstStyle/>
+          <a:p>
+            <a:r>
+              <a:rPr lang="en-US" sz="1200" dirty="0">
+                <a:latin typeface="Arial" panose="020B0604020202020204" pitchFamily="34" charset="0"/>
+                <a:cs typeface="Arial" panose="020B0604020202020204" pitchFamily="34" charset="0"/>
+              </a:rPr>
+              <a:t>STRING – exp score</a:t>
+            </a:r>
+            <a:endParaRPr lang="nl-NL" sz="1200" dirty="0">
+              <a:latin typeface="Arial" panose="020B0604020202020204" pitchFamily="34" charset="0"/>
+              <a:cs typeface="Arial" panose="020B0604020202020204" pitchFamily="34" charset="0"/>
+            </a:endParaRPr>
+          </a:p>
+        </p:txBody>
+      </p:sp>
+      <p:sp>
+        <p:nvSpPr>
+          <p:cNvPr id="21" name="Tekstvak 20">
+            <a:extLst>
+              <a:ext uri="{FF2B5EF4-FFF2-40B4-BE49-F238E27FC236}">
+                <a16:creationId xmlns:a16="http://schemas.microsoft.com/office/drawing/2014/main" id="{C68D8FED-DCB7-4BD7-577F-E5AFA4DF4B03}"/>
+              </a:ext>
+            </a:extLst>
+          </p:cNvPr>
+          <p:cNvSpPr txBox="1"/>
+          <p:nvPr/>
+        </p:nvSpPr>
+        <p:spPr>
+          <a:xfrm>
+            <a:off x="10580661" y="2202456"/>
+            <a:ext cx="1611339" cy="276999"/>
+          </a:xfrm>
+          <a:prstGeom prst="rect">
+            <a:avLst/>
+          </a:prstGeom>
+          <a:noFill/>
+        </p:spPr>
+        <p:txBody>
+          <a:bodyPr wrap="none" rtlCol="0">
+            <a:spAutoFit/>
+          </a:bodyPr>
+          <a:lstStyle/>
+          <a:p>
+            <a:r>
+              <a:rPr lang="en-US" sz="1200" dirty="0">
+                <a:latin typeface="Arial" panose="020B0604020202020204" pitchFamily="34" charset="0"/>
+                <a:cs typeface="Arial" panose="020B0604020202020204" pitchFamily="34" charset="0"/>
+              </a:rPr>
+              <a:t>STRING – gen score</a:t>
+            </a:r>
+            <a:endParaRPr lang="nl-NL" sz="1200" dirty="0">
+              <a:latin typeface="Arial" panose="020B0604020202020204" pitchFamily="34" charset="0"/>
+              <a:cs typeface="Arial" panose="020B0604020202020204" pitchFamily="34" charset="0"/>
+            </a:endParaRPr>
+          </a:p>
+        </p:txBody>
+      </p:sp>
+      <p:sp>
+        <p:nvSpPr>
+          <p:cNvPr id="22" name="Tekstvak 21">
+            <a:extLst>
+              <a:ext uri="{FF2B5EF4-FFF2-40B4-BE49-F238E27FC236}">
+                <a16:creationId xmlns:a16="http://schemas.microsoft.com/office/drawing/2014/main" id="{4BF62B85-4C00-E877-F24B-B5F683FD40A2}"/>
+              </a:ext>
+            </a:extLst>
+          </p:cNvPr>
+          <p:cNvSpPr txBox="1"/>
+          <p:nvPr/>
+        </p:nvSpPr>
+        <p:spPr>
+          <a:xfrm>
+            <a:off x="10580661" y="3260238"/>
+            <a:ext cx="1079142" cy="276999"/>
+          </a:xfrm>
+          <a:prstGeom prst="rect">
+            <a:avLst/>
+          </a:prstGeom>
+          <a:noFill/>
+        </p:spPr>
+        <p:txBody>
+          <a:bodyPr wrap="none" rtlCol="0">
+            <a:spAutoFit/>
+          </a:bodyPr>
+          <a:lstStyle/>
+          <a:p>
+            <a:r>
+              <a:rPr lang="en-US" sz="1200" dirty="0">
+                <a:latin typeface="Arial" panose="020B0604020202020204" pitchFamily="34" charset="0"/>
+                <a:cs typeface="Arial" panose="020B0604020202020204" pitchFamily="34" charset="0"/>
+              </a:rPr>
+              <a:t>phagocytosis</a:t>
+            </a:r>
+            <a:endParaRPr lang="nl-NL" sz="1200" dirty="0">
+              <a:latin typeface="Arial" panose="020B0604020202020204" pitchFamily="34" charset="0"/>
+              <a:cs typeface="Arial" panose="020B0604020202020204" pitchFamily="34" charset="0"/>
+            </a:endParaRPr>
+          </a:p>
+        </p:txBody>
+      </p:sp>
+      <p:sp>
+        <p:nvSpPr>
+          <p:cNvPr id="23" name="Tekstvak 22">
+            <a:extLst>
+              <a:ext uri="{FF2B5EF4-FFF2-40B4-BE49-F238E27FC236}">
+                <a16:creationId xmlns:a16="http://schemas.microsoft.com/office/drawing/2014/main" id="{101F1F03-242F-F3DA-D1C6-16185B9D4619}"/>
+              </a:ext>
+            </a:extLst>
+          </p:cNvPr>
+          <p:cNvSpPr txBox="1"/>
+          <p:nvPr/>
+        </p:nvSpPr>
+        <p:spPr>
+          <a:xfrm>
+            <a:off x="10580661" y="3420770"/>
+            <a:ext cx="1308371" cy="276999"/>
+          </a:xfrm>
+          <a:prstGeom prst="rect">
+            <a:avLst/>
+          </a:prstGeom>
+          <a:noFill/>
+        </p:spPr>
+        <p:txBody>
+          <a:bodyPr wrap="none" rtlCol="0">
+            <a:spAutoFit/>
+          </a:bodyPr>
+          <a:lstStyle/>
+          <a:p>
+            <a:r>
+              <a:rPr lang="en-US" sz="1200" dirty="0">
+                <a:latin typeface="Arial" panose="020B0604020202020204" pitchFamily="34" charset="0"/>
+                <a:cs typeface="Arial" panose="020B0604020202020204" pitchFamily="34" charset="0"/>
+              </a:rPr>
+              <a:t>synapse pruning</a:t>
+            </a:r>
+            <a:endParaRPr lang="nl-NL" sz="1200" dirty="0">
+              <a:latin typeface="Arial" panose="020B0604020202020204" pitchFamily="34" charset="0"/>
+              <a:cs typeface="Arial" panose="020B0604020202020204" pitchFamily="34" charset="0"/>
+            </a:endParaRPr>
+          </a:p>
+        </p:txBody>
+      </p:sp>
+      <p:sp>
+        <p:nvSpPr>
+          <p:cNvPr id="24" name="Tekstvak 23">
+            <a:extLst>
+              <a:ext uri="{FF2B5EF4-FFF2-40B4-BE49-F238E27FC236}">
+                <a16:creationId xmlns:a16="http://schemas.microsoft.com/office/drawing/2014/main" id="{4FF09DBF-B599-3BB6-520F-487A7A89BF64}"/>
+              </a:ext>
+            </a:extLst>
+          </p:cNvPr>
+          <p:cNvSpPr txBox="1"/>
+          <p:nvPr/>
+        </p:nvSpPr>
+        <p:spPr>
+          <a:xfrm>
+            <a:off x="10580661" y="3772320"/>
+            <a:ext cx="1273105" cy="276999"/>
+          </a:xfrm>
+          <a:prstGeom prst="rect">
+            <a:avLst/>
+          </a:prstGeom>
+          <a:noFill/>
+        </p:spPr>
+        <p:txBody>
+          <a:bodyPr wrap="none" rtlCol="0">
+            <a:spAutoFit/>
+          </a:bodyPr>
+          <a:lstStyle/>
+          <a:p>
+            <a:r>
+              <a:rPr lang="en-US" sz="1200" dirty="0">
+                <a:latin typeface="Arial" panose="020B0604020202020204" pitchFamily="34" charset="0"/>
+                <a:cs typeface="Arial" panose="020B0604020202020204" pitchFamily="34" charset="0"/>
+              </a:rPr>
+              <a:t>log2Foldchange</a:t>
+            </a:r>
+            <a:endParaRPr lang="nl-NL" sz="1200" dirty="0">
+              <a:latin typeface="Arial" panose="020B0604020202020204" pitchFamily="34" charset="0"/>
+              <a:cs typeface="Arial" panose="020B0604020202020204" pitchFamily="34" charset="0"/>
+            </a:endParaRPr>
+          </a:p>
+        </p:txBody>
+      </p:sp>
+      <p:sp>
+        <p:nvSpPr>
+          <p:cNvPr id="25" name="Tekstvak 24">
+            <a:extLst>
+              <a:ext uri="{FF2B5EF4-FFF2-40B4-BE49-F238E27FC236}">
+                <a16:creationId xmlns:a16="http://schemas.microsoft.com/office/drawing/2014/main" id="{617832D7-E072-8329-14B0-688B4A31B3AD}"/>
+              </a:ext>
+            </a:extLst>
+          </p:cNvPr>
+          <p:cNvSpPr txBox="1"/>
+          <p:nvPr/>
+        </p:nvSpPr>
+        <p:spPr>
+          <a:xfrm>
+            <a:off x="10580661" y="3931634"/>
+            <a:ext cx="1000595" cy="276999"/>
+          </a:xfrm>
+          <a:prstGeom prst="rect">
+            <a:avLst/>
+          </a:prstGeom>
+          <a:noFill/>
+        </p:spPr>
+        <p:txBody>
+          <a:bodyPr wrap="none" rtlCol="0">
+            <a:spAutoFit/>
+          </a:bodyPr>
+          <a:lstStyle/>
+          <a:p>
+            <a:r>
+              <a:rPr lang="en-US" sz="1200" dirty="0">
+                <a:latin typeface="Arial" panose="020B0604020202020204" pitchFamily="34" charset="0"/>
+                <a:cs typeface="Arial" panose="020B0604020202020204" pitchFamily="34" charset="0"/>
+              </a:rPr>
+              <a:t>-log10(padj)</a:t>
+            </a:r>
+            <a:endParaRPr lang="nl-NL" sz="1200" dirty="0">
+              <a:latin typeface="Arial" panose="020B0604020202020204" pitchFamily="34" charset="0"/>
+              <a:cs typeface="Arial" panose="020B0604020202020204" pitchFamily="34" charset="0"/>
+            </a:endParaRPr>
+          </a:p>
+        </p:txBody>
+      </p:sp>
+      <p:pic>
+        <p:nvPicPr>
+          <p:cNvPr id="26" name="Graphic 25">
+            <a:extLst>
+              <a:ext uri="{FF2B5EF4-FFF2-40B4-BE49-F238E27FC236}">
+                <a16:creationId xmlns:a16="http://schemas.microsoft.com/office/drawing/2014/main" id="{08CE483E-2CEB-5442-E4D4-D313D52BBB85}"/>
+              </a:ext>
+            </a:extLst>
+          </p:cNvPr>
+          <p:cNvPicPr>
+            <a:picLocks noChangeAspect="1"/>
+          </p:cNvPicPr>
+          <p:nvPr/>
+        </p:nvPicPr>
+        <p:blipFill rotWithShape="1">
+          <a:blip r:embed="rId2">
+            <a:extLst>
+              <a:ext uri="{28A0092B-C50C-407E-A947-70E740481C1C}">
+                <a14:useLocalDpi xmlns:a14="http://schemas.microsoft.com/office/drawing/2010/main" val="0"/>
+              </a:ext>
+              <a:ext uri="{96DAC541-7B7A-43D3-8B79-37D633B846F1}">
+                <asvg:svgBlip xmlns:asvg="http://schemas.microsoft.com/office/drawing/2016/SVG/main" r:embed="rId3"/>
+              </a:ext>
+            </a:extLst>
+          </a:blip>
+          <a:srcRect l="48373" t="31623" r="42082" b="57249"/>
+          <a:stretch/>
+        </p:blipFill>
+        <p:spPr>
+          <a:xfrm>
+            <a:off x="3648615" y="4959805"/>
+            <a:ext cx="1166949" cy="1193074"/>
+          </a:xfrm>
+          <a:prstGeom prst="rect">
+            <a:avLst/>
+          </a:prstGeom>
+        </p:spPr>
+      </p:pic>
+      <p:pic>
+        <p:nvPicPr>
+          <p:cNvPr id="27" name="Graphic 26">
+            <a:extLst>
+              <a:ext uri="{FF2B5EF4-FFF2-40B4-BE49-F238E27FC236}">
+                <a16:creationId xmlns:a16="http://schemas.microsoft.com/office/drawing/2014/main" id="{45A308F6-32EE-BA76-A498-3B0A45FA8880}"/>
+              </a:ext>
+            </a:extLst>
+          </p:cNvPr>
+          <p:cNvPicPr>
+            <a:picLocks noChangeAspect="1"/>
+          </p:cNvPicPr>
+          <p:nvPr/>
+        </p:nvPicPr>
+        <p:blipFill rotWithShape="1">
+          <a:blip r:embed="rId2">
+            <a:extLst>
+              <a:ext uri="{28A0092B-C50C-407E-A947-70E740481C1C}">
+                <a14:useLocalDpi xmlns:a14="http://schemas.microsoft.com/office/drawing/2010/main" val="0"/>
+              </a:ext>
+              <a:ext uri="{96DAC541-7B7A-43D3-8B79-37D633B846F1}">
+                <asvg:svgBlip xmlns:asvg="http://schemas.microsoft.com/office/drawing/2016/SVG/main" r:embed="rId3"/>
+              </a:ext>
+            </a:extLst>
+          </a:blip>
+          <a:srcRect l="48373" t="43355" r="40635" b="43974"/>
+          <a:stretch/>
+        </p:blipFill>
+        <p:spPr>
+          <a:xfrm>
+            <a:off x="4775806" y="4905376"/>
+            <a:ext cx="1343828" cy="1358536"/>
+          </a:xfrm>
+          <a:prstGeom prst="rect">
+            <a:avLst/>
+          </a:prstGeom>
+        </p:spPr>
+      </p:pic>
+      <p:pic>
+        <p:nvPicPr>
+          <p:cNvPr id="28" name="Graphic 27">
+            <a:extLst>
+              <a:ext uri="{FF2B5EF4-FFF2-40B4-BE49-F238E27FC236}">
+                <a16:creationId xmlns:a16="http://schemas.microsoft.com/office/drawing/2014/main" id="{F6C2458D-72E9-F5C9-62DC-DAF7E33E2188}"/>
+              </a:ext>
+            </a:extLst>
+          </p:cNvPr>
+          <p:cNvPicPr>
+            <a:picLocks noChangeAspect="1"/>
+          </p:cNvPicPr>
+          <p:nvPr/>
+        </p:nvPicPr>
+        <p:blipFill rotWithShape="1">
+          <a:blip r:embed="rId2">
+            <a:extLst>
+              <a:ext uri="{28A0092B-C50C-407E-A947-70E740481C1C}">
+                <a14:useLocalDpi xmlns:a14="http://schemas.microsoft.com/office/drawing/2010/main" val="0"/>
+              </a:ext>
+              <a:ext uri="{96DAC541-7B7A-43D3-8B79-37D633B846F1}">
+                <asvg:svgBlip xmlns:asvg="http://schemas.microsoft.com/office/drawing/2016/SVG/main" r:embed="rId3"/>
+              </a:ext>
+            </a:extLst>
+          </a:blip>
+          <a:srcRect l="48373" t="55532" r="40635" b="31797"/>
+          <a:stretch/>
+        </p:blipFill>
+        <p:spPr>
+          <a:xfrm>
+            <a:off x="6215320" y="4886372"/>
+            <a:ext cx="1343828" cy="1358537"/>
+          </a:xfrm>
+          <a:prstGeom prst="rect">
+            <a:avLst/>
+          </a:prstGeom>
+        </p:spPr>
+      </p:pic>
+      <p:pic>
+        <p:nvPicPr>
+          <p:cNvPr id="29" name="Graphic 28">
+            <a:extLst>
+              <a:ext uri="{FF2B5EF4-FFF2-40B4-BE49-F238E27FC236}">
+                <a16:creationId xmlns:a16="http://schemas.microsoft.com/office/drawing/2014/main" id="{B6862EF2-F373-6997-E277-80F92D591BE5}"/>
+              </a:ext>
+            </a:extLst>
+          </p:cNvPr>
+          <p:cNvPicPr>
+            <a:picLocks noChangeAspect="1"/>
+          </p:cNvPicPr>
+          <p:nvPr/>
+        </p:nvPicPr>
+        <p:blipFill rotWithShape="1">
+          <a:blip r:embed="rId2">
+            <a:extLst>
+              <a:ext uri="{28A0092B-C50C-407E-A947-70E740481C1C}">
+                <a14:useLocalDpi xmlns:a14="http://schemas.microsoft.com/office/drawing/2010/main" val="0"/>
+              </a:ext>
+              <a:ext uri="{96DAC541-7B7A-43D3-8B79-37D633B846F1}">
+                <asvg:svgBlip xmlns:asvg="http://schemas.microsoft.com/office/drawing/2016/SVG/main" r:embed="rId3"/>
+              </a:ext>
+            </a:extLst>
+          </a:blip>
+          <a:srcRect l="48373" t="83779" r="40635" b="5972"/>
+          <a:stretch/>
+        </p:blipFill>
+        <p:spPr>
+          <a:xfrm>
+            <a:off x="8998662" y="5125858"/>
+            <a:ext cx="1343828" cy="1098865"/>
+          </a:xfrm>
+          <a:prstGeom prst="rect">
+            <a:avLst/>
+          </a:prstGeom>
+        </p:spPr>
+      </p:pic>
+      <p:pic>
+        <p:nvPicPr>
+          <p:cNvPr id="30" name="Graphic 29">
+            <a:extLst>
+              <a:ext uri="{FF2B5EF4-FFF2-40B4-BE49-F238E27FC236}">
+                <a16:creationId xmlns:a16="http://schemas.microsoft.com/office/drawing/2014/main" id="{E282EC55-5A58-D1AB-327F-883E4A84ABBD}"/>
+              </a:ext>
+            </a:extLst>
+          </p:cNvPr>
+          <p:cNvPicPr>
+            <a:picLocks noChangeAspect="1"/>
+          </p:cNvPicPr>
+          <p:nvPr/>
+        </p:nvPicPr>
+        <p:blipFill rotWithShape="1">
+          <a:blip r:embed="rId2">
+            <a:extLst>
+              <a:ext uri="{28A0092B-C50C-407E-A947-70E740481C1C}">
+                <a14:useLocalDpi xmlns:a14="http://schemas.microsoft.com/office/drawing/2010/main" val="0"/>
+              </a:ext>
+              <a:ext uri="{96DAC541-7B7A-43D3-8B79-37D633B846F1}">
+                <asvg:svgBlip xmlns:asvg="http://schemas.microsoft.com/office/drawing/2016/SVG/main" r:embed="rId3"/>
+              </a:ext>
+            </a:extLst>
+          </a:blip>
+          <a:srcRect l="62173" t="6691" r="28281" b="81450"/>
+          <a:stretch/>
+        </p:blipFill>
+        <p:spPr>
+          <a:xfrm>
+            <a:off x="9914008" y="4905376"/>
+            <a:ext cx="1166950" cy="1271451"/>
+          </a:xfrm>
+          <a:prstGeom prst="rect">
+            <a:avLst/>
+          </a:prstGeom>
+        </p:spPr>
+      </p:pic>
+      <p:sp>
+        <p:nvSpPr>
+          <p:cNvPr id="31" name="Rechthoek 30">
+            <a:extLst>
+              <a:ext uri="{FF2B5EF4-FFF2-40B4-BE49-F238E27FC236}">
+                <a16:creationId xmlns:a16="http://schemas.microsoft.com/office/drawing/2014/main" id="{79B55E7D-3D6B-6520-27D9-A4C5990EED85}"/>
               </a:ext>
             </a:extLst>
           </p:cNvPr>
@@ -5585,17 +5806,17 @@
         </p:nvSpPr>
         <p:spPr>
           <a:xfrm>
-            <a:off x="1929207" y="3615145"/>
-            <a:ext cx="9938328" cy="2743101"/>
-          </a:xfrm>
-          <a:prstGeom prst="roundRect">
-            <a:avLst/>
-          </a:prstGeom>
-          <a:noFill/>
-          <a:ln w="28575">
-            <a:solidFill>
-              <a:schemeClr val="accent2"/>
-            </a:solidFill>
+            <a:off x="8453114" y="4886372"/>
+            <a:ext cx="582678" cy="1453468"/>
+          </a:xfrm>
+          <a:prstGeom prst="rect">
+            <a:avLst/>
+          </a:prstGeom>
+          <a:solidFill>
+            <a:schemeClr val="bg1"/>
+          </a:solidFill>
+          <a:ln>
+            <a:noFill/>
           </a:ln>
         </p:spPr>
         <p:style>
@@ -5625,10 +5846,62 @@
       </p:sp>
       <p:sp>
         <p:nvSpPr>
-          <p:cNvPr id="20" name="Tekstvak 19">
-            <a:extLst>
-              <a:ext uri="{FF2B5EF4-FFF2-40B4-BE49-F238E27FC236}">
-                <a16:creationId xmlns:a16="http://schemas.microsoft.com/office/drawing/2014/main" id="{F2486826-1AB8-03B1-3215-93366066623A}"/>
+          <p:cNvPr id="32" name="Rechthoek 31">
+            <a:extLst>
+              <a:ext uri="{FF2B5EF4-FFF2-40B4-BE49-F238E27FC236}">
+                <a16:creationId xmlns:a16="http://schemas.microsoft.com/office/drawing/2014/main" id="{EFC2275F-BB5D-342D-1FFB-53223BB71124}"/>
+              </a:ext>
+            </a:extLst>
+          </p:cNvPr>
+          <p:cNvSpPr/>
+          <p:nvPr/>
+        </p:nvSpPr>
+        <p:spPr>
+          <a:xfrm>
+            <a:off x="10206144" y="5125858"/>
+            <a:ext cx="582678" cy="177662"/>
+          </a:xfrm>
+          <a:prstGeom prst="rect">
+            <a:avLst/>
+          </a:prstGeom>
+          <a:solidFill>
+            <a:schemeClr val="bg1"/>
+          </a:solidFill>
+          <a:ln>
+            <a:noFill/>
+          </a:ln>
+        </p:spPr>
+        <p:style>
+          <a:lnRef idx="2">
+            <a:schemeClr val="accent1">
+              <a:shade val="15000"/>
+            </a:schemeClr>
+          </a:lnRef>
+          <a:fillRef idx="1">
+            <a:schemeClr val="accent1"/>
+          </a:fillRef>
+          <a:effectRef idx="0">
+            <a:schemeClr val="accent1"/>
+          </a:effectRef>
+          <a:fontRef idx="minor">
+            <a:schemeClr val="lt1"/>
+          </a:fontRef>
+        </p:style>
+        <p:txBody>
+          <a:bodyPr rtlCol="0" anchor="ctr"/>
+          <a:lstStyle/>
+          <a:p>
+            <a:pPr algn="ctr"/>
+            <a:endParaRPr lang="nl-NL"/>
+          </a:p>
+        </p:txBody>
+      </p:sp>
+      <p:sp>
+        <p:nvSpPr>
+          <p:cNvPr id="33" name="Tekstvak 32">
+            <a:extLst>
+              <a:ext uri="{FF2B5EF4-FFF2-40B4-BE49-F238E27FC236}">
+                <a16:creationId xmlns:a16="http://schemas.microsoft.com/office/drawing/2014/main" id="{161ACBFC-8B34-2FB1-0DB1-C46E1B66FDB9}"/>
               </a:ext>
             </a:extLst>
           </p:cNvPr>
@@ -5637,8 +5910,8 @@
         </p:nvSpPr>
         <p:spPr>
           <a:xfrm>
-            <a:off x="98322" y="1306345"/>
-            <a:ext cx="1568699" cy="461665"/>
+            <a:off x="10138089" y="5058771"/>
+            <a:ext cx="375424" cy="292388"/>
           </a:xfrm>
           <a:prstGeom prst="rect">
             <a:avLst/>
@@ -5652,27 +5925,25 @@
           <a:lstStyle/>
           <a:p>
             <a:r>
-              <a:rPr lang="en-US" sz="2400" b="1" dirty="0">
-                <a:solidFill>
-                  <a:schemeClr val="accent1"/>
-                </a:solidFill>
+              <a:rPr lang="en-US" sz="1300" dirty="0">
+                <a:latin typeface="Arial" panose="020B0604020202020204" pitchFamily="34" charset="0"/>
+                <a:cs typeface="Arial" panose="020B0604020202020204" pitchFamily="34" charset="0"/>
               </a:rPr>
-              <a:t>Interactors</a:t>
-            </a:r>
-            <a:endParaRPr lang="nl-NL" sz="2400" b="1" dirty="0">
-              <a:solidFill>
-                <a:schemeClr val="accent1"/>
-              </a:solidFill>
+              <a:t>+3</a:t>
+            </a:r>
+            <a:endParaRPr lang="nl-NL" sz="1300" dirty="0">
+              <a:latin typeface="Arial" panose="020B0604020202020204" pitchFamily="34" charset="0"/>
+              <a:cs typeface="Arial" panose="020B0604020202020204" pitchFamily="34" charset="0"/>
             </a:endParaRPr>
           </a:p>
         </p:txBody>
       </p:sp>
       <p:sp>
         <p:nvSpPr>
-          <p:cNvPr id="21" name="Tekstvak 20">
-            <a:extLst>
-              <a:ext uri="{FF2B5EF4-FFF2-40B4-BE49-F238E27FC236}">
-                <a16:creationId xmlns:a16="http://schemas.microsoft.com/office/drawing/2014/main" id="{0D51B59B-4508-8435-2349-73BEB72B7A20}"/>
+          <p:cNvPr id="34" name="Tekstvak 33">
+            <a:extLst>
+              <a:ext uri="{FF2B5EF4-FFF2-40B4-BE49-F238E27FC236}">
+                <a16:creationId xmlns:a16="http://schemas.microsoft.com/office/drawing/2014/main" id="{8323823A-29B5-5853-02B2-EC6CA165D9A8}"/>
               </a:ext>
             </a:extLst>
           </p:cNvPr>
@@ -5681,8 +5952,8 @@
         </p:nvSpPr>
         <p:spPr>
           <a:xfrm>
-            <a:off x="55021" y="2417200"/>
-            <a:ext cx="1615250" cy="461665"/>
+            <a:off x="8725605" y="6136088"/>
+            <a:ext cx="1066318" cy="292388"/>
           </a:xfrm>
           <a:prstGeom prst="rect">
             <a:avLst/>
@@ -5696,27 +5967,25 @@
           <a:lstStyle/>
           <a:p>
             <a:r>
-              <a:rPr lang="en-US" sz="2400" b="1" dirty="0">
-                <a:solidFill>
-                  <a:schemeClr val="accent6"/>
-                </a:solidFill>
+              <a:rPr lang="en-US" sz="1300" dirty="0">
+                <a:latin typeface="Arial" panose="020B0604020202020204" pitchFamily="34" charset="0"/>
+                <a:cs typeface="Arial" panose="020B0604020202020204" pitchFamily="34" charset="0"/>
               </a:rPr>
-              <a:t>Descriptive</a:t>
-            </a:r>
-            <a:endParaRPr lang="nl-NL" sz="2400" b="1" dirty="0">
-              <a:solidFill>
-                <a:schemeClr val="accent6"/>
-              </a:solidFill>
+              <a:t>phagoHIGH</a:t>
+            </a:r>
+            <a:endParaRPr lang="nl-NL" sz="1300" dirty="0">
+              <a:latin typeface="Arial" panose="020B0604020202020204" pitchFamily="34" charset="0"/>
+              <a:cs typeface="Arial" panose="020B0604020202020204" pitchFamily="34" charset="0"/>
             </a:endParaRPr>
           </a:p>
         </p:txBody>
       </p:sp>
       <p:sp>
         <p:nvSpPr>
-          <p:cNvPr id="22" name="Tekstvak 21">
-            <a:extLst>
-              <a:ext uri="{FF2B5EF4-FFF2-40B4-BE49-F238E27FC236}">
-                <a16:creationId xmlns:a16="http://schemas.microsoft.com/office/drawing/2014/main" id="{F7E0AD72-7A29-9B39-A72D-95D2FCDCDDA1}"/>
+          <p:cNvPr id="35" name="Tekstvak 34">
+            <a:extLst>
+              <a:ext uri="{FF2B5EF4-FFF2-40B4-BE49-F238E27FC236}">
+                <a16:creationId xmlns:a16="http://schemas.microsoft.com/office/drawing/2014/main" id="{993C4C73-20B0-D19F-21E4-684A28332E7B}"/>
               </a:ext>
             </a:extLst>
           </p:cNvPr>
@@ -5725,8 +5994,8 @@
         </p:nvSpPr>
         <p:spPr>
           <a:xfrm>
-            <a:off x="106097" y="4591465"/>
-            <a:ext cx="1524776" cy="461665"/>
+            <a:off x="8723353" y="4847439"/>
+            <a:ext cx="1029449" cy="292388"/>
           </a:xfrm>
           <a:prstGeom prst="rect">
             <a:avLst/>
@@ -5740,17 +6009,141 @@
           <a:lstStyle/>
           <a:p>
             <a:r>
-              <a:rPr lang="en-US" sz="2400" b="1" dirty="0">
-                <a:solidFill>
-                  <a:schemeClr val="accent2"/>
-                </a:solidFill>
+              <a:rPr lang="en-US" sz="1300" dirty="0">
+                <a:latin typeface="Arial" panose="020B0604020202020204" pitchFamily="34" charset="0"/>
+                <a:cs typeface="Arial" panose="020B0604020202020204" pitchFamily="34" charset="0"/>
               </a:rPr>
-              <a:t>Functional</a:t>
-            </a:r>
-            <a:endParaRPr lang="nl-NL" sz="2400" b="1" dirty="0">
-              <a:solidFill>
-                <a:schemeClr val="accent2"/>
-              </a:solidFill>
+              <a:t>phagoLOW</a:t>
+            </a:r>
+            <a:endParaRPr lang="nl-NL" sz="1300" dirty="0">
+              <a:latin typeface="Arial" panose="020B0604020202020204" pitchFamily="34" charset="0"/>
+              <a:cs typeface="Arial" panose="020B0604020202020204" pitchFamily="34" charset="0"/>
+            </a:endParaRPr>
+          </a:p>
+        </p:txBody>
+      </p:sp>
+      <p:sp>
+        <p:nvSpPr>
+          <p:cNvPr id="36" name="Tekstvak 35">
+            <a:extLst>
+              <a:ext uri="{FF2B5EF4-FFF2-40B4-BE49-F238E27FC236}">
+                <a16:creationId xmlns:a16="http://schemas.microsoft.com/office/drawing/2014/main" id="{E6FC4D19-03F8-D016-376A-000973963B62}"/>
+              </a:ext>
+            </a:extLst>
+          </p:cNvPr>
+          <p:cNvSpPr txBox="1"/>
+          <p:nvPr/>
+        </p:nvSpPr>
+        <p:spPr>
+          <a:xfrm>
+            <a:off x="10594927" y="2502633"/>
+            <a:ext cx="1135247" cy="276999"/>
+          </a:xfrm>
+          <a:prstGeom prst="rect">
+            <a:avLst/>
+          </a:prstGeom>
+          <a:noFill/>
+        </p:spPr>
+        <p:txBody>
+          <a:bodyPr wrap="none" rtlCol="0">
+            <a:spAutoFit/>
+          </a:bodyPr>
+          <a:lstStyle/>
+          <a:p>
+            <a:r>
+              <a:rPr lang="en-US" sz="1200" dirty="0">
+                <a:latin typeface="Arial" panose="020B0604020202020204" pitchFamily="34" charset="0"/>
+                <a:cs typeface="Arial" panose="020B0604020202020204" pitchFamily="34" charset="0"/>
+              </a:rPr>
+              <a:t>IntAct - score </a:t>
+            </a:r>
+            <a:endParaRPr lang="nl-NL" sz="1200" dirty="0">
+              <a:latin typeface="Arial" panose="020B0604020202020204" pitchFamily="34" charset="0"/>
+              <a:cs typeface="Arial" panose="020B0604020202020204" pitchFamily="34" charset="0"/>
+            </a:endParaRPr>
+          </a:p>
+        </p:txBody>
+      </p:sp>
+      <p:sp>
+        <p:nvSpPr>
+          <p:cNvPr id="37" name="Tekstvak 36">
+            <a:extLst>
+              <a:ext uri="{FF2B5EF4-FFF2-40B4-BE49-F238E27FC236}">
+                <a16:creationId xmlns:a16="http://schemas.microsoft.com/office/drawing/2014/main" id="{66F5ECCD-9F4D-7AAE-6EFB-65500244A30B}"/>
+              </a:ext>
+            </a:extLst>
+          </p:cNvPr>
+          <p:cNvSpPr txBox="1"/>
+          <p:nvPr/>
+        </p:nvSpPr>
+        <p:spPr>
+          <a:xfrm>
+            <a:off x="10587050" y="2672802"/>
+            <a:ext cx="1688283" cy="276999"/>
+          </a:xfrm>
+          <a:prstGeom prst="rect">
+            <a:avLst/>
+          </a:prstGeom>
+          <a:noFill/>
+        </p:spPr>
+        <p:txBody>
+          <a:bodyPr wrap="none" rtlCol="0">
+            <a:spAutoFit/>
+          </a:bodyPr>
+          <a:lstStyle/>
+          <a:p>
+            <a:r>
+              <a:rPr lang="en-US" sz="1200" dirty="0">
+                <a:latin typeface="Arial" panose="020B0604020202020204" pitchFamily="34" charset="0"/>
+                <a:cs typeface="Arial" panose="020B0604020202020204" pitchFamily="34" charset="0"/>
+              </a:rPr>
+              <a:t>BioGRID – nr of pubs </a:t>
+            </a:r>
+            <a:endParaRPr lang="nl-NL" sz="1200" dirty="0">
+              <a:latin typeface="Arial" panose="020B0604020202020204" pitchFamily="34" charset="0"/>
+              <a:cs typeface="Arial" panose="020B0604020202020204" pitchFamily="34" charset="0"/>
+            </a:endParaRPr>
+          </a:p>
+        </p:txBody>
+      </p:sp>
+      <p:sp>
+        <p:nvSpPr>
+          <p:cNvPr id="38" name="Tekstvak 37">
+            <a:extLst>
+              <a:ext uri="{FF2B5EF4-FFF2-40B4-BE49-F238E27FC236}">
+                <a16:creationId xmlns:a16="http://schemas.microsoft.com/office/drawing/2014/main" id="{DA63481D-27AF-0C59-27F9-E6C6B129913D}"/>
+              </a:ext>
+            </a:extLst>
+          </p:cNvPr>
+          <p:cNvSpPr txBox="1"/>
+          <p:nvPr/>
+        </p:nvSpPr>
+        <p:spPr>
+          <a:xfrm>
+            <a:off x="10587049" y="2841497"/>
+            <a:ext cx="1398140" cy="276999"/>
+          </a:xfrm>
+          <a:prstGeom prst="rect">
+            <a:avLst/>
+          </a:prstGeom>
+          <a:noFill/>
+        </p:spPr>
+        <p:txBody>
+          <a:bodyPr wrap="none" rtlCol="0">
+            <a:spAutoFit/>
+          </a:bodyPr>
+          <a:lstStyle/>
+          <a:p>
+            <a:r>
+              <a:rPr lang="en-US" sz="1200" dirty="0">
+                <a:latin typeface="Arial" panose="020B0604020202020204" pitchFamily="34" charset="0"/>
+                <a:cs typeface="Arial" panose="020B0604020202020204" pitchFamily="34" charset="0"/>
+              </a:rPr>
+              <a:t>APID – nr of pubs</a:t>
+            </a:r>
+            <a:endParaRPr lang="nl-NL" sz="1200" dirty="0">
+              <a:latin typeface="Arial" panose="020B0604020202020204" pitchFamily="34" charset="0"/>
+              <a:cs typeface="Arial" panose="020B0604020202020204" pitchFamily="34" charset="0"/>
             </a:endParaRPr>
           </a:p>
         </p:txBody>
@@ -5758,7 +6151,7 @@
     </p:spTree>
     <p:extLst>
       <p:ext uri="{BB962C8B-B14F-4D97-AF65-F5344CB8AC3E}">
-        <p14:creationId xmlns:p14="http://schemas.microsoft.com/office/powerpoint/2010/main" val="3693617880"/>
+        <p14:creationId xmlns:p14="http://schemas.microsoft.com/office/powerpoint/2010/main" val="1199586872"/>
       </p:ext>
     </p:extLst>
   </p:cSld>
@@ -5785,12 +6178,90 @@
           <a:chExt cx="0" cy="0"/>
         </a:xfrm>
       </p:grpSpPr>
+      <p:sp>
+        <p:nvSpPr>
+          <p:cNvPr id="4" name="Tekstvak 3">
+            <a:extLst>
+              <a:ext uri="{FF2B5EF4-FFF2-40B4-BE49-F238E27FC236}">
+                <a16:creationId xmlns:a16="http://schemas.microsoft.com/office/drawing/2014/main" id="{B5410953-95C4-EBF3-58C4-7105C1F4709A}"/>
+              </a:ext>
+            </a:extLst>
+          </p:cNvPr>
+          <p:cNvSpPr txBox="1"/>
+          <p:nvPr/>
+        </p:nvSpPr>
+        <p:spPr>
+          <a:xfrm>
+            <a:off x="3229894" y="681040"/>
+            <a:ext cx="587020" cy="369332"/>
+          </a:xfrm>
+          <a:prstGeom prst="rect">
+            <a:avLst/>
+          </a:prstGeom>
+          <a:noFill/>
+        </p:spPr>
+        <p:txBody>
+          <a:bodyPr wrap="none" rtlCol="0">
+            <a:spAutoFit/>
+          </a:bodyPr>
+          <a:lstStyle/>
+          <a:p>
+            <a:r>
+              <a:rPr lang="en-US" i="1" dirty="0"/>
+              <a:t>Tjp1</a:t>
+            </a:r>
+            <a:endParaRPr lang="nl-NL" i="1" dirty="0"/>
+          </a:p>
+        </p:txBody>
+      </p:sp>
+      <p:sp>
+        <p:nvSpPr>
+          <p:cNvPr id="16" name="Tekstvak 15">
+            <a:extLst>
+              <a:ext uri="{FF2B5EF4-FFF2-40B4-BE49-F238E27FC236}">
+                <a16:creationId xmlns:a16="http://schemas.microsoft.com/office/drawing/2014/main" id="{778E14E7-E780-82D5-B35D-0AF8B2F20E51}"/>
+              </a:ext>
+            </a:extLst>
+          </p:cNvPr>
+          <p:cNvSpPr txBox="1"/>
+          <p:nvPr/>
+        </p:nvSpPr>
+        <p:spPr>
+          <a:xfrm>
+            <a:off x="83257" y="6161576"/>
+            <a:ext cx="5357877" cy="646331"/>
+          </a:xfrm>
+          <a:prstGeom prst="rect">
+            <a:avLst/>
+          </a:prstGeom>
+          <a:noFill/>
+        </p:spPr>
+        <p:txBody>
+          <a:bodyPr wrap="none" rtlCol="0">
+            <a:spAutoFit/>
+          </a:bodyPr>
+          <a:lstStyle/>
+          <a:p>
+            <a:r>
+              <a:rPr lang="en-US" i="1" dirty="0"/>
+              <a:t>Hippocampus scRNAseq P15 data from Blanca &amp; Danie </a:t>
+            </a:r>
+          </a:p>
+          <a:p>
+            <a:r>
+              <a:rPr lang="en-US" i="1" dirty="0"/>
+              <a:t>(low nr of not detected: S100a8, Hspa1a, Ccr2, Anxa1)</a:t>
+            </a:r>
+            <a:endParaRPr lang="nl-NL" i="1" dirty="0"/>
+          </a:p>
+        </p:txBody>
+      </p:sp>
       <p:pic>
         <p:nvPicPr>
-          <p:cNvPr id="2" name="Picture 1">
-            <a:extLst>
-              <a:ext uri="{FF2B5EF4-FFF2-40B4-BE49-F238E27FC236}">
-                <a16:creationId xmlns:a16="http://schemas.microsoft.com/office/drawing/2014/main" id="{2E94BF7E-6F83-499A-BB60-9778BD501DE5}"/>
+          <p:cNvPr id="18" name="Afbeelding 17">
+            <a:extLst>
+              <a:ext uri="{FF2B5EF4-FFF2-40B4-BE49-F238E27FC236}">
+                <a16:creationId xmlns:a16="http://schemas.microsoft.com/office/drawing/2014/main" id="{A79EAD03-8871-D40E-168C-E30B1C9C11BE}"/>
               </a:ext>
             </a:extLst>
           </p:cNvPr>
@@ -5807,113 +6278,20 @@
         </p:blipFill>
         <p:spPr>
           <a:xfrm>
-            <a:off x="1745047" y="1716761"/>
-            <a:ext cx="7350240" cy="4172625"/>
+            <a:off x="2507281" y="1186528"/>
+            <a:ext cx="2032246" cy="1963063"/>
           </a:xfrm>
           <a:prstGeom prst="rect">
             <a:avLst/>
           </a:prstGeom>
         </p:spPr>
       </p:pic>
-      <p:cxnSp>
-        <p:nvCxnSpPr>
-          <p:cNvPr id="4" name="Straight Arrow Connector 3">
-            <a:extLst>
-              <a:ext uri="{FF2B5EF4-FFF2-40B4-BE49-F238E27FC236}">
-                <a16:creationId xmlns:a16="http://schemas.microsoft.com/office/drawing/2014/main" id="{6D671647-3BCD-4A83-82E1-E9501D0A26B4}"/>
-              </a:ext>
-            </a:extLst>
-          </p:cNvPr>
-          <p:cNvCxnSpPr/>
-          <p:nvPr/>
-        </p:nvCxnSpPr>
-        <p:spPr>
-          <a:xfrm>
-            <a:off x="9173688" y="4827321"/>
-            <a:ext cx="575954" cy="0"/>
-          </a:xfrm>
-          <a:prstGeom prst="straightConnector1">
-            <a:avLst/>
-          </a:prstGeom>
-          <a:ln>
-            <a:tailEnd type="triangle"/>
-          </a:ln>
-        </p:spPr>
-        <p:style>
-          <a:lnRef idx="1">
-            <a:schemeClr val="accent1"/>
-          </a:lnRef>
-          <a:fillRef idx="0">
-            <a:schemeClr val="accent1"/>
-          </a:fillRef>
-          <a:effectRef idx="0">
-            <a:schemeClr val="accent1"/>
-          </a:effectRef>
-          <a:fontRef idx="minor">
-            <a:schemeClr val="tx1"/>
-          </a:fontRef>
-        </p:style>
-      </p:cxnSp>
-      <p:sp>
-        <p:nvSpPr>
-          <p:cNvPr id="5" name="TextBox 4">
-            <a:extLst>
-              <a:ext uri="{FF2B5EF4-FFF2-40B4-BE49-F238E27FC236}">
-                <a16:creationId xmlns:a16="http://schemas.microsoft.com/office/drawing/2014/main" id="{A69BA926-E305-43BE-BA5B-782F12316BA1}"/>
-              </a:ext>
-            </a:extLst>
-          </p:cNvPr>
-          <p:cNvSpPr txBox="1"/>
-          <p:nvPr/>
-        </p:nvSpPr>
-        <p:spPr>
-          <a:xfrm>
-            <a:off x="9828043" y="4642655"/>
-            <a:ext cx="1665841" cy="923330"/>
-          </a:xfrm>
-          <a:prstGeom prst="rect">
-            <a:avLst/>
-          </a:prstGeom>
-          <a:noFill/>
-        </p:spPr>
-        <p:txBody>
-          <a:bodyPr wrap="none" rtlCol="0">
-            <a:spAutoFit/>
-          </a:bodyPr>
-          <a:lstStyle/>
-          <a:p>
-            <a:r>
-              <a:rPr lang="en-US" dirty="0"/>
-              <a:t>STRING &amp; </a:t>
-            </a:r>
-            <a:r>
-              <a:rPr lang="en-US" dirty="0" err="1"/>
-              <a:t>UniHI</a:t>
-            </a:r>
-            <a:endParaRPr lang="en-US" dirty="0"/>
-          </a:p>
-          <a:p>
-            <a:endParaRPr lang="en-US" dirty="0"/>
-          </a:p>
-          <a:p>
-            <a:r>
-              <a:rPr lang="en-US" dirty="0" err="1"/>
-              <a:t>UniHi</a:t>
-            </a:r>
-            <a:r>
-              <a:rPr lang="en-US" dirty="0"/>
-              <a:t> is down</a:t>
-            </a:r>
-            <a:endParaRPr lang="nl-BE" dirty="0"/>
-          </a:p>
-        </p:txBody>
-      </p:sp>
       <p:pic>
         <p:nvPicPr>
-          <p:cNvPr id="6" name="Picture 5">
-            <a:extLst>
-              <a:ext uri="{FF2B5EF4-FFF2-40B4-BE49-F238E27FC236}">
-                <a16:creationId xmlns:a16="http://schemas.microsoft.com/office/drawing/2014/main" id="{9CC2B16D-9E85-449C-B8FB-A39BCCA6AD82}"/>
+          <p:cNvPr id="20" name="Afbeelding 19">
+            <a:extLst>
+              <a:ext uri="{FF2B5EF4-FFF2-40B4-BE49-F238E27FC236}">
+                <a16:creationId xmlns:a16="http://schemas.microsoft.com/office/drawing/2014/main" id="{9AD0F2F6-41C9-C471-7F34-A57A8B1DC2DD}"/>
               </a:ext>
             </a:extLst>
           </p:cNvPr>
@@ -5930,18 +6308,1216 @@
         </p:blipFill>
         <p:spPr>
           <a:xfrm>
-            <a:off x="1745047" y="222652"/>
-            <a:ext cx="7635902" cy="1425063"/>
+            <a:off x="4905360" y="1186528"/>
+            <a:ext cx="2053486" cy="1963063"/>
           </a:xfrm>
           <a:prstGeom prst="rect">
             <a:avLst/>
           </a:prstGeom>
         </p:spPr>
       </p:pic>
+      <p:sp>
+        <p:nvSpPr>
+          <p:cNvPr id="21" name="Tekstvak 20">
+            <a:extLst>
+              <a:ext uri="{FF2B5EF4-FFF2-40B4-BE49-F238E27FC236}">
+                <a16:creationId xmlns:a16="http://schemas.microsoft.com/office/drawing/2014/main" id="{0A93DD9D-3F30-4676-AE6E-ADF680DA8981}"/>
+              </a:ext>
+            </a:extLst>
+          </p:cNvPr>
+          <p:cNvSpPr txBox="1"/>
+          <p:nvPr/>
+        </p:nvSpPr>
+        <p:spPr>
+          <a:xfrm>
+            <a:off x="5560848" y="681040"/>
+            <a:ext cx="742511" cy="369332"/>
+          </a:xfrm>
+          <a:prstGeom prst="rect">
+            <a:avLst/>
+          </a:prstGeom>
+          <a:noFill/>
+        </p:spPr>
+        <p:txBody>
+          <a:bodyPr wrap="none" rtlCol="0">
+            <a:spAutoFit/>
+          </a:bodyPr>
+          <a:lstStyle/>
+          <a:p>
+            <a:r>
+              <a:rPr lang="en-US" i="1" dirty="0" err="1"/>
+              <a:t>Selplg</a:t>
+            </a:r>
+            <a:endParaRPr lang="nl-NL" i="1" dirty="0"/>
+          </a:p>
+        </p:txBody>
+      </p:sp>
+      <p:sp>
+        <p:nvSpPr>
+          <p:cNvPr id="22" name="Ovaal 21">
+            <a:extLst>
+              <a:ext uri="{FF2B5EF4-FFF2-40B4-BE49-F238E27FC236}">
+                <a16:creationId xmlns:a16="http://schemas.microsoft.com/office/drawing/2014/main" id="{0BB23A98-E5B5-9EBA-7FBD-9C4730B08F25}"/>
+              </a:ext>
+            </a:extLst>
+          </p:cNvPr>
+          <p:cNvSpPr/>
+          <p:nvPr/>
+        </p:nvSpPr>
+        <p:spPr>
+          <a:xfrm>
+            <a:off x="6287885" y="2337777"/>
+            <a:ext cx="520778" cy="560438"/>
+          </a:xfrm>
+          <a:prstGeom prst="ellipse">
+            <a:avLst/>
+          </a:prstGeom>
+          <a:noFill/>
+          <a:ln w="28575">
+            <a:solidFill>
+              <a:srgbClr val="FFC000"/>
+            </a:solidFill>
+          </a:ln>
+        </p:spPr>
+        <p:style>
+          <a:lnRef idx="2">
+            <a:schemeClr val="accent1">
+              <a:shade val="15000"/>
+            </a:schemeClr>
+          </a:lnRef>
+          <a:fillRef idx="1">
+            <a:schemeClr val="accent1"/>
+          </a:fillRef>
+          <a:effectRef idx="0">
+            <a:schemeClr val="accent1"/>
+          </a:effectRef>
+          <a:fontRef idx="minor">
+            <a:schemeClr val="lt1"/>
+          </a:fontRef>
+        </p:style>
+        <p:txBody>
+          <a:bodyPr rtlCol="0" anchor="ctr"/>
+          <a:lstStyle/>
+          <a:p>
+            <a:pPr algn="ctr"/>
+            <a:endParaRPr lang="nl-NL"/>
+          </a:p>
+        </p:txBody>
+      </p:sp>
+      <p:sp>
+        <p:nvSpPr>
+          <p:cNvPr id="23" name="Tekstvak 22">
+            <a:extLst>
+              <a:ext uri="{FF2B5EF4-FFF2-40B4-BE49-F238E27FC236}">
+                <a16:creationId xmlns:a16="http://schemas.microsoft.com/office/drawing/2014/main" id="{4E34A0FB-CE87-2A5C-BA63-19102E8D3B0D}"/>
+              </a:ext>
+            </a:extLst>
+          </p:cNvPr>
+          <p:cNvSpPr txBox="1"/>
+          <p:nvPr/>
+        </p:nvSpPr>
+        <p:spPr>
+          <a:xfrm>
+            <a:off x="6713356" y="2770144"/>
+            <a:ext cx="716735" cy="338554"/>
+          </a:xfrm>
+          <a:prstGeom prst="rect">
+            <a:avLst/>
+          </a:prstGeom>
+          <a:noFill/>
+        </p:spPr>
+        <p:txBody>
+          <a:bodyPr wrap="none" rtlCol="0">
+            <a:spAutoFit/>
+          </a:bodyPr>
+          <a:lstStyle/>
+          <a:p>
+            <a:r>
+              <a:rPr lang="en-US" sz="1600" dirty="0">
+                <a:solidFill>
+                  <a:srgbClr val="FFC71C"/>
+                </a:solidFill>
+              </a:rPr>
+              <a:t>Micro </a:t>
+            </a:r>
+            <a:endParaRPr lang="nl-NL" sz="1600" dirty="0">
+              <a:solidFill>
+                <a:srgbClr val="FFC71C"/>
+              </a:solidFill>
+            </a:endParaRPr>
+          </a:p>
+        </p:txBody>
+      </p:sp>
+      <p:pic>
+        <p:nvPicPr>
+          <p:cNvPr id="25" name="Afbeelding 24">
+            <a:extLst>
+              <a:ext uri="{FF2B5EF4-FFF2-40B4-BE49-F238E27FC236}">
+                <a16:creationId xmlns:a16="http://schemas.microsoft.com/office/drawing/2014/main" id="{B88FA175-6D00-73EC-EBCD-F0FC4AA372D8}"/>
+              </a:ext>
+            </a:extLst>
+          </p:cNvPr>
+          <p:cNvPicPr>
+            <a:picLocks noChangeAspect="1"/>
+          </p:cNvPicPr>
+          <p:nvPr/>
+        </p:nvPicPr>
+        <p:blipFill>
+          <a:blip r:embed="rId4"/>
+          <a:stretch>
+            <a:fillRect/>
+          </a:stretch>
+        </p:blipFill>
+        <p:spPr>
+          <a:xfrm>
+            <a:off x="7324679" y="1185284"/>
+            <a:ext cx="2032246" cy="1964307"/>
+          </a:xfrm>
+          <a:prstGeom prst="rect">
+            <a:avLst/>
+          </a:prstGeom>
+        </p:spPr>
+      </p:pic>
+      <p:sp>
+        <p:nvSpPr>
+          <p:cNvPr id="26" name="Tekstvak 25">
+            <a:extLst>
+              <a:ext uri="{FF2B5EF4-FFF2-40B4-BE49-F238E27FC236}">
+                <a16:creationId xmlns:a16="http://schemas.microsoft.com/office/drawing/2014/main" id="{31748A59-99A8-EEC5-76C7-53CA6867FCEE}"/>
+              </a:ext>
+            </a:extLst>
+          </p:cNvPr>
+          <p:cNvSpPr txBox="1"/>
+          <p:nvPr/>
+        </p:nvSpPr>
+        <p:spPr>
+          <a:xfrm>
+            <a:off x="8005582" y="681040"/>
+            <a:ext cx="670440" cy="369332"/>
+          </a:xfrm>
+          <a:prstGeom prst="rect">
+            <a:avLst/>
+          </a:prstGeom>
+          <a:noFill/>
+        </p:spPr>
+        <p:txBody>
+          <a:bodyPr wrap="none" rtlCol="0">
+            <a:spAutoFit/>
+          </a:bodyPr>
+          <a:lstStyle/>
+          <a:p>
+            <a:r>
+              <a:rPr lang="en-US" i="1" dirty="0"/>
+              <a:t>Itga9</a:t>
+            </a:r>
+            <a:endParaRPr lang="nl-NL" i="1" dirty="0"/>
+          </a:p>
+        </p:txBody>
+      </p:sp>
+      <p:sp>
+        <p:nvSpPr>
+          <p:cNvPr id="27" name="Ovaal 26">
+            <a:extLst>
+              <a:ext uri="{FF2B5EF4-FFF2-40B4-BE49-F238E27FC236}">
+                <a16:creationId xmlns:a16="http://schemas.microsoft.com/office/drawing/2014/main" id="{FAEAAE82-BB27-98C3-74B5-1785E72DA8FE}"/>
+              </a:ext>
+            </a:extLst>
+          </p:cNvPr>
+          <p:cNvSpPr/>
+          <p:nvPr/>
+        </p:nvSpPr>
+        <p:spPr>
+          <a:xfrm>
+            <a:off x="8714941" y="2367325"/>
+            <a:ext cx="520778" cy="560438"/>
+          </a:xfrm>
+          <a:prstGeom prst="ellipse">
+            <a:avLst/>
+          </a:prstGeom>
+          <a:noFill/>
+          <a:ln w="28575">
+            <a:solidFill>
+              <a:srgbClr val="FFC000"/>
+            </a:solidFill>
+          </a:ln>
+        </p:spPr>
+        <p:style>
+          <a:lnRef idx="2">
+            <a:schemeClr val="accent1">
+              <a:shade val="15000"/>
+            </a:schemeClr>
+          </a:lnRef>
+          <a:fillRef idx="1">
+            <a:schemeClr val="accent1"/>
+          </a:fillRef>
+          <a:effectRef idx="0">
+            <a:schemeClr val="accent1"/>
+          </a:effectRef>
+          <a:fontRef idx="minor">
+            <a:schemeClr val="lt1"/>
+          </a:fontRef>
+        </p:style>
+        <p:txBody>
+          <a:bodyPr rtlCol="0" anchor="ctr"/>
+          <a:lstStyle/>
+          <a:p>
+            <a:pPr algn="ctr"/>
+            <a:endParaRPr lang="nl-NL"/>
+          </a:p>
+        </p:txBody>
+      </p:sp>
+      <p:sp>
+        <p:nvSpPr>
+          <p:cNvPr id="28" name="Tekstvak 27">
+            <a:extLst>
+              <a:ext uri="{FF2B5EF4-FFF2-40B4-BE49-F238E27FC236}">
+                <a16:creationId xmlns:a16="http://schemas.microsoft.com/office/drawing/2014/main" id="{91496B8F-4BAD-1003-D424-0296F8E6B522}"/>
+              </a:ext>
+            </a:extLst>
+          </p:cNvPr>
+          <p:cNvSpPr txBox="1"/>
+          <p:nvPr/>
+        </p:nvSpPr>
+        <p:spPr>
+          <a:xfrm>
+            <a:off x="9175022" y="2700123"/>
+            <a:ext cx="716735" cy="338554"/>
+          </a:xfrm>
+          <a:prstGeom prst="rect">
+            <a:avLst/>
+          </a:prstGeom>
+          <a:noFill/>
+        </p:spPr>
+        <p:txBody>
+          <a:bodyPr wrap="none" rtlCol="0">
+            <a:spAutoFit/>
+          </a:bodyPr>
+          <a:lstStyle/>
+          <a:p>
+            <a:r>
+              <a:rPr lang="en-US" sz="1600" dirty="0">
+                <a:solidFill>
+                  <a:srgbClr val="FFC71C"/>
+                </a:solidFill>
+              </a:rPr>
+              <a:t>Micro </a:t>
+            </a:r>
+            <a:endParaRPr lang="nl-NL" sz="1600" dirty="0">
+              <a:solidFill>
+                <a:srgbClr val="FFC71C"/>
+              </a:solidFill>
+            </a:endParaRPr>
+          </a:p>
+        </p:txBody>
+      </p:sp>
+      <p:sp>
+        <p:nvSpPr>
+          <p:cNvPr id="29" name="Ovaal 28">
+            <a:extLst>
+              <a:ext uri="{FF2B5EF4-FFF2-40B4-BE49-F238E27FC236}">
+                <a16:creationId xmlns:a16="http://schemas.microsoft.com/office/drawing/2014/main" id="{FEC8D74E-3641-4CBD-88FA-FE5EC5BECCE4}"/>
+              </a:ext>
+            </a:extLst>
+          </p:cNvPr>
+          <p:cNvSpPr/>
+          <p:nvPr/>
+        </p:nvSpPr>
+        <p:spPr>
+          <a:xfrm>
+            <a:off x="8288702" y="1034775"/>
+            <a:ext cx="560439" cy="560439"/>
+          </a:xfrm>
+          <a:prstGeom prst="ellipse">
+            <a:avLst/>
+          </a:prstGeom>
+          <a:noFill/>
+          <a:ln w="28575">
+            <a:solidFill>
+              <a:schemeClr val="accent1"/>
+            </a:solidFill>
+          </a:ln>
+        </p:spPr>
+        <p:style>
+          <a:lnRef idx="2">
+            <a:schemeClr val="accent1">
+              <a:shade val="15000"/>
+            </a:schemeClr>
+          </a:lnRef>
+          <a:fillRef idx="1">
+            <a:schemeClr val="accent1"/>
+          </a:fillRef>
+          <a:effectRef idx="0">
+            <a:schemeClr val="accent1"/>
+          </a:effectRef>
+          <a:fontRef idx="minor">
+            <a:schemeClr val="lt1"/>
+          </a:fontRef>
+        </p:style>
+        <p:txBody>
+          <a:bodyPr rtlCol="0" anchor="ctr"/>
+          <a:lstStyle/>
+          <a:p>
+            <a:pPr algn="ctr"/>
+            <a:endParaRPr lang="nl-NL"/>
+          </a:p>
+        </p:txBody>
+      </p:sp>
+      <p:sp>
+        <p:nvSpPr>
+          <p:cNvPr id="30" name="Tekstvak 29">
+            <a:extLst>
+              <a:ext uri="{FF2B5EF4-FFF2-40B4-BE49-F238E27FC236}">
+                <a16:creationId xmlns:a16="http://schemas.microsoft.com/office/drawing/2014/main" id="{97DCD1B9-93FA-3D3A-4ED5-6E32B1E9F9B4}"/>
+              </a:ext>
+            </a:extLst>
+          </p:cNvPr>
+          <p:cNvSpPr txBox="1"/>
+          <p:nvPr/>
+        </p:nvSpPr>
+        <p:spPr>
+          <a:xfrm>
+            <a:off x="8799566" y="1282907"/>
+            <a:ext cx="707923" cy="369332"/>
+          </a:xfrm>
+          <a:prstGeom prst="rect">
+            <a:avLst/>
+          </a:prstGeom>
+          <a:noFill/>
+        </p:spPr>
+        <p:txBody>
+          <a:bodyPr wrap="square">
+            <a:spAutoFit/>
+          </a:bodyPr>
+          <a:lstStyle/>
+          <a:p>
+            <a:r>
+              <a:rPr lang="en-US" sz="1800" dirty="0">
+                <a:solidFill>
+                  <a:srgbClr val="4472C4"/>
+                </a:solidFill>
+              </a:rPr>
+              <a:t>OPC</a:t>
+            </a:r>
+            <a:endParaRPr lang="nl-NL" dirty="0">
+              <a:solidFill>
+                <a:srgbClr val="4472C4"/>
+              </a:solidFill>
+            </a:endParaRPr>
+          </a:p>
+        </p:txBody>
+      </p:sp>
+      <p:pic>
+        <p:nvPicPr>
+          <p:cNvPr id="32" name="Afbeelding 31">
+            <a:extLst>
+              <a:ext uri="{FF2B5EF4-FFF2-40B4-BE49-F238E27FC236}">
+                <a16:creationId xmlns:a16="http://schemas.microsoft.com/office/drawing/2014/main" id="{B7BA6D82-F9AD-F05A-77E3-1E717D947E3C}"/>
+              </a:ext>
+            </a:extLst>
+          </p:cNvPr>
+          <p:cNvPicPr>
+            <a:picLocks noChangeAspect="1"/>
+          </p:cNvPicPr>
+          <p:nvPr/>
+        </p:nvPicPr>
+        <p:blipFill>
+          <a:blip r:embed="rId5"/>
+          <a:stretch>
+            <a:fillRect/>
+          </a:stretch>
+        </p:blipFill>
+        <p:spPr>
+          <a:xfrm>
+            <a:off x="2544846" y="3956946"/>
+            <a:ext cx="2034987" cy="1964307"/>
+          </a:xfrm>
+          <a:prstGeom prst="rect">
+            <a:avLst/>
+          </a:prstGeom>
+        </p:spPr>
+      </p:pic>
+      <p:sp>
+        <p:nvSpPr>
+          <p:cNvPr id="33" name="Tekstvak 32">
+            <a:extLst>
+              <a:ext uri="{FF2B5EF4-FFF2-40B4-BE49-F238E27FC236}">
+                <a16:creationId xmlns:a16="http://schemas.microsoft.com/office/drawing/2014/main" id="{D6F20D3B-902B-9ED8-7A0E-E048E9A342C6}"/>
+              </a:ext>
+            </a:extLst>
+          </p:cNvPr>
+          <p:cNvSpPr txBox="1"/>
+          <p:nvPr/>
+        </p:nvSpPr>
+        <p:spPr>
+          <a:xfrm>
+            <a:off x="3194729" y="3477556"/>
+            <a:ext cx="670440" cy="369332"/>
+          </a:xfrm>
+          <a:prstGeom prst="rect">
+            <a:avLst/>
+          </a:prstGeom>
+          <a:noFill/>
+        </p:spPr>
+        <p:txBody>
+          <a:bodyPr wrap="none" rtlCol="0">
+            <a:spAutoFit/>
+          </a:bodyPr>
+          <a:lstStyle/>
+          <a:p>
+            <a:r>
+              <a:rPr lang="en-US" i="1" dirty="0"/>
+              <a:t>Itga6</a:t>
+            </a:r>
+            <a:endParaRPr lang="nl-NL" i="1" dirty="0"/>
+          </a:p>
+        </p:txBody>
+      </p:sp>
+      <p:sp>
+        <p:nvSpPr>
+          <p:cNvPr id="34" name="Ovaal 33">
+            <a:extLst>
+              <a:ext uri="{FF2B5EF4-FFF2-40B4-BE49-F238E27FC236}">
+                <a16:creationId xmlns:a16="http://schemas.microsoft.com/office/drawing/2014/main" id="{2CAF07A0-163C-3318-74F2-2E6BC93E0D78}"/>
+              </a:ext>
+            </a:extLst>
+          </p:cNvPr>
+          <p:cNvSpPr/>
+          <p:nvPr/>
+        </p:nvSpPr>
+        <p:spPr>
+          <a:xfrm>
+            <a:off x="3931869" y="5174096"/>
+            <a:ext cx="520778" cy="560438"/>
+          </a:xfrm>
+          <a:prstGeom prst="ellipse">
+            <a:avLst/>
+          </a:prstGeom>
+          <a:noFill/>
+          <a:ln w="28575">
+            <a:solidFill>
+              <a:srgbClr val="FFC000"/>
+            </a:solidFill>
+          </a:ln>
+        </p:spPr>
+        <p:style>
+          <a:lnRef idx="2">
+            <a:schemeClr val="accent1">
+              <a:shade val="15000"/>
+            </a:schemeClr>
+          </a:lnRef>
+          <a:fillRef idx="1">
+            <a:schemeClr val="accent1"/>
+          </a:fillRef>
+          <a:effectRef idx="0">
+            <a:schemeClr val="accent1"/>
+          </a:effectRef>
+          <a:fontRef idx="minor">
+            <a:schemeClr val="lt1"/>
+          </a:fontRef>
+        </p:style>
+        <p:txBody>
+          <a:bodyPr rtlCol="0" anchor="ctr"/>
+          <a:lstStyle/>
+          <a:p>
+            <a:pPr algn="ctr"/>
+            <a:endParaRPr lang="nl-NL"/>
+          </a:p>
+        </p:txBody>
+      </p:sp>
+      <p:sp>
+        <p:nvSpPr>
+          <p:cNvPr id="7" name="Ovaal 6">
+            <a:extLst>
+              <a:ext uri="{FF2B5EF4-FFF2-40B4-BE49-F238E27FC236}">
+                <a16:creationId xmlns:a16="http://schemas.microsoft.com/office/drawing/2014/main" id="{3AB2B67A-10F0-5E6A-62B4-7E9576130F41}"/>
+              </a:ext>
+            </a:extLst>
+          </p:cNvPr>
+          <p:cNvSpPr/>
+          <p:nvPr/>
+        </p:nvSpPr>
+        <p:spPr>
+          <a:xfrm>
+            <a:off x="2924285" y="4182104"/>
+            <a:ext cx="520779" cy="560439"/>
+          </a:xfrm>
+          <a:prstGeom prst="ellipse">
+            <a:avLst/>
+          </a:prstGeom>
+          <a:noFill/>
+          <a:ln w="28575">
+            <a:solidFill>
+              <a:schemeClr val="accent6"/>
+            </a:solidFill>
+          </a:ln>
+        </p:spPr>
+        <p:style>
+          <a:lnRef idx="2">
+            <a:schemeClr val="accent1">
+              <a:shade val="15000"/>
+            </a:schemeClr>
+          </a:lnRef>
+          <a:fillRef idx="1">
+            <a:schemeClr val="accent1"/>
+          </a:fillRef>
+          <a:effectRef idx="0">
+            <a:schemeClr val="accent1"/>
+          </a:effectRef>
+          <a:fontRef idx="minor">
+            <a:schemeClr val="lt1"/>
+          </a:fontRef>
+        </p:style>
+        <p:txBody>
+          <a:bodyPr rtlCol="0" anchor="ctr"/>
+          <a:lstStyle/>
+          <a:p>
+            <a:pPr algn="ctr"/>
+            <a:endParaRPr lang="nl-NL"/>
+          </a:p>
+        </p:txBody>
+      </p:sp>
+      <p:sp>
+        <p:nvSpPr>
+          <p:cNvPr id="9" name="Tekstvak 8">
+            <a:extLst>
+              <a:ext uri="{FF2B5EF4-FFF2-40B4-BE49-F238E27FC236}">
+                <a16:creationId xmlns:a16="http://schemas.microsoft.com/office/drawing/2014/main" id="{13F81558-29E7-CD40-8C57-AE944B3F55F6}"/>
+              </a:ext>
+            </a:extLst>
+          </p:cNvPr>
+          <p:cNvSpPr txBox="1"/>
+          <p:nvPr/>
+        </p:nvSpPr>
+        <p:spPr>
+          <a:xfrm>
+            <a:off x="2869641" y="3905517"/>
+            <a:ext cx="627864" cy="338554"/>
+          </a:xfrm>
+          <a:prstGeom prst="rect">
+            <a:avLst/>
+          </a:prstGeom>
+          <a:noFill/>
+        </p:spPr>
+        <p:txBody>
+          <a:bodyPr wrap="none" rtlCol="0">
+            <a:spAutoFit/>
+          </a:bodyPr>
+          <a:lstStyle/>
+          <a:p>
+            <a:r>
+              <a:rPr lang="en-US" sz="1600" dirty="0">
+                <a:solidFill>
+                  <a:srgbClr val="9CC680"/>
+                </a:solidFill>
+              </a:rPr>
+              <a:t>Astro</a:t>
+            </a:r>
+            <a:endParaRPr lang="nl-NL" sz="1600" dirty="0">
+              <a:solidFill>
+                <a:srgbClr val="9CC680"/>
+              </a:solidFill>
+            </a:endParaRPr>
+          </a:p>
+        </p:txBody>
+      </p:sp>
+      <p:sp>
+        <p:nvSpPr>
+          <p:cNvPr id="8" name="Ovaal 7">
+            <a:extLst>
+              <a:ext uri="{FF2B5EF4-FFF2-40B4-BE49-F238E27FC236}">
+                <a16:creationId xmlns:a16="http://schemas.microsoft.com/office/drawing/2014/main" id="{6B1D0DA5-DB02-1BF4-EF35-F2AB5880D690}"/>
+              </a:ext>
+            </a:extLst>
+          </p:cNvPr>
+          <p:cNvSpPr/>
+          <p:nvPr/>
+        </p:nvSpPr>
+        <p:spPr>
+          <a:xfrm>
+            <a:off x="2508356" y="4512887"/>
+            <a:ext cx="520778" cy="1018604"/>
+          </a:xfrm>
+          <a:prstGeom prst="ellipse">
+            <a:avLst/>
+          </a:prstGeom>
+          <a:noFill/>
+          <a:ln w="28575">
+            <a:solidFill>
+              <a:srgbClr val="FF0000"/>
+            </a:solidFill>
+          </a:ln>
+        </p:spPr>
+        <p:style>
+          <a:lnRef idx="2">
+            <a:schemeClr val="accent1">
+              <a:shade val="15000"/>
+            </a:schemeClr>
+          </a:lnRef>
+          <a:fillRef idx="1">
+            <a:schemeClr val="accent1"/>
+          </a:fillRef>
+          <a:effectRef idx="0">
+            <a:schemeClr val="accent1"/>
+          </a:effectRef>
+          <a:fontRef idx="minor">
+            <a:schemeClr val="lt1"/>
+          </a:fontRef>
+        </p:style>
+        <p:txBody>
+          <a:bodyPr rtlCol="0" anchor="ctr"/>
+          <a:lstStyle/>
+          <a:p>
+            <a:pPr algn="ctr"/>
+            <a:endParaRPr lang="nl-NL"/>
+          </a:p>
+        </p:txBody>
+      </p:sp>
+      <p:sp>
+        <p:nvSpPr>
+          <p:cNvPr id="15" name="Tekstvak 14">
+            <a:extLst>
+              <a:ext uri="{FF2B5EF4-FFF2-40B4-BE49-F238E27FC236}">
+                <a16:creationId xmlns:a16="http://schemas.microsoft.com/office/drawing/2014/main" id="{319ABF25-BB22-10D1-C804-C206E1761E64}"/>
+              </a:ext>
+            </a:extLst>
+          </p:cNvPr>
+          <p:cNvSpPr txBox="1"/>
+          <p:nvPr/>
+        </p:nvSpPr>
+        <p:spPr>
+          <a:xfrm>
+            <a:off x="1901252" y="4277203"/>
+            <a:ext cx="890565" cy="584775"/>
+          </a:xfrm>
+          <a:prstGeom prst="rect">
+            <a:avLst/>
+          </a:prstGeom>
+          <a:noFill/>
+        </p:spPr>
+        <p:txBody>
+          <a:bodyPr wrap="none" rtlCol="0">
+            <a:spAutoFit/>
+          </a:bodyPr>
+          <a:lstStyle/>
+          <a:p>
+            <a:r>
+              <a:rPr lang="en-US" sz="1600" dirty="0">
+                <a:solidFill>
+                  <a:srgbClr val="FF0000"/>
+                </a:solidFill>
+              </a:rPr>
+              <a:t>Granule </a:t>
+            </a:r>
+          </a:p>
+          <a:p>
+            <a:r>
+              <a:rPr lang="en-US" sz="1600" dirty="0">
+                <a:solidFill>
+                  <a:srgbClr val="FF0000"/>
+                </a:solidFill>
+              </a:rPr>
+              <a:t>cells </a:t>
+            </a:r>
+            <a:endParaRPr lang="nl-NL" sz="1600" dirty="0">
+              <a:solidFill>
+                <a:srgbClr val="FF0000"/>
+              </a:solidFill>
+            </a:endParaRPr>
+          </a:p>
+        </p:txBody>
+      </p:sp>
+      <p:pic>
+        <p:nvPicPr>
+          <p:cNvPr id="37" name="Afbeelding 36">
+            <a:extLst>
+              <a:ext uri="{FF2B5EF4-FFF2-40B4-BE49-F238E27FC236}">
+                <a16:creationId xmlns:a16="http://schemas.microsoft.com/office/drawing/2014/main" id="{87A27951-CCAE-8284-EC03-5BA6470C9F39}"/>
+              </a:ext>
+            </a:extLst>
+          </p:cNvPr>
+          <p:cNvPicPr>
+            <a:picLocks noChangeAspect="1"/>
+          </p:cNvPicPr>
+          <p:nvPr/>
+        </p:nvPicPr>
+        <p:blipFill>
+          <a:blip r:embed="rId6"/>
+          <a:stretch>
+            <a:fillRect/>
+          </a:stretch>
+        </p:blipFill>
+        <p:spPr>
+          <a:xfrm>
+            <a:off x="4905360" y="3956946"/>
+            <a:ext cx="2080611" cy="1963063"/>
+          </a:xfrm>
+          <a:prstGeom prst="rect">
+            <a:avLst/>
+          </a:prstGeom>
+        </p:spPr>
+      </p:pic>
+      <p:sp>
+        <p:nvSpPr>
+          <p:cNvPr id="38" name="Tekstvak 37">
+            <a:extLst>
+              <a:ext uri="{FF2B5EF4-FFF2-40B4-BE49-F238E27FC236}">
+                <a16:creationId xmlns:a16="http://schemas.microsoft.com/office/drawing/2014/main" id="{7A27D508-C499-6D2C-9F6E-E0ABA4D7801D}"/>
+              </a:ext>
+            </a:extLst>
+          </p:cNvPr>
+          <p:cNvSpPr txBox="1"/>
+          <p:nvPr/>
+        </p:nvSpPr>
+        <p:spPr>
+          <a:xfrm>
+            <a:off x="5604867" y="3477556"/>
+            <a:ext cx="681597" cy="369332"/>
+          </a:xfrm>
+          <a:prstGeom prst="rect">
+            <a:avLst/>
+          </a:prstGeom>
+          <a:noFill/>
+        </p:spPr>
+        <p:txBody>
+          <a:bodyPr wrap="none" rtlCol="0">
+            <a:spAutoFit/>
+          </a:bodyPr>
+          <a:lstStyle/>
+          <a:p>
+            <a:r>
+              <a:rPr lang="en-US" i="1" dirty="0"/>
+              <a:t>Dbn1</a:t>
+            </a:r>
+            <a:endParaRPr lang="nl-NL" i="1" dirty="0"/>
+          </a:p>
+        </p:txBody>
+      </p:sp>
+      <p:sp>
+        <p:nvSpPr>
+          <p:cNvPr id="39" name="Ovaal 38">
+            <a:extLst>
+              <a:ext uri="{FF2B5EF4-FFF2-40B4-BE49-F238E27FC236}">
+                <a16:creationId xmlns:a16="http://schemas.microsoft.com/office/drawing/2014/main" id="{9129477C-9DA9-BBE5-C0EF-99359EBE87C3}"/>
+              </a:ext>
+            </a:extLst>
+          </p:cNvPr>
+          <p:cNvSpPr/>
+          <p:nvPr/>
+        </p:nvSpPr>
+        <p:spPr>
+          <a:xfrm>
+            <a:off x="4886828" y="4526114"/>
+            <a:ext cx="520778" cy="1038373"/>
+          </a:xfrm>
+          <a:prstGeom prst="ellipse">
+            <a:avLst/>
+          </a:prstGeom>
+          <a:noFill/>
+          <a:ln w="28575">
+            <a:solidFill>
+              <a:srgbClr val="FF0000"/>
+            </a:solidFill>
+          </a:ln>
+        </p:spPr>
+        <p:style>
+          <a:lnRef idx="2">
+            <a:schemeClr val="accent1">
+              <a:shade val="15000"/>
+            </a:schemeClr>
+          </a:lnRef>
+          <a:fillRef idx="1">
+            <a:schemeClr val="accent1"/>
+          </a:fillRef>
+          <a:effectRef idx="0">
+            <a:schemeClr val="accent1"/>
+          </a:effectRef>
+          <a:fontRef idx="minor">
+            <a:schemeClr val="lt1"/>
+          </a:fontRef>
+        </p:style>
+        <p:txBody>
+          <a:bodyPr rtlCol="0" anchor="ctr"/>
+          <a:lstStyle/>
+          <a:p>
+            <a:pPr algn="ctr"/>
+            <a:endParaRPr lang="nl-NL"/>
+          </a:p>
+        </p:txBody>
+      </p:sp>
+      <p:sp>
+        <p:nvSpPr>
+          <p:cNvPr id="40" name="Tekstvak 39">
+            <a:extLst>
+              <a:ext uri="{FF2B5EF4-FFF2-40B4-BE49-F238E27FC236}">
+                <a16:creationId xmlns:a16="http://schemas.microsoft.com/office/drawing/2014/main" id="{6681DE1A-4411-D633-7080-0787AA180D57}"/>
+              </a:ext>
+            </a:extLst>
+          </p:cNvPr>
+          <p:cNvSpPr txBox="1"/>
+          <p:nvPr/>
+        </p:nvSpPr>
+        <p:spPr>
+          <a:xfrm>
+            <a:off x="4473258" y="4112016"/>
+            <a:ext cx="890565" cy="584775"/>
+          </a:xfrm>
+          <a:prstGeom prst="rect">
+            <a:avLst/>
+          </a:prstGeom>
+          <a:noFill/>
+        </p:spPr>
+        <p:txBody>
+          <a:bodyPr wrap="none" rtlCol="0">
+            <a:spAutoFit/>
+          </a:bodyPr>
+          <a:lstStyle/>
+          <a:p>
+            <a:r>
+              <a:rPr lang="en-US" sz="1600" dirty="0">
+                <a:solidFill>
+                  <a:srgbClr val="FF0000"/>
+                </a:solidFill>
+              </a:rPr>
+              <a:t>Granule </a:t>
+            </a:r>
+          </a:p>
+          <a:p>
+            <a:r>
+              <a:rPr lang="en-US" sz="1600" dirty="0">
+                <a:solidFill>
+                  <a:srgbClr val="FF0000"/>
+                </a:solidFill>
+              </a:rPr>
+              <a:t>cells </a:t>
+            </a:r>
+            <a:endParaRPr lang="nl-NL" sz="1600" dirty="0">
+              <a:solidFill>
+                <a:srgbClr val="FF0000"/>
+              </a:solidFill>
+            </a:endParaRPr>
+          </a:p>
+        </p:txBody>
+      </p:sp>
+      <p:sp>
+        <p:nvSpPr>
+          <p:cNvPr id="41" name="Ovaal 40">
+            <a:extLst>
+              <a:ext uri="{FF2B5EF4-FFF2-40B4-BE49-F238E27FC236}">
+                <a16:creationId xmlns:a16="http://schemas.microsoft.com/office/drawing/2014/main" id="{E1B48DB7-731D-45F3-6C02-ACCD11FAAA1B}"/>
+              </a:ext>
+            </a:extLst>
+          </p:cNvPr>
+          <p:cNvSpPr/>
+          <p:nvPr/>
+        </p:nvSpPr>
+        <p:spPr>
+          <a:xfrm>
+            <a:off x="5718156" y="4457640"/>
+            <a:ext cx="520778" cy="1038373"/>
+          </a:xfrm>
+          <a:prstGeom prst="ellipse">
+            <a:avLst/>
+          </a:prstGeom>
+          <a:noFill/>
+          <a:ln w="28575">
+            <a:solidFill>
+              <a:srgbClr val="7030A0"/>
+            </a:solidFill>
+          </a:ln>
+        </p:spPr>
+        <p:style>
+          <a:lnRef idx="2">
+            <a:schemeClr val="accent1">
+              <a:shade val="15000"/>
+            </a:schemeClr>
+          </a:lnRef>
+          <a:fillRef idx="1">
+            <a:schemeClr val="accent1"/>
+          </a:fillRef>
+          <a:effectRef idx="0">
+            <a:schemeClr val="accent1"/>
+          </a:effectRef>
+          <a:fontRef idx="minor">
+            <a:schemeClr val="lt1"/>
+          </a:fontRef>
+        </p:style>
+        <p:txBody>
+          <a:bodyPr rtlCol="0" anchor="ctr"/>
+          <a:lstStyle/>
+          <a:p>
+            <a:pPr algn="ctr"/>
+            <a:endParaRPr lang="nl-NL">
+              <a:solidFill>
+                <a:srgbClr val="7030A0"/>
+              </a:solidFill>
+            </a:endParaRPr>
+          </a:p>
+        </p:txBody>
+      </p:sp>
+      <p:sp>
+        <p:nvSpPr>
+          <p:cNvPr id="42" name="Tekstvak 41">
+            <a:extLst>
+              <a:ext uri="{FF2B5EF4-FFF2-40B4-BE49-F238E27FC236}">
+                <a16:creationId xmlns:a16="http://schemas.microsoft.com/office/drawing/2014/main" id="{6E75BC3F-02F6-8D86-BB64-92402931114E}"/>
+              </a:ext>
+            </a:extLst>
+          </p:cNvPr>
+          <p:cNvSpPr txBox="1"/>
+          <p:nvPr/>
+        </p:nvSpPr>
+        <p:spPr>
+          <a:xfrm>
+            <a:off x="6178744" y="4371574"/>
+            <a:ext cx="867417" cy="584775"/>
+          </a:xfrm>
+          <a:prstGeom prst="rect">
+            <a:avLst/>
+          </a:prstGeom>
+          <a:noFill/>
+        </p:spPr>
+        <p:txBody>
+          <a:bodyPr wrap="none" rtlCol="0">
+            <a:spAutoFit/>
+          </a:bodyPr>
+          <a:lstStyle/>
+          <a:p>
+            <a:r>
+              <a:rPr lang="en-US" sz="1600" dirty="0">
+                <a:solidFill>
+                  <a:srgbClr val="7030A0"/>
+                </a:solidFill>
+              </a:rPr>
+              <a:t>Hip </a:t>
+            </a:r>
+          </a:p>
+          <a:p>
+            <a:r>
+              <a:rPr lang="en-US" sz="1600" dirty="0">
+                <a:solidFill>
+                  <a:srgbClr val="7030A0"/>
+                </a:solidFill>
+              </a:rPr>
+              <a:t>neurons</a:t>
+            </a:r>
+            <a:endParaRPr lang="nl-NL" sz="1600" dirty="0">
+              <a:solidFill>
+                <a:srgbClr val="7030A0"/>
+              </a:solidFill>
+            </a:endParaRPr>
+          </a:p>
+        </p:txBody>
+      </p:sp>
+      <p:pic>
+        <p:nvPicPr>
+          <p:cNvPr id="44" name="Afbeelding 43">
+            <a:extLst>
+              <a:ext uri="{FF2B5EF4-FFF2-40B4-BE49-F238E27FC236}">
+                <a16:creationId xmlns:a16="http://schemas.microsoft.com/office/drawing/2014/main" id="{112DA2DE-EEA5-503F-0C07-A8753629CFBA}"/>
+              </a:ext>
+            </a:extLst>
+          </p:cNvPr>
+          <p:cNvPicPr>
+            <a:picLocks noChangeAspect="1"/>
+          </p:cNvPicPr>
+          <p:nvPr/>
+        </p:nvPicPr>
+        <p:blipFill>
+          <a:blip r:embed="rId7"/>
+          <a:stretch>
+            <a:fillRect/>
+          </a:stretch>
+        </p:blipFill>
+        <p:spPr>
+          <a:xfrm>
+            <a:off x="7324679" y="3956946"/>
+            <a:ext cx="2004082" cy="1963063"/>
+          </a:xfrm>
+          <a:prstGeom prst="rect">
+            <a:avLst/>
+          </a:prstGeom>
+        </p:spPr>
+      </p:pic>
+      <p:sp>
+        <p:nvSpPr>
+          <p:cNvPr id="45" name="Tekstvak 44">
+            <a:extLst>
+              <a:ext uri="{FF2B5EF4-FFF2-40B4-BE49-F238E27FC236}">
+                <a16:creationId xmlns:a16="http://schemas.microsoft.com/office/drawing/2014/main" id="{CF51C8F9-8BAF-9E53-7736-6726833A2A9C}"/>
+              </a:ext>
+            </a:extLst>
+          </p:cNvPr>
+          <p:cNvSpPr txBox="1"/>
+          <p:nvPr/>
+        </p:nvSpPr>
+        <p:spPr>
+          <a:xfrm>
+            <a:off x="8028401" y="3477556"/>
+            <a:ext cx="596638" cy="369332"/>
+          </a:xfrm>
+          <a:prstGeom prst="rect">
+            <a:avLst/>
+          </a:prstGeom>
+          <a:noFill/>
+        </p:spPr>
+        <p:txBody>
+          <a:bodyPr wrap="none" rtlCol="0">
+            <a:spAutoFit/>
+          </a:bodyPr>
+          <a:lstStyle/>
+          <a:p>
+            <a:r>
+              <a:rPr lang="en-US" i="1" dirty="0"/>
+              <a:t>Ccr5</a:t>
+            </a:r>
+            <a:endParaRPr lang="nl-NL" i="1" dirty="0"/>
+          </a:p>
+        </p:txBody>
+      </p:sp>
+      <p:sp>
+        <p:nvSpPr>
+          <p:cNvPr id="46" name="Ovaal 45">
+            <a:extLst>
+              <a:ext uri="{FF2B5EF4-FFF2-40B4-BE49-F238E27FC236}">
+                <a16:creationId xmlns:a16="http://schemas.microsoft.com/office/drawing/2014/main" id="{3B9FBD9A-B357-63B0-F6ED-DA8CA08D1717}"/>
+              </a:ext>
+            </a:extLst>
+          </p:cNvPr>
+          <p:cNvSpPr/>
+          <p:nvPr/>
+        </p:nvSpPr>
+        <p:spPr>
+          <a:xfrm>
+            <a:off x="8681869" y="5121825"/>
+            <a:ext cx="520778" cy="560438"/>
+          </a:xfrm>
+          <a:prstGeom prst="ellipse">
+            <a:avLst/>
+          </a:prstGeom>
+          <a:noFill/>
+          <a:ln w="28575">
+            <a:solidFill>
+              <a:srgbClr val="FFC000"/>
+            </a:solidFill>
+          </a:ln>
+        </p:spPr>
+        <p:style>
+          <a:lnRef idx="2">
+            <a:schemeClr val="accent1">
+              <a:shade val="15000"/>
+            </a:schemeClr>
+          </a:lnRef>
+          <a:fillRef idx="1">
+            <a:schemeClr val="accent1"/>
+          </a:fillRef>
+          <a:effectRef idx="0">
+            <a:schemeClr val="accent1"/>
+          </a:effectRef>
+          <a:fontRef idx="minor">
+            <a:schemeClr val="lt1"/>
+          </a:fontRef>
+        </p:style>
+        <p:txBody>
+          <a:bodyPr rtlCol="0" anchor="ctr"/>
+          <a:lstStyle/>
+          <a:p>
+            <a:pPr algn="ctr"/>
+            <a:endParaRPr lang="nl-NL"/>
+          </a:p>
+        </p:txBody>
+      </p:sp>
+      <p:sp>
+        <p:nvSpPr>
+          <p:cNvPr id="47" name="Tekstvak 46">
+            <a:extLst>
+              <a:ext uri="{FF2B5EF4-FFF2-40B4-BE49-F238E27FC236}">
+                <a16:creationId xmlns:a16="http://schemas.microsoft.com/office/drawing/2014/main" id="{31B7D9CA-6087-0916-D307-22EB007DE75B}"/>
+              </a:ext>
+            </a:extLst>
+          </p:cNvPr>
+          <p:cNvSpPr txBox="1"/>
+          <p:nvPr/>
+        </p:nvSpPr>
+        <p:spPr>
+          <a:xfrm>
+            <a:off x="9175021" y="5469361"/>
+            <a:ext cx="716735" cy="338554"/>
+          </a:xfrm>
+          <a:prstGeom prst="rect">
+            <a:avLst/>
+          </a:prstGeom>
+          <a:noFill/>
+        </p:spPr>
+        <p:txBody>
+          <a:bodyPr wrap="none" rtlCol="0">
+            <a:spAutoFit/>
+          </a:bodyPr>
+          <a:lstStyle/>
+          <a:p>
+            <a:r>
+              <a:rPr lang="en-US" sz="1600" dirty="0">
+                <a:solidFill>
+                  <a:srgbClr val="FFC71C"/>
+                </a:solidFill>
+              </a:rPr>
+              <a:t>Micro </a:t>
+            </a:r>
+            <a:endParaRPr lang="nl-NL" sz="1600" dirty="0">
+              <a:solidFill>
+                <a:srgbClr val="FFC71C"/>
+              </a:solidFill>
+            </a:endParaRPr>
+          </a:p>
+        </p:txBody>
+      </p:sp>
+      <p:sp>
+        <p:nvSpPr>
+          <p:cNvPr id="35" name="Tekstvak 34">
+            <a:extLst>
+              <a:ext uri="{FF2B5EF4-FFF2-40B4-BE49-F238E27FC236}">
+                <a16:creationId xmlns:a16="http://schemas.microsoft.com/office/drawing/2014/main" id="{7ED94278-9826-144B-B7EB-41D9E8A22E37}"/>
+              </a:ext>
+            </a:extLst>
+          </p:cNvPr>
+          <p:cNvSpPr txBox="1"/>
+          <p:nvPr/>
+        </p:nvSpPr>
+        <p:spPr>
+          <a:xfrm>
+            <a:off x="4372797" y="5589973"/>
+            <a:ext cx="716735" cy="338554"/>
+          </a:xfrm>
+          <a:prstGeom prst="rect">
+            <a:avLst/>
+          </a:prstGeom>
+          <a:noFill/>
+        </p:spPr>
+        <p:txBody>
+          <a:bodyPr wrap="none" rtlCol="0">
+            <a:spAutoFit/>
+          </a:bodyPr>
+          <a:lstStyle/>
+          <a:p>
+            <a:r>
+              <a:rPr lang="en-US" sz="1600" dirty="0">
+                <a:solidFill>
+                  <a:srgbClr val="FFC71C"/>
+                </a:solidFill>
+              </a:rPr>
+              <a:t>Micro </a:t>
+            </a:r>
+            <a:endParaRPr lang="nl-NL" sz="1600" dirty="0">
+              <a:solidFill>
+                <a:srgbClr val="FFC71C"/>
+              </a:solidFill>
+            </a:endParaRPr>
+          </a:p>
+        </p:txBody>
+      </p:sp>
     </p:spTree>
     <p:extLst>
       <p:ext uri="{BB962C8B-B14F-4D97-AF65-F5344CB8AC3E}">
-        <p14:creationId xmlns:p14="http://schemas.microsoft.com/office/powerpoint/2010/main" val="1588898040"/>
+        <p14:creationId xmlns:p14="http://schemas.microsoft.com/office/powerpoint/2010/main" val="1307972020"/>
       </p:ext>
     </p:extLst>
   </p:cSld>
@@ -5970,10 +7546,10 @@
       </p:grpSpPr>
       <p:sp>
         <p:nvSpPr>
-          <p:cNvPr id="2" name="Tekstvak 1">
-            <a:extLst>
-              <a:ext uri="{FF2B5EF4-FFF2-40B4-BE49-F238E27FC236}">
-                <a16:creationId xmlns:a16="http://schemas.microsoft.com/office/drawing/2014/main" id="{09F43449-AD8F-4BC8-BA43-FD0A499484D7}"/>
+          <p:cNvPr id="4" name="Tekstvak 3">
+            <a:extLst>
+              <a:ext uri="{FF2B5EF4-FFF2-40B4-BE49-F238E27FC236}">
+                <a16:creationId xmlns:a16="http://schemas.microsoft.com/office/drawing/2014/main" id="{11B53E2A-8006-F2CB-6A5C-9C9532A08ED8}"/>
               </a:ext>
             </a:extLst>
           </p:cNvPr>
@@ -5982,8 +7558,232 @@
         </p:nvSpPr>
         <p:spPr>
           <a:xfrm>
-            <a:off x="2437764" y="156479"/>
-            <a:ext cx="2366353" cy="400110"/>
+            <a:off x="4943403" y="1316850"/>
+            <a:ext cx="3217547" cy="307777"/>
+          </a:xfrm>
+          <a:prstGeom prst="rect">
+            <a:avLst/>
+          </a:prstGeom>
+          <a:noFill/>
+        </p:spPr>
+        <p:txBody>
+          <a:bodyPr wrap="none" rtlCol="0">
+            <a:spAutoFit/>
+          </a:bodyPr>
+          <a:lstStyle/>
+          <a:p>
+            <a:r>
+              <a:rPr lang="en-US" sz="1400" dirty="0">
+                <a:latin typeface="Arial" panose="020B0604020202020204" pitchFamily="34" charset="0"/>
+                <a:cs typeface="Arial" panose="020B0604020202020204" pitchFamily="34" charset="0"/>
+              </a:rPr>
+              <a:t>data bases (experimental interactions)</a:t>
+            </a:r>
+            <a:endParaRPr lang="nl-NL" sz="1400" dirty="0">
+              <a:latin typeface="Arial" panose="020B0604020202020204" pitchFamily="34" charset="0"/>
+              <a:cs typeface="Arial" panose="020B0604020202020204" pitchFamily="34" charset="0"/>
+            </a:endParaRPr>
+          </a:p>
+        </p:txBody>
+      </p:sp>
+      <p:sp>
+        <p:nvSpPr>
+          <p:cNvPr id="5" name="Tekstvak 4">
+            <a:extLst>
+              <a:ext uri="{FF2B5EF4-FFF2-40B4-BE49-F238E27FC236}">
+                <a16:creationId xmlns:a16="http://schemas.microsoft.com/office/drawing/2014/main" id="{98C716B5-641E-BEB1-0E10-97B04D6FBEB8}"/>
+              </a:ext>
+            </a:extLst>
+          </p:cNvPr>
+          <p:cNvSpPr txBox="1"/>
+          <p:nvPr/>
+        </p:nvSpPr>
+        <p:spPr>
+          <a:xfrm>
+            <a:off x="4943403" y="1704418"/>
+            <a:ext cx="2521844" cy="307777"/>
+          </a:xfrm>
+          <a:prstGeom prst="rect">
+            <a:avLst/>
+          </a:prstGeom>
+          <a:noFill/>
+        </p:spPr>
+        <p:txBody>
+          <a:bodyPr wrap="none" rtlCol="0">
+            <a:spAutoFit/>
+          </a:bodyPr>
+          <a:lstStyle/>
+          <a:p>
+            <a:r>
+              <a:rPr lang="en-US" sz="1400" dirty="0">
+                <a:latin typeface="Arial" panose="020B0604020202020204" pitchFamily="34" charset="0"/>
+                <a:cs typeface="Arial" panose="020B0604020202020204" pitchFamily="34" charset="0"/>
+              </a:rPr>
+              <a:t>docking (</a:t>
+            </a:r>
+            <a:r>
+              <a:rPr lang="en-US" sz="1400" dirty="0" err="1">
+                <a:latin typeface="Arial" panose="020B0604020202020204" pitchFamily="34" charset="0"/>
+                <a:cs typeface="Arial" panose="020B0604020202020204" pitchFamily="34" charset="0"/>
+              </a:rPr>
+              <a:t>AlphaFold</a:t>
+            </a:r>
+            <a:r>
+              <a:rPr lang="en-US" sz="1400" dirty="0">
+                <a:latin typeface="Arial" panose="020B0604020202020204" pitchFamily="34" charset="0"/>
+                <a:cs typeface="Arial" panose="020B0604020202020204" pitchFamily="34" charset="0"/>
+              </a:rPr>
+              <a:t>-Multimer)</a:t>
+            </a:r>
+            <a:endParaRPr lang="nl-NL" sz="1400" dirty="0">
+              <a:latin typeface="Arial" panose="020B0604020202020204" pitchFamily="34" charset="0"/>
+              <a:cs typeface="Arial" panose="020B0604020202020204" pitchFamily="34" charset="0"/>
+            </a:endParaRPr>
+          </a:p>
+        </p:txBody>
+      </p:sp>
+      <p:sp>
+        <p:nvSpPr>
+          <p:cNvPr id="6" name="Tekstvak 5">
+            <a:extLst>
+              <a:ext uri="{FF2B5EF4-FFF2-40B4-BE49-F238E27FC236}">
+                <a16:creationId xmlns:a16="http://schemas.microsoft.com/office/drawing/2014/main" id="{32BBCCC5-B6CE-C132-4C2F-6E41F45EE488}"/>
+              </a:ext>
+            </a:extLst>
+          </p:cNvPr>
+          <p:cNvSpPr txBox="1"/>
+          <p:nvPr/>
+        </p:nvSpPr>
+        <p:spPr>
+          <a:xfrm>
+            <a:off x="3775455" y="1507322"/>
+            <a:ext cx="556563" cy="369332"/>
+          </a:xfrm>
+          <a:prstGeom prst="rect">
+            <a:avLst/>
+          </a:prstGeom>
+          <a:noFill/>
+        </p:spPr>
+        <p:txBody>
+          <a:bodyPr wrap="none" rtlCol="0">
+            <a:spAutoFit/>
+          </a:bodyPr>
+          <a:lstStyle/>
+          <a:p>
+            <a:r>
+              <a:rPr lang="en-US" b="1" dirty="0">
+                <a:latin typeface="Arial" panose="020B0604020202020204" pitchFamily="34" charset="0"/>
+                <a:cs typeface="Arial" panose="020B0604020202020204" pitchFamily="34" charset="0"/>
+              </a:rPr>
+              <a:t>PPI</a:t>
+            </a:r>
+            <a:endParaRPr lang="nl-NL" b="1" dirty="0">
+              <a:latin typeface="Arial" panose="020B0604020202020204" pitchFamily="34" charset="0"/>
+              <a:cs typeface="Arial" panose="020B0604020202020204" pitchFamily="34" charset="0"/>
+            </a:endParaRPr>
+          </a:p>
+        </p:txBody>
+      </p:sp>
+      <p:sp>
+        <p:nvSpPr>
+          <p:cNvPr id="7" name="Tekstvak 6">
+            <a:extLst>
+              <a:ext uri="{FF2B5EF4-FFF2-40B4-BE49-F238E27FC236}">
+                <a16:creationId xmlns:a16="http://schemas.microsoft.com/office/drawing/2014/main" id="{25BD6156-AFED-0ABF-9FE5-42083C3CE109}"/>
+              </a:ext>
+            </a:extLst>
+          </p:cNvPr>
+          <p:cNvSpPr txBox="1"/>
+          <p:nvPr/>
+        </p:nvSpPr>
+        <p:spPr>
+          <a:xfrm>
+            <a:off x="3587096" y="3750422"/>
+            <a:ext cx="1236236" cy="369332"/>
+          </a:xfrm>
+          <a:prstGeom prst="rect">
+            <a:avLst/>
+          </a:prstGeom>
+          <a:noFill/>
+        </p:spPr>
+        <p:txBody>
+          <a:bodyPr wrap="none" rtlCol="0">
+            <a:spAutoFit/>
+          </a:bodyPr>
+          <a:lstStyle/>
+          <a:p>
+            <a:r>
+              <a:rPr lang="en-US" b="1" dirty="0">
+                <a:latin typeface="Arial" panose="020B0604020202020204" pitchFamily="34" charset="0"/>
+                <a:cs typeface="Arial" panose="020B0604020202020204" pitchFamily="34" charset="0"/>
+              </a:rPr>
+              <a:t>GO terms</a:t>
+            </a:r>
+            <a:endParaRPr lang="nl-NL" b="1" dirty="0">
+              <a:latin typeface="Arial" panose="020B0604020202020204" pitchFamily="34" charset="0"/>
+              <a:cs typeface="Arial" panose="020B0604020202020204" pitchFamily="34" charset="0"/>
+            </a:endParaRPr>
+          </a:p>
+        </p:txBody>
+      </p:sp>
+      <p:sp>
+        <p:nvSpPr>
+          <p:cNvPr id="8" name="Tekstvak 7">
+            <a:extLst>
+              <a:ext uri="{FF2B5EF4-FFF2-40B4-BE49-F238E27FC236}">
+                <a16:creationId xmlns:a16="http://schemas.microsoft.com/office/drawing/2014/main" id="{7A352AFF-8399-FEB2-062A-1CF4728706E2}"/>
+              </a:ext>
+            </a:extLst>
+          </p:cNvPr>
+          <p:cNvSpPr txBox="1"/>
+          <p:nvPr/>
+        </p:nvSpPr>
+        <p:spPr>
+          <a:xfrm>
+            <a:off x="4943403" y="3781200"/>
+            <a:ext cx="5955476" cy="307777"/>
+          </a:xfrm>
+          <a:prstGeom prst="rect">
+            <a:avLst/>
+          </a:prstGeom>
+          <a:noFill/>
+        </p:spPr>
+        <p:txBody>
+          <a:bodyPr wrap="none" rtlCol="0">
+            <a:spAutoFit/>
+          </a:bodyPr>
+          <a:lstStyle/>
+          <a:p>
+            <a:r>
+              <a:rPr lang="en-US" sz="1400" dirty="0">
+                <a:latin typeface="Arial" panose="020B0604020202020204" pitchFamily="34" charset="0"/>
+                <a:cs typeface="Arial" panose="020B0604020202020204" pitchFamily="34" charset="0"/>
+              </a:rPr>
+              <a:t>Check GO terms (phagocytosis, synapse phagocytosis, … ) of interactors</a:t>
+            </a:r>
+            <a:endParaRPr lang="nl-NL" sz="1400" dirty="0">
+              <a:latin typeface="Arial" panose="020B0604020202020204" pitchFamily="34" charset="0"/>
+              <a:cs typeface="Arial" panose="020B0604020202020204" pitchFamily="34" charset="0"/>
+            </a:endParaRPr>
+          </a:p>
+        </p:txBody>
+      </p:sp>
+      <p:sp>
+        <p:nvSpPr>
+          <p:cNvPr id="9" name="Tekstvak 8">
+            <a:extLst>
+              <a:ext uri="{FF2B5EF4-FFF2-40B4-BE49-F238E27FC236}">
+                <a16:creationId xmlns:a16="http://schemas.microsoft.com/office/drawing/2014/main" id="{7AD4FFAC-B3BC-F011-65EB-921E9E8D7454}"/>
+              </a:ext>
+            </a:extLst>
+          </p:cNvPr>
+          <p:cNvSpPr txBox="1"/>
+          <p:nvPr/>
+        </p:nvSpPr>
+        <p:spPr>
+          <a:xfrm>
+            <a:off x="2457428" y="331581"/>
+            <a:ext cx="7136890" cy="400110"/>
           </a:xfrm>
           <a:prstGeom prst="rect">
             <a:avLst/>
@@ -6001,7 +7801,21 @@
                 <a:latin typeface="Arial" panose="020B0604020202020204" pitchFamily="34" charset="0"/>
                 <a:cs typeface="Arial" panose="020B0604020202020204" pitchFamily="34" charset="0"/>
               </a:rPr>
-              <a:t>Database selection</a:t>
+              <a:t>Finding computational relevant VCAM1 interactors (</a:t>
+            </a:r>
+            <a:r>
+              <a:rPr lang="en-US" sz="2000" i="1" dirty="0">
+                <a:latin typeface="Arial" panose="020B0604020202020204" pitchFamily="34" charset="0"/>
+                <a:cs typeface="Arial" panose="020B0604020202020204" pitchFamily="34" charset="0"/>
+              </a:rPr>
+              <a:t>heatmap</a:t>
+            </a:r>
+            <a:r>
+              <a:rPr lang="en-US" sz="2000" dirty="0">
+                <a:latin typeface="Arial" panose="020B0604020202020204" pitchFamily="34" charset="0"/>
+                <a:cs typeface="Arial" panose="020B0604020202020204" pitchFamily="34" charset="0"/>
+              </a:rPr>
+              <a:t>)</a:t>
             </a:r>
             <a:endParaRPr lang="nl-NL" sz="2000" dirty="0">
               <a:latin typeface="Arial" panose="020B0604020202020204" pitchFamily="34" charset="0"/>
@@ -6010,100 +7824,726 @@
           </a:p>
         </p:txBody>
       </p:sp>
-      <p:pic>
-        <p:nvPicPr>
-          <p:cNvPr id="3" name="Picture 2">
-            <a:extLst>
-              <a:ext uri="{FF2B5EF4-FFF2-40B4-BE49-F238E27FC236}">
-                <a16:creationId xmlns:a16="http://schemas.microsoft.com/office/drawing/2014/main" id="{628AD89C-D07F-4B7A-903B-7983D3DE9353}"/>
-              </a:ext>
-            </a:extLst>
-          </p:cNvPr>
-          <p:cNvPicPr>
-            <a:picLocks noChangeAspect="1"/>
-          </p:cNvPicPr>
-          <p:nvPr/>
-        </p:nvPicPr>
-        <p:blipFill>
-          <a:blip r:embed="rId2"/>
-          <a:stretch>
-            <a:fillRect/>
-          </a:stretch>
-        </p:blipFill>
-        <p:spPr>
-          <a:xfrm>
-            <a:off x="1786611" y="947045"/>
-            <a:ext cx="7635902" cy="1425063"/>
-          </a:xfrm>
-          <a:prstGeom prst="rect">
-            <a:avLst/>
-          </a:prstGeom>
-        </p:spPr>
-      </p:pic>
-      <p:pic>
-        <p:nvPicPr>
-          <p:cNvPr id="9" name="Picture 8">
-            <a:extLst>
-              <a:ext uri="{FF2B5EF4-FFF2-40B4-BE49-F238E27FC236}">
-                <a16:creationId xmlns:a16="http://schemas.microsoft.com/office/drawing/2014/main" id="{ED38D8B8-6D73-4159-90F5-7CC67DAE7DAB}"/>
-              </a:ext>
-            </a:extLst>
-          </p:cNvPr>
-          <p:cNvPicPr>
-            <a:picLocks noChangeAspect="1"/>
-          </p:cNvPicPr>
-          <p:nvPr/>
-        </p:nvPicPr>
-        <p:blipFill>
-          <a:blip r:embed="rId3"/>
-          <a:stretch>
-            <a:fillRect/>
-          </a:stretch>
-        </p:blipFill>
-        <p:spPr>
-          <a:xfrm>
-            <a:off x="824124" y="2501987"/>
-            <a:ext cx="5430982" cy="3967812"/>
-          </a:xfrm>
-          <a:prstGeom prst="rect">
-            <a:avLst/>
-          </a:prstGeom>
-        </p:spPr>
-      </p:pic>
-      <p:pic>
-        <p:nvPicPr>
-          <p:cNvPr id="12" name="Picture 11">
-            <a:extLst>
-              <a:ext uri="{FF2B5EF4-FFF2-40B4-BE49-F238E27FC236}">
-                <a16:creationId xmlns:a16="http://schemas.microsoft.com/office/drawing/2014/main" id="{2002654C-0A29-4D37-95B5-EE0B3738B8B3}"/>
-              </a:ext>
-            </a:extLst>
-          </p:cNvPr>
-          <p:cNvPicPr>
-            <a:picLocks noChangeAspect="1"/>
-          </p:cNvPicPr>
-          <p:nvPr/>
-        </p:nvPicPr>
-        <p:blipFill>
-          <a:blip r:embed="rId4"/>
-          <a:stretch>
-            <a:fillRect/>
-          </a:stretch>
-        </p:blipFill>
-        <p:spPr>
-          <a:xfrm>
-            <a:off x="6584867" y="5701920"/>
-            <a:ext cx="5523702" cy="921510"/>
-          </a:xfrm>
-          <a:prstGeom prst="rect">
-            <a:avLst/>
-          </a:prstGeom>
-        </p:spPr>
-      </p:pic>
+      <p:sp>
+        <p:nvSpPr>
+          <p:cNvPr id="2" name="Tekstvak 1">
+            <a:extLst>
+              <a:ext uri="{FF2B5EF4-FFF2-40B4-BE49-F238E27FC236}">
+                <a16:creationId xmlns:a16="http://schemas.microsoft.com/office/drawing/2014/main" id="{FDDE8009-B8D8-2698-C458-F224561ECC6E}"/>
+              </a:ext>
+            </a:extLst>
+          </p:cNvPr>
+          <p:cNvSpPr txBox="1"/>
+          <p:nvPr/>
+        </p:nvSpPr>
+        <p:spPr>
+          <a:xfrm>
+            <a:off x="2540181" y="2423366"/>
+            <a:ext cx="2441694" cy="369332"/>
+          </a:xfrm>
+          <a:prstGeom prst="rect">
+            <a:avLst/>
+          </a:prstGeom>
+          <a:noFill/>
+        </p:spPr>
+        <p:txBody>
+          <a:bodyPr wrap="none" rtlCol="0">
+            <a:spAutoFit/>
+          </a:bodyPr>
+          <a:lstStyle/>
+          <a:p>
+            <a:r>
+              <a:rPr lang="en-US" b="1" dirty="0">
+                <a:latin typeface="Arial" panose="020B0604020202020204" pitchFamily="34" charset="0"/>
+                <a:cs typeface="Arial" panose="020B0604020202020204" pitchFamily="34" charset="0"/>
+              </a:rPr>
+              <a:t>Cell-type expression</a:t>
+            </a:r>
+            <a:endParaRPr lang="nl-NL" b="1" dirty="0">
+              <a:latin typeface="Arial" panose="020B0604020202020204" pitchFamily="34" charset="0"/>
+              <a:cs typeface="Arial" panose="020B0604020202020204" pitchFamily="34" charset="0"/>
+            </a:endParaRPr>
+          </a:p>
+        </p:txBody>
+      </p:sp>
+      <p:sp>
+        <p:nvSpPr>
+          <p:cNvPr id="3" name="Tekstvak 2">
+            <a:extLst>
+              <a:ext uri="{FF2B5EF4-FFF2-40B4-BE49-F238E27FC236}">
+                <a16:creationId xmlns:a16="http://schemas.microsoft.com/office/drawing/2014/main" id="{0DE6FB12-86A8-89F4-3CFE-5F541C3C773A}"/>
+              </a:ext>
+            </a:extLst>
+          </p:cNvPr>
+          <p:cNvSpPr txBox="1"/>
+          <p:nvPr/>
+        </p:nvSpPr>
+        <p:spPr>
+          <a:xfrm>
+            <a:off x="4943403" y="2490537"/>
+            <a:ext cx="7003840" cy="307777"/>
+          </a:xfrm>
+          <a:prstGeom prst="rect">
+            <a:avLst/>
+          </a:prstGeom>
+          <a:noFill/>
+        </p:spPr>
+        <p:txBody>
+          <a:bodyPr wrap="none" rtlCol="0">
+            <a:spAutoFit/>
+          </a:bodyPr>
+          <a:lstStyle/>
+          <a:p>
+            <a:r>
+              <a:rPr lang="en-US" sz="1400" dirty="0">
+                <a:latin typeface="Arial" panose="020B0604020202020204" pitchFamily="34" charset="0"/>
+                <a:cs typeface="Arial" panose="020B0604020202020204" pitchFamily="34" charset="0"/>
+              </a:rPr>
+              <a:t>Checking cell-type expression (microglia &amp; OPCs)  from Blanca and </a:t>
+            </a:r>
+            <a:r>
+              <a:rPr lang="en-US" sz="1400" dirty="0" err="1">
+                <a:latin typeface="Arial" panose="020B0604020202020204" pitchFamily="34" charset="0"/>
+                <a:cs typeface="Arial" panose="020B0604020202020204" pitchFamily="34" charset="0"/>
+              </a:rPr>
+              <a:t>Danies</a:t>
+            </a:r>
+            <a:r>
+              <a:rPr lang="en-US" sz="1400" dirty="0">
+                <a:latin typeface="Arial" panose="020B0604020202020204" pitchFamily="34" charset="0"/>
+                <a:cs typeface="Arial" panose="020B0604020202020204" pitchFamily="34" charset="0"/>
+              </a:rPr>
+              <a:t> single-cell</a:t>
+            </a:r>
+            <a:endParaRPr lang="nl-NL" sz="1400" dirty="0">
+              <a:latin typeface="Arial" panose="020B0604020202020204" pitchFamily="34" charset="0"/>
+              <a:cs typeface="Arial" panose="020B0604020202020204" pitchFamily="34" charset="0"/>
+            </a:endParaRPr>
+          </a:p>
+        </p:txBody>
+      </p:sp>
+      <p:sp>
+        <p:nvSpPr>
+          <p:cNvPr id="10" name="Tekstvak 9">
+            <a:extLst>
+              <a:ext uri="{FF2B5EF4-FFF2-40B4-BE49-F238E27FC236}">
+                <a16:creationId xmlns:a16="http://schemas.microsoft.com/office/drawing/2014/main" id="{C0521906-2307-8328-7157-3F35D6CA29BD}"/>
+              </a:ext>
+            </a:extLst>
+          </p:cNvPr>
+          <p:cNvSpPr txBox="1"/>
+          <p:nvPr/>
+        </p:nvSpPr>
+        <p:spPr>
+          <a:xfrm>
+            <a:off x="1929207" y="2878865"/>
+            <a:ext cx="3108543" cy="369332"/>
+          </a:xfrm>
+          <a:prstGeom prst="rect">
+            <a:avLst/>
+          </a:prstGeom>
+          <a:noFill/>
+        </p:spPr>
+        <p:txBody>
+          <a:bodyPr wrap="none" rtlCol="0">
+            <a:spAutoFit/>
+          </a:bodyPr>
+          <a:lstStyle/>
+          <a:p>
+            <a:r>
+              <a:rPr lang="en-US" b="1" dirty="0">
+                <a:latin typeface="Arial" panose="020B0604020202020204" pitchFamily="34" charset="0"/>
+                <a:cs typeface="Arial" panose="020B0604020202020204" pitchFamily="34" charset="0"/>
+              </a:rPr>
+              <a:t>Developmental expression</a:t>
+            </a:r>
+            <a:endParaRPr lang="nl-NL" b="1" dirty="0">
+              <a:latin typeface="Arial" panose="020B0604020202020204" pitchFamily="34" charset="0"/>
+              <a:cs typeface="Arial" panose="020B0604020202020204" pitchFamily="34" charset="0"/>
+            </a:endParaRPr>
+          </a:p>
+        </p:txBody>
+      </p:sp>
+      <p:sp>
+        <p:nvSpPr>
+          <p:cNvPr id="11" name="Tekstvak 10">
+            <a:extLst>
+              <a:ext uri="{FF2B5EF4-FFF2-40B4-BE49-F238E27FC236}">
+                <a16:creationId xmlns:a16="http://schemas.microsoft.com/office/drawing/2014/main" id="{A7E944EB-17EA-1B7A-EA23-9A0A14D05944}"/>
+              </a:ext>
+            </a:extLst>
+          </p:cNvPr>
+          <p:cNvSpPr txBox="1"/>
+          <p:nvPr/>
+        </p:nvSpPr>
+        <p:spPr>
+          <a:xfrm>
+            <a:off x="4943403" y="2940420"/>
+            <a:ext cx="5827236" cy="307777"/>
+          </a:xfrm>
+          <a:prstGeom prst="rect">
+            <a:avLst/>
+          </a:prstGeom>
+          <a:noFill/>
+        </p:spPr>
+        <p:txBody>
+          <a:bodyPr wrap="none" rtlCol="0">
+            <a:spAutoFit/>
+          </a:bodyPr>
+          <a:lstStyle/>
+          <a:p>
+            <a:r>
+              <a:rPr lang="en-US" sz="1400" dirty="0">
+                <a:latin typeface="Arial" panose="020B0604020202020204" pitchFamily="34" charset="0"/>
+                <a:cs typeface="Arial" panose="020B0604020202020204" pitchFamily="34" charset="0"/>
+              </a:rPr>
+              <a:t>Checking developmental expression from Blanca and </a:t>
+            </a:r>
+            <a:r>
+              <a:rPr lang="en-US" sz="1400" dirty="0" err="1">
+                <a:latin typeface="Arial" panose="020B0604020202020204" pitchFamily="34" charset="0"/>
+                <a:cs typeface="Arial" panose="020B0604020202020204" pitchFamily="34" charset="0"/>
+              </a:rPr>
+              <a:t>Danies</a:t>
+            </a:r>
+            <a:r>
+              <a:rPr lang="en-US" sz="1400" dirty="0">
+                <a:latin typeface="Arial" panose="020B0604020202020204" pitchFamily="34" charset="0"/>
+                <a:cs typeface="Arial" panose="020B0604020202020204" pitchFamily="34" charset="0"/>
+              </a:rPr>
+              <a:t> single-cell</a:t>
+            </a:r>
+            <a:endParaRPr lang="nl-NL" sz="1400" dirty="0">
+              <a:latin typeface="Arial" panose="020B0604020202020204" pitchFamily="34" charset="0"/>
+              <a:cs typeface="Arial" panose="020B0604020202020204" pitchFamily="34" charset="0"/>
+            </a:endParaRPr>
+          </a:p>
+        </p:txBody>
+      </p:sp>
+      <p:sp>
+        <p:nvSpPr>
+          <p:cNvPr id="14" name="Tekstvak 13">
+            <a:extLst>
+              <a:ext uri="{FF2B5EF4-FFF2-40B4-BE49-F238E27FC236}">
+                <a16:creationId xmlns:a16="http://schemas.microsoft.com/office/drawing/2014/main" id="{8154976C-2BB0-85F8-0D1D-6B5070B8C5EF}"/>
+              </a:ext>
+            </a:extLst>
+          </p:cNvPr>
+          <p:cNvSpPr txBox="1"/>
+          <p:nvPr/>
+        </p:nvSpPr>
+        <p:spPr>
+          <a:xfrm>
+            <a:off x="3407560" y="4326922"/>
+            <a:ext cx="1415772" cy="369332"/>
+          </a:xfrm>
+          <a:prstGeom prst="rect">
+            <a:avLst/>
+          </a:prstGeom>
+          <a:noFill/>
+        </p:spPr>
+        <p:txBody>
+          <a:bodyPr wrap="none" rtlCol="0">
+            <a:spAutoFit/>
+          </a:bodyPr>
+          <a:lstStyle/>
+          <a:p>
+            <a:r>
+              <a:rPr lang="en-US" b="1" dirty="0">
+                <a:latin typeface="Arial" panose="020B0604020202020204" pitchFamily="34" charset="0"/>
+                <a:cs typeface="Arial" panose="020B0604020202020204" pitchFamily="34" charset="0"/>
+              </a:rPr>
+              <a:t>Public data</a:t>
+            </a:r>
+            <a:endParaRPr lang="nl-NL" b="1" dirty="0">
+              <a:latin typeface="Arial" panose="020B0604020202020204" pitchFamily="34" charset="0"/>
+              <a:cs typeface="Arial" panose="020B0604020202020204" pitchFamily="34" charset="0"/>
+            </a:endParaRPr>
+          </a:p>
+        </p:txBody>
+      </p:sp>
+      <p:sp>
+        <p:nvSpPr>
+          <p:cNvPr id="15" name="Tekstvak 14">
+            <a:extLst>
+              <a:ext uri="{FF2B5EF4-FFF2-40B4-BE49-F238E27FC236}">
+                <a16:creationId xmlns:a16="http://schemas.microsoft.com/office/drawing/2014/main" id="{87081870-9BA9-3346-D4EC-0F24CF73EF39}"/>
+              </a:ext>
+            </a:extLst>
+          </p:cNvPr>
+          <p:cNvSpPr txBox="1"/>
+          <p:nvPr/>
+        </p:nvSpPr>
+        <p:spPr>
+          <a:xfrm>
+            <a:off x="4942379" y="4326922"/>
+            <a:ext cx="6822901" cy="2031325"/>
+          </a:xfrm>
+          <a:prstGeom prst="rect">
+            <a:avLst/>
+          </a:prstGeom>
+          <a:noFill/>
+        </p:spPr>
+        <p:txBody>
+          <a:bodyPr wrap="square" rtlCol="0">
+            <a:spAutoFit/>
+          </a:bodyPr>
+          <a:lstStyle/>
+          <a:p>
+            <a:r>
+              <a:rPr lang="en-US" sz="1400" dirty="0">
+                <a:latin typeface="Arial" panose="020B0604020202020204" pitchFamily="34" charset="0"/>
+                <a:cs typeface="Arial" panose="020B0604020202020204" pitchFamily="34" charset="0"/>
+              </a:rPr>
+              <a:t>Reanalyzing public </a:t>
+            </a:r>
+            <a:r>
+              <a:rPr lang="en-US" sz="1400" dirty="0" err="1">
+                <a:latin typeface="Arial" panose="020B0604020202020204" pitchFamily="34" charset="0"/>
+                <a:cs typeface="Arial" panose="020B0604020202020204" pitchFamily="34" charset="0"/>
+              </a:rPr>
+              <a:t>RNAseq</a:t>
+            </a:r>
+            <a:r>
+              <a:rPr lang="en-US" sz="1400" dirty="0">
+                <a:latin typeface="Arial" panose="020B0604020202020204" pitchFamily="34" charset="0"/>
+                <a:cs typeface="Arial" panose="020B0604020202020204" pitchFamily="34" charset="0"/>
+              </a:rPr>
+              <a:t> data related to synapse phagocytosis</a:t>
+            </a:r>
+          </a:p>
+          <a:p>
+            <a:r>
+              <a:rPr lang="en-US" sz="1400" dirty="0">
+                <a:latin typeface="Arial" panose="020B0604020202020204" pitchFamily="34" charset="0"/>
+                <a:cs typeface="Arial" panose="020B0604020202020204" pitchFamily="34" charset="0"/>
+              </a:rPr>
+              <a:t>- </a:t>
+            </a:r>
+            <a:r>
+              <a:rPr lang="da-DK" sz="1400" b="0" i="0" dirty="0">
+                <a:effectLst/>
+                <a:latin typeface="Roboto" panose="02000000000000000000" pitchFamily="2" charset="0"/>
+              </a:rPr>
+              <a:t>danyang et al. 2022 Mg tau-GFP+ and tau GFP-</a:t>
+            </a:r>
+            <a:endParaRPr lang="en-US" sz="1400" dirty="0">
+              <a:latin typeface="Arial" panose="020B0604020202020204" pitchFamily="34" charset="0"/>
+              <a:cs typeface="Arial" panose="020B0604020202020204" pitchFamily="34" charset="0"/>
+            </a:endParaRPr>
+          </a:p>
+          <a:p>
+            <a:r>
+              <a:rPr lang="en-US" sz="1400" dirty="0">
+                <a:latin typeface="Arial" panose="020B0604020202020204" pitchFamily="34" charset="0"/>
+                <a:cs typeface="Arial" panose="020B0604020202020204" pitchFamily="34" charset="0"/>
+              </a:rPr>
+              <a:t>- </a:t>
+            </a:r>
+            <a:r>
+              <a:rPr lang="en-US" sz="1400" b="0" i="0" dirty="0" err="1">
+                <a:effectLst/>
+                <a:latin typeface="Roboto" panose="02000000000000000000" pitchFamily="2" charset="0"/>
+              </a:rPr>
+              <a:t>danyang</a:t>
+            </a:r>
+            <a:r>
+              <a:rPr lang="en-US" sz="1400" b="0" i="0" dirty="0">
+                <a:effectLst/>
+                <a:latin typeface="Roboto" panose="02000000000000000000" pitchFamily="2" charset="0"/>
+              </a:rPr>
+              <a:t> et al. 2022 Mg high and low TRPM</a:t>
+            </a:r>
+            <a:endParaRPr lang="en-US" sz="1400" dirty="0">
+              <a:latin typeface="Arial" panose="020B0604020202020204" pitchFamily="34" charset="0"/>
+              <a:cs typeface="Arial" panose="020B0604020202020204" pitchFamily="34" charset="0"/>
+            </a:endParaRPr>
+          </a:p>
+          <a:p>
+            <a:r>
+              <a:rPr lang="en-US" sz="1400" dirty="0">
+                <a:latin typeface="Arial" panose="020B0604020202020204" pitchFamily="34" charset="0"/>
+                <a:cs typeface="Arial" panose="020B0604020202020204" pitchFamily="34" charset="0"/>
+              </a:rPr>
+              <a:t>- </a:t>
+            </a:r>
+            <a:r>
+              <a:rPr lang="de-DE" sz="1400" b="0" i="0" dirty="0" err="1">
+                <a:effectLst/>
+                <a:latin typeface="Roboto" panose="02000000000000000000" pitchFamily="2" charset="0"/>
+              </a:rPr>
+              <a:t>grubman</a:t>
+            </a:r>
+            <a:r>
+              <a:rPr lang="de-DE" sz="1400" b="0" i="0" dirty="0">
+                <a:effectLst/>
+                <a:latin typeface="Roboto" panose="02000000000000000000" pitchFamily="2" charset="0"/>
+              </a:rPr>
+              <a:t> et al. 2021 Mg Ab </a:t>
+            </a:r>
+            <a:r>
+              <a:rPr lang="de-DE" sz="1400" b="0" i="0" dirty="0" err="1">
+                <a:effectLst/>
+                <a:latin typeface="Roboto" panose="02000000000000000000" pitchFamily="2" charset="0"/>
+              </a:rPr>
+              <a:t>phago</a:t>
+            </a:r>
+            <a:endParaRPr lang="de-DE" sz="1400" b="0" i="0" dirty="0">
+              <a:effectLst/>
+              <a:latin typeface="Roboto" panose="02000000000000000000" pitchFamily="2" charset="0"/>
+            </a:endParaRPr>
+          </a:p>
+          <a:p>
+            <a:r>
+              <a:rPr lang="en-US" sz="1400" b="0" i="0" dirty="0">
+                <a:effectLst/>
+                <a:latin typeface="Roboto" panose="02000000000000000000" pitchFamily="2" charset="0"/>
+              </a:rPr>
+              <a:t>- Masuda et al. 2019 Mg subclasses throughout development</a:t>
+            </a:r>
+          </a:p>
+          <a:p>
+            <a:r>
+              <a:rPr lang="nl-NL" sz="1400" b="0" i="0" dirty="0">
+                <a:effectLst/>
+                <a:latin typeface="Roboto" panose="02000000000000000000" pitchFamily="2" charset="0"/>
+              </a:rPr>
+              <a:t>- Hammond et al. 2019 Mg over development</a:t>
+            </a:r>
+            <a:endParaRPr lang="en-US" sz="1400" dirty="0">
+              <a:latin typeface="Roboto" panose="02000000000000000000" pitchFamily="2" charset="0"/>
+            </a:endParaRPr>
+          </a:p>
+          <a:p>
+            <a:r>
+              <a:rPr lang="en-US" sz="1400" b="0" i="0" dirty="0">
+                <a:effectLst/>
+                <a:latin typeface="Roboto" panose="02000000000000000000" pitchFamily="2" charset="0"/>
+              </a:rPr>
+              <a:t>- Keren-</a:t>
+            </a:r>
+            <a:r>
+              <a:rPr lang="en-US" sz="1400" b="0" i="0" dirty="0" err="1">
+                <a:effectLst/>
+                <a:latin typeface="Roboto" panose="02000000000000000000" pitchFamily="2" charset="0"/>
+              </a:rPr>
+              <a:t>shaul</a:t>
+            </a:r>
+            <a:r>
+              <a:rPr lang="en-US" sz="1400" b="0" i="0" dirty="0">
+                <a:effectLst/>
+                <a:latin typeface="Roboto" panose="02000000000000000000" pitchFamily="2" charset="0"/>
+              </a:rPr>
+              <a:t> et al. 2017. DAM microglia (because the phagocytic pathway is induced in these type of microglia in AD context)</a:t>
+            </a:r>
+          </a:p>
+          <a:p>
+            <a:r>
+              <a:rPr lang="it-IT" sz="1400" b="0" i="0" dirty="0">
+                <a:effectLst/>
+                <a:latin typeface="Roboto" panose="02000000000000000000" pitchFamily="2" charset="0"/>
+              </a:rPr>
+              <a:t>- Li et al. 2019. Microglia developement</a:t>
+            </a:r>
+            <a:endParaRPr lang="nl-NL" sz="1400" dirty="0">
+              <a:latin typeface="Arial" panose="020B0604020202020204" pitchFamily="34" charset="0"/>
+              <a:cs typeface="Arial" panose="020B0604020202020204" pitchFamily="34" charset="0"/>
+            </a:endParaRPr>
+          </a:p>
+        </p:txBody>
+      </p:sp>
+      <p:sp>
+        <p:nvSpPr>
+          <p:cNvPr id="17" name="Rechthoek: afgeronde hoeken 16">
+            <a:extLst>
+              <a:ext uri="{FF2B5EF4-FFF2-40B4-BE49-F238E27FC236}">
+                <a16:creationId xmlns:a16="http://schemas.microsoft.com/office/drawing/2014/main" id="{DDF4FC3B-F9FC-D6EB-FEEA-091918D07346}"/>
+              </a:ext>
+            </a:extLst>
+          </p:cNvPr>
+          <p:cNvSpPr/>
+          <p:nvPr/>
+        </p:nvSpPr>
+        <p:spPr>
+          <a:xfrm>
+            <a:off x="3587096" y="1170039"/>
+            <a:ext cx="4672001" cy="1009216"/>
+          </a:xfrm>
+          <a:prstGeom prst="roundRect">
+            <a:avLst/>
+          </a:prstGeom>
+          <a:noFill/>
+          <a:ln w="28575">
+            <a:solidFill>
+              <a:schemeClr val="accent1"/>
+            </a:solidFill>
+          </a:ln>
+        </p:spPr>
+        <p:style>
+          <a:lnRef idx="2">
+            <a:schemeClr val="accent1">
+              <a:shade val="15000"/>
+            </a:schemeClr>
+          </a:lnRef>
+          <a:fillRef idx="1">
+            <a:schemeClr val="accent1"/>
+          </a:fillRef>
+          <a:effectRef idx="0">
+            <a:schemeClr val="accent1"/>
+          </a:effectRef>
+          <a:fontRef idx="minor">
+            <a:schemeClr val="lt1"/>
+          </a:fontRef>
+        </p:style>
+        <p:txBody>
+          <a:bodyPr rtlCol="0" anchor="ctr"/>
+          <a:lstStyle/>
+          <a:p>
+            <a:pPr algn="ctr"/>
+            <a:endParaRPr lang="nl-NL"/>
+          </a:p>
+        </p:txBody>
+      </p:sp>
+      <p:sp>
+        <p:nvSpPr>
+          <p:cNvPr id="18" name="Rechthoek: afgeronde hoeken 17">
+            <a:extLst>
+              <a:ext uri="{FF2B5EF4-FFF2-40B4-BE49-F238E27FC236}">
+                <a16:creationId xmlns:a16="http://schemas.microsoft.com/office/drawing/2014/main" id="{28A88665-BF3E-E3F3-AB00-50BE9B4D8B4B}"/>
+              </a:ext>
+            </a:extLst>
+          </p:cNvPr>
+          <p:cNvSpPr/>
+          <p:nvPr/>
+        </p:nvSpPr>
+        <p:spPr>
+          <a:xfrm>
+            <a:off x="1929207" y="2374257"/>
+            <a:ext cx="9938328" cy="1009216"/>
+          </a:xfrm>
+          <a:prstGeom prst="roundRect">
+            <a:avLst/>
+          </a:prstGeom>
+          <a:noFill/>
+          <a:ln w="28575">
+            <a:solidFill>
+              <a:schemeClr val="accent6"/>
+            </a:solidFill>
+          </a:ln>
+        </p:spPr>
+        <p:style>
+          <a:lnRef idx="2">
+            <a:schemeClr val="accent1">
+              <a:shade val="15000"/>
+            </a:schemeClr>
+          </a:lnRef>
+          <a:fillRef idx="1">
+            <a:schemeClr val="accent1"/>
+          </a:fillRef>
+          <a:effectRef idx="0">
+            <a:schemeClr val="accent1"/>
+          </a:effectRef>
+          <a:fontRef idx="minor">
+            <a:schemeClr val="lt1"/>
+          </a:fontRef>
+        </p:style>
+        <p:txBody>
+          <a:bodyPr rtlCol="0" anchor="ctr"/>
+          <a:lstStyle/>
+          <a:p>
+            <a:pPr algn="ctr"/>
+            <a:endParaRPr lang="nl-NL"/>
+          </a:p>
+        </p:txBody>
+      </p:sp>
+      <p:sp>
+        <p:nvSpPr>
+          <p:cNvPr id="19" name="Rechthoek: afgeronde hoeken 18">
+            <a:extLst>
+              <a:ext uri="{FF2B5EF4-FFF2-40B4-BE49-F238E27FC236}">
+                <a16:creationId xmlns:a16="http://schemas.microsoft.com/office/drawing/2014/main" id="{7995BDD8-DC06-089B-52B7-D5879A535AFE}"/>
+              </a:ext>
+            </a:extLst>
+          </p:cNvPr>
+          <p:cNvSpPr/>
+          <p:nvPr/>
+        </p:nvSpPr>
+        <p:spPr>
+          <a:xfrm>
+            <a:off x="1929207" y="3615145"/>
+            <a:ext cx="9938328" cy="2743101"/>
+          </a:xfrm>
+          <a:prstGeom prst="roundRect">
+            <a:avLst/>
+          </a:prstGeom>
+          <a:noFill/>
+          <a:ln w="28575">
+            <a:solidFill>
+              <a:schemeClr val="accent2"/>
+            </a:solidFill>
+          </a:ln>
+        </p:spPr>
+        <p:style>
+          <a:lnRef idx="2">
+            <a:schemeClr val="accent1">
+              <a:shade val="15000"/>
+            </a:schemeClr>
+          </a:lnRef>
+          <a:fillRef idx="1">
+            <a:schemeClr val="accent1"/>
+          </a:fillRef>
+          <a:effectRef idx="0">
+            <a:schemeClr val="accent1"/>
+          </a:effectRef>
+          <a:fontRef idx="minor">
+            <a:schemeClr val="lt1"/>
+          </a:fontRef>
+        </p:style>
+        <p:txBody>
+          <a:bodyPr rtlCol="0" anchor="ctr"/>
+          <a:lstStyle/>
+          <a:p>
+            <a:pPr algn="ctr"/>
+            <a:endParaRPr lang="nl-NL"/>
+          </a:p>
+        </p:txBody>
+      </p:sp>
+      <p:sp>
+        <p:nvSpPr>
+          <p:cNvPr id="20" name="Tekstvak 19">
+            <a:extLst>
+              <a:ext uri="{FF2B5EF4-FFF2-40B4-BE49-F238E27FC236}">
+                <a16:creationId xmlns:a16="http://schemas.microsoft.com/office/drawing/2014/main" id="{F2486826-1AB8-03B1-3215-93366066623A}"/>
+              </a:ext>
+            </a:extLst>
+          </p:cNvPr>
+          <p:cNvSpPr txBox="1"/>
+          <p:nvPr/>
+        </p:nvSpPr>
+        <p:spPr>
+          <a:xfrm>
+            <a:off x="98322" y="1306345"/>
+            <a:ext cx="1568699" cy="461665"/>
+          </a:xfrm>
+          <a:prstGeom prst="rect">
+            <a:avLst/>
+          </a:prstGeom>
+          <a:noFill/>
+        </p:spPr>
+        <p:txBody>
+          <a:bodyPr wrap="none" rtlCol="0">
+            <a:spAutoFit/>
+          </a:bodyPr>
+          <a:lstStyle/>
+          <a:p>
+            <a:r>
+              <a:rPr lang="en-US" sz="2400" b="1" dirty="0">
+                <a:solidFill>
+                  <a:schemeClr val="accent1"/>
+                </a:solidFill>
+              </a:rPr>
+              <a:t>Interactors</a:t>
+            </a:r>
+            <a:endParaRPr lang="nl-NL" sz="2400" b="1" dirty="0">
+              <a:solidFill>
+                <a:schemeClr val="accent1"/>
+              </a:solidFill>
+            </a:endParaRPr>
+          </a:p>
+        </p:txBody>
+      </p:sp>
+      <p:sp>
+        <p:nvSpPr>
+          <p:cNvPr id="21" name="Tekstvak 20">
+            <a:extLst>
+              <a:ext uri="{FF2B5EF4-FFF2-40B4-BE49-F238E27FC236}">
+                <a16:creationId xmlns:a16="http://schemas.microsoft.com/office/drawing/2014/main" id="{0D51B59B-4508-8435-2349-73BEB72B7A20}"/>
+              </a:ext>
+            </a:extLst>
+          </p:cNvPr>
+          <p:cNvSpPr txBox="1"/>
+          <p:nvPr/>
+        </p:nvSpPr>
+        <p:spPr>
+          <a:xfrm>
+            <a:off x="55021" y="2417200"/>
+            <a:ext cx="1615250" cy="461665"/>
+          </a:xfrm>
+          <a:prstGeom prst="rect">
+            <a:avLst/>
+          </a:prstGeom>
+          <a:noFill/>
+        </p:spPr>
+        <p:txBody>
+          <a:bodyPr wrap="none" rtlCol="0">
+            <a:spAutoFit/>
+          </a:bodyPr>
+          <a:lstStyle/>
+          <a:p>
+            <a:r>
+              <a:rPr lang="en-US" sz="2400" b="1" dirty="0">
+                <a:solidFill>
+                  <a:schemeClr val="accent6"/>
+                </a:solidFill>
+              </a:rPr>
+              <a:t>Descriptive</a:t>
+            </a:r>
+            <a:endParaRPr lang="nl-NL" sz="2400" b="1" dirty="0">
+              <a:solidFill>
+                <a:schemeClr val="accent6"/>
+              </a:solidFill>
+            </a:endParaRPr>
+          </a:p>
+        </p:txBody>
+      </p:sp>
+      <p:sp>
+        <p:nvSpPr>
+          <p:cNvPr id="22" name="Tekstvak 21">
+            <a:extLst>
+              <a:ext uri="{FF2B5EF4-FFF2-40B4-BE49-F238E27FC236}">
+                <a16:creationId xmlns:a16="http://schemas.microsoft.com/office/drawing/2014/main" id="{F7E0AD72-7A29-9B39-A72D-95D2FCDCDDA1}"/>
+              </a:ext>
+            </a:extLst>
+          </p:cNvPr>
+          <p:cNvSpPr txBox="1"/>
+          <p:nvPr/>
+        </p:nvSpPr>
+        <p:spPr>
+          <a:xfrm>
+            <a:off x="106097" y="4591465"/>
+            <a:ext cx="1524776" cy="461665"/>
+          </a:xfrm>
+          <a:prstGeom prst="rect">
+            <a:avLst/>
+          </a:prstGeom>
+          <a:noFill/>
+        </p:spPr>
+        <p:txBody>
+          <a:bodyPr wrap="none" rtlCol="0">
+            <a:spAutoFit/>
+          </a:bodyPr>
+          <a:lstStyle/>
+          <a:p>
+            <a:r>
+              <a:rPr lang="en-US" sz="2400" b="1" dirty="0">
+                <a:solidFill>
+                  <a:schemeClr val="accent2"/>
+                </a:solidFill>
+              </a:rPr>
+              <a:t>Functional</a:t>
+            </a:r>
+            <a:endParaRPr lang="nl-NL" sz="2400" b="1" dirty="0">
+              <a:solidFill>
+                <a:schemeClr val="accent2"/>
+              </a:solidFill>
+            </a:endParaRPr>
+          </a:p>
+        </p:txBody>
+      </p:sp>
     </p:spTree>
     <p:extLst>
       <p:ext uri="{BB962C8B-B14F-4D97-AF65-F5344CB8AC3E}">
-        <p14:creationId xmlns:p14="http://schemas.microsoft.com/office/powerpoint/2010/main" val="3517122714"/>
+        <p14:creationId xmlns:p14="http://schemas.microsoft.com/office/powerpoint/2010/main" val="3693617880"/>
       </p:ext>
     </p:extLst>
   </p:cSld>
@@ -6135,7 +8575,7 @@
           <p:cNvPr id="2" name="Picture 1">
             <a:extLst>
               <a:ext uri="{FF2B5EF4-FFF2-40B4-BE49-F238E27FC236}">
-                <a16:creationId xmlns:a16="http://schemas.microsoft.com/office/drawing/2014/main" id="{19C50232-B35D-473D-B4B8-DAC80CB28961}"/>
+                <a16:creationId xmlns:a16="http://schemas.microsoft.com/office/drawing/2014/main" id="{2E94BF7E-6F83-499A-BB60-9778BD501DE5}"/>
               </a:ext>
             </a:extLst>
           </p:cNvPr>
@@ -6152,8 +8592,8 @@
         </p:blipFill>
         <p:spPr>
           <a:xfrm>
-            <a:off x="338448" y="967836"/>
-            <a:ext cx="5317938" cy="4108863"/>
+            <a:off x="1745047" y="1716761"/>
+            <a:ext cx="7350240" cy="4172625"/>
           </a:xfrm>
           <a:prstGeom prst="rect">
             <a:avLst/>
@@ -6162,30 +8602,26 @@
       </p:pic>
       <p:cxnSp>
         <p:nvCxnSpPr>
-          <p:cNvPr id="4" name="Straight Connector 3">
-            <a:extLst>
-              <a:ext uri="{FF2B5EF4-FFF2-40B4-BE49-F238E27FC236}">
-                <a16:creationId xmlns:a16="http://schemas.microsoft.com/office/drawing/2014/main" id="{F9F43923-4294-4ABF-98CA-882E69471F7A}"/>
-              </a:ext>
-            </a:extLst>
-          </p:cNvPr>
-          <p:cNvCxnSpPr>
-            <a:cxnSpLocks/>
-          </p:cNvCxnSpPr>
+          <p:cNvPr id="4" name="Straight Arrow Connector 3">
+            <a:extLst>
+              <a:ext uri="{FF2B5EF4-FFF2-40B4-BE49-F238E27FC236}">
+                <a16:creationId xmlns:a16="http://schemas.microsoft.com/office/drawing/2014/main" id="{6D671647-3BCD-4A83-82E1-E9501D0A26B4}"/>
+              </a:ext>
+            </a:extLst>
+          </p:cNvPr>
+          <p:cNvCxnSpPr/>
           <p:nvPr/>
         </p:nvCxnSpPr>
         <p:spPr>
-          <a:xfrm flipV="1">
-            <a:off x="2676158" y="2092035"/>
-            <a:ext cx="414891" cy="2"/>
-          </a:xfrm>
-          <a:prstGeom prst="line">
-            <a:avLst/>
-          </a:prstGeom>
-          <a:ln w="38100">
-            <a:solidFill>
-              <a:srgbClr val="FF0000"/>
-            </a:solidFill>
+          <a:xfrm>
+            <a:off x="9173688" y="4827321"/>
+            <a:ext cx="575954" cy="0"/>
+          </a:xfrm>
+          <a:prstGeom prst="straightConnector1">
+            <a:avLst/>
+          </a:prstGeom>
+          <a:ln>
+            <a:tailEnd type="triangle"/>
           </a:ln>
         </p:spPr>
         <p:style>
@@ -6203,216 +8639,66 @@
           </a:fontRef>
         </p:style>
       </p:cxnSp>
-      <p:cxnSp>
-        <p:nvCxnSpPr>
-          <p:cNvPr id="5" name="Straight Connector 4">
-            <a:extLst>
-              <a:ext uri="{FF2B5EF4-FFF2-40B4-BE49-F238E27FC236}">
-                <a16:creationId xmlns:a16="http://schemas.microsoft.com/office/drawing/2014/main" id="{5E370DC0-146A-484C-A107-C34F7EB333E1}"/>
-              </a:ext>
-            </a:extLst>
-          </p:cNvPr>
-          <p:cNvCxnSpPr>
-            <a:cxnSpLocks/>
-          </p:cNvCxnSpPr>
-          <p:nvPr/>
-        </p:nvCxnSpPr>
-        <p:spPr>
-          <a:xfrm flipV="1">
-            <a:off x="2676158" y="2313708"/>
-            <a:ext cx="516229" cy="2"/>
-          </a:xfrm>
-          <a:prstGeom prst="line">
-            <a:avLst/>
-          </a:prstGeom>
-          <a:ln w="38100">
-            <a:solidFill>
-              <a:srgbClr val="FF0000"/>
-            </a:solidFill>
-          </a:ln>
-        </p:spPr>
-        <p:style>
-          <a:lnRef idx="1">
-            <a:schemeClr val="accent1"/>
-          </a:lnRef>
-          <a:fillRef idx="0">
-            <a:schemeClr val="accent1"/>
-          </a:fillRef>
-          <a:effectRef idx="0">
-            <a:schemeClr val="accent1"/>
-          </a:effectRef>
-          <a:fontRef idx="minor">
-            <a:schemeClr val="tx1"/>
-          </a:fontRef>
-        </p:style>
-      </p:cxnSp>
-      <p:cxnSp>
-        <p:nvCxnSpPr>
-          <p:cNvPr id="7" name="Straight Connector 6">
-            <a:extLst>
-              <a:ext uri="{FF2B5EF4-FFF2-40B4-BE49-F238E27FC236}">
-                <a16:creationId xmlns:a16="http://schemas.microsoft.com/office/drawing/2014/main" id="{40664960-FE14-4CDE-9B45-3129368DB20C}"/>
-              </a:ext>
-            </a:extLst>
-          </p:cNvPr>
-          <p:cNvCxnSpPr>
-            <a:cxnSpLocks/>
-          </p:cNvCxnSpPr>
-          <p:nvPr/>
-        </p:nvCxnSpPr>
-        <p:spPr>
-          <a:xfrm flipV="1">
-            <a:off x="2676158" y="2952996"/>
-            <a:ext cx="516229" cy="2"/>
-          </a:xfrm>
-          <a:prstGeom prst="line">
-            <a:avLst/>
-          </a:prstGeom>
-          <a:ln w="38100">
-            <a:solidFill>
-              <a:srgbClr val="FF0000"/>
-            </a:solidFill>
-          </a:ln>
-        </p:spPr>
-        <p:style>
-          <a:lnRef idx="1">
-            <a:schemeClr val="accent1"/>
-          </a:lnRef>
-          <a:fillRef idx="0">
-            <a:schemeClr val="accent1"/>
-          </a:fillRef>
-          <a:effectRef idx="0">
-            <a:schemeClr val="accent1"/>
-          </a:effectRef>
-          <a:fontRef idx="minor">
-            <a:schemeClr val="tx1"/>
-          </a:fontRef>
-        </p:style>
-      </p:cxnSp>
-      <p:sp>
-        <p:nvSpPr>
-          <p:cNvPr id="11" name="Rectangle 10">
-            <a:extLst>
-              <a:ext uri="{FF2B5EF4-FFF2-40B4-BE49-F238E27FC236}">
-                <a16:creationId xmlns:a16="http://schemas.microsoft.com/office/drawing/2014/main" id="{BFFA5932-90BD-4BA6-9535-ABCB746150DD}"/>
-              </a:ext>
-            </a:extLst>
-          </p:cNvPr>
-          <p:cNvSpPr/>
-          <p:nvPr/>
-        </p:nvSpPr>
-        <p:spPr>
-          <a:xfrm>
-            <a:off x="534008" y="72171"/>
-            <a:ext cx="5114081" cy="523220"/>
-          </a:xfrm>
-          <a:prstGeom prst="rect">
-            <a:avLst/>
-          </a:prstGeom>
-        </p:spPr>
-        <p:txBody>
-          <a:bodyPr wrap="square">
+      <p:sp>
+        <p:nvSpPr>
+          <p:cNvPr id="5" name="TextBox 4">
+            <a:extLst>
+              <a:ext uri="{FF2B5EF4-FFF2-40B4-BE49-F238E27FC236}">
+                <a16:creationId xmlns:a16="http://schemas.microsoft.com/office/drawing/2014/main" id="{A69BA926-E305-43BE-BA5B-782F12316BA1}"/>
+              </a:ext>
+            </a:extLst>
+          </p:cNvPr>
+          <p:cNvSpPr txBox="1"/>
+          <p:nvPr/>
+        </p:nvSpPr>
+        <p:spPr>
+          <a:xfrm>
+            <a:off x="9828043" y="4642655"/>
+            <a:ext cx="1665841" cy="923330"/>
+          </a:xfrm>
+          <a:prstGeom prst="rect">
+            <a:avLst/>
+          </a:prstGeom>
+          <a:noFill/>
+        </p:spPr>
+        <p:txBody>
+          <a:bodyPr wrap="none" rtlCol="0">
             <a:spAutoFit/>
           </a:bodyPr>
           <a:lstStyle/>
           <a:p>
             <a:r>
-              <a:rPr lang="nl-BE" sz="1400" dirty="0" err="1"/>
-              <a:t>Mean</a:t>
-            </a:r>
-            <a:r>
-              <a:rPr lang="nl-BE" sz="1400" dirty="0"/>
-              <a:t> </a:t>
-            </a:r>
-            <a:r>
-              <a:rPr lang="nl-BE" sz="1400" dirty="0" err="1"/>
-              <a:t>yield</a:t>
-            </a:r>
-            <a:r>
-              <a:rPr lang="nl-BE" sz="1400" dirty="0"/>
-              <a:t> </a:t>
-            </a:r>
-            <a:r>
-              <a:rPr lang="nl-BE" sz="1400" dirty="0" err="1"/>
-              <a:t>coverage</a:t>
-            </a:r>
-            <a:r>
-              <a:rPr lang="nl-BE" sz="1400" dirty="0"/>
-              <a:t> of </a:t>
-            </a:r>
-            <a:r>
-              <a:rPr lang="nl-BE" sz="1400" dirty="0" err="1"/>
-              <a:t>protein</a:t>
-            </a:r>
-            <a:r>
-              <a:rPr lang="nl-BE" sz="1400" dirty="0"/>
-              <a:t> </a:t>
-            </a:r>
-            <a:r>
-              <a:rPr lang="nl-BE" sz="1400" dirty="0" err="1"/>
-              <a:t>interactions</a:t>
-            </a:r>
-            <a:r>
-              <a:rPr lang="nl-BE" sz="1400" dirty="0"/>
-              <a:t> </a:t>
-            </a:r>
-            <a:r>
-              <a:rPr lang="nl-BE" sz="1400" dirty="0" err="1"/>
-              <a:t>across</a:t>
-            </a:r>
-            <a:r>
-              <a:rPr lang="nl-BE" sz="1400" dirty="0"/>
-              <a:t> databases </a:t>
-            </a:r>
-            <a:r>
-              <a:rPr lang="nl-BE" sz="1400" dirty="0" err="1"/>
-              <a:t>for</a:t>
-            </a:r>
-            <a:r>
-              <a:rPr lang="nl-BE" sz="1400" dirty="0"/>
-              <a:t> </a:t>
-            </a:r>
-            <a:r>
-              <a:rPr lang="nl-BE" sz="1400" dirty="0" err="1"/>
-              <a:t>ubiquitous</a:t>
-            </a:r>
-            <a:r>
-              <a:rPr lang="nl-BE" sz="1400" dirty="0"/>
-              <a:t>, tissue-</a:t>
-            </a:r>
-            <a:r>
-              <a:rPr lang="nl-BE" sz="1400" dirty="0" err="1"/>
-              <a:t>specific</a:t>
-            </a:r>
-            <a:r>
-              <a:rPr lang="nl-BE" sz="1400" dirty="0"/>
-              <a:t>, </a:t>
-            </a:r>
-            <a:r>
-              <a:rPr lang="nl-BE" sz="1400" dirty="0" err="1"/>
-              <a:t>and</a:t>
-            </a:r>
-            <a:r>
-              <a:rPr lang="nl-BE" sz="1400" dirty="0"/>
-              <a:t> </a:t>
-            </a:r>
-            <a:r>
-              <a:rPr lang="nl-BE" sz="1400" dirty="0" err="1"/>
-              <a:t>disease-associated</a:t>
-            </a:r>
-            <a:r>
-              <a:rPr lang="nl-BE" sz="1400" dirty="0"/>
-              <a:t> gene-sets.</a:t>
-            </a:r>
+              <a:rPr lang="en-US" dirty="0"/>
+              <a:t>STRING &amp; </a:t>
+            </a:r>
+            <a:r>
+              <a:rPr lang="en-US" dirty="0" err="1"/>
+              <a:t>UniHI</a:t>
+            </a:r>
+            <a:endParaRPr lang="en-US" dirty="0"/>
+          </a:p>
+          <a:p>
+            <a:endParaRPr lang="en-US" dirty="0"/>
+          </a:p>
+          <a:p>
+            <a:r>
+              <a:rPr lang="en-US" dirty="0" err="1"/>
+              <a:t>UniHi</a:t>
+            </a:r>
+            <a:r>
+              <a:rPr lang="en-US" dirty="0"/>
+              <a:t> is down</a:t>
+            </a:r>
+            <a:endParaRPr lang="nl-BE" dirty="0"/>
           </a:p>
         </p:txBody>
       </p:sp>
       <p:pic>
         <p:nvPicPr>
-          <p:cNvPr id="15" name="Picture 14">
-            <a:extLst>
-              <a:ext uri="{FF2B5EF4-FFF2-40B4-BE49-F238E27FC236}">
-                <a16:creationId xmlns:a16="http://schemas.microsoft.com/office/drawing/2014/main" id="{6A523DB4-4433-49EF-9322-C106F354FBB8}"/>
+          <p:cNvPr id="6" name="Picture 5">
+            <a:extLst>
+              <a:ext uri="{FF2B5EF4-FFF2-40B4-BE49-F238E27FC236}">
+                <a16:creationId xmlns:a16="http://schemas.microsoft.com/office/drawing/2014/main" id="{9CC2B16D-9E85-449C-B8FB-A39BCCA6AD82}"/>
               </a:ext>
             </a:extLst>
           </p:cNvPr>
@@ -6429,402 +8715,18 @@
         </p:blipFill>
         <p:spPr>
           <a:xfrm>
-            <a:off x="5950604" y="599490"/>
-            <a:ext cx="5487695" cy="3010240"/>
+            <a:off x="1745047" y="222652"/>
+            <a:ext cx="7635902" cy="1425063"/>
           </a:xfrm>
           <a:prstGeom prst="rect">
             <a:avLst/>
           </a:prstGeom>
         </p:spPr>
       </p:pic>
-      <p:sp>
-        <p:nvSpPr>
-          <p:cNvPr id="16" name="Rectangle 15">
-            <a:extLst>
-              <a:ext uri="{FF2B5EF4-FFF2-40B4-BE49-F238E27FC236}">
-                <a16:creationId xmlns:a16="http://schemas.microsoft.com/office/drawing/2014/main" id="{89F237DC-E413-41E3-BE41-A4D9282D3BC0}"/>
-              </a:ext>
-            </a:extLst>
-          </p:cNvPr>
-          <p:cNvSpPr/>
-          <p:nvPr/>
-        </p:nvSpPr>
-        <p:spPr>
-          <a:xfrm>
-            <a:off x="6575555" y="205012"/>
-            <a:ext cx="4862744" cy="523220"/>
-          </a:xfrm>
-          <a:prstGeom prst="rect">
-            <a:avLst/>
-          </a:prstGeom>
-        </p:spPr>
-        <p:txBody>
-          <a:bodyPr wrap="square">
-            <a:spAutoFit/>
-          </a:bodyPr>
-          <a:lstStyle/>
-          <a:p>
-            <a:r>
-              <a:rPr lang="en-US" sz="1400" b="0" i="0" dirty="0">
-                <a:solidFill>
-                  <a:srgbClr val="000000"/>
-                </a:solidFill>
-              </a:rPr>
-              <a:t>Coverage of protein interactions across the databases based on complete downloaded data.</a:t>
-            </a:r>
-            <a:endParaRPr lang="nl-BE" sz="1400" dirty="0"/>
-          </a:p>
-        </p:txBody>
-      </p:sp>
-      <p:cxnSp>
-        <p:nvCxnSpPr>
-          <p:cNvPr id="17" name="Straight Connector 16">
-            <a:extLst>
-              <a:ext uri="{FF2B5EF4-FFF2-40B4-BE49-F238E27FC236}">
-                <a16:creationId xmlns:a16="http://schemas.microsoft.com/office/drawing/2014/main" id="{CE77BC9E-114D-406C-9314-722E8FBAB53F}"/>
-              </a:ext>
-            </a:extLst>
-          </p:cNvPr>
-          <p:cNvCxnSpPr>
-            <a:cxnSpLocks/>
-          </p:cNvCxnSpPr>
-          <p:nvPr/>
-        </p:nvCxnSpPr>
-        <p:spPr>
-          <a:xfrm flipV="1">
-            <a:off x="7519312" y="3064823"/>
-            <a:ext cx="433686" cy="469078"/>
-          </a:xfrm>
-          <a:prstGeom prst="line">
-            <a:avLst/>
-          </a:prstGeom>
-          <a:ln w="38100">
-            <a:solidFill>
-              <a:srgbClr val="FF0000"/>
-            </a:solidFill>
-          </a:ln>
-        </p:spPr>
-        <p:style>
-          <a:lnRef idx="1">
-            <a:schemeClr val="accent1"/>
-          </a:lnRef>
-          <a:fillRef idx="0">
-            <a:schemeClr val="accent1"/>
-          </a:fillRef>
-          <a:effectRef idx="0">
-            <a:schemeClr val="accent1"/>
-          </a:effectRef>
-          <a:fontRef idx="minor">
-            <a:schemeClr val="tx1"/>
-          </a:fontRef>
-        </p:style>
-      </p:cxnSp>
-      <p:cxnSp>
-        <p:nvCxnSpPr>
-          <p:cNvPr id="21" name="Straight Connector 20">
-            <a:extLst>
-              <a:ext uri="{FF2B5EF4-FFF2-40B4-BE49-F238E27FC236}">
-                <a16:creationId xmlns:a16="http://schemas.microsoft.com/office/drawing/2014/main" id="{CD8D4623-A05E-4127-84F7-D4E3CE9566A1}"/>
-              </a:ext>
-            </a:extLst>
-          </p:cNvPr>
-          <p:cNvCxnSpPr>
-            <a:cxnSpLocks/>
-          </p:cNvCxnSpPr>
-          <p:nvPr/>
-        </p:nvCxnSpPr>
-        <p:spPr>
-          <a:xfrm flipV="1">
-            <a:off x="7861717" y="3064823"/>
-            <a:ext cx="433686" cy="469078"/>
-          </a:xfrm>
-          <a:prstGeom prst="line">
-            <a:avLst/>
-          </a:prstGeom>
-          <a:ln w="38100">
-            <a:solidFill>
-              <a:srgbClr val="FF0000"/>
-            </a:solidFill>
-          </a:ln>
-        </p:spPr>
-        <p:style>
-          <a:lnRef idx="1">
-            <a:schemeClr val="accent1"/>
-          </a:lnRef>
-          <a:fillRef idx="0">
-            <a:schemeClr val="accent1"/>
-          </a:fillRef>
-          <a:effectRef idx="0">
-            <a:schemeClr val="accent1"/>
-          </a:effectRef>
-          <a:fontRef idx="minor">
-            <a:schemeClr val="tx1"/>
-          </a:fontRef>
-        </p:style>
-      </p:cxnSp>
-      <p:cxnSp>
-        <p:nvCxnSpPr>
-          <p:cNvPr id="22" name="Straight Connector 21">
-            <a:extLst>
-              <a:ext uri="{FF2B5EF4-FFF2-40B4-BE49-F238E27FC236}">
-                <a16:creationId xmlns:a16="http://schemas.microsoft.com/office/drawing/2014/main" id="{3468E38C-3ECE-498C-8A42-719C34A817E4}"/>
-              </a:ext>
-            </a:extLst>
-          </p:cNvPr>
-          <p:cNvCxnSpPr>
-            <a:cxnSpLocks/>
-          </p:cNvCxnSpPr>
-          <p:nvPr/>
-        </p:nvCxnSpPr>
-        <p:spPr>
-          <a:xfrm flipV="1">
-            <a:off x="8803826" y="3064823"/>
-            <a:ext cx="433686" cy="469078"/>
-          </a:xfrm>
-          <a:prstGeom prst="line">
-            <a:avLst/>
-          </a:prstGeom>
-          <a:ln w="38100">
-            <a:solidFill>
-              <a:srgbClr val="FF0000"/>
-            </a:solidFill>
-          </a:ln>
-        </p:spPr>
-        <p:style>
-          <a:lnRef idx="1">
-            <a:schemeClr val="accent1"/>
-          </a:lnRef>
-          <a:fillRef idx="0">
-            <a:schemeClr val="accent1"/>
-          </a:fillRef>
-          <a:effectRef idx="0">
-            <a:schemeClr val="accent1"/>
-          </a:effectRef>
-          <a:fontRef idx="minor">
-            <a:schemeClr val="tx1"/>
-          </a:fontRef>
-        </p:style>
-      </p:cxnSp>
-      <p:cxnSp>
-        <p:nvCxnSpPr>
-          <p:cNvPr id="23" name="Straight Arrow Connector 22">
-            <a:extLst>
-              <a:ext uri="{FF2B5EF4-FFF2-40B4-BE49-F238E27FC236}">
-                <a16:creationId xmlns:a16="http://schemas.microsoft.com/office/drawing/2014/main" id="{31A3A2F8-3225-461E-9CB7-AEE3F4A1A241}"/>
-              </a:ext>
-            </a:extLst>
-          </p:cNvPr>
-          <p:cNvCxnSpPr/>
-          <p:nvPr/>
-        </p:nvCxnSpPr>
-        <p:spPr>
-          <a:xfrm>
-            <a:off x="836106" y="5888179"/>
-            <a:ext cx="575954" cy="0"/>
-          </a:xfrm>
-          <a:prstGeom prst="straightConnector1">
-            <a:avLst/>
-          </a:prstGeom>
-          <a:ln>
-            <a:solidFill>
-              <a:schemeClr val="tx1"/>
-            </a:solidFill>
-            <a:tailEnd type="triangle"/>
-          </a:ln>
-        </p:spPr>
-        <p:style>
-          <a:lnRef idx="1">
-            <a:schemeClr val="accent1"/>
-          </a:lnRef>
-          <a:fillRef idx="0">
-            <a:schemeClr val="accent1"/>
-          </a:fillRef>
-          <a:effectRef idx="0">
-            <a:schemeClr val="accent1"/>
-          </a:effectRef>
-          <a:fontRef idx="minor">
-            <a:schemeClr val="tx1"/>
-          </a:fontRef>
-        </p:style>
-      </p:cxnSp>
-      <p:sp>
-        <p:nvSpPr>
-          <p:cNvPr id="24" name="TextBox 23">
-            <a:extLst>
-              <a:ext uri="{FF2B5EF4-FFF2-40B4-BE49-F238E27FC236}">
-                <a16:creationId xmlns:a16="http://schemas.microsoft.com/office/drawing/2014/main" id="{BA1C8646-B888-4A91-8827-FB4B78BCF3D6}"/>
-              </a:ext>
-            </a:extLst>
-          </p:cNvPr>
-          <p:cNvSpPr txBox="1"/>
-          <p:nvPr/>
-        </p:nvSpPr>
-        <p:spPr>
-          <a:xfrm>
-            <a:off x="1548627" y="5222242"/>
-            <a:ext cx="3910814" cy="1200329"/>
-          </a:xfrm>
-          <a:prstGeom prst="rect">
-            <a:avLst/>
-          </a:prstGeom>
-          <a:noFill/>
-        </p:spPr>
-        <p:txBody>
-          <a:bodyPr wrap="none" rtlCol="0">
-            <a:spAutoFit/>
-          </a:bodyPr>
-          <a:lstStyle/>
-          <a:p>
-            <a:r>
-              <a:rPr lang="en-US" dirty="0"/>
-              <a:t>STRING</a:t>
-            </a:r>
-          </a:p>
-          <a:p>
-            <a:r>
-              <a:rPr lang="en-US" dirty="0"/>
-              <a:t>APID (</a:t>
-            </a:r>
-            <a:r>
-              <a:rPr lang="en-US" dirty="0" err="1"/>
-              <a:t>BioGRID</a:t>
-            </a:r>
-            <a:r>
-              <a:rPr lang="en-US" dirty="0"/>
-              <a:t>, </a:t>
-            </a:r>
-            <a:r>
-              <a:rPr lang="en-US" dirty="0" err="1"/>
-              <a:t>InAct</a:t>
-            </a:r>
-            <a:r>
-              <a:rPr lang="en-US" dirty="0"/>
-              <a:t>, MINT, HPRD, …)</a:t>
-            </a:r>
-          </a:p>
-          <a:p>
-            <a:r>
-              <a:rPr lang="en-US" dirty="0"/>
-              <a:t>HIPPIE (</a:t>
-            </a:r>
-            <a:r>
-              <a:rPr lang="en-US" dirty="0" err="1"/>
-              <a:t>BioGRID</a:t>
-            </a:r>
-            <a:r>
-              <a:rPr lang="en-US" dirty="0"/>
-              <a:t>, </a:t>
-            </a:r>
-            <a:r>
-              <a:rPr lang="en-US" dirty="0" err="1"/>
-              <a:t>InAct</a:t>
-            </a:r>
-            <a:r>
-              <a:rPr lang="en-US" dirty="0"/>
-              <a:t>, MINT, HPRD, … )</a:t>
-            </a:r>
-          </a:p>
-          <a:p>
-            <a:r>
-              <a:rPr lang="en-US" dirty="0"/>
-              <a:t>IID (</a:t>
-            </a:r>
-            <a:r>
-              <a:rPr lang="en-US" dirty="0" err="1"/>
-              <a:t>BioGRID</a:t>
-            </a:r>
-            <a:r>
-              <a:rPr lang="en-US" dirty="0"/>
-              <a:t>, </a:t>
-            </a:r>
-            <a:r>
-              <a:rPr lang="en-US" dirty="0" err="1"/>
-              <a:t>InAct</a:t>
-            </a:r>
-            <a:r>
-              <a:rPr lang="en-US" dirty="0"/>
-              <a:t>, MINT, HPRD, … )</a:t>
-            </a:r>
-          </a:p>
-        </p:txBody>
-      </p:sp>
-      <p:pic>
-        <p:nvPicPr>
-          <p:cNvPr id="25" name="Picture 24">
-            <a:extLst>
-              <a:ext uri="{FF2B5EF4-FFF2-40B4-BE49-F238E27FC236}">
-                <a16:creationId xmlns:a16="http://schemas.microsoft.com/office/drawing/2014/main" id="{AE67DDCB-41CB-4CE9-80D2-2EEA765DDB33}"/>
-              </a:ext>
-            </a:extLst>
-          </p:cNvPr>
-          <p:cNvPicPr>
-            <a:picLocks noChangeAspect="1"/>
-          </p:cNvPicPr>
-          <p:nvPr/>
-        </p:nvPicPr>
-        <p:blipFill>
-          <a:blip r:embed="rId4"/>
-          <a:stretch>
-            <a:fillRect/>
-          </a:stretch>
-        </p:blipFill>
-        <p:spPr>
-          <a:xfrm>
-            <a:off x="7669802" y="4203872"/>
-            <a:ext cx="2701733" cy="2562320"/>
-          </a:xfrm>
-          <a:prstGeom prst="rect">
-            <a:avLst/>
-          </a:prstGeom>
-        </p:spPr>
-      </p:pic>
-      <p:sp>
-        <p:nvSpPr>
-          <p:cNvPr id="27" name="Rectangle 26">
-            <a:extLst>
-              <a:ext uri="{FF2B5EF4-FFF2-40B4-BE49-F238E27FC236}">
-                <a16:creationId xmlns:a16="http://schemas.microsoft.com/office/drawing/2014/main" id="{D234F007-1571-48F8-AB99-08EF78473498}"/>
-              </a:ext>
-            </a:extLst>
-          </p:cNvPr>
-          <p:cNvSpPr/>
-          <p:nvPr/>
-        </p:nvSpPr>
-        <p:spPr>
-          <a:xfrm>
-            <a:off x="6575555" y="3796537"/>
-            <a:ext cx="5474770" cy="523220"/>
-          </a:xfrm>
-          <a:prstGeom prst="rect">
-            <a:avLst/>
-          </a:prstGeom>
-        </p:spPr>
-        <p:txBody>
-          <a:bodyPr wrap="square">
-            <a:spAutoFit/>
-          </a:bodyPr>
-          <a:lstStyle/>
-          <a:p>
-            <a:r>
-              <a:rPr lang="en-US" sz="1400" dirty="0"/>
-              <a:t> </a:t>
-            </a:r>
-            <a:r>
-              <a:rPr lang="en-US" sz="1400" b="0" i="0" dirty="0">
-                <a:solidFill>
-                  <a:srgbClr val="000000"/>
-                </a:solidFill>
-              </a:rPr>
-              <a:t>Coverage of exclusive protein interactions among the primary databases, based on the analysis of complete downloaded data. </a:t>
-            </a:r>
-            <a:endParaRPr lang="nl-BE" sz="1400" dirty="0"/>
-          </a:p>
-        </p:txBody>
-      </p:sp>
     </p:spTree>
     <p:extLst>
       <p:ext uri="{BB962C8B-B14F-4D97-AF65-F5344CB8AC3E}">
-        <p14:creationId xmlns:p14="http://schemas.microsoft.com/office/powerpoint/2010/main" val="1728162899"/>
+        <p14:creationId xmlns:p14="http://schemas.microsoft.com/office/powerpoint/2010/main" val="1588898040"/>
       </p:ext>
     </p:extLst>
   </p:cSld>
@@ -6851,6 +8753,865 @@
           <a:chExt cx="0" cy="0"/>
         </a:xfrm>
       </p:grpSpPr>
+      <p:sp>
+        <p:nvSpPr>
+          <p:cNvPr id="2" name="Tekstvak 1">
+            <a:extLst>
+              <a:ext uri="{FF2B5EF4-FFF2-40B4-BE49-F238E27FC236}">
+                <a16:creationId xmlns:a16="http://schemas.microsoft.com/office/drawing/2014/main" id="{09F43449-AD8F-4BC8-BA43-FD0A499484D7}"/>
+              </a:ext>
+            </a:extLst>
+          </p:cNvPr>
+          <p:cNvSpPr txBox="1"/>
+          <p:nvPr/>
+        </p:nvSpPr>
+        <p:spPr>
+          <a:xfrm>
+            <a:off x="2437764" y="156479"/>
+            <a:ext cx="2366353" cy="400110"/>
+          </a:xfrm>
+          <a:prstGeom prst="rect">
+            <a:avLst/>
+          </a:prstGeom>
+          <a:noFill/>
+        </p:spPr>
+        <p:txBody>
+          <a:bodyPr wrap="none" rtlCol="0">
+            <a:spAutoFit/>
+          </a:bodyPr>
+          <a:lstStyle/>
+          <a:p>
+            <a:r>
+              <a:rPr lang="en-US" sz="2000" dirty="0">
+                <a:latin typeface="Arial" panose="020B0604020202020204" pitchFamily="34" charset="0"/>
+                <a:cs typeface="Arial" panose="020B0604020202020204" pitchFamily="34" charset="0"/>
+              </a:rPr>
+              <a:t>Database selection</a:t>
+            </a:r>
+            <a:endParaRPr lang="nl-NL" sz="2000" dirty="0">
+              <a:latin typeface="Arial" panose="020B0604020202020204" pitchFamily="34" charset="0"/>
+              <a:cs typeface="Arial" panose="020B0604020202020204" pitchFamily="34" charset="0"/>
+            </a:endParaRPr>
+          </a:p>
+        </p:txBody>
+      </p:sp>
+      <p:pic>
+        <p:nvPicPr>
+          <p:cNvPr id="3" name="Picture 2">
+            <a:extLst>
+              <a:ext uri="{FF2B5EF4-FFF2-40B4-BE49-F238E27FC236}">
+                <a16:creationId xmlns:a16="http://schemas.microsoft.com/office/drawing/2014/main" id="{628AD89C-D07F-4B7A-903B-7983D3DE9353}"/>
+              </a:ext>
+            </a:extLst>
+          </p:cNvPr>
+          <p:cNvPicPr>
+            <a:picLocks noChangeAspect="1"/>
+          </p:cNvPicPr>
+          <p:nvPr/>
+        </p:nvPicPr>
+        <p:blipFill>
+          <a:blip r:embed="rId2"/>
+          <a:stretch>
+            <a:fillRect/>
+          </a:stretch>
+        </p:blipFill>
+        <p:spPr>
+          <a:xfrm>
+            <a:off x="1786611" y="947045"/>
+            <a:ext cx="7635902" cy="1425063"/>
+          </a:xfrm>
+          <a:prstGeom prst="rect">
+            <a:avLst/>
+          </a:prstGeom>
+        </p:spPr>
+      </p:pic>
+      <p:pic>
+        <p:nvPicPr>
+          <p:cNvPr id="9" name="Picture 8">
+            <a:extLst>
+              <a:ext uri="{FF2B5EF4-FFF2-40B4-BE49-F238E27FC236}">
+                <a16:creationId xmlns:a16="http://schemas.microsoft.com/office/drawing/2014/main" id="{ED38D8B8-6D73-4159-90F5-7CC67DAE7DAB}"/>
+              </a:ext>
+            </a:extLst>
+          </p:cNvPr>
+          <p:cNvPicPr>
+            <a:picLocks noChangeAspect="1"/>
+          </p:cNvPicPr>
+          <p:nvPr/>
+        </p:nvPicPr>
+        <p:blipFill>
+          <a:blip r:embed="rId3"/>
+          <a:stretch>
+            <a:fillRect/>
+          </a:stretch>
+        </p:blipFill>
+        <p:spPr>
+          <a:xfrm>
+            <a:off x="824124" y="2501987"/>
+            <a:ext cx="5430982" cy="3967812"/>
+          </a:xfrm>
+          <a:prstGeom prst="rect">
+            <a:avLst/>
+          </a:prstGeom>
+        </p:spPr>
+      </p:pic>
+      <p:pic>
+        <p:nvPicPr>
+          <p:cNvPr id="12" name="Picture 11">
+            <a:extLst>
+              <a:ext uri="{FF2B5EF4-FFF2-40B4-BE49-F238E27FC236}">
+                <a16:creationId xmlns:a16="http://schemas.microsoft.com/office/drawing/2014/main" id="{2002654C-0A29-4D37-95B5-EE0B3738B8B3}"/>
+              </a:ext>
+            </a:extLst>
+          </p:cNvPr>
+          <p:cNvPicPr>
+            <a:picLocks noChangeAspect="1"/>
+          </p:cNvPicPr>
+          <p:nvPr/>
+        </p:nvPicPr>
+        <p:blipFill>
+          <a:blip r:embed="rId4"/>
+          <a:stretch>
+            <a:fillRect/>
+          </a:stretch>
+        </p:blipFill>
+        <p:spPr>
+          <a:xfrm>
+            <a:off x="6584867" y="5701920"/>
+            <a:ext cx="5523702" cy="921510"/>
+          </a:xfrm>
+          <a:prstGeom prst="rect">
+            <a:avLst/>
+          </a:prstGeom>
+        </p:spPr>
+      </p:pic>
+    </p:spTree>
+    <p:extLst>
+      <p:ext uri="{BB962C8B-B14F-4D97-AF65-F5344CB8AC3E}">
+        <p14:creationId xmlns:p14="http://schemas.microsoft.com/office/powerpoint/2010/main" val="3517122714"/>
+      </p:ext>
+    </p:extLst>
+  </p:cSld>
+  <p:clrMapOvr>
+    <a:masterClrMapping/>
+  </p:clrMapOvr>
+</p:sld>
+</file>
+
+<file path=ppt/slides/slide7.xml><?xml version="1.0" encoding="utf-8"?>
+<p:sld xmlns:a="http://schemas.openxmlformats.org/drawingml/2006/main" xmlns:r="http://schemas.openxmlformats.org/officeDocument/2006/relationships" xmlns:p="http://schemas.openxmlformats.org/presentationml/2006/main">
+  <p:cSld>
+    <p:spTree>
+      <p:nvGrpSpPr>
+        <p:cNvPr id="1" name=""/>
+        <p:cNvGrpSpPr/>
+        <p:nvPr/>
+      </p:nvGrpSpPr>
+      <p:grpSpPr>
+        <a:xfrm>
+          <a:off x="0" y="0"/>
+          <a:ext cx="0" cy="0"/>
+          <a:chOff x="0" y="0"/>
+          <a:chExt cx="0" cy="0"/>
+        </a:xfrm>
+      </p:grpSpPr>
+      <p:pic>
+        <p:nvPicPr>
+          <p:cNvPr id="2" name="Picture 1">
+            <a:extLst>
+              <a:ext uri="{FF2B5EF4-FFF2-40B4-BE49-F238E27FC236}">
+                <a16:creationId xmlns:a16="http://schemas.microsoft.com/office/drawing/2014/main" id="{19C50232-B35D-473D-B4B8-DAC80CB28961}"/>
+              </a:ext>
+            </a:extLst>
+          </p:cNvPr>
+          <p:cNvPicPr>
+            <a:picLocks noChangeAspect="1"/>
+          </p:cNvPicPr>
+          <p:nvPr/>
+        </p:nvPicPr>
+        <p:blipFill>
+          <a:blip r:embed="rId2"/>
+          <a:stretch>
+            <a:fillRect/>
+          </a:stretch>
+        </p:blipFill>
+        <p:spPr>
+          <a:xfrm>
+            <a:off x="338448" y="967836"/>
+            <a:ext cx="5317938" cy="4108863"/>
+          </a:xfrm>
+          <a:prstGeom prst="rect">
+            <a:avLst/>
+          </a:prstGeom>
+        </p:spPr>
+      </p:pic>
+      <p:cxnSp>
+        <p:nvCxnSpPr>
+          <p:cNvPr id="4" name="Straight Connector 3">
+            <a:extLst>
+              <a:ext uri="{FF2B5EF4-FFF2-40B4-BE49-F238E27FC236}">
+                <a16:creationId xmlns:a16="http://schemas.microsoft.com/office/drawing/2014/main" id="{F9F43923-4294-4ABF-98CA-882E69471F7A}"/>
+              </a:ext>
+            </a:extLst>
+          </p:cNvPr>
+          <p:cNvCxnSpPr>
+            <a:cxnSpLocks/>
+          </p:cNvCxnSpPr>
+          <p:nvPr/>
+        </p:nvCxnSpPr>
+        <p:spPr>
+          <a:xfrm flipV="1">
+            <a:off x="2676158" y="2092035"/>
+            <a:ext cx="414891" cy="2"/>
+          </a:xfrm>
+          <a:prstGeom prst="line">
+            <a:avLst/>
+          </a:prstGeom>
+          <a:ln w="38100">
+            <a:solidFill>
+              <a:srgbClr val="FF0000"/>
+            </a:solidFill>
+          </a:ln>
+        </p:spPr>
+        <p:style>
+          <a:lnRef idx="1">
+            <a:schemeClr val="accent1"/>
+          </a:lnRef>
+          <a:fillRef idx="0">
+            <a:schemeClr val="accent1"/>
+          </a:fillRef>
+          <a:effectRef idx="0">
+            <a:schemeClr val="accent1"/>
+          </a:effectRef>
+          <a:fontRef idx="minor">
+            <a:schemeClr val="tx1"/>
+          </a:fontRef>
+        </p:style>
+      </p:cxnSp>
+      <p:cxnSp>
+        <p:nvCxnSpPr>
+          <p:cNvPr id="5" name="Straight Connector 4">
+            <a:extLst>
+              <a:ext uri="{FF2B5EF4-FFF2-40B4-BE49-F238E27FC236}">
+                <a16:creationId xmlns:a16="http://schemas.microsoft.com/office/drawing/2014/main" id="{5E370DC0-146A-484C-A107-C34F7EB333E1}"/>
+              </a:ext>
+            </a:extLst>
+          </p:cNvPr>
+          <p:cNvCxnSpPr>
+            <a:cxnSpLocks/>
+          </p:cNvCxnSpPr>
+          <p:nvPr/>
+        </p:nvCxnSpPr>
+        <p:spPr>
+          <a:xfrm flipV="1">
+            <a:off x="2676158" y="2313708"/>
+            <a:ext cx="516229" cy="2"/>
+          </a:xfrm>
+          <a:prstGeom prst="line">
+            <a:avLst/>
+          </a:prstGeom>
+          <a:ln w="38100">
+            <a:solidFill>
+              <a:srgbClr val="FF0000"/>
+            </a:solidFill>
+          </a:ln>
+        </p:spPr>
+        <p:style>
+          <a:lnRef idx="1">
+            <a:schemeClr val="accent1"/>
+          </a:lnRef>
+          <a:fillRef idx="0">
+            <a:schemeClr val="accent1"/>
+          </a:fillRef>
+          <a:effectRef idx="0">
+            <a:schemeClr val="accent1"/>
+          </a:effectRef>
+          <a:fontRef idx="minor">
+            <a:schemeClr val="tx1"/>
+          </a:fontRef>
+        </p:style>
+      </p:cxnSp>
+      <p:cxnSp>
+        <p:nvCxnSpPr>
+          <p:cNvPr id="7" name="Straight Connector 6">
+            <a:extLst>
+              <a:ext uri="{FF2B5EF4-FFF2-40B4-BE49-F238E27FC236}">
+                <a16:creationId xmlns:a16="http://schemas.microsoft.com/office/drawing/2014/main" id="{40664960-FE14-4CDE-9B45-3129368DB20C}"/>
+              </a:ext>
+            </a:extLst>
+          </p:cNvPr>
+          <p:cNvCxnSpPr>
+            <a:cxnSpLocks/>
+          </p:cNvCxnSpPr>
+          <p:nvPr/>
+        </p:nvCxnSpPr>
+        <p:spPr>
+          <a:xfrm flipV="1">
+            <a:off x="2676158" y="2952996"/>
+            <a:ext cx="516229" cy="2"/>
+          </a:xfrm>
+          <a:prstGeom prst="line">
+            <a:avLst/>
+          </a:prstGeom>
+          <a:ln w="38100">
+            <a:solidFill>
+              <a:srgbClr val="FF0000"/>
+            </a:solidFill>
+          </a:ln>
+        </p:spPr>
+        <p:style>
+          <a:lnRef idx="1">
+            <a:schemeClr val="accent1"/>
+          </a:lnRef>
+          <a:fillRef idx="0">
+            <a:schemeClr val="accent1"/>
+          </a:fillRef>
+          <a:effectRef idx="0">
+            <a:schemeClr val="accent1"/>
+          </a:effectRef>
+          <a:fontRef idx="minor">
+            <a:schemeClr val="tx1"/>
+          </a:fontRef>
+        </p:style>
+      </p:cxnSp>
+      <p:sp>
+        <p:nvSpPr>
+          <p:cNvPr id="11" name="Rectangle 10">
+            <a:extLst>
+              <a:ext uri="{FF2B5EF4-FFF2-40B4-BE49-F238E27FC236}">
+                <a16:creationId xmlns:a16="http://schemas.microsoft.com/office/drawing/2014/main" id="{BFFA5932-90BD-4BA6-9535-ABCB746150DD}"/>
+              </a:ext>
+            </a:extLst>
+          </p:cNvPr>
+          <p:cNvSpPr/>
+          <p:nvPr/>
+        </p:nvSpPr>
+        <p:spPr>
+          <a:xfrm>
+            <a:off x="534008" y="72171"/>
+            <a:ext cx="5114081" cy="523220"/>
+          </a:xfrm>
+          <a:prstGeom prst="rect">
+            <a:avLst/>
+          </a:prstGeom>
+        </p:spPr>
+        <p:txBody>
+          <a:bodyPr wrap="square">
+            <a:spAutoFit/>
+          </a:bodyPr>
+          <a:lstStyle/>
+          <a:p>
+            <a:r>
+              <a:rPr lang="nl-BE" sz="1400" dirty="0" err="1"/>
+              <a:t>Mean</a:t>
+            </a:r>
+            <a:r>
+              <a:rPr lang="nl-BE" sz="1400" dirty="0"/>
+              <a:t> </a:t>
+            </a:r>
+            <a:r>
+              <a:rPr lang="nl-BE" sz="1400" dirty="0" err="1"/>
+              <a:t>yield</a:t>
+            </a:r>
+            <a:r>
+              <a:rPr lang="nl-BE" sz="1400" dirty="0"/>
+              <a:t> </a:t>
+            </a:r>
+            <a:r>
+              <a:rPr lang="nl-BE" sz="1400" dirty="0" err="1"/>
+              <a:t>coverage</a:t>
+            </a:r>
+            <a:r>
+              <a:rPr lang="nl-BE" sz="1400" dirty="0"/>
+              <a:t> of </a:t>
+            </a:r>
+            <a:r>
+              <a:rPr lang="nl-BE" sz="1400" dirty="0" err="1"/>
+              <a:t>protein</a:t>
+            </a:r>
+            <a:r>
+              <a:rPr lang="nl-BE" sz="1400" dirty="0"/>
+              <a:t> </a:t>
+            </a:r>
+            <a:r>
+              <a:rPr lang="nl-BE" sz="1400" dirty="0" err="1"/>
+              <a:t>interactions</a:t>
+            </a:r>
+            <a:r>
+              <a:rPr lang="nl-BE" sz="1400" dirty="0"/>
+              <a:t> </a:t>
+            </a:r>
+            <a:r>
+              <a:rPr lang="nl-BE" sz="1400" dirty="0" err="1"/>
+              <a:t>across</a:t>
+            </a:r>
+            <a:r>
+              <a:rPr lang="nl-BE" sz="1400" dirty="0"/>
+              <a:t> databases </a:t>
+            </a:r>
+            <a:r>
+              <a:rPr lang="nl-BE" sz="1400" dirty="0" err="1"/>
+              <a:t>for</a:t>
+            </a:r>
+            <a:r>
+              <a:rPr lang="nl-BE" sz="1400" dirty="0"/>
+              <a:t> </a:t>
+            </a:r>
+            <a:r>
+              <a:rPr lang="nl-BE" sz="1400" dirty="0" err="1"/>
+              <a:t>ubiquitous</a:t>
+            </a:r>
+            <a:r>
+              <a:rPr lang="nl-BE" sz="1400" dirty="0"/>
+              <a:t>, tissue-</a:t>
+            </a:r>
+            <a:r>
+              <a:rPr lang="nl-BE" sz="1400" dirty="0" err="1"/>
+              <a:t>specific</a:t>
+            </a:r>
+            <a:r>
+              <a:rPr lang="nl-BE" sz="1400" dirty="0"/>
+              <a:t>, </a:t>
+            </a:r>
+            <a:r>
+              <a:rPr lang="nl-BE" sz="1400" dirty="0" err="1"/>
+              <a:t>and</a:t>
+            </a:r>
+            <a:r>
+              <a:rPr lang="nl-BE" sz="1400" dirty="0"/>
+              <a:t> </a:t>
+            </a:r>
+            <a:r>
+              <a:rPr lang="nl-BE" sz="1400" dirty="0" err="1"/>
+              <a:t>disease-associated</a:t>
+            </a:r>
+            <a:r>
+              <a:rPr lang="nl-BE" sz="1400" dirty="0"/>
+              <a:t> gene-sets.</a:t>
+            </a:r>
+          </a:p>
+        </p:txBody>
+      </p:sp>
+      <p:pic>
+        <p:nvPicPr>
+          <p:cNvPr id="15" name="Picture 14">
+            <a:extLst>
+              <a:ext uri="{FF2B5EF4-FFF2-40B4-BE49-F238E27FC236}">
+                <a16:creationId xmlns:a16="http://schemas.microsoft.com/office/drawing/2014/main" id="{6A523DB4-4433-49EF-9322-C106F354FBB8}"/>
+              </a:ext>
+            </a:extLst>
+          </p:cNvPr>
+          <p:cNvPicPr>
+            <a:picLocks noChangeAspect="1"/>
+          </p:cNvPicPr>
+          <p:nvPr/>
+        </p:nvPicPr>
+        <p:blipFill>
+          <a:blip r:embed="rId3"/>
+          <a:stretch>
+            <a:fillRect/>
+          </a:stretch>
+        </p:blipFill>
+        <p:spPr>
+          <a:xfrm>
+            <a:off x="5950604" y="599490"/>
+            <a:ext cx="5487695" cy="3010240"/>
+          </a:xfrm>
+          <a:prstGeom prst="rect">
+            <a:avLst/>
+          </a:prstGeom>
+        </p:spPr>
+      </p:pic>
+      <p:sp>
+        <p:nvSpPr>
+          <p:cNvPr id="16" name="Rectangle 15">
+            <a:extLst>
+              <a:ext uri="{FF2B5EF4-FFF2-40B4-BE49-F238E27FC236}">
+                <a16:creationId xmlns:a16="http://schemas.microsoft.com/office/drawing/2014/main" id="{89F237DC-E413-41E3-BE41-A4D9282D3BC0}"/>
+              </a:ext>
+            </a:extLst>
+          </p:cNvPr>
+          <p:cNvSpPr/>
+          <p:nvPr/>
+        </p:nvSpPr>
+        <p:spPr>
+          <a:xfrm>
+            <a:off x="6575555" y="205012"/>
+            <a:ext cx="4862744" cy="523220"/>
+          </a:xfrm>
+          <a:prstGeom prst="rect">
+            <a:avLst/>
+          </a:prstGeom>
+        </p:spPr>
+        <p:txBody>
+          <a:bodyPr wrap="square">
+            <a:spAutoFit/>
+          </a:bodyPr>
+          <a:lstStyle/>
+          <a:p>
+            <a:r>
+              <a:rPr lang="en-US" sz="1400" b="0" i="0" dirty="0">
+                <a:solidFill>
+                  <a:srgbClr val="000000"/>
+                </a:solidFill>
+              </a:rPr>
+              <a:t>Coverage of protein interactions across the databases based on complete downloaded data.</a:t>
+            </a:r>
+            <a:endParaRPr lang="nl-BE" sz="1400" dirty="0"/>
+          </a:p>
+        </p:txBody>
+      </p:sp>
+      <p:cxnSp>
+        <p:nvCxnSpPr>
+          <p:cNvPr id="17" name="Straight Connector 16">
+            <a:extLst>
+              <a:ext uri="{FF2B5EF4-FFF2-40B4-BE49-F238E27FC236}">
+                <a16:creationId xmlns:a16="http://schemas.microsoft.com/office/drawing/2014/main" id="{CE77BC9E-114D-406C-9314-722E8FBAB53F}"/>
+              </a:ext>
+            </a:extLst>
+          </p:cNvPr>
+          <p:cNvCxnSpPr>
+            <a:cxnSpLocks/>
+          </p:cNvCxnSpPr>
+          <p:nvPr/>
+        </p:nvCxnSpPr>
+        <p:spPr>
+          <a:xfrm flipV="1">
+            <a:off x="7519312" y="3064823"/>
+            <a:ext cx="433686" cy="469078"/>
+          </a:xfrm>
+          <a:prstGeom prst="line">
+            <a:avLst/>
+          </a:prstGeom>
+          <a:ln w="38100">
+            <a:solidFill>
+              <a:srgbClr val="FF0000"/>
+            </a:solidFill>
+          </a:ln>
+        </p:spPr>
+        <p:style>
+          <a:lnRef idx="1">
+            <a:schemeClr val="accent1"/>
+          </a:lnRef>
+          <a:fillRef idx="0">
+            <a:schemeClr val="accent1"/>
+          </a:fillRef>
+          <a:effectRef idx="0">
+            <a:schemeClr val="accent1"/>
+          </a:effectRef>
+          <a:fontRef idx="minor">
+            <a:schemeClr val="tx1"/>
+          </a:fontRef>
+        </p:style>
+      </p:cxnSp>
+      <p:cxnSp>
+        <p:nvCxnSpPr>
+          <p:cNvPr id="21" name="Straight Connector 20">
+            <a:extLst>
+              <a:ext uri="{FF2B5EF4-FFF2-40B4-BE49-F238E27FC236}">
+                <a16:creationId xmlns:a16="http://schemas.microsoft.com/office/drawing/2014/main" id="{CD8D4623-A05E-4127-84F7-D4E3CE9566A1}"/>
+              </a:ext>
+            </a:extLst>
+          </p:cNvPr>
+          <p:cNvCxnSpPr>
+            <a:cxnSpLocks/>
+          </p:cNvCxnSpPr>
+          <p:nvPr/>
+        </p:nvCxnSpPr>
+        <p:spPr>
+          <a:xfrm flipV="1">
+            <a:off x="7861717" y="3064823"/>
+            <a:ext cx="433686" cy="469078"/>
+          </a:xfrm>
+          <a:prstGeom prst="line">
+            <a:avLst/>
+          </a:prstGeom>
+          <a:ln w="38100">
+            <a:solidFill>
+              <a:srgbClr val="FF0000"/>
+            </a:solidFill>
+          </a:ln>
+        </p:spPr>
+        <p:style>
+          <a:lnRef idx="1">
+            <a:schemeClr val="accent1"/>
+          </a:lnRef>
+          <a:fillRef idx="0">
+            <a:schemeClr val="accent1"/>
+          </a:fillRef>
+          <a:effectRef idx="0">
+            <a:schemeClr val="accent1"/>
+          </a:effectRef>
+          <a:fontRef idx="minor">
+            <a:schemeClr val="tx1"/>
+          </a:fontRef>
+        </p:style>
+      </p:cxnSp>
+      <p:cxnSp>
+        <p:nvCxnSpPr>
+          <p:cNvPr id="22" name="Straight Connector 21">
+            <a:extLst>
+              <a:ext uri="{FF2B5EF4-FFF2-40B4-BE49-F238E27FC236}">
+                <a16:creationId xmlns:a16="http://schemas.microsoft.com/office/drawing/2014/main" id="{3468E38C-3ECE-498C-8A42-719C34A817E4}"/>
+              </a:ext>
+            </a:extLst>
+          </p:cNvPr>
+          <p:cNvCxnSpPr>
+            <a:cxnSpLocks/>
+          </p:cNvCxnSpPr>
+          <p:nvPr/>
+        </p:nvCxnSpPr>
+        <p:spPr>
+          <a:xfrm flipV="1">
+            <a:off x="8803826" y="3064823"/>
+            <a:ext cx="433686" cy="469078"/>
+          </a:xfrm>
+          <a:prstGeom prst="line">
+            <a:avLst/>
+          </a:prstGeom>
+          <a:ln w="38100">
+            <a:solidFill>
+              <a:srgbClr val="FF0000"/>
+            </a:solidFill>
+          </a:ln>
+        </p:spPr>
+        <p:style>
+          <a:lnRef idx="1">
+            <a:schemeClr val="accent1"/>
+          </a:lnRef>
+          <a:fillRef idx="0">
+            <a:schemeClr val="accent1"/>
+          </a:fillRef>
+          <a:effectRef idx="0">
+            <a:schemeClr val="accent1"/>
+          </a:effectRef>
+          <a:fontRef idx="minor">
+            <a:schemeClr val="tx1"/>
+          </a:fontRef>
+        </p:style>
+      </p:cxnSp>
+      <p:cxnSp>
+        <p:nvCxnSpPr>
+          <p:cNvPr id="23" name="Straight Arrow Connector 22">
+            <a:extLst>
+              <a:ext uri="{FF2B5EF4-FFF2-40B4-BE49-F238E27FC236}">
+                <a16:creationId xmlns:a16="http://schemas.microsoft.com/office/drawing/2014/main" id="{31A3A2F8-3225-461E-9CB7-AEE3F4A1A241}"/>
+              </a:ext>
+            </a:extLst>
+          </p:cNvPr>
+          <p:cNvCxnSpPr/>
+          <p:nvPr/>
+        </p:nvCxnSpPr>
+        <p:spPr>
+          <a:xfrm>
+            <a:off x="836106" y="5888179"/>
+            <a:ext cx="575954" cy="0"/>
+          </a:xfrm>
+          <a:prstGeom prst="straightConnector1">
+            <a:avLst/>
+          </a:prstGeom>
+          <a:ln>
+            <a:solidFill>
+              <a:schemeClr val="tx1"/>
+            </a:solidFill>
+            <a:tailEnd type="triangle"/>
+          </a:ln>
+        </p:spPr>
+        <p:style>
+          <a:lnRef idx="1">
+            <a:schemeClr val="accent1"/>
+          </a:lnRef>
+          <a:fillRef idx="0">
+            <a:schemeClr val="accent1"/>
+          </a:fillRef>
+          <a:effectRef idx="0">
+            <a:schemeClr val="accent1"/>
+          </a:effectRef>
+          <a:fontRef idx="minor">
+            <a:schemeClr val="tx1"/>
+          </a:fontRef>
+        </p:style>
+      </p:cxnSp>
+      <p:sp>
+        <p:nvSpPr>
+          <p:cNvPr id="24" name="TextBox 23">
+            <a:extLst>
+              <a:ext uri="{FF2B5EF4-FFF2-40B4-BE49-F238E27FC236}">
+                <a16:creationId xmlns:a16="http://schemas.microsoft.com/office/drawing/2014/main" id="{BA1C8646-B888-4A91-8827-FB4B78BCF3D6}"/>
+              </a:ext>
+            </a:extLst>
+          </p:cNvPr>
+          <p:cNvSpPr txBox="1"/>
+          <p:nvPr/>
+        </p:nvSpPr>
+        <p:spPr>
+          <a:xfrm>
+            <a:off x="1548627" y="5222242"/>
+            <a:ext cx="3910814" cy="1200329"/>
+          </a:xfrm>
+          <a:prstGeom prst="rect">
+            <a:avLst/>
+          </a:prstGeom>
+          <a:noFill/>
+        </p:spPr>
+        <p:txBody>
+          <a:bodyPr wrap="none" rtlCol="0">
+            <a:spAutoFit/>
+          </a:bodyPr>
+          <a:lstStyle/>
+          <a:p>
+            <a:r>
+              <a:rPr lang="en-US" dirty="0"/>
+              <a:t>STRING</a:t>
+            </a:r>
+          </a:p>
+          <a:p>
+            <a:r>
+              <a:rPr lang="en-US" dirty="0"/>
+              <a:t>APID (BioGRID, </a:t>
+            </a:r>
+            <a:r>
+              <a:rPr lang="en-US" dirty="0" err="1"/>
+              <a:t>InAct</a:t>
+            </a:r>
+            <a:r>
+              <a:rPr lang="en-US" dirty="0"/>
+              <a:t>, MINT, HPRD, …)</a:t>
+            </a:r>
+          </a:p>
+          <a:p>
+            <a:r>
+              <a:rPr lang="en-US" dirty="0"/>
+              <a:t>HIPPIE (BioGRID, </a:t>
+            </a:r>
+            <a:r>
+              <a:rPr lang="en-US" dirty="0" err="1"/>
+              <a:t>InAct</a:t>
+            </a:r>
+            <a:r>
+              <a:rPr lang="en-US" dirty="0"/>
+              <a:t>, MINT, HPRD, … )</a:t>
+            </a:r>
+          </a:p>
+          <a:p>
+            <a:r>
+              <a:rPr lang="en-US" dirty="0"/>
+              <a:t>IID (BioGRID, </a:t>
+            </a:r>
+            <a:r>
+              <a:rPr lang="en-US" dirty="0" err="1"/>
+              <a:t>InAct</a:t>
+            </a:r>
+            <a:r>
+              <a:rPr lang="en-US" dirty="0"/>
+              <a:t>, MINT, HPRD, … )</a:t>
+            </a:r>
+          </a:p>
+        </p:txBody>
+      </p:sp>
+      <p:pic>
+        <p:nvPicPr>
+          <p:cNvPr id="25" name="Picture 24">
+            <a:extLst>
+              <a:ext uri="{FF2B5EF4-FFF2-40B4-BE49-F238E27FC236}">
+                <a16:creationId xmlns:a16="http://schemas.microsoft.com/office/drawing/2014/main" id="{AE67DDCB-41CB-4CE9-80D2-2EEA765DDB33}"/>
+              </a:ext>
+            </a:extLst>
+          </p:cNvPr>
+          <p:cNvPicPr>
+            <a:picLocks noChangeAspect="1"/>
+          </p:cNvPicPr>
+          <p:nvPr/>
+        </p:nvPicPr>
+        <p:blipFill>
+          <a:blip r:embed="rId4"/>
+          <a:stretch>
+            <a:fillRect/>
+          </a:stretch>
+        </p:blipFill>
+        <p:spPr>
+          <a:xfrm>
+            <a:off x="7669802" y="4203872"/>
+            <a:ext cx="2701733" cy="2562320"/>
+          </a:xfrm>
+          <a:prstGeom prst="rect">
+            <a:avLst/>
+          </a:prstGeom>
+        </p:spPr>
+      </p:pic>
+      <p:sp>
+        <p:nvSpPr>
+          <p:cNvPr id="27" name="Rectangle 26">
+            <a:extLst>
+              <a:ext uri="{FF2B5EF4-FFF2-40B4-BE49-F238E27FC236}">
+                <a16:creationId xmlns:a16="http://schemas.microsoft.com/office/drawing/2014/main" id="{D234F007-1571-48F8-AB99-08EF78473498}"/>
+              </a:ext>
+            </a:extLst>
+          </p:cNvPr>
+          <p:cNvSpPr/>
+          <p:nvPr/>
+        </p:nvSpPr>
+        <p:spPr>
+          <a:xfrm>
+            <a:off x="6575555" y="3796537"/>
+            <a:ext cx="5474770" cy="523220"/>
+          </a:xfrm>
+          <a:prstGeom prst="rect">
+            <a:avLst/>
+          </a:prstGeom>
+        </p:spPr>
+        <p:txBody>
+          <a:bodyPr wrap="square">
+            <a:spAutoFit/>
+          </a:bodyPr>
+          <a:lstStyle/>
+          <a:p>
+            <a:r>
+              <a:rPr lang="en-US" sz="1400" dirty="0"/>
+              <a:t> </a:t>
+            </a:r>
+            <a:r>
+              <a:rPr lang="en-US" sz="1400" b="0" i="0" dirty="0">
+                <a:solidFill>
+                  <a:srgbClr val="000000"/>
+                </a:solidFill>
+              </a:rPr>
+              <a:t>Coverage of exclusive protein interactions among the primary databases, based on the analysis of complete downloaded data. </a:t>
+            </a:r>
+            <a:endParaRPr lang="nl-BE" sz="1400" dirty="0"/>
+          </a:p>
+        </p:txBody>
+      </p:sp>
+    </p:spTree>
+    <p:extLst>
+      <p:ext uri="{BB962C8B-B14F-4D97-AF65-F5344CB8AC3E}">
+        <p14:creationId xmlns:p14="http://schemas.microsoft.com/office/powerpoint/2010/main" val="1728162899"/>
+      </p:ext>
+    </p:extLst>
+  </p:cSld>
+  <p:clrMapOvr>
+    <a:masterClrMapping/>
+  </p:clrMapOvr>
+</p:sld>
+</file>
+
+<file path=ppt/slides/slide8.xml><?xml version="1.0" encoding="utf-8"?>
+<p:sld xmlns:a="http://schemas.openxmlformats.org/drawingml/2006/main" xmlns:r="http://schemas.openxmlformats.org/officeDocument/2006/relationships" xmlns:p="http://schemas.openxmlformats.org/presentationml/2006/main">
+  <p:cSld>
+    <p:spTree>
+      <p:nvGrpSpPr>
+        <p:cNvPr id="1" name=""/>
+        <p:cNvGrpSpPr/>
+        <p:nvPr/>
+      </p:nvGrpSpPr>
+      <p:grpSpPr>
+        <a:xfrm>
+          <a:off x="0" y="0"/>
+          <a:ext cx="0" cy="0"/>
+          <a:chOff x="0" y="0"/>
+          <a:chExt cx="0" cy="0"/>
+        </a:xfrm>
+      </p:grpSpPr>
       <p:pic>
         <p:nvPicPr>
           <p:cNvPr id="2" name="Picture 1">
@@ -7132,15 +9893,7 @@
           <a:p>
             <a:r>
               <a:rPr lang="en-US" dirty="0"/>
-              <a:t>APID (</a:t>
-            </a:r>
-            <a:r>
-              <a:rPr lang="en-US" dirty="0" err="1"/>
-              <a:t>BioGRID</a:t>
-            </a:r>
-            <a:r>
-              <a:rPr lang="en-US" dirty="0"/>
-              <a:t>, </a:t>
+              <a:t>APID (BioGRID, </a:t>
             </a:r>
             <a:r>
               <a:rPr lang="en-US" dirty="0" err="1"/>
@@ -7154,15 +9907,7 @@
           <a:p>
             <a:r>
               <a:rPr lang="en-US" dirty="0"/>
-              <a:t>HIPPIE (</a:t>
-            </a:r>
-            <a:r>
-              <a:rPr lang="en-US" dirty="0" err="1"/>
-              <a:t>BioGRID</a:t>
-            </a:r>
-            <a:r>
-              <a:rPr lang="en-US" dirty="0"/>
-              <a:t>, </a:t>
+              <a:t>HIPPIE (BioGRID, </a:t>
             </a:r>
             <a:r>
               <a:rPr lang="en-US" dirty="0" err="1"/>
@@ -7176,15 +9921,7 @@
           <a:p>
             <a:r>
               <a:rPr lang="en-US" dirty="0"/>
-              <a:t>IID (</a:t>
-            </a:r>
-            <a:r>
-              <a:rPr lang="en-US" dirty="0" err="1"/>
-              <a:t>BioGRID</a:t>
-            </a:r>
-            <a:r>
-              <a:rPr lang="en-US" dirty="0"/>
-              <a:t>, </a:t>
+              <a:t>IID (BioGRID, </a:t>
             </a:r>
             <a:r>
               <a:rPr lang="en-US" dirty="0" err="1"/>

--- a/ppi/ppi-project.pptx
+++ b/ppi/ppi-project.pptx
@@ -6250,7 +6250,15 @@
           <a:p>
             <a:r>
               <a:rPr lang="en-US" i="1" dirty="0"/>
-              <a:t>(low nr of not detected: S100a8, Hspa1a, Ccr2, Anxa1)</a:t>
+              <a:t>(low nr </a:t>
+            </a:r>
+            <a:r>
+              <a:rPr lang="en-US" i="1" dirty="0" err="1"/>
+              <a:t>oR</a:t>
+            </a:r>
+            <a:r>
+              <a:rPr lang="en-US" i="1" dirty="0"/>
+              <a:t> not detected: S100a8, Hspa1a, Ccr2, Anxa1)</a:t>
             </a:r>
             <a:endParaRPr lang="nl-NL" i="1" dirty="0"/>
           </a:p>
